--- a/presentacion/combinar_o_reentrenar.pptx
+++ b/presentacion/combinar_o_reentrenar.pptx
@@ -23,11 +23,9 @@
     <p:sldId id="271" r:id="rId17"/>
     <p:sldId id="272" r:id="rId18"/>
     <p:sldId id="273" r:id="rId19"/>
-    <p:sldId id="274" r:id="rId20"/>
-    <p:sldId id="275" r:id="rId21"/>
   </p:sldIdLst>
   <p:notesMasterIdLst>
-    <p:notesMasterId r:id="rId22"/>
+    <p:notesMasterId r:id="rId20"/>
   </p:notesMasterIdLst>
   <p:sldSz cx="12192000" cy="6858000"/>
   <p:notesSz cx="6858000" cy="12192000"/>
@@ -126,7 +124,7 @@
   <p:extLst>
     <p:ext uri="{521415D9-36F7-43E2-AB2F-B90AF26B5E84}">
       <p14:sectionLst xmlns:p14="http://schemas.microsoft.com/office/powerpoint/2010/main">
-        <p14:section name="1 · El problema" id="{6de9d2f7-e67b-dfce-6c64-736de6f4e595}">
+        <p14:section name="1 · El problema" id="{8139ed1f-08fa-bfb5-f98d-1211f62203bb}">
           <p14:sldIdLst>
             <p14:sldId id="256"/>
             <p14:sldId id="257"/>
@@ -136,7 +134,7 @@
             <p14:sldId id="261"/>
           </p14:sldIdLst>
         </p14:section>
-        <p14:section name="2 · Hallazgos" id="{16cdc7f7-b2d5-380b-f08e-17083d9e93e9}">
+        <p14:section name="2 · Hallazgos" id="{04480572-d2b3-427f-b8de-a3afa1248b09}">
           <p14:sldIdLst>
             <p14:sldId id="262"/>
             <p14:sldId id="263"/>
@@ -147,15 +145,13 @@
             <p14:sldId id="268"/>
             <p14:sldId id="269"/>
             <p14:sldId id="270"/>
+          </p14:sldIdLst>
+        </p14:section>
+        <p14:section name="3 · Cierre" id="{ad898e01-fc13-6e51-ccc1-961aced05e43}">
+          <p14:sldIdLst>
             <p14:sldId id="271"/>
             <p14:sldId id="272"/>
-          </p14:sldIdLst>
-        </p14:section>
-        <p14:section name="3 · Cierre" id="{94907d10-299f-fe5a-a204-bb153b1b6175}">
-          <p14:sldIdLst>
             <p14:sldId id="273"/>
-            <p14:sldId id="274"/>
-            <p14:sldId id="275"/>
           </p14:sldIdLst>
         </p14:section>
       </p14:sectionLst>
@@ -650,7 +646,7 @@
           <a:p>
             <a:r>
               <a:rPr lang="en-US" dirty="0"/>
-              <a:t>A · 0:30. Hedge cae con el estático, porque al principio le cree a Naive Bayes, y después se recupera hasta ~60%.</a:t>
+              <a:t>A · 1:15 (y pasa a B). El porqué. Hedge no había apostado todo al mejor del momento: al llegar el ataque tenía el peso en tercios. Cuando el ataque rompe a Naive Bayes, el peso migra al estructural, que mira formato y no palabras. Pase: «Esto con todas las etiquetas. Ezequiel muestra qué pasa cuando escasean.»</a:t>
             </a:r>
             <a:endParaRPr lang="en-US" dirty="0"/>
           </a:p>
@@ -738,7 +734,7 @@
           <a:p>
             <a:r>
               <a:rPr lang="en-US" dirty="0"/>
-              <a:t>A · 0:30. SGD también cae, menos, y vuelve casi al nivel previo: aprende «wiin» como palabra de spam. Hedge no puede, porque sus expertos están congelados.</a:t>
+              <a:t>B · 1:30. Respuesta a la pregunta 2. Con todas las etiquetas, reentrenar gana claro: 73 contra 133. A medida que el usuario reporta menos, SGD se degrada mucho más rápido. Las curvas se cruzan entre 1 de cada 5 y 1 de cada 20: ahí Hedge gana en 15 de 20 semillas, y SGD termina peor que no adaptarse.</a:t>
             </a:r>
             <a:endParaRPr lang="en-US" dirty="0"/>
           </a:p>
@@ -826,7 +822,7 @@
           <a:p>
             <a:r>
               <a:rPr lang="en-US" dirty="0"/>
-              <a:t>A · 1:15 (y pasa a B). El porqué. Hedge no había apostado todo al mejor del momento: al llegar el ataque tenía el peso en tercios. Cuando el ataque rompe a Naive Bayes, el peso migra al estructural, que mira formato y no palabras. Pase: «Esto con todas las etiquetas. Ezequiel muestra qué pasa cuando escasean.»</a:t>
+              <a:t>B · 1:15. Un revisor nos objetó que SGD perdía por no reponderar como Hedge. Lo probamos: reponderar lo empeora, de 210 a 240 o 323 errores. La razón es de conteo: Hedge aprende 5 pesos; reentrenar necesita un peso por cada palabra nueva. Lo que sí sufre Hedge es la varianza del estimador.</a:t>
             </a:r>
             <a:endParaRPr lang="en-US" dirty="0"/>
           </a:p>
@@ -914,7 +910,7 @@
           <a:p>
             <a:r>
               <a:rPr lang="en-US" dirty="0"/>
-              <a:t>B · 1:30. Respuesta a la pregunta 2. Con todas las etiquetas, reentrenar gana claro: 73 contra 133. A medida que el usuario reporta menos, SGD se degrada mucho más rápido. Las curvas se cruzan entre 1 de cada 5 y 1 de cada 20: ahí Hedge gana en 15 de 20 semillas, y SGD termina peor que no adaptarse.</a:t>
+              <a:t>B · 1:30. Primera precisión sobre la teoría. Las slides 71 y 73 presentan juntos el voto pesado y la cota, pero la cota es del Hedge randomizado. Construimos un adversario que simula al determinístico y le etiqueta lo contrario: su regret crece lineal, T/2. El randomizado queda en 14, bajo su cota de 37. En el stream real el determinístico anda mejor: la diferencia es de peor caso.</a:t>
             </a:r>
             <a:endParaRPr lang="en-US" dirty="0"/>
           </a:p>
@@ -1002,7 +998,7 @@
           <a:p>
             <a:r>
               <a:rPr lang="en-US" dirty="0"/>
-              <a:t>B · 1:15. Un revisor nos objetó que SGD perdía por no reponderar como Hedge. Lo probamos: reponderar lo empeora, de 210 a 240 o 323 errores. La razón es de conteo: Hedge aprende 5 pesos; reentrenar necesita un peso por cada palabra nueva. Lo que sí sufre Hedge es la varianza del estimador.</a:t>
+              <a:t>B · 1:15. Segunda precisión. Hay dos cotas y cada una vale para su propia tasa de aprendizaje. Las dos se cumplen en las 20 semillas. La small-loss da la mitad de regret, pero requiere saber cuántos errores comete el mejor experto, algo que bajo ataque no sabemos. Notar cómo esa cota cambia de pendiente con el ataque.</a:t>
             </a:r>
             <a:endParaRPr lang="en-US" dirty="0"/>
           </a:p>
@@ -1090,7 +1086,7 @@
           <a:p>
             <a:r>
               <a:rPr lang="en-US" dirty="0"/>
-              <a:t>B · 1:30. Primera precisión sobre la teoría. Las slides 71 y 73 presentan juntos el voto pesado y la cota, pero la cota es del Hedge randomizado. Construimos un adversario que simula al determinístico y le etiqueta lo contrario: su regret crece lineal, T/2. El randomizado queda en 14, bajo su cota de 37. En el stream real el determinístico anda mejor: la diferencia es de peor caso.</a:t>
+              <a:t>B · 1:30. Tres cosas que sirven fuera de este trabajo. Accuracy engaña con datos desbalanceados. La validación cruzada sobre datos sin cambio no sirve para elegir hiperparámetros de adaptación: tuvimos que fijar el alfa de SGD. Y combinar solo funciona si algún experto sobrevive: con la primera versión del estructural, Hedge no recuperaba nada.</a:t>
             </a:r>
             <a:endParaRPr lang="en-US" dirty="0"/>
           </a:p>
@@ -1178,7 +1174,7 @@
           <a:p>
             <a:r>
               <a:rPr lang="en-US" dirty="0"/>
-              <a:t>B · 1:15. Segunda precisión. Hay dos cotas y cada una vale para su propia tasa de aprendizaje. Las dos se cumplen en las 20 semillas. La small-loss da la mitad de regret, pero requiere saber cuántos errores comete el mejor experto, algo que bajo ataque no sabemos. Notar cómo esa cota cambia de pendiente con el ataque.</a:t>
+              <a:t>B · 1:00. La conclusión práctica. Lowd y Meek tenían razón a medias: reentrenar seguido funciona si hay etiquetas seguido. Cuando escasean, combinar es más robusto porque tiene muchos menos parámetros. Cerrar con la pregunta abierta, aclarando que no la probamos.</a:t>
             </a:r>
             <a:endParaRPr lang="en-US" dirty="0"/>
           </a:p>
@@ -1266,7 +1262,7 @@
           <a:p>
             <a:r>
               <a:rPr lang="en-US" dirty="0"/>
-              <a:t>B · 1:30. Tres cosas que sirven fuera de este trabajo. Accuracy engaña con datos desbalanceados. La validación cruzada sobre datos sin cambio no sirve para elegir hiperparámetros de adaptación: tuvimos que fijar el alfa de SGD. Y combinar solo funciona si algún experto sobrevive: con la primera versión del estructural, Hedge no recuperaba nada.</a:t>
+              <a:t>B · 0:45. Mencionar rápido, sin leer todas. Las dos más importantes: el drift es sintético y el experto robusto lo es para este ataque en particular.</a:t>
             </a:r>
             <a:endParaRPr lang="en-US" dirty="0"/>
           </a:p>
@@ -1354,7 +1350,7 @@
           <a:p>
             <a:r>
               <a:rPr lang="en-US" dirty="0"/>
-              <a:t>B · 1:00. La conclusión práctica. Lowd y Meek tenían razón a medias: reentrenar seguido funciona si hay etiquetas seguido. Cuando escasean, combinar es más robusto porque tiene muchos menos parámetros. Cerrar con la pregunta abierta, aclarando que no la probamos.</a:t>
+              <a:t>B · 0:15 + preguntas. Agradecer y abrir preguntas. Verificar antes que el repositorio sea público si se muestra el enlace.</a:t>
             </a:r>
             <a:endParaRPr lang="en-US" dirty="0"/>
           </a:p>
@@ -1378,94 +1374,6 @@
             <a:fld id="{F7021451-1387-4CA6-816F-3879F97B5CBC}" type="slidenum">
               <a:rPr lang="en-US"/>
               <a:t>18</a:t>
-            </a:fld>
-            <a:endParaRPr lang="en-US"/>
-          </a:p>
-        </p:txBody>
-      </p:sp>
-    </p:spTree>
-    <p:extLst>
-      <p:ext uri="{BB962C8B-B14F-4D97-AF65-F5344CB8AC3E}">
-        <p14:creationId xmlns:p14="http://schemas.microsoft.com/office/powerpoint/2010/main" val="1024086991"/>
-      </p:ext>
-    </p:extLst>
-  </p:cSld>
-  <p:clrMapOvr>
-    <a:masterClrMapping/>
-  </p:clrMapOvr>
-</p:notes>
-</file>
-
-<file path=ppt/notesSlides/notesSlide19.xml><?xml version="1.0" encoding="utf-8"?>
-<p:notes xmlns:a="http://schemas.openxmlformats.org/drawingml/2006/main" xmlns:r="http://schemas.openxmlformats.org/officeDocument/2006/relationships" xmlns:p="http://schemas.openxmlformats.org/presentationml/2006/main">
-  <p:cSld>
-    <p:spTree>
-      <p:nvGrpSpPr>
-        <p:cNvPr id="1" name=""/>
-        <p:cNvGrpSpPr/>
-        <p:nvPr/>
-      </p:nvGrpSpPr>
-      <p:grpSpPr>
-        <a:xfrm>
-          <a:off x="0" y="0"/>
-          <a:ext cx="0" cy="0"/>
-          <a:chOff x="0" y="0"/>
-          <a:chExt cx="0" cy="0"/>
-        </a:xfrm>
-      </p:grpSpPr>
-      <p:sp>
-        <p:nvSpPr>
-          <p:cNvPr id="2" name="Slide Image Placeholder 1"/>
-          <p:cNvSpPr>
-            <a:spLocks noGrp="1" noRot="1" noChangeAspect="1"/>
-          </p:cNvSpPr>
-          <p:nvPr>
-            <p:ph type="sldImg"/>
-          </p:nvPr>
-        </p:nvSpPr>
-        <p:spPr/>
-      </p:sp>
-      <p:sp>
-        <p:nvSpPr>
-          <p:cNvPr id="3" name="Notes Placeholder 2"/>
-          <p:cNvSpPr>
-            <a:spLocks noGrp="1"/>
-          </p:cNvSpPr>
-          <p:nvPr>
-            <p:ph type="body" idx="1"/>
-          </p:nvPr>
-        </p:nvSpPr>
-        <p:spPr/>
-        <p:txBody>
-          <a:bodyPr/>
-          <a:lstStyle/>
-          <a:p>
-            <a:r>
-              <a:rPr lang="en-US" dirty="0"/>
-              <a:t>B · 0:45. Mencionar rápido, sin leer todas. Las dos más importantes: el drift es sintético y el experto robusto lo es para este ataque en particular.</a:t>
-            </a:r>
-            <a:endParaRPr lang="en-US" dirty="0"/>
-          </a:p>
-        </p:txBody>
-      </p:sp>
-      <p:sp>
-        <p:nvSpPr>
-          <p:cNvPr id="4" name="Slide Number Placeholder 3"/>
-          <p:cNvSpPr>
-            <a:spLocks noGrp="1"/>
-          </p:cNvSpPr>
-          <p:nvPr>
-            <p:ph type="sldNum" sz="quarter" idx="10"/>
-          </p:nvPr>
-        </p:nvSpPr>
-        <p:spPr/>
-        <p:txBody>
-          <a:bodyPr/>
-          <a:lstStyle/>
-          <a:p>
-            <a:fld id="{F7021451-1387-4CA6-816F-3879F97B5CBC}" type="slidenum">
-              <a:rPr lang="en-US"/>
-              <a:t>19</a:t>
             </a:fld>
             <a:endParaRPr lang="en-US"/>
           </a:p>
@@ -1572,94 +1480,6 @@
 </p:notes>
 </file>
 
-<file path=ppt/notesSlides/notesSlide20.xml><?xml version="1.0" encoding="utf-8"?>
-<p:notes xmlns:a="http://schemas.openxmlformats.org/drawingml/2006/main" xmlns:r="http://schemas.openxmlformats.org/officeDocument/2006/relationships" xmlns:p="http://schemas.openxmlformats.org/presentationml/2006/main">
-  <p:cSld>
-    <p:spTree>
-      <p:nvGrpSpPr>
-        <p:cNvPr id="1" name=""/>
-        <p:cNvGrpSpPr/>
-        <p:nvPr/>
-      </p:nvGrpSpPr>
-      <p:grpSpPr>
-        <a:xfrm>
-          <a:off x="0" y="0"/>
-          <a:ext cx="0" cy="0"/>
-          <a:chOff x="0" y="0"/>
-          <a:chExt cx="0" cy="0"/>
-        </a:xfrm>
-      </p:grpSpPr>
-      <p:sp>
-        <p:nvSpPr>
-          <p:cNvPr id="2" name="Slide Image Placeholder 1"/>
-          <p:cNvSpPr>
-            <a:spLocks noGrp="1" noRot="1" noChangeAspect="1"/>
-          </p:cNvSpPr>
-          <p:nvPr>
-            <p:ph type="sldImg"/>
-          </p:nvPr>
-        </p:nvSpPr>
-        <p:spPr/>
-      </p:sp>
-      <p:sp>
-        <p:nvSpPr>
-          <p:cNvPr id="3" name="Notes Placeholder 2"/>
-          <p:cNvSpPr>
-            <a:spLocks noGrp="1"/>
-          </p:cNvSpPr>
-          <p:nvPr>
-            <p:ph type="body" idx="1"/>
-          </p:nvPr>
-        </p:nvSpPr>
-        <p:spPr/>
-        <p:txBody>
-          <a:bodyPr/>
-          <a:lstStyle/>
-          <a:p>
-            <a:r>
-              <a:rPr lang="en-US" dirty="0"/>
-              <a:t>B · 0:15 + preguntas. Agradecer y abrir preguntas. Verificar antes que el repositorio sea público si se muestra el enlace.</a:t>
-            </a:r>
-            <a:endParaRPr lang="en-US" dirty="0"/>
-          </a:p>
-        </p:txBody>
-      </p:sp>
-      <p:sp>
-        <p:nvSpPr>
-          <p:cNvPr id="4" name="Slide Number Placeholder 3"/>
-          <p:cNvSpPr>
-            <a:spLocks noGrp="1"/>
-          </p:cNvSpPr>
-          <p:nvPr>
-            <p:ph type="sldNum" sz="quarter" idx="10"/>
-          </p:nvPr>
-        </p:nvSpPr>
-        <p:spPr/>
-        <p:txBody>
-          <a:bodyPr/>
-          <a:lstStyle/>
-          <a:p>
-            <a:fld id="{F7021451-1387-4CA6-816F-3879F97B5CBC}" type="slidenum">
-              <a:rPr lang="en-US"/>
-              <a:t>20</a:t>
-            </a:fld>
-            <a:endParaRPr lang="en-US"/>
-          </a:p>
-        </p:txBody>
-      </p:sp>
-    </p:spTree>
-    <p:extLst>
-      <p:ext uri="{BB962C8B-B14F-4D97-AF65-F5344CB8AC3E}">
-        <p14:creationId xmlns:p14="http://schemas.microsoft.com/office/powerpoint/2010/main" val="1024086991"/>
-      </p:ext>
-    </p:extLst>
-  </p:cSld>
-  <p:clrMapOvr>
-    <a:masterClrMapping/>
-  </p:clrMapOvr>
-</p:notes>
-</file>
-
 <file path=ppt/notesSlides/notesSlide3.xml><?xml version="1.0" encoding="utf-8"?>
 <p:notes xmlns:a="http://schemas.openxmlformats.org/drawingml/2006/main" xmlns:r="http://schemas.openxmlformats.org/officeDocument/2006/relationships" xmlns:p="http://schemas.openxmlformats.org/presentationml/2006/main">
   <p:cSld>
@@ -2234,7 +2054,7 @@
           <a:p>
             <a:r>
               <a:rPr lang="en-US" dirty="0"/>
-              <a:t>A · 0:30. Primero solo el estático: atrapa ~85% del spam; con el ataque cae a ~43% y se queda ahí.</a:t>
+              <a:t>A · 1:30. Dejar correr la animación y narrar sobre ella; se puede pausar con un clic. Fase 1: sin ataque, los tres atrapan parecido. Fase 2: llega el ataque y los tres caen; el estático se queda en ~43%. Fase 3: abajo, el peso de Hedge pasa al experto estructural (violeta) y Hedge se recupera hasta ~60%. Fase 4: SGD aprendió las palabras nuevas y vuelve casi al nivel previo. Al final, los contadores: 190, 133 y 73 errores en la mitad atacada.</a:t>
             </a:r>
             <a:endParaRPr lang="en-US" dirty="0"/>
           </a:p>
@@ -3414,7 +3234,7 @@
                 <a:ea typeface="Georgia" pitchFamily="34" charset="-122"/>
                 <a:cs typeface="Georgia" pitchFamily="34" charset="-120"/>
               </a:rPr>
-              <a:t>Hedge cae con él, pero se recupera a medias</a:t>
+              <a:t>Por qué funciona: la apuesta ya estaba cubierta</a:t>
             </a:r>
             <a:endParaRPr lang="en-US" sz="3000" dirty="0"/>
           </a:p>
@@ -3456,7 +3276,7 @@
                 <a:ea typeface="Arial" pitchFamily="34" charset="-122"/>
                 <a:cs typeface="Arial" pitchFamily="34" charset="-120"/>
               </a:rPr>
-              <a:t>Spam atrapado en una ventana móvil de 300 mensajes.</a:t>
+              <a:t>Peso de cada experto en Hedge a lo largo del stream.</a:t>
             </a:r>
             <a:endParaRPr lang="en-US" sz="1500" dirty="0"/>
           </a:p>
@@ -3592,7 +3412,7 @@
       </p:sp>
       <p:pic>
         <p:nvPicPr>
-          <p:cNvPr id="10" name="Image 0" descr="Se suma Hedge: cae junto con el estático y se recupera hasta 62%.">    </p:cNvPr>
+          <p:cNvPr id="10" name="Image 0" descr="Área apilada con el peso de cada experto. Al llegar el ataque el peso está repartido en tercios; después migra al estructural, que termina con 0,96.">    </p:cNvPr>
           <p:cNvPicPr>
             <a:picLocks noChangeAspect="1"/>
           </p:cNvPicPr>
@@ -3606,8 +3426,8 @@
         </p:blipFill>
         <p:spPr>
           <a:xfrm>
-            <a:off x="411480" y="1783080"/>
-            <a:ext cx="9856468" cy="4434840"/>
+            <a:off x="411480" y="1828800"/>
+            <a:ext cx="8001000" cy="3599987"/>
           </a:xfrm>
           <a:prstGeom prst="rect">
             <a:avLst/>
@@ -3616,41 +3436,314 @@
       </p:pic>
       <p:sp>
         <p:nvSpPr>
-          <p:cNvPr id="11" name="Text 8"/>
-          <p:cNvSpPr txBox="1"/>
-          <p:nvPr/>
-        </p:nvSpPr>
-        <p:spPr>
-          <a:xfrm>
-            <a:off x="548640" y="6373368"/>
-            <a:ext cx="10241280" cy="274320"/>
-          </a:xfrm>
-          <a:prstGeom prst="rect">
-            <a:avLst/>
-          </a:prstGeom>
-          <a:noFill/>
-          <a:ln/>
-        </p:spPr>
-        <p:txBody>
-          <a:bodyPr wrap="square" lIns="0" tIns="0" rIns="0" bIns="0" rtlCol="0" anchor="t"/>
-          <a:lstStyle/>
-          <a:p>
-            <a:pPr indent="0" marL="0">
-              <a:lnSpc>
-                <a:spcPct val="100000"/>
-              </a:lnSpc>
-              <a:buNone/>
-            </a:pPr>
-            <a:r>
-              <a:rPr lang="en-US" sz="1000" dirty="0">
-                <a:solidFill>
-                  <a:srgbClr val="9AA1AE"/>
+          <p:cNvPr id="11" name="llamada 1"/>
+          <p:cNvSpPr/>
+          <p:nvPr/>
+        </p:nvSpPr>
+        <p:spPr>
+          <a:xfrm>
+            <a:off x="8641080" y="2011680"/>
+            <a:ext cx="384048" cy="384048"/>
+          </a:xfrm>
+          <a:prstGeom prst="ellipse">
+            <a:avLst/>
+          </a:prstGeom>
+          <a:solidFill>
+            <a:srgbClr val="1F2430"/>
+          </a:solidFill>
+          <a:ln/>
+        </p:spPr>
+      </p:sp>
+      <p:sp>
+        <p:nvSpPr>
+          <p:cNvPr id="12" name="Text 9"/>
+          <p:cNvSpPr txBox="1"/>
+          <p:nvPr/>
+        </p:nvSpPr>
+        <p:spPr>
+          <a:xfrm>
+            <a:off x="8641080" y="2011680"/>
+            <a:ext cx="384048" cy="384048"/>
+          </a:xfrm>
+          <a:prstGeom prst="rect">
+            <a:avLst/>
+          </a:prstGeom>
+          <a:noFill/>
+          <a:ln/>
+        </p:spPr>
+        <p:txBody>
+          <a:bodyPr wrap="square" lIns="0" tIns="0" rIns="0" bIns="0" rtlCol="0" anchor="ctr"/>
+          <a:lstStyle/>
+          <a:p>
+            <a:pPr algn="ctr" indent="0" marL="0">
+              <a:lnSpc>
+                <a:spcPct val="100000"/>
+              </a:lnSpc>
+              <a:buNone/>
+            </a:pPr>
+            <a:r>
+              <a:rPr lang="en-US" sz="1500" b="1" dirty="0">
+                <a:solidFill>
+                  <a:srgbClr val="FFFFFF"/>
                 </a:solidFill>
                 <a:latin typeface="Arial" pitchFamily="34" charset="0"/>
                 <a:ea typeface="Arial" pitchFamily="34" charset="-122"/>
                 <a:cs typeface="Arial" pitchFamily="34" charset="-120"/>
               </a:rPr>
-              <a:t>Media de 20 permutaciones (semillas) del SMS Spam Collection. Ataque desde la mitad del stream. Es la figura 1 del paper.</a:t>
+              <a:t>1</a:t>
+            </a:r>
+            <a:endParaRPr lang="en-US" sz="1500" dirty="0"/>
+          </a:p>
+        </p:txBody>
+      </p:sp>
+      <p:sp>
+        <p:nvSpPr>
+          <p:cNvPr id="13" name="Text 10"/>
+          <p:cNvSpPr txBox="1"/>
+          <p:nvPr/>
+        </p:nvSpPr>
+        <p:spPr>
+          <a:xfrm>
+            <a:off x="9208008" y="1993392"/>
+            <a:ext cx="2450592" cy="1188720"/>
+          </a:xfrm>
+          <a:prstGeom prst="rect">
+            <a:avLst/>
+          </a:prstGeom>
+          <a:noFill/>
+          <a:ln/>
+        </p:spPr>
+        <p:txBody>
+          <a:bodyPr wrap="square" lIns="0" tIns="0" rIns="0" bIns="0" rtlCol="0" anchor="t"/>
+          <a:lstStyle/>
+          <a:p>
+            <a:pPr indent="0" marL="0">
+              <a:lnSpc>
+                <a:spcPct val="100000"/>
+              </a:lnSpc>
+              <a:buNone/>
+            </a:pPr>
+            <a:r>
+              <a:rPr lang="en-US" sz="1500" dirty="0">
+                <a:solidFill>
+                  <a:srgbClr val="1F2430"/>
+                </a:solidFill>
+                <a:latin typeface="Arial" pitchFamily="34" charset="0"/>
+                <a:ea typeface="Arial" pitchFamily="34" charset="-122"/>
+                <a:cs typeface="Arial" pitchFamily="34" charset="-120"/>
+              </a:rPr>
+              <a:t>Al llegar el ataque, el peso estaba repartido en tercios: Naive Bayes 0,36, estructural 0,33, el resto 0,31.</a:t>
+            </a:r>
+            <a:endParaRPr lang="en-US" sz="1500" dirty="0"/>
+          </a:p>
+        </p:txBody>
+      </p:sp>
+      <p:sp>
+        <p:nvSpPr>
+          <p:cNvPr id="14" name="llamada 2"/>
+          <p:cNvSpPr/>
+          <p:nvPr/>
+        </p:nvSpPr>
+        <p:spPr>
+          <a:xfrm>
+            <a:off x="8641080" y="3429000"/>
+            <a:ext cx="384048" cy="384048"/>
+          </a:xfrm>
+          <a:prstGeom prst="ellipse">
+            <a:avLst/>
+          </a:prstGeom>
+          <a:solidFill>
+            <a:srgbClr val="1F2430"/>
+          </a:solidFill>
+          <a:ln/>
+        </p:spPr>
+      </p:sp>
+      <p:sp>
+        <p:nvSpPr>
+          <p:cNvPr id="15" name="Text 12"/>
+          <p:cNvSpPr txBox="1"/>
+          <p:nvPr/>
+        </p:nvSpPr>
+        <p:spPr>
+          <a:xfrm>
+            <a:off x="8641080" y="3429000"/>
+            <a:ext cx="384048" cy="384048"/>
+          </a:xfrm>
+          <a:prstGeom prst="rect">
+            <a:avLst/>
+          </a:prstGeom>
+          <a:noFill/>
+          <a:ln/>
+        </p:spPr>
+        <p:txBody>
+          <a:bodyPr wrap="square" lIns="0" tIns="0" rIns="0" bIns="0" rtlCol="0" anchor="ctr"/>
+          <a:lstStyle/>
+          <a:p>
+            <a:pPr algn="ctr" indent="0" marL="0">
+              <a:lnSpc>
+                <a:spcPct val="100000"/>
+              </a:lnSpc>
+              <a:buNone/>
+            </a:pPr>
+            <a:r>
+              <a:rPr lang="en-US" sz="1500" b="1" dirty="0">
+                <a:solidFill>
+                  <a:srgbClr val="FFFFFF"/>
+                </a:solidFill>
+                <a:latin typeface="Arial" pitchFamily="34" charset="0"/>
+                <a:ea typeface="Arial" pitchFamily="34" charset="-122"/>
+                <a:cs typeface="Arial" pitchFamily="34" charset="-120"/>
+              </a:rPr>
+              <a:t>2</a:t>
+            </a:r>
+            <a:endParaRPr lang="en-US" sz="1500" dirty="0"/>
+          </a:p>
+        </p:txBody>
+      </p:sp>
+      <p:sp>
+        <p:nvSpPr>
+          <p:cNvPr id="16" name="Text 13"/>
+          <p:cNvSpPr txBox="1"/>
+          <p:nvPr/>
+        </p:nvSpPr>
+        <p:spPr>
+          <a:xfrm>
+            <a:off x="9208008" y="3410712"/>
+            <a:ext cx="2450592" cy="1188720"/>
+          </a:xfrm>
+          <a:prstGeom prst="rect">
+            <a:avLst/>
+          </a:prstGeom>
+          <a:noFill/>
+          <a:ln/>
+        </p:spPr>
+        <p:txBody>
+          <a:bodyPr wrap="square" lIns="0" tIns="0" rIns="0" bIns="0" rtlCol="0" anchor="t"/>
+          <a:lstStyle/>
+          <a:p>
+            <a:pPr indent="0" marL="0">
+              <a:lnSpc>
+                <a:spcPct val="100000"/>
+              </a:lnSpc>
+              <a:buNone/>
+            </a:pPr>
+            <a:r>
+              <a:rPr lang="en-US" sz="1500" dirty="0">
+                <a:solidFill>
+                  <a:srgbClr val="1F2430"/>
+                </a:solidFill>
+                <a:latin typeface="Arial" pitchFamily="34" charset="0"/>
+                <a:ea typeface="Arial" pitchFamily="34" charset="-122"/>
+                <a:cs typeface="Arial" pitchFamily="34" charset="-120"/>
+              </a:rPr>
+              <a:t>El ataque rompe a los léxicos y el peso migra al estructural en unos 1.000 mensajes: termina con 0,96.</a:t>
+            </a:r>
+            <a:endParaRPr lang="en-US" sz="1500" dirty="0"/>
+          </a:p>
+        </p:txBody>
+      </p:sp>
+      <p:sp>
+        <p:nvSpPr>
+          <p:cNvPr id="17" name="Shape 14"/>
+          <p:cNvSpPr/>
+          <p:nvPr/>
+        </p:nvSpPr>
+        <p:spPr>
+          <a:xfrm>
+            <a:off x="8641080" y="4846320"/>
+            <a:ext cx="2999232" cy="0"/>
+          </a:xfrm>
+          <a:prstGeom prst="line">
+            <a:avLst/>
+          </a:prstGeom>
+          <a:noFill/>
+          <a:ln w="9525">
+            <a:solidFill>
+              <a:srgbClr val="D9D6CE"/>
+            </a:solidFill>
+            <a:prstDash val="solid"/>
+          </a:ln>
+        </p:spPr>
+      </p:sp>
+      <p:sp>
+        <p:nvSpPr>
+          <p:cNvPr id="18" name="Text 15"/>
+          <p:cNvSpPr txBox="1"/>
+          <p:nvPr/>
+        </p:nvSpPr>
+        <p:spPr>
+          <a:xfrm>
+            <a:off x="8641080" y="4983480"/>
+            <a:ext cx="3017520" cy="731520"/>
+          </a:xfrm>
+          <a:prstGeom prst="rect">
+            <a:avLst/>
+          </a:prstGeom>
+          <a:noFill/>
+          <a:ln/>
+        </p:spPr>
+        <p:txBody>
+          <a:bodyPr wrap="square" lIns="0" tIns="0" rIns="0" bIns="0" rtlCol="0" anchor="t"/>
+          <a:lstStyle/>
+          <a:p>
+            <a:pPr indent="0" marL="0">
+              <a:lnSpc>
+                <a:spcPct val="100000"/>
+              </a:lnSpc>
+              <a:buNone/>
+            </a:pPr>
+            <a:r>
+              <a:rPr lang="en-US" sz="1500" b="1" dirty="0">
+                <a:solidFill>
+                  <a:srgbClr val="4A3AA7"/>
+                </a:solidFill>
+                <a:latin typeface="Arial" pitchFamily="34" charset="0"/>
+                <a:ea typeface="Arial" pitchFamily="34" charset="-122"/>
+                <a:cs typeface="Arial" pitchFamily="34" charset="-120"/>
+              </a:rPr>
+              <a:t>El estructural mira formato, no palabras: este ataque no lo toca.</a:t>
+            </a:r>
+            <a:endParaRPr lang="en-US" sz="1500" dirty="0"/>
+          </a:p>
+        </p:txBody>
+      </p:sp>
+      <p:sp>
+        <p:nvSpPr>
+          <p:cNvPr id="19" name="Text 16"/>
+          <p:cNvSpPr txBox="1"/>
+          <p:nvPr/>
+        </p:nvSpPr>
+        <p:spPr>
+          <a:xfrm>
+            <a:off x="548640" y="6373368"/>
+            <a:ext cx="10241280" cy="274320"/>
+          </a:xfrm>
+          <a:prstGeom prst="rect">
+            <a:avLst/>
+          </a:prstGeom>
+          <a:noFill/>
+          <a:ln/>
+        </p:spPr>
+        <p:txBody>
+          <a:bodyPr wrap="square" lIns="0" tIns="0" rIns="0" bIns="0" rtlCol="0" anchor="t"/>
+          <a:lstStyle/>
+          <a:p>
+            <a:pPr indent="0" marL="0">
+              <a:lnSpc>
+                <a:spcPct val="100000"/>
+              </a:lnSpc>
+              <a:buNone/>
+            </a:pPr>
+            <a:r>
+              <a:rPr lang="en-US" sz="1000" dirty="0">
+                <a:solidFill>
+                  <a:srgbClr val="9AA1AE"/>
+                </a:solidFill>
+                <a:latin typeface="Arial" pitchFamily="34" charset="0"/>
+                <a:ea typeface="Arial" pitchFamily="34" charset="-122"/>
+                <a:cs typeface="Arial" pitchFamily="34" charset="-120"/>
+              </a:rPr>
+              <a:t>Media de 20 permutaciones (semillas) del SMS Spam Collection. Ataque desde la mitad del stream.</a:t>
             </a:r>
             <a:endParaRPr lang="en-US" sz="1000" dirty="0"/>
           </a:p>
@@ -3768,7 +3861,7 @@
                 <a:ea typeface="Arial" pitchFamily="34" charset="-122"/>
                 <a:cs typeface="Arial" pitchFamily="34" charset="-120"/>
               </a:rPr>
-              <a:t>HALLAZGO 1</a:t>
+              <a:t>HALLAZGO 2 · ¿CUÁNTA ETIQUETA HACE FALTA?</a:t>
             </a:r>
             <a:endParaRPr lang="en-US" sz="1100" dirty="0"/>
           </a:p>
@@ -3809,7 +3902,7 @@
                 <a:ea typeface="Georgia" pitchFamily="34" charset="-122"/>
                 <a:cs typeface="Georgia" pitchFamily="34" charset="-120"/>
               </a:rPr>
-              <a:t>Reentrenar aprende las palabras nuevas</a:t>
+              <a:t>Con pocas etiquetas, combinar le gana a reentrenar</a:t>
             </a:r>
             <a:endParaRPr lang="en-US" sz="3000" dirty="0"/>
           </a:p>
@@ -3851,7 +3944,7 @@
                 <a:ea typeface="Arial" pitchFamily="34" charset="-122"/>
                 <a:cs typeface="Arial" pitchFamily="34" charset="-120"/>
               </a:rPr>
-              <a:t>Spam atrapado en una ventana móvil de 300 mensajes.</a:t>
+              <a:t>Errores en la mitad atacada, según cuántos mensajes reporta el usuario.</a:t>
             </a:r>
             <a:endParaRPr lang="en-US" sz="1500" dirty="0"/>
           </a:p>
@@ -3901,33 +3994,13 @@
       </p:sp>
       <p:sp>
         <p:nvSpPr>
-          <p:cNvPr id="6" name="hallazgo 1 (actual)"/>
+          <p:cNvPr id="6" name="hallazgo 1"/>
           <p:cNvSpPr/>
           <p:nvPr/>
         </p:nvSpPr>
         <p:spPr>
           <a:xfrm>
             <a:off x="10899648" y="457200"/>
-            <a:ext cx="137160" cy="137160"/>
-          </a:xfrm>
-          <a:prstGeom prst="ellipse">
-            <a:avLst/>
-          </a:prstGeom>
-          <a:solidFill>
-            <a:srgbClr val="1F2430"/>
-          </a:solidFill>
-          <a:ln/>
-        </p:spPr>
-      </p:sp>
-      <p:sp>
-        <p:nvSpPr>
-          <p:cNvPr id="7" name="hallazgo 2"/>
-          <p:cNvSpPr/>
-          <p:nvPr/>
-        </p:nvSpPr>
-        <p:spPr>
-          <a:xfrm>
-            <a:off x="11100816" y="457200"/>
             <a:ext cx="137160" cy="137160"/>
           </a:xfrm>
           <a:prstGeom prst="ellipse">
@@ -3943,6 +4016,26 @@
       </p:sp>
       <p:sp>
         <p:nvSpPr>
+          <p:cNvPr id="7" name="hallazgo 2 (actual)"/>
+          <p:cNvSpPr/>
+          <p:nvPr/>
+        </p:nvSpPr>
+        <p:spPr>
+          <a:xfrm>
+            <a:off x="11100816" y="457200"/>
+            <a:ext cx="137160" cy="137160"/>
+          </a:xfrm>
+          <a:prstGeom prst="ellipse">
+            <a:avLst/>
+          </a:prstGeom>
+          <a:solidFill>
+            <a:srgbClr val="1F2430"/>
+          </a:solidFill>
+          <a:ln/>
+        </p:spPr>
+      </p:sp>
+      <p:sp>
+        <p:nvSpPr>
           <p:cNvPr id="8" name="hallazgo 3"/>
           <p:cNvSpPr/>
           <p:nvPr/>
@@ -3987,7 +4080,7 @@
       </p:sp>
       <p:pic>
         <p:nvPicPr>
-          <p:cNvPr id="10" name="Image 0" descr="Se suma SGD online: cae menos y vuelve a 89%, casi el nivel previo al ataque.">    </p:cNvPr>
+          <p:cNvPr id="10" name="Image 0" descr="Errores según la fracción de mensajes etiquetados. Con todas las etiquetas SGD comete 73 y Hedge 133; con 1 de cada 20, SGD 210 y Hedge 189, frente a 190 del estático.">    </p:cNvPr>
           <p:cNvPicPr>
             <a:picLocks noChangeAspect="1"/>
           </p:cNvPicPr>
@@ -4002,7 +4095,7 @@
         <p:spPr>
           <a:xfrm>
             <a:off x="411480" y="1783080"/>
-            <a:ext cx="9856468" cy="4434840"/>
+            <a:ext cx="6495445" cy="4434840"/>
           </a:xfrm>
           <a:prstGeom prst="rect">
             <a:avLst/>
@@ -4017,35 +4110,245 @@
         </p:nvSpPr>
         <p:spPr>
           <a:xfrm>
-            <a:off x="548640" y="6373368"/>
-            <a:ext cx="10241280" cy="274320"/>
-          </a:xfrm>
-          <a:prstGeom prst="rect">
-            <a:avLst/>
-          </a:prstGeom>
-          <a:noFill/>
-          <a:ln/>
-        </p:spPr>
-        <p:txBody>
-          <a:bodyPr wrap="square" lIns="0" tIns="0" rIns="0" bIns="0" rtlCol="0" anchor="t"/>
-          <a:lstStyle/>
-          <a:p>
-            <a:pPr indent="0" marL="0">
-              <a:lnSpc>
-                <a:spcPct val="100000"/>
-              </a:lnSpc>
-              <a:buNone/>
-            </a:pPr>
-            <a:r>
-              <a:rPr lang="en-US" sz="1000" dirty="0">
-                <a:solidFill>
-                  <a:srgbClr val="9AA1AE"/>
+            <a:off x="7726680" y="1920240"/>
+            <a:ext cx="3931920" cy="822960"/>
+          </a:xfrm>
+          <a:prstGeom prst="rect">
+            <a:avLst/>
+          </a:prstGeom>
+          <a:noFill/>
+          <a:ln/>
+        </p:spPr>
+        <p:txBody>
+          <a:bodyPr wrap="square" lIns="0" tIns="0" rIns="0" bIns="0" rtlCol="0" anchor="t"/>
+          <a:lstStyle/>
+          <a:p>
+            <a:pPr indent="0" marL="0">
+              <a:lnSpc>
+                <a:spcPct val="100000"/>
+              </a:lnSpc>
+              <a:buNone/>
+            </a:pPr>
+            <a:r>
+              <a:rPr lang="en-US" sz="5400" b="1" dirty="0">
+                <a:solidFill>
+                  <a:srgbClr val="2A78D6"/>
                 </a:solidFill>
                 <a:latin typeface="Arial" pitchFamily="34" charset="0"/>
                 <a:ea typeface="Arial" pitchFamily="34" charset="-122"/>
                 <a:cs typeface="Arial" pitchFamily="34" charset="-120"/>
               </a:rPr>
-              <a:t>Media de 20 permutaciones (semillas) del SMS Spam Collection. Ataque desde la mitad del stream. Es la figura 1 del paper.</a:t>
+              <a:t>15 de 20</a:t>
+            </a:r>
+            <a:endParaRPr lang="en-US" sz="5400" dirty="0"/>
+          </a:p>
+        </p:txBody>
+      </p:sp>
+      <p:sp>
+        <p:nvSpPr>
+          <p:cNvPr id="12" name="Text 9"/>
+          <p:cNvSpPr txBox="1"/>
+          <p:nvPr/>
+        </p:nvSpPr>
+        <p:spPr>
+          <a:xfrm>
+            <a:off x="7726680" y="2816352"/>
+            <a:ext cx="3931920" cy="685800"/>
+          </a:xfrm>
+          <a:prstGeom prst="rect">
+            <a:avLst/>
+          </a:prstGeom>
+          <a:noFill/>
+          <a:ln/>
+        </p:spPr>
+        <p:txBody>
+          <a:bodyPr wrap="square" lIns="0" tIns="0" rIns="0" bIns="0" rtlCol="0" anchor="t"/>
+          <a:lstStyle/>
+          <a:p>
+            <a:pPr indent="0" marL="0">
+              <a:lnSpc>
+                <a:spcPct val="100000"/>
+              </a:lnSpc>
+              <a:buNone/>
+            </a:pPr>
+            <a:r>
+              <a:rPr lang="en-US" sz="1500" dirty="0">
+                <a:solidFill>
+                  <a:srgbClr val="1F2430"/>
+                </a:solidFill>
+                <a:latin typeface="Arial" pitchFamily="34" charset="0"/>
+                <a:ea typeface="Arial" pitchFamily="34" charset="-122"/>
+                <a:cs typeface="Arial" pitchFamily="34" charset="-120"/>
+              </a:rPr>
+              <a:t>semillas en las que gana Hedge cuando el usuario reporta 1 de cada 20 mensajes</a:t>
+            </a:r>
+            <a:endParaRPr lang="en-US" sz="1500" dirty="0"/>
+          </a:p>
+        </p:txBody>
+      </p:sp>
+      <p:sp>
+        <p:nvSpPr>
+          <p:cNvPr id="13" name="Text 10"/>
+          <p:cNvSpPr txBox="1"/>
+          <p:nvPr/>
+        </p:nvSpPr>
+        <p:spPr>
+          <a:xfrm>
+            <a:off x="7726680" y="3657600"/>
+            <a:ext cx="3931920" cy="670560"/>
+          </a:xfrm>
+          <a:prstGeom prst="rect">
+            <a:avLst/>
+          </a:prstGeom>
+          <a:noFill/>
+          <a:ln/>
+        </p:spPr>
+        <p:txBody>
+          <a:bodyPr wrap="square" lIns="0" tIns="0" rIns="0" bIns="0" rtlCol="0" anchor="t"/>
+          <a:lstStyle/>
+          <a:p>
+            <a:pPr indent="0" marL="0">
+              <a:lnSpc>
+                <a:spcPct val="100000"/>
+              </a:lnSpc>
+              <a:buNone/>
+            </a:pPr>
+            <a:r>
+              <a:rPr lang="en-US" sz="4400" b="1" dirty="0">
+                <a:solidFill>
+                  <a:srgbClr val="1BAF7A"/>
+                </a:solidFill>
+                <a:latin typeface="Arial" pitchFamily="34" charset="0"/>
+                <a:ea typeface="Arial" pitchFamily="34" charset="-122"/>
+                <a:cs typeface="Arial" pitchFamily="34" charset="-120"/>
+              </a:rPr>
+              <a:t>210 &gt; 190</a:t>
+            </a:r>
+            <a:endParaRPr lang="en-US" sz="4400" dirty="0"/>
+          </a:p>
+        </p:txBody>
+      </p:sp>
+      <p:sp>
+        <p:nvSpPr>
+          <p:cNvPr id="14" name="Text 11"/>
+          <p:cNvSpPr txBox="1"/>
+          <p:nvPr/>
+        </p:nvSpPr>
+        <p:spPr>
+          <a:xfrm>
+            <a:off x="7726680" y="4401312"/>
+            <a:ext cx="3931920" cy="685800"/>
+          </a:xfrm>
+          <a:prstGeom prst="rect">
+            <a:avLst/>
+          </a:prstGeom>
+          <a:noFill/>
+          <a:ln/>
+        </p:spPr>
+        <p:txBody>
+          <a:bodyPr wrap="square" lIns="0" tIns="0" rIns="0" bIns="0" rtlCol="0" anchor="t"/>
+          <a:lstStyle/>
+          <a:p>
+            <a:pPr indent="0" marL="0">
+              <a:lnSpc>
+                <a:spcPct val="100000"/>
+              </a:lnSpc>
+              <a:buNone/>
+            </a:pPr>
+            <a:r>
+              <a:rPr lang="en-US" sz="1500" dirty="0">
+                <a:solidFill>
+                  <a:srgbClr val="1F2430"/>
+                </a:solidFill>
+                <a:latin typeface="Arial" pitchFamily="34" charset="0"/>
+                <a:ea typeface="Arial" pitchFamily="34" charset="-122"/>
+                <a:cs typeface="Arial" pitchFamily="34" charset="-120"/>
+              </a:rPr>
+              <a:t>errores: con tan pocas etiquetas, SGD termina peor que no adaptarse</a:t>
+            </a:r>
+            <a:endParaRPr lang="en-US" sz="1500" dirty="0"/>
+          </a:p>
+        </p:txBody>
+      </p:sp>
+      <p:sp>
+        <p:nvSpPr>
+          <p:cNvPr id="15" name="Text 12"/>
+          <p:cNvSpPr txBox="1"/>
+          <p:nvPr/>
+        </p:nvSpPr>
+        <p:spPr>
+          <a:xfrm>
+            <a:off x="7726680" y="5440680"/>
+            <a:ext cx="3931920" cy="548640"/>
+          </a:xfrm>
+          <a:prstGeom prst="rect">
+            <a:avLst/>
+          </a:prstGeom>
+          <a:noFill/>
+          <a:ln/>
+        </p:spPr>
+        <p:txBody>
+          <a:bodyPr wrap="square" lIns="0" tIns="0" rIns="0" bIns="0" rtlCol="0" anchor="t"/>
+          <a:lstStyle/>
+          <a:p>
+            <a:pPr indent="0" marL="0">
+              <a:lnSpc>
+                <a:spcPct val="100000"/>
+              </a:lnSpc>
+              <a:buNone/>
+            </a:pPr>
+            <a:r>
+              <a:rPr lang="en-US" sz="1300" dirty="0">
+                <a:solidFill>
+                  <a:srgbClr val="5A6274"/>
+                </a:solidFill>
+                <a:latin typeface="Arial" pitchFamily="34" charset="0"/>
+                <a:ea typeface="Arial" pitchFamily="34" charset="-122"/>
+                <a:cs typeface="Arial" pitchFamily="34" charset="-120"/>
+              </a:rPr>
+              <a:t>Con 1 de cada 5 o más, reentrenar gana en al menos 18 de 20 semillas.</a:t>
+            </a:r>
+            <a:endParaRPr lang="en-US" sz="1300" dirty="0"/>
+          </a:p>
+        </p:txBody>
+      </p:sp>
+      <p:sp>
+        <p:nvSpPr>
+          <p:cNvPr id="16" name="Text 13"/>
+          <p:cNvSpPr txBox="1"/>
+          <p:nvPr/>
+        </p:nvSpPr>
+        <p:spPr>
+          <a:xfrm>
+            <a:off x="548640" y="6373368"/>
+            <a:ext cx="10241280" cy="274320"/>
+          </a:xfrm>
+          <a:prstGeom prst="rect">
+            <a:avLst/>
+          </a:prstGeom>
+          <a:noFill/>
+          <a:ln/>
+        </p:spPr>
+        <p:txBody>
+          <a:bodyPr wrap="square" lIns="0" tIns="0" rIns="0" bIns="0" rtlCol="0" anchor="t"/>
+          <a:lstStyle/>
+          <a:p>
+            <a:pPr indent="0" marL="0">
+              <a:lnSpc>
+                <a:spcPct val="100000"/>
+              </a:lnSpc>
+              <a:buNone/>
+            </a:pPr>
+            <a:r>
+              <a:rPr lang="en-US" sz="1000" dirty="0">
+                <a:solidFill>
+                  <a:srgbClr val="9AA1AE"/>
+                </a:solidFill>
+                <a:latin typeface="Arial" pitchFamily="34" charset="0"/>
+                <a:ea typeface="Arial" pitchFamily="34" charset="-122"/>
+                <a:cs typeface="Arial" pitchFamily="34" charset="-120"/>
+              </a:rPr>
+              <a:t>Barrido de ρ, la probabilidad de ver la etiqueta. Hedge usa el estimador ℓ/ρ con η_ρ = √ρ · η_T. Media de 20 permutaciones (semillas) del SMS Spam Collection.</a:t>
             </a:r>
             <a:endParaRPr lang="en-US" sz="1000" dirty="0"/>
           </a:p>
@@ -4163,7 +4466,7 @@
                 <a:ea typeface="Arial" pitchFamily="34" charset="-122"/>
                 <a:cs typeface="Arial" pitchFamily="34" charset="-120"/>
               </a:rPr>
-              <a:t>HALLAZGO 1</a:t>
+              <a:t>HALLAZGO 2</a:t>
             </a:r>
             <a:endParaRPr lang="en-US" sz="1100" dirty="0"/>
           </a:p>
@@ -4204,7 +4507,7 @@
                 <a:ea typeface="Georgia" pitchFamily="34" charset="-122"/>
                 <a:cs typeface="Georgia" pitchFamily="34" charset="-120"/>
               </a:rPr>
-              <a:t>Por qué funciona: la apuesta ya estaba cubierta</a:t>
+              <a:t>No es un artefacto de cómo se pondera</a:t>
             </a:r>
             <a:endParaRPr lang="en-US" sz="3000" dirty="0"/>
           </a:p>
@@ -4246,7 +4549,7 @@
                 <a:ea typeface="Arial" pitchFamily="34" charset="-122"/>
                 <a:cs typeface="Arial" pitchFamily="34" charset="-120"/>
               </a:rPr>
-              <a:t>Peso de cada experto en Hedge a lo largo del stream.</a:t>
+              <a:t>Errores en la mitad atacada con 1 de cada 20 mensajes etiquetado.</a:t>
             </a:r>
             <a:endParaRPr lang="en-US" sz="1500" dirty="0"/>
           </a:p>
@@ -4296,33 +4599,13 @@
       </p:sp>
       <p:sp>
         <p:nvSpPr>
-          <p:cNvPr id="6" name="hallazgo 1 (actual)"/>
+          <p:cNvPr id="6" name="hallazgo 1"/>
           <p:cNvSpPr/>
           <p:nvPr/>
         </p:nvSpPr>
         <p:spPr>
           <a:xfrm>
             <a:off x="10899648" y="457200"/>
-            <a:ext cx="137160" cy="137160"/>
-          </a:xfrm>
-          <a:prstGeom prst="ellipse">
-            <a:avLst/>
-          </a:prstGeom>
-          <a:solidFill>
-            <a:srgbClr val="1F2430"/>
-          </a:solidFill>
-          <a:ln/>
-        </p:spPr>
-      </p:sp>
-      <p:sp>
-        <p:nvSpPr>
-          <p:cNvPr id="7" name="hallazgo 2"/>
-          <p:cNvSpPr/>
-          <p:nvPr/>
-        </p:nvSpPr>
-        <p:spPr>
-          <a:xfrm>
-            <a:off x="11100816" y="457200"/>
             <a:ext cx="137160" cy="137160"/>
           </a:xfrm>
           <a:prstGeom prst="ellipse">
@@ -4338,6 +4621,26 @@
       </p:sp>
       <p:sp>
         <p:nvSpPr>
+          <p:cNvPr id="7" name="hallazgo 2 (actual)"/>
+          <p:cNvSpPr/>
+          <p:nvPr/>
+        </p:nvSpPr>
+        <p:spPr>
+          <a:xfrm>
+            <a:off x="11100816" y="457200"/>
+            <a:ext cx="137160" cy="137160"/>
+          </a:xfrm>
+          <a:prstGeom prst="ellipse">
+            <a:avLst/>
+          </a:prstGeom>
+          <a:solidFill>
+            <a:srgbClr val="1F2430"/>
+          </a:solidFill>
+          <a:ln/>
+        </p:spPr>
+      </p:sp>
+      <p:sp>
+        <p:nvSpPr>
           <p:cNvPr id="8" name="hallazgo 3"/>
           <p:cNvSpPr/>
           <p:nvPr/>
@@ -4382,7 +4685,7 @@
       </p:sp>
       <p:pic>
         <p:nvPicPr>
-          <p:cNvPr id="10" name="Image 0" descr="Área apilada con el peso de cada experto. Al llegar el ataque el peso está repartido en tercios; después migra al estructural, que termina con 0,96.">    </p:cNvPr>
+          <p:cNvPr id="10" name="Image 0" descr="SGD online sin reponderar comete 210 errores; reponderado por 1 sobre raíz de rho, 240; por 1 sobre rho, 323. Hedge comete 189.">    </p:cNvPr>
           <p:cNvPicPr>
             <a:picLocks noChangeAspect="1"/>
           </p:cNvPicPr>
@@ -4397,7 +4700,7 @@
         <p:spPr>
           <a:xfrm>
             <a:off x="411480" y="1828800"/>
-            <a:ext cx="8001000" cy="3599987"/>
+            <a:ext cx="6949440" cy="3897102"/>
           </a:xfrm>
           <a:prstGeom prst="rect">
             <a:avLst/>
@@ -4406,23 +4709,45 @@
       </p:pic>
       <p:sp>
         <p:nvSpPr>
-          <p:cNvPr id="11" name="llamada 1"/>
-          <p:cNvSpPr/>
-          <p:nvPr/>
-        </p:nvSpPr>
-        <p:spPr>
-          <a:xfrm>
-            <a:off x="8641080" y="2011680"/>
-            <a:ext cx="384048" cy="384048"/>
-          </a:xfrm>
-          <a:prstGeom prst="ellipse">
-            <a:avLst/>
-          </a:prstGeom>
-          <a:solidFill>
-            <a:srgbClr val="1F2430"/>
-          </a:solidFill>
-          <a:ln/>
-        </p:spPr>
+          <p:cNvPr id="11" name="Text 8"/>
+          <p:cNvSpPr txBox="1"/>
+          <p:nvPr/>
+        </p:nvSpPr>
+        <p:spPr>
+          <a:xfrm>
+            <a:off x="7726680" y="1920240"/>
+            <a:ext cx="3931920" cy="1097280"/>
+          </a:xfrm>
+          <a:prstGeom prst="rect">
+            <a:avLst/>
+          </a:prstGeom>
+          <a:noFill/>
+          <a:ln/>
+        </p:spPr>
+        <p:txBody>
+          <a:bodyPr wrap="square" lIns="0" tIns="0" rIns="0" bIns="0" rtlCol="0" anchor="t"/>
+          <a:lstStyle/>
+          <a:p>
+            <a:pPr indent="0" marL="0">
+              <a:lnSpc>
+                <a:spcPct val="100000"/>
+              </a:lnSpc>
+              <a:buNone/>
+            </a:pPr>
+            <a:r>
+              <a:rPr lang="en-US" sz="2000" dirty="0">
+                <a:solidFill>
+                  <a:srgbClr val="1F2430"/>
+                </a:solidFill>
+                <a:latin typeface="Georgia" pitchFamily="34" charset="0"/>
+                <a:ea typeface="Georgia" pitchFamily="34" charset="-122"/>
+                <a:cs typeface="Georgia" pitchFamily="34" charset="-120"/>
+              </a:rPr>
+              <a:t>¿Y si SGD compensa las etiquetas que faltan pesando más cada ejemplo, como hace Hedge?</a:t>
+            </a:r>
+            <a:endParaRPr lang="en-US" sz="2000" dirty="0"/>
+          </a:p>
+        </p:txBody>
       </p:sp>
       <p:sp>
         <p:nvSpPr>
@@ -4432,35 +4757,35 @@
         </p:nvSpPr>
         <p:spPr>
           <a:xfrm>
-            <a:off x="8641080" y="2011680"/>
-            <a:ext cx="384048" cy="384048"/>
-          </a:xfrm>
-          <a:prstGeom prst="rect">
-            <a:avLst/>
-          </a:prstGeom>
-          <a:noFill/>
-          <a:ln/>
-        </p:spPr>
-        <p:txBody>
-          <a:bodyPr wrap="square" lIns="0" tIns="0" rIns="0" bIns="0" rtlCol="0" anchor="ctr"/>
-          <a:lstStyle/>
-          <a:p>
-            <a:pPr algn="ctr" indent="0" marL="0">
-              <a:lnSpc>
-                <a:spcPct val="100000"/>
-              </a:lnSpc>
-              <a:buNone/>
-            </a:pPr>
-            <a:r>
-              <a:rPr lang="en-US" sz="1500" b="1" dirty="0">
-                <a:solidFill>
-                  <a:srgbClr val="FFFFFF"/>
+            <a:off x="7726680" y="3108960"/>
+            <a:ext cx="3931920" cy="548640"/>
+          </a:xfrm>
+          <a:prstGeom prst="rect">
+            <a:avLst/>
+          </a:prstGeom>
+          <a:noFill/>
+          <a:ln/>
+        </p:spPr>
+        <p:txBody>
+          <a:bodyPr wrap="square" lIns="0" tIns="0" rIns="0" bIns="0" rtlCol="0" anchor="t"/>
+          <a:lstStyle/>
+          <a:p>
+            <a:pPr indent="0" marL="0">
+              <a:lnSpc>
+                <a:spcPct val="100000"/>
+              </a:lnSpc>
+              <a:buNone/>
+            </a:pPr>
+            <a:r>
+              <a:rPr lang="en-US" sz="1500" dirty="0">
+                <a:solidFill>
+                  <a:srgbClr val="5A6274"/>
                 </a:solidFill>
                 <a:latin typeface="Arial" pitchFamily="34" charset="0"/>
                 <a:ea typeface="Arial" pitchFamily="34" charset="-122"/>
                 <a:cs typeface="Arial" pitchFamily="34" charset="-120"/>
               </a:rPr>
-              <a:t>1</a:t>
+              <a:t>Empeora: con pocos ejemplos, pasos más grandes sobreajustan a cada uno.</a:t>
             </a:r>
             <a:endParaRPr lang="en-US" sz="1500" dirty="0"/>
           </a:p>
@@ -4468,160 +4793,14 @@
       </p:sp>
       <p:sp>
         <p:nvSpPr>
-          <p:cNvPr id="13" name="Text 10"/>
-          <p:cNvSpPr txBox="1"/>
-          <p:nvPr/>
-        </p:nvSpPr>
-        <p:spPr>
-          <a:xfrm>
-            <a:off x="9208008" y="1993392"/>
-            <a:ext cx="2450592" cy="1188720"/>
-          </a:xfrm>
-          <a:prstGeom prst="rect">
-            <a:avLst/>
-          </a:prstGeom>
-          <a:noFill/>
-          <a:ln/>
-        </p:spPr>
-        <p:txBody>
-          <a:bodyPr wrap="square" lIns="0" tIns="0" rIns="0" bIns="0" rtlCol="0" anchor="t"/>
-          <a:lstStyle/>
-          <a:p>
-            <a:pPr indent="0" marL="0">
-              <a:lnSpc>
-                <a:spcPct val="100000"/>
-              </a:lnSpc>
-              <a:buNone/>
-            </a:pPr>
-            <a:r>
-              <a:rPr lang="en-US" sz="1500" dirty="0">
-                <a:solidFill>
-                  <a:srgbClr val="1F2430"/>
-                </a:solidFill>
-                <a:latin typeface="Arial" pitchFamily="34" charset="0"/>
-                <a:ea typeface="Arial" pitchFamily="34" charset="-122"/>
-                <a:cs typeface="Arial" pitchFamily="34" charset="-120"/>
-              </a:rPr>
-              <a:t>Al llegar el ataque, el peso estaba repartido en tercios: Naive Bayes 0,36, estructural 0,33, el resto 0,31.</a:t>
-            </a:r>
-            <a:endParaRPr lang="en-US" sz="1500" dirty="0"/>
-          </a:p>
-        </p:txBody>
-      </p:sp>
-      <p:sp>
-        <p:nvSpPr>
-          <p:cNvPr id="14" name="llamada 2"/>
-          <p:cNvSpPr/>
-          <p:nvPr/>
-        </p:nvSpPr>
-        <p:spPr>
-          <a:xfrm>
-            <a:off x="8641080" y="3429000"/>
-            <a:ext cx="384048" cy="384048"/>
-          </a:xfrm>
-          <a:prstGeom prst="ellipse">
-            <a:avLst/>
-          </a:prstGeom>
-          <a:solidFill>
-            <a:srgbClr val="1F2430"/>
-          </a:solidFill>
-          <a:ln/>
-        </p:spPr>
-      </p:sp>
-      <p:sp>
-        <p:nvSpPr>
-          <p:cNvPr id="15" name="Text 12"/>
-          <p:cNvSpPr txBox="1"/>
-          <p:nvPr/>
-        </p:nvSpPr>
-        <p:spPr>
-          <a:xfrm>
-            <a:off x="8641080" y="3429000"/>
-            <a:ext cx="384048" cy="384048"/>
-          </a:xfrm>
-          <a:prstGeom prst="rect">
-            <a:avLst/>
-          </a:prstGeom>
-          <a:noFill/>
-          <a:ln/>
-        </p:spPr>
-        <p:txBody>
-          <a:bodyPr wrap="square" lIns="0" tIns="0" rIns="0" bIns="0" rtlCol="0" anchor="ctr"/>
-          <a:lstStyle/>
-          <a:p>
-            <a:pPr algn="ctr" indent="0" marL="0">
-              <a:lnSpc>
-                <a:spcPct val="100000"/>
-              </a:lnSpc>
-              <a:buNone/>
-            </a:pPr>
-            <a:r>
-              <a:rPr lang="en-US" sz="1500" b="1" dirty="0">
-                <a:solidFill>
-                  <a:srgbClr val="FFFFFF"/>
-                </a:solidFill>
-                <a:latin typeface="Arial" pitchFamily="34" charset="0"/>
-                <a:ea typeface="Arial" pitchFamily="34" charset="-122"/>
-                <a:cs typeface="Arial" pitchFamily="34" charset="-120"/>
-              </a:rPr>
-              <a:t>2</a:t>
-            </a:r>
-            <a:endParaRPr lang="en-US" sz="1500" dirty="0"/>
-          </a:p>
-        </p:txBody>
-      </p:sp>
-      <p:sp>
-        <p:nvSpPr>
-          <p:cNvPr id="16" name="Text 13"/>
-          <p:cNvSpPr txBox="1"/>
-          <p:nvPr/>
-        </p:nvSpPr>
-        <p:spPr>
-          <a:xfrm>
-            <a:off x="9208008" y="3410712"/>
-            <a:ext cx="2450592" cy="1188720"/>
-          </a:xfrm>
-          <a:prstGeom prst="rect">
-            <a:avLst/>
-          </a:prstGeom>
-          <a:noFill/>
-          <a:ln/>
-        </p:spPr>
-        <p:txBody>
-          <a:bodyPr wrap="square" lIns="0" tIns="0" rIns="0" bIns="0" rtlCol="0" anchor="t"/>
-          <a:lstStyle/>
-          <a:p>
-            <a:pPr indent="0" marL="0">
-              <a:lnSpc>
-                <a:spcPct val="100000"/>
-              </a:lnSpc>
-              <a:buNone/>
-            </a:pPr>
-            <a:r>
-              <a:rPr lang="en-US" sz="1500" dirty="0">
-                <a:solidFill>
-                  <a:srgbClr val="1F2430"/>
-                </a:solidFill>
-                <a:latin typeface="Arial" pitchFamily="34" charset="0"/>
-                <a:ea typeface="Arial" pitchFamily="34" charset="-122"/>
-                <a:cs typeface="Arial" pitchFamily="34" charset="-120"/>
-              </a:rPr>
-              <a:t>El ataque rompe a los léxicos y el peso migra al estructural en unos 1.000 mensajes: termina con 0,96.</a:t>
-            </a:r>
-            <a:endParaRPr lang="en-US" sz="1500" dirty="0"/>
-          </a:p>
-        </p:txBody>
-      </p:sp>
-      <p:sp>
-        <p:nvSpPr>
-          <p:cNvPr id="17" name="Shape 14"/>
-          <p:cNvSpPr/>
-          <p:nvPr/>
-        </p:nvSpPr>
-        <p:spPr>
-          <a:xfrm>
-            <a:off x="8641080" y="4846320"/>
-            <a:ext cx="2999232" cy="0"/>
+          <p:cNvPr id="13" name="Shape 10"/>
+          <p:cNvSpPr/>
+          <p:nvPr/>
+        </p:nvSpPr>
+        <p:spPr>
+          <a:xfrm>
+            <a:off x="7726680" y="3931920"/>
+            <a:ext cx="3913632" cy="0"/>
           </a:xfrm>
           <a:prstGeom prst="line">
             <a:avLst/>
@@ -4637,49 +4816,91 @@
       </p:sp>
       <p:sp>
         <p:nvSpPr>
-          <p:cNvPr id="18" name="Text 15"/>
-          <p:cNvSpPr txBox="1"/>
-          <p:nvPr/>
-        </p:nvSpPr>
-        <p:spPr>
-          <a:xfrm>
-            <a:off x="8641080" y="4983480"/>
-            <a:ext cx="3017520" cy="731520"/>
-          </a:xfrm>
-          <a:prstGeom prst="rect">
-            <a:avLst/>
-          </a:prstGeom>
-          <a:noFill/>
-          <a:ln/>
-        </p:spPr>
-        <p:txBody>
-          <a:bodyPr wrap="square" lIns="0" tIns="0" rIns="0" bIns="0" rtlCol="0" anchor="t"/>
-          <a:lstStyle/>
-          <a:p>
-            <a:pPr indent="0" marL="0">
-              <a:lnSpc>
-                <a:spcPct val="100000"/>
-              </a:lnSpc>
-              <a:buNone/>
-            </a:pPr>
-            <a:r>
-              <a:rPr lang="en-US" sz="1500" b="1" dirty="0">
-                <a:solidFill>
-                  <a:srgbClr val="4A3AA7"/>
+          <p:cNvPr id="14" name="Text 11"/>
+          <p:cNvSpPr txBox="1"/>
+          <p:nvPr/>
+        </p:nvSpPr>
+        <p:spPr>
+          <a:xfrm>
+            <a:off x="7726680" y="4114800"/>
+            <a:ext cx="3931920" cy="1051560"/>
+          </a:xfrm>
+          <a:prstGeom prst="rect">
+            <a:avLst/>
+          </a:prstGeom>
+          <a:noFill/>
+          <a:ln/>
+        </p:spPr>
+        <p:txBody>
+          <a:bodyPr wrap="square" lIns="0" tIns="0" rIns="0" bIns="0" rtlCol="0" anchor="t"/>
+          <a:lstStyle/>
+          <a:p>
+            <a:pPr indent="0" marL="0">
+              <a:lnSpc>
+                <a:spcPct val="100000"/>
+              </a:lnSpc>
+              <a:buNone/>
+            </a:pPr>
+            <a:r>
+              <a:rPr lang="en-US" sz="2200" dirty="0">
+                <a:solidFill>
+                  <a:srgbClr val="2A78D6"/>
+                </a:solidFill>
+                <a:latin typeface="Georgia" pitchFamily="34" charset="0"/>
+                <a:ea typeface="Georgia" pitchFamily="34" charset="-122"/>
+                <a:cs typeface="Georgia" pitchFamily="34" charset="-120"/>
+              </a:rPr>
+              <a:t>Hedge aprende 5 pesos. Reentrenar, uno por cada palabra nueva.</a:t>
+            </a:r>
+            <a:endParaRPr lang="en-US" sz="2200" dirty="0"/>
+          </a:p>
+        </p:txBody>
+      </p:sp>
+      <p:sp>
+        <p:nvSpPr>
+          <p:cNvPr id="15" name="Text 12"/>
+          <p:cNvSpPr txBox="1"/>
+          <p:nvPr/>
+        </p:nvSpPr>
+        <p:spPr>
+          <a:xfrm>
+            <a:off x="7726680" y="5303520"/>
+            <a:ext cx="3931920" cy="548640"/>
+          </a:xfrm>
+          <a:prstGeom prst="rect">
+            <a:avLst/>
+          </a:prstGeom>
+          <a:noFill/>
+          <a:ln/>
+        </p:spPr>
+        <p:txBody>
+          <a:bodyPr wrap="square" lIns="0" tIns="0" rIns="0" bIns="0" rtlCol="0" anchor="t"/>
+          <a:lstStyle/>
+          <a:p>
+            <a:pPr indent="0" marL="0">
+              <a:lnSpc>
+                <a:spcPct val="100000"/>
+              </a:lnSpc>
+              <a:buNone/>
+            </a:pPr>
+            <a:r>
+              <a:rPr lang="en-US" sz="1300" dirty="0">
+                <a:solidFill>
+                  <a:srgbClr val="5A6274"/>
                 </a:solidFill>
                 <a:latin typeface="Arial" pitchFamily="34" charset="0"/>
                 <a:ea typeface="Arial" pitchFamily="34" charset="-122"/>
                 <a:cs typeface="Arial" pitchFamily="34" charset="-120"/>
               </a:rPr>
-              <a:t>El estructural mira formato, no palabras: este ataque no lo toca.</a:t>
-            </a:r>
-            <a:endParaRPr lang="en-US" sz="1500" dirty="0"/>
-          </a:p>
-        </p:txBody>
-      </p:sp>
-      <p:sp>
-        <p:nvSpPr>
-          <p:cNvPr id="19" name="Text 16"/>
+              <a:t>Lo que sí paga Hedge es varianza: con ρ = 0,05 cada observación pesa ≈ 4,5 veces más.</a:t>
+            </a:r>
+            <a:endParaRPr lang="en-US" sz="1300" dirty="0"/>
+          </a:p>
+        </p:txBody>
+      </p:sp>
+      <p:sp>
+        <p:nvSpPr>
+          <p:cNvPr id="16" name="Text 13"/>
           <p:cNvSpPr txBox="1"/>
           <p:nvPr/>
         </p:nvSpPr>
@@ -4831,7 +5052,7 @@
                 <a:ea typeface="Arial" pitchFamily="34" charset="-122"/>
                 <a:cs typeface="Arial" pitchFamily="34" charset="-120"/>
               </a:rPr>
-              <a:t>HALLAZGO 2 · ¿CUÁNTA ETIQUETA HACE FALTA?</a:t>
+              <a:t>HALLAZGO 3 · LA TEORÍA, CON PRECISIÓN</a:t>
             </a:r>
             <a:endParaRPr lang="en-US" sz="1100" dirty="0"/>
           </a:p>
@@ -4872,7 +5093,7 @@
                 <a:ea typeface="Georgia" pitchFamily="34" charset="-122"/>
                 <a:cs typeface="Georgia" pitchFamily="34" charset="-120"/>
               </a:rPr>
-              <a:t>Con pocas etiquetas, combinar le gana a reentrenar</a:t>
+              <a:t>La cota de la teoría no es la del voto pesado</a:t>
             </a:r>
             <a:endParaRPr lang="en-US" sz="3000" dirty="0"/>
           </a:p>
@@ -4886,76 +5107,34 @@
         </p:nvSpPr>
         <p:spPr>
           <a:xfrm>
-            <a:off x="548640" y="1307592"/>
-            <a:ext cx="10424160" cy="320040"/>
-          </a:xfrm>
-          <a:prstGeom prst="rect">
-            <a:avLst/>
-          </a:prstGeom>
-          <a:noFill/>
-          <a:ln/>
-        </p:spPr>
-        <p:txBody>
-          <a:bodyPr wrap="square" lIns="0" tIns="0" rIns="0" bIns="0" rtlCol="0" anchor="t"/>
-          <a:lstStyle/>
-          <a:p>
-            <a:pPr indent="0" marL="0">
-              <a:lnSpc>
-                <a:spcPct val="100000"/>
-              </a:lnSpc>
-              <a:buNone/>
-            </a:pPr>
-            <a:r>
-              <a:rPr lang="en-US" sz="1500" dirty="0">
-                <a:solidFill>
-                  <a:srgbClr val="5A6274"/>
+            <a:off x="9235440" y="429768"/>
+            <a:ext cx="1554480" cy="201168"/>
+          </a:xfrm>
+          <a:prstGeom prst="rect">
+            <a:avLst/>
+          </a:prstGeom>
+          <a:noFill/>
+          <a:ln/>
+        </p:spPr>
+        <p:txBody>
+          <a:bodyPr wrap="square" lIns="0" tIns="0" rIns="0" bIns="0" rtlCol="0" anchor="t"/>
+          <a:lstStyle/>
+          <a:p>
+            <a:pPr algn="r" indent="0" marL="0">
+              <a:lnSpc>
+                <a:spcPct val="100000"/>
+              </a:lnSpc>
+              <a:buNone/>
+            </a:pPr>
+            <a:r>
+              <a:rPr lang="en-US" sz="900" b="1" spc="200" kern="0" dirty="0">
+                <a:solidFill>
+                  <a:srgbClr val="9AA1AE"/>
                 </a:solidFill>
                 <a:latin typeface="Arial" pitchFamily="34" charset="0"/>
                 <a:ea typeface="Arial" pitchFamily="34" charset="-122"/>
                 <a:cs typeface="Arial" pitchFamily="34" charset="-120"/>
               </a:rPr>
-              <a:t>Errores en la mitad atacada, según cuántos mensajes reporta el usuario.</a:t>
-            </a:r>
-            <a:endParaRPr lang="en-US" sz="1500" dirty="0"/>
-          </a:p>
-        </p:txBody>
-      </p:sp>
-      <p:sp>
-        <p:nvSpPr>
-          <p:cNvPr id="5" name="Text 3"/>
-          <p:cNvSpPr txBox="1"/>
-          <p:nvPr/>
-        </p:nvSpPr>
-        <p:spPr>
-          <a:xfrm>
-            <a:off x="9235440" y="429768"/>
-            <a:ext cx="1554480" cy="201168"/>
-          </a:xfrm>
-          <a:prstGeom prst="rect">
-            <a:avLst/>
-          </a:prstGeom>
-          <a:noFill/>
-          <a:ln/>
-        </p:spPr>
-        <p:txBody>
-          <a:bodyPr wrap="square" lIns="0" tIns="0" rIns="0" bIns="0" rtlCol="0" anchor="t"/>
-          <a:lstStyle/>
-          <a:p>
-            <a:pPr algn="r" indent="0" marL="0">
-              <a:lnSpc>
-                <a:spcPct val="100000"/>
-              </a:lnSpc>
-              <a:buNone/>
-            </a:pPr>
-            <a:r>
-              <a:rPr lang="en-US" sz="900" b="1" spc="200" kern="0" dirty="0">
-                <a:solidFill>
-                  <a:srgbClr val="9AA1AE"/>
-                </a:solidFill>
-                <a:latin typeface="Arial" pitchFamily="34" charset="0"/>
-                <a:ea typeface="Arial" pitchFamily="34" charset="-122"/>
-                <a:cs typeface="Arial" pitchFamily="34" charset="-120"/>
-              </a:rPr>
               <a:t>HALLAZGOS</a:t>
             </a:r>
             <a:endParaRPr lang="en-US" sz="900" dirty="0"/>
@@ -4964,7 +5143,7 @@
       </p:sp>
       <p:sp>
         <p:nvSpPr>
-          <p:cNvPr id="6" name="hallazgo 1"/>
+          <p:cNvPr id="5" name="hallazgo 1"/>
           <p:cNvSpPr/>
           <p:nvPr/>
         </p:nvSpPr>
@@ -4986,33 +5165,13 @@
       </p:sp>
       <p:sp>
         <p:nvSpPr>
-          <p:cNvPr id="7" name="hallazgo 2 (actual)"/>
+          <p:cNvPr id="6" name="hallazgo 2"/>
           <p:cNvSpPr/>
           <p:nvPr/>
         </p:nvSpPr>
         <p:spPr>
           <a:xfrm>
             <a:off x="11100816" y="457200"/>
-            <a:ext cx="137160" cy="137160"/>
-          </a:xfrm>
-          <a:prstGeom prst="ellipse">
-            <a:avLst/>
-          </a:prstGeom>
-          <a:solidFill>
-            <a:srgbClr val="1F2430"/>
-          </a:solidFill>
-          <a:ln/>
-        </p:spPr>
-      </p:sp>
-      <p:sp>
-        <p:nvSpPr>
-          <p:cNvPr id="8" name="hallazgo 3"/>
-          <p:cNvSpPr/>
-          <p:nvPr/>
-        </p:nvSpPr>
-        <p:spPr>
-          <a:xfrm>
-            <a:off x="11301984" y="457200"/>
             <a:ext cx="137160" cy="137160"/>
           </a:xfrm>
           <a:prstGeom prst="ellipse">
@@ -5028,7 +5187,27 @@
       </p:sp>
       <p:sp>
         <p:nvSpPr>
-          <p:cNvPr id="9" name="hallazgo 4"/>
+          <p:cNvPr id="7" name="hallazgo 3 (actual)"/>
+          <p:cNvSpPr/>
+          <p:nvPr/>
+        </p:nvSpPr>
+        <p:spPr>
+          <a:xfrm>
+            <a:off x="11301984" y="457200"/>
+            <a:ext cx="137160" cy="137160"/>
+          </a:xfrm>
+          <a:prstGeom prst="ellipse">
+            <a:avLst/>
+          </a:prstGeom>
+          <a:solidFill>
+            <a:srgbClr val="1F2430"/>
+          </a:solidFill>
+          <a:ln/>
+        </p:spPr>
+      </p:sp>
+      <p:sp>
+        <p:nvSpPr>
+          <p:cNvPr id="8" name="hallazgo 4"/>
           <p:cNvSpPr/>
           <p:nvPr/>
         </p:nvSpPr>
@@ -5048,9 +5227,366 @@
           </a:ln>
         </p:spPr>
       </p:sp>
+      <p:sp>
+        <p:nvSpPr>
+          <p:cNvPr id="9" name="Text 7"/>
+          <p:cNvSpPr txBox="1"/>
+          <p:nvPr/>
+        </p:nvSpPr>
+        <p:spPr>
+          <a:xfrm>
+            <a:off x="548640" y="1783080"/>
+            <a:ext cx="4572000" cy="274320"/>
+          </a:xfrm>
+          <a:prstGeom prst="rect">
+            <a:avLst/>
+          </a:prstGeom>
+          <a:noFill/>
+          <a:ln/>
+        </p:spPr>
+        <p:txBody>
+          <a:bodyPr wrap="square" lIns="0" tIns="0" rIns="0" bIns="0" rtlCol="0" anchor="t"/>
+          <a:lstStyle/>
+          <a:p>
+            <a:pPr indent="0" marL="0">
+              <a:lnSpc>
+                <a:spcPct val="100000"/>
+              </a:lnSpc>
+              <a:buNone/>
+            </a:pPr>
+            <a:r>
+              <a:rPr lang="en-US" sz="1500" dirty="0">
+                <a:solidFill>
+                  <a:srgbClr val="5A6274"/>
+                </a:solidFill>
+                <a:latin typeface="Arial" pitchFamily="34" charset="0"/>
+                <a:ea typeface="Arial" pitchFamily="34" charset="-122"/>
+                <a:cs typeface="Arial" pitchFamily="34" charset="-120"/>
+              </a:rPr>
+              <a:t>En clase se presentan juntos:</a:t>
+            </a:r>
+            <a:endParaRPr lang="en-US" sz="1500" dirty="0"/>
+          </a:p>
+        </p:txBody>
+      </p:sp>
+      <p:sp>
+        <p:nvSpPr>
+          <p:cNvPr id="10" name="punto Voto pesado determinístico"/>
+          <p:cNvSpPr/>
+          <p:nvPr/>
+        </p:nvSpPr>
+        <p:spPr>
+          <a:xfrm>
+            <a:off x="548640" y="2295144"/>
+            <a:ext cx="219456" cy="219456"/>
+          </a:xfrm>
+          <a:prstGeom prst="ellipse">
+            <a:avLst/>
+          </a:prstGeom>
+          <a:solidFill>
+            <a:srgbClr val="E34948"/>
+          </a:solidFill>
+          <a:ln/>
+        </p:spPr>
+      </p:sp>
+      <p:sp>
+        <p:nvSpPr>
+          <p:cNvPr id="11" name="Text 9"/>
+          <p:cNvSpPr txBox="1"/>
+          <p:nvPr/>
+        </p:nvSpPr>
+        <p:spPr>
+          <a:xfrm>
+            <a:off x="932688" y="2240280"/>
+            <a:ext cx="4187952" cy="292608"/>
+          </a:xfrm>
+          <a:prstGeom prst="rect">
+            <a:avLst/>
+          </a:prstGeom>
+          <a:noFill/>
+          <a:ln/>
+        </p:spPr>
+        <p:txBody>
+          <a:bodyPr wrap="square" lIns="0" tIns="0" rIns="0" bIns="0" rtlCol="0" anchor="t"/>
+          <a:lstStyle/>
+          <a:p>
+            <a:pPr indent="0" marL="0">
+              <a:lnSpc>
+                <a:spcPct val="100000"/>
+              </a:lnSpc>
+              <a:buNone/>
+            </a:pPr>
+            <a:r>
+              <a:rPr lang="en-US" sz="1600" b="1" dirty="0">
+                <a:solidFill>
+                  <a:srgbClr val="1F2430"/>
+                </a:solidFill>
+                <a:latin typeface="Arial" pitchFamily="34" charset="0"/>
+                <a:ea typeface="Arial" pitchFamily="34" charset="-122"/>
+                <a:cs typeface="Arial" pitchFamily="34" charset="-120"/>
+              </a:rPr>
+              <a:t>Voto pesado determinístico</a:t>
+            </a:r>
+            <a:endParaRPr lang="en-US" sz="1600" dirty="0"/>
+          </a:p>
+        </p:txBody>
+      </p:sp>
+      <p:sp>
+        <p:nvSpPr>
+          <p:cNvPr id="12" name="Text 10"/>
+          <p:cNvSpPr txBox="1"/>
+          <p:nvPr/>
+        </p:nvSpPr>
+        <p:spPr>
+          <a:xfrm>
+            <a:off x="932688" y="2569464"/>
+            <a:ext cx="4187952" cy="457200"/>
+          </a:xfrm>
+          <a:prstGeom prst="rect">
+            <a:avLst/>
+          </a:prstGeom>
+          <a:noFill/>
+          <a:ln/>
+        </p:spPr>
+        <p:txBody>
+          <a:bodyPr wrap="square" lIns="0" tIns="0" rIns="0" bIns="0" rtlCol="0" anchor="t"/>
+          <a:lstStyle/>
+          <a:p>
+            <a:pPr indent="0" marL="0">
+              <a:lnSpc>
+                <a:spcPct val="100000"/>
+              </a:lnSpc>
+              <a:buNone/>
+            </a:pPr>
+            <a:r>
+              <a:rPr lang="en-US" sz="1300" dirty="0">
+                <a:solidFill>
+                  <a:srgbClr val="5A6274"/>
+                </a:solidFill>
+                <a:latin typeface="Arial" pitchFamily="34" charset="0"/>
+                <a:ea typeface="Arial" pitchFamily="34" charset="-122"/>
+                <a:cs typeface="Arial" pitchFamily="34" charset="-120"/>
+              </a:rPr>
+              <a:t>predice lo que dice la mayoría ponderada</a:t>
+            </a:r>
+            <a:endParaRPr lang="en-US" sz="1300" dirty="0"/>
+          </a:p>
+        </p:txBody>
+      </p:sp>
+      <p:sp>
+        <p:nvSpPr>
+          <p:cNvPr id="13" name="punto Hedge randomizado"/>
+          <p:cNvSpPr/>
+          <p:nvPr/>
+        </p:nvSpPr>
+        <p:spPr>
+          <a:xfrm>
+            <a:off x="548640" y="3118104"/>
+            <a:ext cx="219456" cy="219456"/>
+          </a:xfrm>
+          <a:prstGeom prst="ellipse">
+            <a:avLst/>
+          </a:prstGeom>
+          <a:solidFill>
+            <a:srgbClr val="2A78D6"/>
+          </a:solidFill>
+          <a:ln/>
+        </p:spPr>
+      </p:sp>
+      <p:sp>
+        <p:nvSpPr>
+          <p:cNvPr id="14" name="Text 12"/>
+          <p:cNvSpPr txBox="1"/>
+          <p:nvPr/>
+        </p:nvSpPr>
+        <p:spPr>
+          <a:xfrm>
+            <a:off x="932688" y="3063240"/>
+            <a:ext cx="4187952" cy="292608"/>
+          </a:xfrm>
+          <a:prstGeom prst="rect">
+            <a:avLst/>
+          </a:prstGeom>
+          <a:noFill/>
+          <a:ln/>
+        </p:spPr>
+        <p:txBody>
+          <a:bodyPr wrap="square" lIns="0" tIns="0" rIns="0" bIns="0" rtlCol="0" anchor="t"/>
+          <a:lstStyle/>
+          <a:p>
+            <a:pPr indent="0" marL="0">
+              <a:lnSpc>
+                <a:spcPct val="100000"/>
+              </a:lnSpc>
+              <a:buNone/>
+            </a:pPr>
+            <a:r>
+              <a:rPr lang="en-US" sz="1600" b="1" dirty="0">
+                <a:solidFill>
+                  <a:srgbClr val="1F2430"/>
+                </a:solidFill>
+                <a:latin typeface="Arial" pitchFamily="34" charset="0"/>
+                <a:ea typeface="Arial" pitchFamily="34" charset="-122"/>
+                <a:cs typeface="Arial" pitchFamily="34" charset="-120"/>
+              </a:rPr>
+              <a:t>Hedge randomizado</a:t>
+            </a:r>
+            <a:endParaRPr lang="en-US" sz="1600" dirty="0"/>
+          </a:p>
+        </p:txBody>
+      </p:sp>
+      <p:sp>
+        <p:nvSpPr>
+          <p:cNvPr id="15" name="Text 13"/>
+          <p:cNvSpPr txBox="1"/>
+          <p:nvPr/>
+        </p:nvSpPr>
+        <p:spPr>
+          <a:xfrm>
+            <a:off x="932688" y="3392424"/>
+            <a:ext cx="4187952" cy="457200"/>
+          </a:xfrm>
+          <a:prstGeom prst="rect">
+            <a:avLst/>
+          </a:prstGeom>
+          <a:noFill/>
+          <a:ln/>
+        </p:spPr>
+        <p:txBody>
+          <a:bodyPr wrap="square" lIns="0" tIns="0" rIns="0" bIns="0" rtlCol="0" anchor="t"/>
+          <a:lstStyle/>
+          <a:p>
+            <a:pPr indent="0" marL="0">
+              <a:lnSpc>
+                <a:spcPct val="100000"/>
+              </a:lnSpc>
+              <a:buNone/>
+            </a:pPr>
+            <a:r>
+              <a:rPr lang="en-US" sz="1300" dirty="0">
+                <a:solidFill>
+                  <a:srgbClr val="5A6274"/>
+                </a:solidFill>
+                <a:latin typeface="Arial" pitchFamily="34" charset="0"/>
+                <a:ea typeface="Arial" pitchFamily="34" charset="-122"/>
+                <a:cs typeface="Arial" pitchFamily="34" charset="-120"/>
+              </a:rPr>
+              <a:t>sortea un experto según los pesos: para este vale la cota</a:t>
+            </a:r>
+            <a:endParaRPr lang="en-US" sz="1300" dirty="0"/>
+          </a:p>
+        </p:txBody>
+      </p:sp>
+      <p:sp>
+        <p:nvSpPr>
+          <p:cNvPr id="16" name="Shape 14"/>
+          <p:cNvSpPr/>
+          <p:nvPr/>
+        </p:nvSpPr>
+        <p:spPr>
+          <a:xfrm>
+            <a:off x="548640" y="3977640"/>
+            <a:ext cx="4572000" cy="0"/>
+          </a:xfrm>
+          <a:prstGeom prst="line">
+            <a:avLst/>
+          </a:prstGeom>
+          <a:noFill/>
+          <a:ln w="9525">
+            <a:solidFill>
+              <a:srgbClr val="D9D6CE"/>
+            </a:solidFill>
+            <a:prstDash val="solid"/>
+          </a:ln>
+        </p:spPr>
+      </p:sp>
+      <p:sp>
+        <p:nvSpPr>
+          <p:cNvPr id="17" name="Text 15"/>
+          <p:cNvSpPr txBox="1"/>
+          <p:nvPr/>
+        </p:nvSpPr>
+        <p:spPr>
+          <a:xfrm>
+            <a:off x="548640" y="4160520"/>
+            <a:ext cx="4572000" cy="1005840"/>
+          </a:xfrm>
+          <a:prstGeom prst="rect">
+            <a:avLst/>
+          </a:prstGeom>
+          <a:noFill/>
+          <a:ln/>
+        </p:spPr>
+        <p:txBody>
+          <a:bodyPr wrap="square" lIns="0" tIns="0" rIns="0" bIns="0" rtlCol="0" anchor="t"/>
+          <a:lstStyle/>
+          <a:p>
+            <a:pPr indent="0" marL="0">
+              <a:lnSpc>
+                <a:spcPct val="100000"/>
+              </a:lnSpc>
+              <a:buNone/>
+            </a:pPr>
+            <a:r>
+              <a:rPr lang="en-US" sz="2000" dirty="0">
+                <a:solidFill>
+                  <a:srgbClr val="1F2430"/>
+                </a:solidFill>
+                <a:latin typeface="Georgia" pitchFamily="34" charset="0"/>
+                <a:ea typeface="Georgia" pitchFamily="34" charset="-122"/>
+                <a:cs typeface="Georgia" pitchFamily="34" charset="-120"/>
+              </a:rPr>
+              <a:t>Si el jugador es predecible, un adversario lo simula y etiqueta lo contrario: lo hace errar siempre.</a:t>
+            </a:r>
+            <a:endParaRPr lang="en-US" sz="2000" dirty="0"/>
+          </a:p>
+        </p:txBody>
+      </p:sp>
+      <p:sp>
+        <p:nvSpPr>
+          <p:cNvPr id="18" name="Text 16"/>
+          <p:cNvSpPr txBox="1"/>
+          <p:nvPr/>
+        </p:nvSpPr>
+        <p:spPr>
+          <a:xfrm>
+            <a:off x="548640" y="5349240"/>
+            <a:ext cx="4572000" cy="548640"/>
+          </a:xfrm>
+          <a:prstGeom prst="rect">
+            <a:avLst/>
+          </a:prstGeom>
+          <a:noFill/>
+          <a:ln/>
+        </p:spPr>
+        <p:txBody>
+          <a:bodyPr wrap="square" lIns="0" tIns="0" rIns="0" bIns="0" rtlCol="0" anchor="t"/>
+          <a:lstStyle/>
+          <a:p>
+            <a:pPr indent="0" marL="0">
+              <a:lnSpc>
+                <a:spcPct val="100000"/>
+              </a:lnSpc>
+              <a:buNone/>
+            </a:pPr>
+            <a:r>
+              <a:rPr lang="en-US" sz="1300" dirty="0">
+                <a:solidFill>
+                  <a:srgbClr val="5A6274"/>
+                </a:solidFill>
+                <a:latin typeface="Arial" pitchFamily="34" charset="0"/>
+                <a:ea typeface="Arial" pitchFamily="34" charset="-122"/>
+                <a:cs typeface="Arial" pitchFamily="34" charset="-120"/>
+              </a:rPr>
+              <a:t>En nuestro stream de spam, que es benigno, el determinístico incluso anda mejor (regret −2,6).</a:t>
+            </a:r>
+            <a:endParaRPr lang="en-US" sz="1300" dirty="0"/>
+          </a:p>
+        </p:txBody>
+      </p:sp>
       <p:pic>
         <p:nvPicPr>
-          <p:cNvPr id="10" name="Image 0" descr="Errores según la fracción de mensajes etiquetados. Con todas las etiquetas SGD comete 73 y Hedge 133; con 1 de cada 20, SGD 210 y Hedge 189, frente a 190 del estático.">    </p:cNvPr>
+          <p:cNvPr id="19" name="Image 0" descr="Regret frente a un adversario que simula al jugador. El voto pesado determinístico llega a 2.000, T sobre 2; Hedge randomizado queda en 14, bajo su cota de 37.">    </p:cNvPr>
           <p:cNvPicPr>
             <a:picLocks noChangeAspect="1"/>
           </p:cNvPicPr>
@@ -5064,8 +5600,8 @@
         </p:blipFill>
         <p:spPr>
           <a:xfrm>
-            <a:off x="411480" y="1783080"/>
-            <a:ext cx="6495445" cy="4434840"/>
+            <a:off x="5440680" y="1737360"/>
+            <a:ext cx="6263640" cy="4276573"/>
           </a:xfrm>
           <a:prstGeom prst="rect">
             <a:avLst/>
@@ -5074,251 +5610,41 @@
       </p:pic>
       <p:sp>
         <p:nvSpPr>
-          <p:cNvPr id="11" name="Text 8"/>
-          <p:cNvSpPr txBox="1"/>
-          <p:nvPr/>
-        </p:nvSpPr>
-        <p:spPr>
-          <a:xfrm>
-            <a:off x="7726680" y="1920240"/>
-            <a:ext cx="3931920" cy="822960"/>
-          </a:xfrm>
-          <a:prstGeom prst="rect">
-            <a:avLst/>
-          </a:prstGeom>
-          <a:noFill/>
-          <a:ln/>
-        </p:spPr>
-        <p:txBody>
-          <a:bodyPr wrap="square" lIns="0" tIns="0" rIns="0" bIns="0" rtlCol="0" anchor="t"/>
-          <a:lstStyle/>
-          <a:p>
-            <a:pPr indent="0" marL="0">
-              <a:lnSpc>
-                <a:spcPct val="100000"/>
-              </a:lnSpc>
-              <a:buNone/>
-            </a:pPr>
-            <a:r>
-              <a:rPr lang="en-US" sz="5400" b="1" dirty="0">
-                <a:solidFill>
-                  <a:srgbClr val="2A78D6"/>
+          <p:cNvPr id="20" name="Text 17"/>
+          <p:cNvSpPr txBox="1"/>
+          <p:nvPr/>
+        </p:nvSpPr>
+        <p:spPr>
+          <a:xfrm>
+            <a:off x="548640" y="6373368"/>
+            <a:ext cx="10241280" cy="274320"/>
+          </a:xfrm>
+          <a:prstGeom prst="rect">
+            <a:avLst/>
+          </a:prstGeom>
+          <a:noFill/>
+          <a:ln/>
+        </p:spPr>
+        <p:txBody>
+          <a:bodyPr wrap="square" lIns="0" tIns="0" rIns="0" bIns="0" rtlCol="0" anchor="t"/>
+          <a:lstStyle/>
+          <a:p>
+            <a:pPr indent="0" marL="0">
+              <a:lnSpc>
+                <a:spcPct val="100000"/>
+              </a:lnSpc>
+              <a:buNone/>
+            </a:pPr>
+            <a:r>
+              <a:rPr lang="en-US" sz="1000" dirty="0">
+                <a:solidFill>
+                  <a:srgbClr val="9AA1AE"/>
                 </a:solidFill>
                 <a:latin typeface="Arial" pitchFamily="34" charset="0"/>
                 <a:ea typeface="Arial" pitchFamily="34" charset="-122"/>
                 <a:cs typeface="Arial" pitchFamily="34" charset="-120"/>
               </a:rPr>
-              <a:t>15 de 20</a:t>
-            </a:r>
-            <a:endParaRPr lang="en-US" sz="5400" dirty="0"/>
-          </a:p>
-        </p:txBody>
-      </p:sp>
-      <p:sp>
-        <p:nvSpPr>
-          <p:cNvPr id="12" name="Text 9"/>
-          <p:cNvSpPr txBox="1"/>
-          <p:nvPr/>
-        </p:nvSpPr>
-        <p:spPr>
-          <a:xfrm>
-            <a:off x="7726680" y="2816352"/>
-            <a:ext cx="3931920" cy="685800"/>
-          </a:xfrm>
-          <a:prstGeom prst="rect">
-            <a:avLst/>
-          </a:prstGeom>
-          <a:noFill/>
-          <a:ln/>
-        </p:spPr>
-        <p:txBody>
-          <a:bodyPr wrap="square" lIns="0" tIns="0" rIns="0" bIns="0" rtlCol="0" anchor="t"/>
-          <a:lstStyle/>
-          <a:p>
-            <a:pPr indent="0" marL="0">
-              <a:lnSpc>
-                <a:spcPct val="100000"/>
-              </a:lnSpc>
-              <a:buNone/>
-            </a:pPr>
-            <a:r>
-              <a:rPr lang="en-US" sz="1500" dirty="0">
-                <a:solidFill>
-                  <a:srgbClr val="1F2430"/>
-                </a:solidFill>
-                <a:latin typeface="Arial" pitchFamily="34" charset="0"/>
-                <a:ea typeface="Arial" pitchFamily="34" charset="-122"/>
-                <a:cs typeface="Arial" pitchFamily="34" charset="-120"/>
-              </a:rPr>
-              <a:t>semillas en las que gana Hedge cuando el usuario reporta 1 de cada 20 mensajes</a:t>
-            </a:r>
-            <a:endParaRPr lang="en-US" sz="1500" dirty="0"/>
-          </a:p>
-        </p:txBody>
-      </p:sp>
-      <p:sp>
-        <p:nvSpPr>
-          <p:cNvPr id="13" name="Text 10"/>
-          <p:cNvSpPr txBox="1"/>
-          <p:nvPr/>
-        </p:nvSpPr>
-        <p:spPr>
-          <a:xfrm>
-            <a:off x="7726680" y="3657600"/>
-            <a:ext cx="3931920" cy="670560"/>
-          </a:xfrm>
-          <a:prstGeom prst="rect">
-            <a:avLst/>
-          </a:prstGeom>
-          <a:noFill/>
-          <a:ln/>
-        </p:spPr>
-        <p:txBody>
-          <a:bodyPr wrap="square" lIns="0" tIns="0" rIns="0" bIns="0" rtlCol="0" anchor="t"/>
-          <a:lstStyle/>
-          <a:p>
-            <a:pPr indent="0" marL="0">
-              <a:lnSpc>
-                <a:spcPct val="100000"/>
-              </a:lnSpc>
-              <a:buNone/>
-            </a:pPr>
-            <a:r>
-              <a:rPr lang="en-US" sz="4400" b="1" dirty="0">
-                <a:solidFill>
-                  <a:srgbClr val="1BAF7A"/>
-                </a:solidFill>
-                <a:latin typeface="Arial" pitchFamily="34" charset="0"/>
-                <a:ea typeface="Arial" pitchFamily="34" charset="-122"/>
-                <a:cs typeface="Arial" pitchFamily="34" charset="-120"/>
-              </a:rPr>
-              <a:t>210 &gt; 190</a:t>
-            </a:r>
-            <a:endParaRPr lang="en-US" sz="4400" dirty="0"/>
-          </a:p>
-        </p:txBody>
-      </p:sp>
-      <p:sp>
-        <p:nvSpPr>
-          <p:cNvPr id="14" name="Text 11"/>
-          <p:cNvSpPr txBox="1"/>
-          <p:nvPr/>
-        </p:nvSpPr>
-        <p:spPr>
-          <a:xfrm>
-            <a:off x="7726680" y="4401312"/>
-            <a:ext cx="3931920" cy="685800"/>
-          </a:xfrm>
-          <a:prstGeom prst="rect">
-            <a:avLst/>
-          </a:prstGeom>
-          <a:noFill/>
-          <a:ln/>
-        </p:spPr>
-        <p:txBody>
-          <a:bodyPr wrap="square" lIns="0" tIns="0" rIns="0" bIns="0" rtlCol="0" anchor="t"/>
-          <a:lstStyle/>
-          <a:p>
-            <a:pPr indent="0" marL="0">
-              <a:lnSpc>
-                <a:spcPct val="100000"/>
-              </a:lnSpc>
-              <a:buNone/>
-            </a:pPr>
-            <a:r>
-              <a:rPr lang="en-US" sz="1500" dirty="0">
-                <a:solidFill>
-                  <a:srgbClr val="1F2430"/>
-                </a:solidFill>
-                <a:latin typeface="Arial" pitchFamily="34" charset="0"/>
-                <a:ea typeface="Arial" pitchFamily="34" charset="-122"/>
-                <a:cs typeface="Arial" pitchFamily="34" charset="-120"/>
-              </a:rPr>
-              <a:t>errores: con tan pocas etiquetas, SGD termina peor que no adaptarse</a:t>
-            </a:r>
-            <a:endParaRPr lang="en-US" sz="1500" dirty="0"/>
-          </a:p>
-        </p:txBody>
-      </p:sp>
-      <p:sp>
-        <p:nvSpPr>
-          <p:cNvPr id="15" name="Text 12"/>
-          <p:cNvSpPr txBox="1"/>
-          <p:nvPr/>
-        </p:nvSpPr>
-        <p:spPr>
-          <a:xfrm>
-            <a:off x="7726680" y="5440680"/>
-            <a:ext cx="3931920" cy="548640"/>
-          </a:xfrm>
-          <a:prstGeom prst="rect">
-            <a:avLst/>
-          </a:prstGeom>
-          <a:noFill/>
-          <a:ln/>
-        </p:spPr>
-        <p:txBody>
-          <a:bodyPr wrap="square" lIns="0" tIns="0" rIns="0" bIns="0" rtlCol="0" anchor="t"/>
-          <a:lstStyle/>
-          <a:p>
-            <a:pPr indent="0" marL="0">
-              <a:lnSpc>
-                <a:spcPct val="100000"/>
-              </a:lnSpc>
-              <a:buNone/>
-            </a:pPr>
-            <a:r>
-              <a:rPr lang="en-US" sz="1300" dirty="0">
-                <a:solidFill>
-                  <a:srgbClr val="5A6274"/>
-                </a:solidFill>
-                <a:latin typeface="Arial" pitchFamily="34" charset="0"/>
-                <a:ea typeface="Arial" pitchFamily="34" charset="-122"/>
-                <a:cs typeface="Arial" pitchFamily="34" charset="-120"/>
-              </a:rPr>
-              <a:t>Con 1 de cada 5 o más, reentrenar gana en al menos 18 de 20 semillas.</a:t>
-            </a:r>
-            <a:endParaRPr lang="en-US" sz="1300" dirty="0"/>
-          </a:p>
-        </p:txBody>
-      </p:sp>
-      <p:sp>
-        <p:nvSpPr>
-          <p:cNvPr id="16" name="Text 13"/>
-          <p:cNvSpPr txBox="1"/>
-          <p:nvPr/>
-        </p:nvSpPr>
-        <p:spPr>
-          <a:xfrm>
-            <a:off x="548640" y="6373368"/>
-            <a:ext cx="10241280" cy="274320"/>
-          </a:xfrm>
-          <a:prstGeom prst="rect">
-            <a:avLst/>
-          </a:prstGeom>
-          <a:noFill/>
-          <a:ln/>
-        </p:spPr>
-        <p:txBody>
-          <a:bodyPr wrap="square" lIns="0" tIns="0" rIns="0" bIns="0" rtlCol="0" anchor="t"/>
-          <a:lstStyle/>
-          <a:p>
-            <a:pPr indent="0" marL="0">
-              <a:lnSpc>
-                <a:spcPct val="100000"/>
-              </a:lnSpc>
-              <a:buNone/>
-            </a:pPr>
-            <a:r>
-              <a:rPr lang="en-US" sz="1000" dirty="0">
-                <a:solidFill>
-                  <a:srgbClr val="9AA1AE"/>
-                </a:solidFill>
-                <a:latin typeface="Arial" pitchFamily="34" charset="0"/>
-                <a:ea typeface="Arial" pitchFamily="34" charset="-122"/>
-                <a:cs typeface="Arial" pitchFamily="34" charset="-120"/>
-              </a:rPr>
-              <a:t>Barrido de ρ, la probabilidad de ver la etiqueta. Hedge usa el estimador ℓ/ρ con η_ρ = √ρ · η_T. Media de 20 permutaciones (semillas) del SMS Spam Collection.</a:t>
+              <a:t>Secuencia sintética de 4.000 rondas con 2 expertos. Slides 71 y 73 de la clase 2.</a:t>
             </a:r>
             <a:endParaRPr lang="en-US" sz="1000" dirty="0"/>
           </a:p>
@@ -5436,7 +5762,7 @@
                 <a:ea typeface="Arial" pitchFamily="34" charset="-122"/>
                 <a:cs typeface="Arial" pitchFamily="34" charset="-120"/>
               </a:rPr>
-              <a:t>HALLAZGO 2</a:t>
+              <a:t>HALLAZGO 3</a:t>
             </a:r>
             <a:endParaRPr lang="en-US" sz="1100" dirty="0"/>
           </a:p>
@@ -5477,7 +5803,7 @@
                 <a:ea typeface="Georgia" pitchFamily="34" charset="-122"/>
                 <a:cs typeface="Georgia" pitchFamily="34" charset="-120"/>
               </a:rPr>
-              <a:t>No es un artefacto de cómo se pondera</a:t>
+              <a:t>Cada cota vale para su tasa de aprendizaje</a:t>
             </a:r>
             <a:endParaRPr lang="en-US" sz="3000" dirty="0"/>
           </a:p>
@@ -5519,7 +5845,7 @@
                 <a:ea typeface="Arial" pitchFamily="34" charset="-122"/>
                 <a:cs typeface="Arial" pitchFamily="34" charset="-120"/>
               </a:rPr>
-              <a:t>Errores en la mitad atacada con 1 de cada 20 mensajes etiquetado.</a:t>
+              <a:t>Regret de Hedge en el stream atacado, con dos formas de elegir η.</a:t>
             </a:r>
             <a:endParaRPr lang="en-US" sz="1500" dirty="0"/>
           </a:p>
@@ -5591,33 +5917,13 @@
       </p:sp>
       <p:sp>
         <p:nvSpPr>
-          <p:cNvPr id="7" name="hallazgo 2 (actual)"/>
+          <p:cNvPr id="7" name="hallazgo 2"/>
           <p:cNvSpPr/>
           <p:nvPr/>
         </p:nvSpPr>
         <p:spPr>
           <a:xfrm>
             <a:off x="11100816" y="457200"/>
-            <a:ext cx="137160" cy="137160"/>
-          </a:xfrm>
-          <a:prstGeom prst="ellipse">
-            <a:avLst/>
-          </a:prstGeom>
-          <a:solidFill>
-            <a:srgbClr val="1F2430"/>
-          </a:solidFill>
-          <a:ln/>
-        </p:spPr>
-      </p:sp>
-      <p:sp>
-        <p:nvSpPr>
-          <p:cNvPr id="8" name="hallazgo 3"/>
-          <p:cNvSpPr/>
-          <p:nvPr/>
-        </p:nvSpPr>
-        <p:spPr>
-          <a:xfrm>
-            <a:off x="11301984" y="457200"/>
             <a:ext cx="137160" cy="137160"/>
           </a:xfrm>
           <a:prstGeom prst="ellipse">
@@ -5633,6 +5939,26 @@
       </p:sp>
       <p:sp>
         <p:nvSpPr>
+          <p:cNvPr id="8" name="hallazgo 3 (actual)"/>
+          <p:cNvSpPr/>
+          <p:nvPr/>
+        </p:nvSpPr>
+        <p:spPr>
+          <a:xfrm>
+            <a:off x="11301984" y="457200"/>
+            <a:ext cx="137160" cy="137160"/>
+          </a:xfrm>
+          <a:prstGeom prst="ellipse">
+            <a:avLst/>
+          </a:prstGeom>
+          <a:solidFill>
+            <a:srgbClr val="1F2430"/>
+          </a:solidFill>
+          <a:ln/>
+        </p:spPr>
+      </p:sp>
+      <p:sp>
+        <p:nvSpPr>
           <p:cNvPr id="9" name="hallazgo 4"/>
           <p:cNvSpPr/>
           <p:nvPr/>
@@ -5655,7 +5981,7 @@
       </p:sp>
       <p:pic>
         <p:nvPicPr>
-          <p:cNvPr id="10" name="Image 0" descr="SGD online sin reponderar comete 210 errores; reponderado por 1 sobre raíz de rho, 240; por 1 sobre rho, 323. Hedge comete 189.">    </p:cNvPr>
+          <p:cNvPr id="10" name="Image 0" descr="Regret de Hedge con eta de peor caso: 31, bajo su cota de 60. Con eta small-loss: 15, bajo su cota de 25.">    </p:cNvPr>
           <p:cNvPicPr>
             <a:picLocks noChangeAspect="1"/>
           </p:cNvPicPr>
@@ -5669,8 +5995,8 @@
         </p:blipFill>
         <p:spPr>
           <a:xfrm>
-            <a:off x="411480" y="1828800"/>
-            <a:ext cx="6949440" cy="3897102"/>
+            <a:off x="411480" y="1783080"/>
+            <a:ext cx="6495445" cy="4434840"/>
           </a:xfrm>
           <a:prstGeom prst="rect">
             <a:avLst/>
@@ -5686,7 +6012,7 @@
         <p:spPr>
           <a:xfrm>
             <a:off x="7726680" y="1920240"/>
-            <a:ext cx="3931920" cy="1097280"/>
+            <a:ext cx="3931920" cy="868680"/>
           </a:xfrm>
           <a:prstGeom prst="rect">
             <a:avLst/>
@@ -5713,7 +6039,7 @@
                 <a:ea typeface="Georgia" pitchFamily="34" charset="-122"/>
                 <a:cs typeface="Georgia" pitchFamily="34" charset="-120"/>
               </a:rPr>
-              <a:t>¿Y si SGD compensa las etiquetas que faltan pesando más cada ejemplo, como hace Hedge?</a:t>
+              <a:t>Las dos cotas se cumplen en las 20 semillas, cada una con su propio η.</a:t>
             </a:r>
             <a:endParaRPr lang="en-US" sz="2000" dirty="0"/>
           </a:p>
@@ -5721,55 +6047,221 @@
       </p:sp>
       <p:sp>
         <p:nvSpPr>
-          <p:cNvPr id="12" name="Text 9"/>
-          <p:cNvSpPr txBox="1"/>
-          <p:nvPr/>
-        </p:nvSpPr>
-        <p:spPr>
-          <a:xfrm>
-            <a:off x="7726680" y="3108960"/>
-            <a:ext cx="3931920" cy="548640"/>
-          </a:xfrm>
-          <a:prstGeom prst="rect">
-            <a:avLst/>
-          </a:prstGeom>
-          <a:noFill/>
-          <a:ln/>
-        </p:spPr>
-        <p:txBody>
-          <a:bodyPr wrap="square" lIns="0" tIns="0" rIns="0" bIns="0" rtlCol="0" anchor="t"/>
-          <a:lstStyle/>
-          <a:p>
-            <a:pPr indent="0" marL="0">
-              <a:lnSpc>
-                <a:spcPct val="100000"/>
-              </a:lnSpc>
-              <a:buNone/>
-            </a:pPr>
-            <a:r>
-              <a:rPr lang="en-US" sz="1500" dirty="0">
-                <a:solidFill>
-                  <a:srgbClr val="5A6274"/>
+          <p:cNvPr id="12" name="punto η de peor caso"/>
+          <p:cNvSpPr/>
+          <p:nvPr/>
+        </p:nvSpPr>
+        <p:spPr>
+          <a:xfrm>
+            <a:off x="7726680" y="3072384"/>
+            <a:ext cx="219456" cy="219456"/>
+          </a:xfrm>
+          <a:prstGeom prst="ellipse">
+            <a:avLst/>
+          </a:prstGeom>
+          <a:solidFill>
+            <a:srgbClr val="2A78D6"/>
+          </a:solidFill>
+          <a:ln/>
+        </p:spPr>
+      </p:sp>
+      <p:sp>
+        <p:nvSpPr>
+          <p:cNvPr id="13" name="Text 10"/>
+          <p:cNvSpPr txBox="1"/>
+          <p:nvPr/>
+        </p:nvSpPr>
+        <p:spPr>
+          <a:xfrm>
+            <a:off x="8110728" y="3017520"/>
+            <a:ext cx="3547872" cy="292608"/>
+          </a:xfrm>
+          <a:prstGeom prst="rect">
+            <a:avLst/>
+          </a:prstGeom>
+          <a:noFill/>
+          <a:ln/>
+        </p:spPr>
+        <p:txBody>
+          <a:bodyPr wrap="square" lIns="0" tIns="0" rIns="0" bIns="0" rtlCol="0" anchor="t"/>
+          <a:lstStyle/>
+          <a:p>
+            <a:pPr indent="0" marL="0">
+              <a:lnSpc>
+                <a:spcPct val="100000"/>
+              </a:lnSpc>
+              <a:buNone/>
+            </a:pPr>
+            <a:r>
+              <a:rPr lang="en-US" sz="1600" b="1" dirty="0">
+                <a:solidFill>
+                  <a:srgbClr val="1F2430"/>
                 </a:solidFill>
                 <a:latin typeface="Arial" pitchFamily="34" charset="0"/>
                 <a:ea typeface="Arial" pitchFamily="34" charset="-122"/>
                 <a:cs typeface="Arial" pitchFamily="34" charset="-120"/>
               </a:rPr>
-              <a:t>Empeora: con pocos ejemplos, pasos más grandes sobreajustan a cada uno.</a:t>
-            </a:r>
-            <a:endParaRPr lang="en-US" sz="1500" dirty="0"/>
-          </a:p>
-        </p:txBody>
-      </p:sp>
-      <p:sp>
-        <p:nvSpPr>
-          <p:cNvPr id="13" name="Shape 10"/>
-          <p:cNvSpPr/>
-          <p:nvPr/>
-        </p:nvSpPr>
-        <p:spPr>
-          <a:xfrm>
-            <a:off x="7726680" y="3931920"/>
+              <a:t>η de peor caso</a:t>
+            </a:r>
+            <a:endParaRPr lang="en-US" sz="1600" dirty="0"/>
+          </a:p>
+        </p:txBody>
+      </p:sp>
+      <p:sp>
+        <p:nvSpPr>
+          <p:cNvPr id="14" name="Text 11"/>
+          <p:cNvSpPr txBox="1"/>
+          <p:nvPr/>
+        </p:nvSpPr>
+        <p:spPr>
+          <a:xfrm>
+            <a:off x="8110728" y="3346704"/>
+            <a:ext cx="3547872" cy="457200"/>
+          </a:xfrm>
+          <a:prstGeom prst="rect">
+            <a:avLst/>
+          </a:prstGeom>
+          <a:noFill/>
+          <a:ln/>
+        </p:spPr>
+        <p:txBody>
+          <a:bodyPr wrap="square" lIns="0" tIns="0" rIns="0" bIns="0" rtlCol="0" anchor="t"/>
+          <a:lstStyle/>
+          <a:p>
+            <a:pPr indent="0" marL="0">
+              <a:lnSpc>
+                <a:spcPct val="100000"/>
+              </a:lnSpc>
+              <a:buNone/>
+            </a:pPr>
+            <a:r>
+              <a:rPr lang="en-US" sz="1300" dirty="0">
+                <a:solidFill>
+                  <a:srgbClr val="5A6274"/>
+                </a:solidFill>
+                <a:latin typeface="Arial" pitchFamily="34" charset="0"/>
+                <a:ea typeface="Arial" pitchFamily="34" charset="-122"/>
+                <a:cs typeface="Arial" pitchFamily="34" charset="-120"/>
+              </a:rPr>
+              <a:t>sintonizado por T: regret 31, cota 60</a:t>
+            </a:r>
+            <a:endParaRPr lang="en-US" sz="1300" dirty="0"/>
+          </a:p>
+        </p:txBody>
+      </p:sp>
+      <p:sp>
+        <p:nvSpPr>
+          <p:cNvPr id="15" name="punto η small-loss"/>
+          <p:cNvSpPr/>
+          <p:nvPr/>
+        </p:nvSpPr>
+        <p:spPr>
+          <a:xfrm>
+            <a:off x="7726680" y="3895344"/>
+            <a:ext cx="219456" cy="219456"/>
+          </a:xfrm>
+          <a:prstGeom prst="ellipse">
+            <a:avLst/>
+          </a:prstGeom>
+          <a:solidFill>
+            <a:srgbClr val="E87BA4"/>
+          </a:solidFill>
+          <a:ln/>
+        </p:spPr>
+      </p:sp>
+      <p:sp>
+        <p:nvSpPr>
+          <p:cNvPr id="16" name="Text 13"/>
+          <p:cNvSpPr txBox="1"/>
+          <p:nvPr/>
+        </p:nvSpPr>
+        <p:spPr>
+          <a:xfrm>
+            <a:off x="8110728" y="3840480"/>
+            <a:ext cx="3547872" cy="292608"/>
+          </a:xfrm>
+          <a:prstGeom prst="rect">
+            <a:avLst/>
+          </a:prstGeom>
+          <a:noFill/>
+          <a:ln/>
+        </p:spPr>
+        <p:txBody>
+          <a:bodyPr wrap="square" lIns="0" tIns="0" rIns="0" bIns="0" rtlCol="0" anchor="t"/>
+          <a:lstStyle/>
+          <a:p>
+            <a:pPr indent="0" marL="0">
+              <a:lnSpc>
+                <a:spcPct val="100000"/>
+              </a:lnSpc>
+              <a:buNone/>
+            </a:pPr>
+            <a:r>
+              <a:rPr lang="en-US" sz="1600" b="1" dirty="0">
+                <a:solidFill>
+                  <a:srgbClr val="1F2430"/>
+                </a:solidFill>
+                <a:latin typeface="Arial" pitchFamily="34" charset="0"/>
+                <a:ea typeface="Arial" pitchFamily="34" charset="-122"/>
+                <a:cs typeface="Arial" pitchFamily="34" charset="-120"/>
+              </a:rPr>
+              <a:t>η small-loss</a:t>
+            </a:r>
+            <a:endParaRPr lang="en-US" sz="1600" dirty="0"/>
+          </a:p>
+        </p:txBody>
+      </p:sp>
+      <p:sp>
+        <p:nvSpPr>
+          <p:cNvPr id="17" name="Text 14"/>
+          <p:cNvSpPr txBox="1"/>
+          <p:nvPr/>
+        </p:nvSpPr>
+        <p:spPr>
+          <a:xfrm>
+            <a:off x="8110728" y="4169664"/>
+            <a:ext cx="3547872" cy="457200"/>
+          </a:xfrm>
+          <a:prstGeom prst="rect">
+            <a:avLst/>
+          </a:prstGeom>
+          <a:noFill/>
+          <a:ln/>
+        </p:spPr>
+        <p:txBody>
+          <a:bodyPr wrap="square" lIns="0" tIns="0" rIns="0" bIns="0" rtlCol="0" anchor="t"/>
+          <a:lstStyle/>
+          <a:p>
+            <a:pPr indent="0" marL="0">
+              <a:lnSpc>
+                <a:spcPct val="100000"/>
+              </a:lnSpc>
+              <a:buNone/>
+            </a:pPr>
+            <a:r>
+              <a:rPr lang="en-US" sz="1300" dirty="0">
+                <a:solidFill>
+                  <a:srgbClr val="5A6274"/>
+                </a:solidFill>
+                <a:latin typeface="Arial" pitchFamily="34" charset="0"/>
+                <a:ea typeface="Arial" pitchFamily="34" charset="-122"/>
+                <a:cs typeface="Arial" pitchFamily="34" charset="-120"/>
+              </a:rPr>
+              <a:t>sintonizado por la pérdida del mejor: regret 15, cota 25</a:t>
+            </a:r>
+            <a:endParaRPr lang="en-US" sz="1300" dirty="0"/>
+          </a:p>
+        </p:txBody>
+      </p:sp>
+      <p:sp>
+        <p:nvSpPr>
+          <p:cNvPr id="18" name="Shape 15"/>
+          <p:cNvSpPr/>
+          <p:nvPr/>
+        </p:nvSpPr>
+        <p:spPr>
+          <a:xfrm>
+            <a:off x="7726680" y="4709160"/>
             <a:ext cx="3913632" cy="0"/>
           </a:xfrm>
           <a:prstGeom prst="line">
@@ -5786,75 +6278,33 @@
       </p:sp>
       <p:sp>
         <p:nvSpPr>
-          <p:cNvPr id="14" name="Text 11"/>
-          <p:cNvSpPr txBox="1"/>
-          <p:nvPr/>
-        </p:nvSpPr>
-        <p:spPr>
-          <a:xfrm>
-            <a:off x="7726680" y="4114800"/>
-            <a:ext cx="3931920" cy="1051560"/>
-          </a:xfrm>
-          <a:prstGeom prst="rect">
-            <a:avLst/>
-          </a:prstGeom>
-          <a:noFill/>
-          <a:ln/>
-        </p:spPr>
-        <p:txBody>
-          <a:bodyPr wrap="square" lIns="0" tIns="0" rIns="0" bIns="0" rtlCol="0" anchor="t"/>
-          <a:lstStyle/>
-          <a:p>
-            <a:pPr indent="0" marL="0">
-              <a:lnSpc>
-                <a:spcPct val="100000"/>
-              </a:lnSpc>
-              <a:buNone/>
-            </a:pPr>
-            <a:r>
-              <a:rPr lang="en-US" sz="2200" dirty="0">
-                <a:solidFill>
-                  <a:srgbClr val="2A78D6"/>
-                </a:solidFill>
-                <a:latin typeface="Georgia" pitchFamily="34" charset="0"/>
-                <a:ea typeface="Georgia" pitchFamily="34" charset="-122"/>
-                <a:cs typeface="Georgia" pitchFamily="34" charset="-120"/>
-              </a:rPr>
-              <a:t>Hedge aprende 5 pesos. Reentrenar, uno por cada palabra nueva.</a:t>
-            </a:r>
-            <a:endParaRPr lang="en-US" sz="2200" dirty="0"/>
-          </a:p>
-        </p:txBody>
-      </p:sp>
-      <p:sp>
-        <p:nvSpPr>
-          <p:cNvPr id="15" name="Text 12"/>
-          <p:cNvSpPr txBox="1"/>
-          <p:nvPr/>
-        </p:nvSpPr>
-        <p:spPr>
-          <a:xfrm>
-            <a:off x="7726680" y="5303520"/>
-            <a:ext cx="3931920" cy="548640"/>
-          </a:xfrm>
-          <a:prstGeom prst="rect">
-            <a:avLst/>
-          </a:prstGeom>
-          <a:noFill/>
-          <a:ln/>
-        </p:spPr>
-        <p:txBody>
-          <a:bodyPr wrap="square" lIns="0" tIns="0" rIns="0" bIns="0" rtlCol="0" anchor="t"/>
-          <a:lstStyle/>
-          <a:p>
-            <a:pPr indent="0" marL="0">
-              <a:lnSpc>
-                <a:spcPct val="100000"/>
-              </a:lnSpc>
-              <a:buNone/>
-            </a:pPr>
-            <a:r>
-              <a:rPr lang="en-US" sz="1300" dirty="0">
+          <p:cNvPr id="19" name="Text 16"/>
+          <p:cNvSpPr txBox="1"/>
+          <p:nvPr/>
+        </p:nvSpPr>
+        <p:spPr>
+          <a:xfrm>
+            <a:off x="7726680" y="4846320"/>
+            <a:ext cx="3931920" cy="914400"/>
+          </a:xfrm>
+          <a:prstGeom prst="rect">
+            <a:avLst/>
+          </a:prstGeom>
+          <a:noFill/>
+          <a:ln/>
+        </p:spPr>
+        <p:txBody>
+          <a:bodyPr wrap="square" lIns="0" tIns="0" rIns="0" bIns="0" rtlCol="0" anchor="t"/>
+          <a:lstStyle/>
+          <a:p>
+            <a:pPr indent="0" marL="0">
+              <a:lnSpc>
+                <a:spcPct val="100000"/>
+              </a:lnSpc>
+              <a:buNone/>
+            </a:pPr>
+            <a:r>
+              <a:rPr lang="en-US" sz="1400" dirty="0">
                 <a:solidFill>
                   <a:srgbClr val="5A6274"/>
                 </a:solidFill>
@@ -5862,15 +6312,15 @@
                 <a:ea typeface="Arial" pitchFamily="34" charset="-122"/>
                 <a:cs typeface="Arial" pitchFamily="34" charset="-120"/>
               </a:rPr>
-              <a:t>Lo que sí paga Hedge es varianza: con ρ = 0,05 cada observación pesa ≈ 4,5 veces más.</a:t>
-            </a:r>
-            <a:endParaRPr lang="en-US" sz="1300" dirty="0"/>
-          </a:p>
-        </p:txBody>
-      </p:sp>
-      <p:sp>
-        <p:nvSpPr>
-          <p:cNvPr id="16" name="Text 13"/>
+              <a:t>La small-loss es mejor algoritmo, pero necesita saber de antemano cuántos errores comete el mejor experto: información de oráculo.</a:t>
+            </a:r>
+            <a:endParaRPr lang="en-US" sz="1400" dirty="0"/>
+          </a:p>
+        </p:txBody>
+      </p:sp>
+      <p:sp>
+        <p:nvSpPr>
+          <p:cNvPr id="20" name="Text 17"/>
           <p:cNvSpPr txBox="1"/>
           <p:nvPr/>
         </p:nvSpPr>
@@ -5904,7 +6354,7 @@
                 <a:ea typeface="Arial" pitchFamily="34" charset="-122"/>
                 <a:cs typeface="Arial" pitchFamily="34" charset="-120"/>
               </a:rPr>
-              <a:t>Media de 20 permutaciones (semillas) del SMS Spam Collection. Ataque desde la mitad del stream.</a:t>
+              <a:t>La √(2T ln K) de la clase vale 120: correcta, pero el doble de lo necesario. Media de 20 permutaciones (semillas) del SMS Spam Collection.</a:t>
             </a:r>
             <a:endParaRPr lang="en-US" sz="1000" dirty="0"/>
           </a:p>
@@ -6022,7 +6472,7 @@
                 <a:ea typeface="Arial" pitchFamily="34" charset="-122"/>
                 <a:cs typeface="Arial" pitchFamily="34" charset="-120"/>
               </a:rPr>
-              <a:t>HALLAZGO 3 · LA TEORÍA, CON PRECISIÓN</a:t>
+              <a:t>HALLAZGO 4 · LECCIONES DE MÉTODO</a:t>
             </a:r>
             <a:endParaRPr lang="en-US" sz="1100" dirty="0"/>
           </a:p>
@@ -6063,7 +6513,7 @@
                 <a:ea typeface="Georgia" pitchFamily="34" charset="-122"/>
                 <a:cs typeface="Georgia" pitchFamily="34" charset="-120"/>
               </a:rPr>
-              <a:t>La cota de la teoría no es la del voto pesado</a:t>
+              <a:t>Tres cosas que sirven fuera de este trabajo</a:t>
             </a:r>
             <a:endParaRPr lang="en-US" sz="3000" dirty="0"/>
           </a:p>
@@ -6157,33 +6607,13 @@
       </p:sp>
       <p:sp>
         <p:nvSpPr>
-          <p:cNvPr id="7" name="hallazgo 3 (actual)"/>
+          <p:cNvPr id="7" name="hallazgo 3"/>
           <p:cNvSpPr/>
           <p:nvPr/>
         </p:nvSpPr>
         <p:spPr>
           <a:xfrm>
             <a:off x="11301984" y="457200"/>
-            <a:ext cx="137160" cy="137160"/>
-          </a:xfrm>
-          <a:prstGeom prst="ellipse">
-            <a:avLst/>
-          </a:prstGeom>
-          <a:solidFill>
-            <a:srgbClr val="1F2430"/>
-          </a:solidFill>
-          <a:ln/>
-        </p:spPr>
-      </p:sp>
-      <p:sp>
-        <p:nvSpPr>
-          <p:cNvPr id="8" name="hallazgo 4"/>
-          <p:cNvSpPr/>
-          <p:nvPr/>
-        </p:nvSpPr>
-        <p:spPr>
-          <a:xfrm>
-            <a:off x="11503152" y="457200"/>
             <a:ext cx="137160" cy="137160"/>
           </a:xfrm>
           <a:prstGeom prst="ellipse">
@@ -6199,6 +6629,26 @@
       </p:sp>
       <p:sp>
         <p:nvSpPr>
+          <p:cNvPr id="8" name="hallazgo 4 (actual)"/>
+          <p:cNvSpPr/>
+          <p:nvPr/>
+        </p:nvSpPr>
+        <p:spPr>
+          <a:xfrm>
+            <a:off x="11503152" y="457200"/>
+            <a:ext cx="137160" cy="137160"/>
+          </a:xfrm>
+          <a:prstGeom prst="ellipse">
+            <a:avLst/>
+          </a:prstGeom>
+          <a:solidFill>
+            <a:srgbClr val="1F2430"/>
+          </a:solidFill>
+          <a:ln/>
+        </p:spPr>
+      </p:sp>
+      <p:sp>
+        <p:nvSpPr>
           <p:cNvPr id="9" name="Text 7"/>
           <p:cNvSpPr txBox="1"/>
           <p:nvPr/>
@@ -6206,88 +6656,68 @@
         <p:spPr>
           <a:xfrm>
             <a:off x="548640" y="1783080"/>
-            <a:ext cx="4572000" cy="274320"/>
-          </a:xfrm>
-          <a:prstGeom prst="rect">
-            <a:avLst/>
-          </a:prstGeom>
-          <a:noFill/>
-          <a:ln/>
-        </p:spPr>
-        <p:txBody>
-          <a:bodyPr wrap="square" lIns="0" tIns="0" rIns="0" bIns="0" rtlCol="0" anchor="t"/>
-          <a:lstStyle/>
-          <a:p>
-            <a:pPr indent="0" marL="0">
-              <a:lnSpc>
-                <a:spcPct val="100000"/>
-              </a:lnSpc>
-              <a:buNone/>
-            </a:pPr>
-            <a:r>
-              <a:rPr lang="en-US" sz="1500" dirty="0">
-                <a:solidFill>
-                  <a:srgbClr val="5A6274"/>
+            <a:ext cx="3474720" cy="914400"/>
+          </a:xfrm>
+          <a:prstGeom prst="rect">
+            <a:avLst/>
+          </a:prstGeom>
+          <a:noFill/>
+          <a:ln/>
+        </p:spPr>
+        <p:txBody>
+          <a:bodyPr wrap="square" lIns="0" tIns="0" rIns="0" bIns="0" rtlCol="0" anchor="t"/>
+          <a:lstStyle/>
+          <a:p>
+            <a:pPr indent="0" marL="0">
+              <a:lnSpc>
+                <a:spcPct val="100000"/>
+              </a:lnSpc>
+              <a:buNone/>
+            </a:pPr>
+            <a:r>
+              <a:rPr lang="en-US" sz="5400" b="1" dirty="0">
+                <a:solidFill>
+                  <a:srgbClr val="1F2430"/>
                 </a:solidFill>
                 <a:latin typeface="Arial" pitchFamily="34" charset="0"/>
                 <a:ea typeface="Arial" pitchFamily="34" charset="-122"/>
                 <a:cs typeface="Arial" pitchFamily="34" charset="-120"/>
               </a:rPr>
-              <a:t>En clase se presentan juntos:</a:t>
-            </a:r>
-            <a:endParaRPr lang="en-US" sz="1500" dirty="0"/>
-          </a:p>
-        </p:txBody>
-      </p:sp>
-      <p:sp>
-        <p:nvSpPr>
-          <p:cNvPr id="10" name="punto Voto pesado determinístico"/>
-          <p:cNvSpPr/>
-          <p:nvPr/>
-        </p:nvSpPr>
-        <p:spPr>
-          <a:xfrm>
-            <a:off x="548640" y="2295144"/>
-            <a:ext cx="219456" cy="219456"/>
-          </a:xfrm>
-          <a:prstGeom prst="ellipse">
-            <a:avLst/>
-          </a:prstGeom>
-          <a:solidFill>
-            <a:srgbClr val="E34948"/>
-          </a:solidFill>
-          <a:ln/>
-        </p:spPr>
-      </p:sp>
-      <p:sp>
-        <p:nvSpPr>
-          <p:cNvPr id="11" name="Text 9"/>
-          <p:cNvSpPr txBox="1"/>
-          <p:nvPr/>
-        </p:nvSpPr>
-        <p:spPr>
-          <a:xfrm>
-            <a:off x="932688" y="2240280"/>
-            <a:ext cx="4187952" cy="292608"/>
-          </a:xfrm>
-          <a:prstGeom prst="rect">
-            <a:avLst/>
-          </a:prstGeom>
-          <a:noFill/>
-          <a:ln/>
-        </p:spPr>
-        <p:txBody>
-          <a:bodyPr wrap="square" lIns="0" tIns="0" rIns="0" bIns="0" rtlCol="0" anchor="t"/>
-          <a:lstStyle/>
-          <a:p>
-            <a:pPr indent="0" marL="0">
-              <a:lnSpc>
-                <a:spcPct val="100000"/>
-              </a:lnSpc>
-              <a:buNone/>
-            </a:pPr>
-            <a:r>
-              <a:rPr lang="en-US" sz="1600" b="1" dirty="0">
+              <a:t>87%</a:t>
+            </a:r>
+            <a:endParaRPr lang="en-US" sz="5400" dirty="0"/>
+          </a:p>
+        </p:txBody>
+      </p:sp>
+      <p:sp>
+        <p:nvSpPr>
+          <p:cNvPr id="10" name="Text 8"/>
+          <p:cNvSpPr txBox="1"/>
+          <p:nvPr/>
+        </p:nvSpPr>
+        <p:spPr>
+          <a:xfrm>
+            <a:off x="548640" y="2880360"/>
+            <a:ext cx="3429000" cy="868680"/>
+          </a:xfrm>
+          <a:prstGeom prst="rect">
+            <a:avLst/>
+          </a:prstGeom>
+          <a:noFill/>
+          <a:ln/>
+        </p:spPr>
+        <p:txBody>
+          <a:bodyPr wrap="square" lIns="0" tIns="0" rIns="0" bIns="0" rtlCol="0" anchor="t"/>
+          <a:lstStyle/>
+          <a:p>
+            <a:pPr indent="0" marL="0">
+              <a:lnSpc>
+                <a:spcPct val="100000"/>
+              </a:lnSpc>
+              <a:buNone/>
+            </a:pPr>
+            <a:r>
+              <a:rPr lang="en-US" sz="1900" b="1" dirty="0">
                 <a:solidFill>
                   <a:srgbClr val="1F2430"/>
                 </a:solidFill>
@@ -6295,41 +6725,41 @@
                 <a:ea typeface="Arial" pitchFamily="34" charset="-122"/>
                 <a:cs typeface="Arial" pitchFamily="34" charset="-120"/>
               </a:rPr>
-              <a:t>Voto pesado determinístico</a:t>
-            </a:r>
-            <a:endParaRPr lang="en-US" sz="1600" dirty="0"/>
-          </a:p>
-        </p:txBody>
-      </p:sp>
-      <p:sp>
-        <p:nvSpPr>
-          <p:cNvPr id="12" name="Text 10"/>
-          <p:cNvSpPr txBox="1"/>
-          <p:nvPr/>
-        </p:nvSpPr>
-        <p:spPr>
-          <a:xfrm>
-            <a:off x="932688" y="2569464"/>
-            <a:ext cx="4187952" cy="457200"/>
-          </a:xfrm>
-          <a:prstGeom prst="rect">
-            <a:avLst/>
-          </a:prstGeom>
-          <a:noFill/>
-          <a:ln/>
-        </p:spPr>
-        <p:txBody>
-          <a:bodyPr wrap="square" lIns="0" tIns="0" rIns="0" bIns="0" rtlCol="0" anchor="t"/>
-          <a:lstStyle/>
-          <a:p>
-            <a:pPr indent="0" marL="0">
-              <a:lnSpc>
-                <a:spcPct val="100000"/>
-              </a:lnSpc>
-              <a:buNone/>
-            </a:pPr>
-            <a:r>
-              <a:rPr lang="en-US" sz="1300" dirty="0">
+              <a:t>La accuracy engaña</a:t>
+            </a:r>
+            <a:endParaRPr lang="en-US" sz="1900" dirty="0"/>
+          </a:p>
+        </p:txBody>
+      </p:sp>
+      <p:sp>
+        <p:nvSpPr>
+          <p:cNvPr id="11" name="Text 9"/>
+          <p:cNvSpPr txBox="1"/>
+          <p:nvPr/>
+        </p:nvSpPr>
+        <p:spPr>
+          <a:xfrm>
+            <a:off x="548640" y="3840480"/>
+            <a:ext cx="3429000" cy="1828800"/>
+          </a:xfrm>
+          <a:prstGeom prst="rect">
+            <a:avLst/>
+          </a:prstGeom>
+          <a:noFill/>
+          <a:ln/>
+        </p:spPr>
+        <p:txBody>
+          <a:bodyPr wrap="square" lIns="0" tIns="0" rIns="0" bIns="0" rtlCol="0" anchor="t"/>
+          <a:lstStyle/>
+          <a:p>
+            <a:pPr indent="0" marL="0">
+              <a:lnSpc>
+                <a:spcPct val="100000"/>
+              </a:lnSpc>
+              <a:buNone/>
+            </a:pPr>
+            <a:r>
+              <a:rPr lang="en-US" sz="1500" dirty="0">
                 <a:solidFill>
                   <a:srgbClr val="5A6274"/>
                 </a:solidFill>
@@ -6337,126 +6767,22 @@
                 <a:ea typeface="Arial" pitchFamily="34" charset="-122"/>
                 <a:cs typeface="Arial" pitchFamily="34" charset="-120"/>
               </a:rPr>
-              <a:t>predice lo que dice la mayoría ponderada</a:t>
-            </a:r>
-            <a:endParaRPr lang="en-US" sz="1300" dirty="0"/>
-          </a:p>
-        </p:txBody>
-      </p:sp>
-      <p:sp>
-        <p:nvSpPr>
-          <p:cNvPr id="13" name="punto Hedge randomizado"/>
-          <p:cNvSpPr/>
-          <p:nvPr/>
-        </p:nvSpPr>
-        <p:spPr>
-          <a:xfrm>
-            <a:off x="548640" y="3118104"/>
-            <a:ext cx="219456" cy="219456"/>
-          </a:xfrm>
-          <a:prstGeom prst="ellipse">
-            <a:avLst/>
-          </a:prstGeom>
-          <a:solidFill>
-            <a:srgbClr val="2A78D6"/>
-          </a:solidFill>
-          <a:ln/>
-        </p:spPr>
-      </p:sp>
-      <p:sp>
-        <p:nvSpPr>
-          <p:cNvPr id="14" name="Text 12"/>
-          <p:cNvSpPr txBox="1"/>
-          <p:nvPr/>
-        </p:nvSpPr>
-        <p:spPr>
-          <a:xfrm>
-            <a:off x="932688" y="3063240"/>
-            <a:ext cx="4187952" cy="292608"/>
-          </a:xfrm>
-          <a:prstGeom prst="rect">
-            <a:avLst/>
-          </a:prstGeom>
-          <a:noFill/>
-          <a:ln/>
-        </p:spPr>
-        <p:txBody>
-          <a:bodyPr wrap="square" lIns="0" tIns="0" rIns="0" bIns="0" rtlCol="0" anchor="t"/>
-          <a:lstStyle/>
-          <a:p>
-            <a:pPr indent="0" marL="0">
-              <a:lnSpc>
-                <a:spcPct val="100000"/>
-              </a:lnSpc>
-              <a:buNone/>
-            </a:pPr>
-            <a:r>
-              <a:rPr lang="en-US" sz="1600" b="1" dirty="0">
-                <a:solidFill>
-                  <a:srgbClr val="1F2430"/>
-                </a:solidFill>
-                <a:latin typeface="Arial" pitchFamily="34" charset="0"/>
-                <a:ea typeface="Arial" pitchFamily="34" charset="-122"/>
-                <a:cs typeface="Arial" pitchFamily="34" charset="-120"/>
-              </a:rPr>
-              <a:t>Hedge randomizado</a:t>
-            </a:r>
-            <a:endParaRPr lang="en-US" sz="1600" dirty="0"/>
-          </a:p>
-        </p:txBody>
-      </p:sp>
-      <p:sp>
-        <p:nvSpPr>
-          <p:cNvPr id="15" name="Text 13"/>
-          <p:cNvSpPr txBox="1"/>
-          <p:nvPr/>
-        </p:nvSpPr>
-        <p:spPr>
-          <a:xfrm>
-            <a:off x="932688" y="3392424"/>
-            <a:ext cx="4187952" cy="457200"/>
-          </a:xfrm>
-          <a:prstGeom prst="rect">
-            <a:avLst/>
-          </a:prstGeom>
-          <a:noFill/>
-          <a:ln/>
-        </p:spPr>
-        <p:txBody>
-          <a:bodyPr wrap="square" lIns="0" tIns="0" rIns="0" bIns="0" rtlCol="0" anchor="t"/>
-          <a:lstStyle/>
-          <a:p>
-            <a:pPr indent="0" marL="0">
-              <a:lnSpc>
-                <a:spcPct val="100000"/>
-              </a:lnSpc>
-              <a:buNone/>
-            </a:pPr>
-            <a:r>
-              <a:rPr lang="en-US" sz="1300" dirty="0">
-                <a:solidFill>
-                  <a:srgbClr val="5A6274"/>
-                </a:solidFill>
-                <a:latin typeface="Arial" pitchFamily="34" charset="0"/>
-                <a:ea typeface="Arial" pitchFamily="34" charset="-122"/>
-                <a:cs typeface="Arial" pitchFamily="34" charset="-120"/>
-              </a:rPr>
-              <a:t>sortea un experto según los pesos: para este vale la cota</a:t>
-            </a:r>
-            <a:endParaRPr lang="en-US" sz="1300" dirty="0"/>
-          </a:p>
-        </p:txBody>
-      </p:sp>
-      <p:sp>
-        <p:nvSpPr>
-          <p:cNvPr id="16" name="Shape 14"/>
-          <p:cNvSpPr/>
-          <p:nvPr/>
-        </p:nvSpPr>
-        <p:spPr>
-          <a:xfrm>
-            <a:off x="548640" y="3977640"/>
-            <a:ext cx="4572000" cy="0"/>
+              <a:t>Con 13% de spam, no marcar nada acierta el 87%. Medimos spam atrapado, legítimo bloqueado y MCC.</a:t>
+            </a:r>
+            <a:endParaRPr lang="en-US" sz="1500" dirty="0"/>
+          </a:p>
+        </p:txBody>
+      </p:sp>
+      <p:sp>
+        <p:nvSpPr>
+          <p:cNvPr id="12" name="Shape 10"/>
+          <p:cNvSpPr/>
+          <p:nvPr/>
+        </p:nvSpPr>
+        <p:spPr>
+          <a:xfrm>
+            <a:off x="4142232" y="1828800"/>
+            <a:ext cx="0" cy="4023360"/>
           </a:xfrm>
           <a:prstGeom prst="line">
             <a:avLst/>
@@ -6472,149 +6798,316 @@
       </p:sp>
       <p:sp>
         <p:nvSpPr>
-          <p:cNvPr id="17" name="Text 15"/>
-          <p:cNvSpPr txBox="1"/>
-          <p:nvPr/>
-        </p:nvSpPr>
-        <p:spPr>
-          <a:xfrm>
-            <a:off x="548640" y="4160520"/>
-            <a:ext cx="4572000" cy="1005840"/>
-          </a:xfrm>
-          <a:prstGeom prst="rect">
-            <a:avLst/>
-          </a:prstGeom>
-          <a:noFill/>
-          <a:ln/>
-        </p:spPr>
-        <p:txBody>
-          <a:bodyPr wrap="square" lIns="0" tIns="0" rIns="0" bIns="0" rtlCol="0" anchor="t"/>
-          <a:lstStyle/>
-          <a:p>
-            <a:pPr indent="0" marL="0">
-              <a:lnSpc>
-                <a:spcPct val="100000"/>
-              </a:lnSpc>
-              <a:buNone/>
-            </a:pPr>
-            <a:r>
-              <a:rPr lang="en-US" sz="2000" dirty="0">
-                <a:solidFill>
-                  <a:srgbClr val="1F2430"/>
-                </a:solidFill>
-                <a:latin typeface="Georgia" pitchFamily="34" charset="0"/>
-                <a:ea typeface="Georgia" pitchFamily="34" charset="-122"/>
-                <a:cs typeface="Georgia" pitchFamily="34" charset="-120"/>
-              </a:rPr>
-              <a:t>Si el jugador es predecible, un adversario lo simula y etiqueta lo contrario: lo hace errar siempre.</a:t>
-            </a:r>
-            <a:endParaRPr lang="en-US" sz="2000" dirty="0"/>
-          </a:p>
-        </p:txBody>
-      </p:sp>
-      <p:sp>
-        <p:nvSpPr>
-          <p:cNvPr id="18" name="Text 16"/>
-          <p:cNvSpPr txBox="1"/>
-          <p:nvPr/>
-        </p:nvSpPr>
-        <p:spPr>
-          <a:xfrm>
-            <a:off x="548640" y="5349240"/>
-            <a:ext cx="4572000" cy="548640"/>
-          </a:xfrm>
-          <a:prstGeom prst="rect">
-            <a:avLst/>
-          </a:prstGeom>
-          <a:noFill/>
-          <a:ln/>
-        </p:spPr>
-        <p:txBody>
-          <a:bodyPr wrap="square" lIns="0" tIns="0" rIns="0" bIns="0" rtlCol="0" anchor="t"/>
-          <a:lstStyle/>
-          <a:p>
-            <a:pPr indent="0" marL="0">
-              <a:lnSpc>
-                <a:spcPct val="100000"/>
-              </a:lnSpc>
-              <a:buNone/>
-            </a:pPr>
-            <a:r>
-              <a:rPr lang="en-US" sz="1300" dirty="0">
-                <a:solidFill>
-                  <a:srgbClr val="5A6274"/>
+          <p:cNvPr id="13" name="Text 11"/>
+          <p:cNvSpPr txBox="1"/>
+          <p:nvPr/>
+        </p:nvSpPr>
+        <p:spPr>
+          <a:xfrm>
+            <a:off x="4370832" y="1783080"/>
+            <a:ext cx="3474720" cy="914400"/>
+          </a:xfrm>
+          <a:prstGeom prst="rect">
+            <a:avLst/>
+          </a:prstGeom>
+          <a:noFill/>
+          <a:ln/>
+        </p:spPr>
+        <p:txBody>
+          <a:bodyPr wrap="square" lIns="0" tIns="0" rIns="0" bIns="0" rtlCol="0" anchor="t"/>
+          <a:lstStyle/>
+          <a:p>
+            <a:pPr indent="0" marL="0">
+              <a:lnSpc>
+                <a:spcPct val="100000"/>
+              </a:lnSpc>
+              <a:buNone/>
+            </a:pPr>
+            <a:r>
+              <a:rPr lang="en-US" sz="5400" b="1" dirty="0">
+                <a:solidFill>
+                  <a:srgbClr val="1BAF7A"/>
                 </a:solidFill>
                 <a:latin typeface="Arial" pitchFamily="34" charset="0"/>
                 <a:ea typeface="Arial" pitchFamily="34" charset="-122"/>
                 <a:cs typeface="Arial" pitchFamily="34" charset="-120"/>
               </a:rPr>
-              <a:t>En nuestro stream de spam, que es benigno, el determinístico incluso anda mejor (regret −2,6).</a:t>
-            </a:r>
-            <a:endParaRPr lang="en-US" sz="1300" dirty="0"/>
-          </a:p>
-        </p:txBody>
-      </p:sp>
-      <p:pic>
-        <p:nvPicPr>
-          <p:cNvPr id="19" name="Image 0" descr="Regret frente a un adversario que simula al jugador. El voto pesado determinístico llega a 2.000, T sobre 2; Hedge randomizado queda en 14, bajo su cota de 37.">    </p:cNvPr>
-          <p:cNvPicPr>
-            <a:picLocks noChangeAspect="1"/>
-          </p:cNvPicPr>
-          <p:nvPr/>
-        </p:nvPicPr>
-        <p:blipFill>
-          <a:blip r:embed="rId1"/>
-          <a:stretch>
-            <a:fillRect/>
-          </a:stretch>
-        </p:blipFill>
-        <p:spPr>
-          <a:xfrm>
-            <a:off x="5440680" y="1737360"/>
-            <a:ext cx="6263640" cy="4276573"/>
-          </a:xfrm>
-          <a:prstGeom prst="rect">
-            <a:avLst/>
-          </a:prstGeom>
-        </p:spPr>
-      </p:pic>
-      <p:sp>
-        <p:nvSpPr>
-          <p:cNvPr id="20" name="Text 17"/>
-          <p:cNvSpPr txBox="1"/>
-          <p:nvPr/>
-        </p:nvSpPr>
-        <p:spPr>
-          <a:xfrm>
-            <a:off x="548640" y="6373368"/>
-            <a:ext cx="10241280" cy="274320"/>
-          </a:xfrm>
-          <a:prstGeom prst="rect">
-            <a:avLst/>
-          </a:prstGeom>
-          <a:noFill/>
-          <a:ln/>
-        </p:spPr>
-        <p:txBody>
-          <a:bodyPr wrap="square" lIns="0" tIns="0" rIns="0" bIns="0" rtlCol="0" anchor="t"/>
-          <a:lstStyle/>
-          <a:p>
-            <a:pPr indent="0" marL="0">
-              <a:lnSpc>
-                <a:spcPct val="100000"/>
-              </a:lnSpc>
-              <a:buNone/>
-            </a:pPr>
-            <a:r>
-              <a:rPr lang="en-US" sz="1000" dirty="0">
-                <a:solidFill>
-                  <a:srgbClr val="9AA1AE"/>
+              <a:t>8 de 20</a:t>
+            </a:r>
+            <a:endParaRPr lang="en-US" sz="5400" dirty="0"/>
+          </a:p>
+        </p:txBody>
+      </p:sp>
+      <p:sp>
+        <p:nvSpPr>
+          <p:cNvPr id="14" name="Text 12"/>
+          <p:cNvSpPr txBox="1"/>
+          <p:nvPr/>
+        </p:nvSpPr>
+        <p:spPr>
+          <a:xfrm>
+            <a:off x="4370832" y="2880360"/>
+            <a:ext cx="3429000" cy="868680"/>
+          </a:xfrm>
+          <a:prstGeom prst="rect">
+            <a:avLst/>
+          </a:prstGeom>
+          <a:noFill/>
+          <a:ln/>
+        </p:spPr>
+        <p:txBody>
+          <a:bodyPr wrap="square" lIns="0" tIns="0" rIns="0" bIns="0" rtlCol="0" anchor="t"/>
+          <a:lstStyle/>
+          <a:p>
+            <a:pPr indent="0" marL="0">
+              <a:lnSpc>
+                <a:spcPct val="100000"/>
+              </a:lnSpc>
+              <a:buNone/>
+            </a:pPr>
+            <a:r>
+              <a:rPr lang="en-US" sz="1900" b="1" dirty="0">
+                <a:solidFill>
+                  <a:srgbClr val="1F2430"/>
                 </a:solidFill>
                 <a:latin typeface="Arial" pitchFamily="34" charset="0"/>
                 <a:ea typeface="Arial" pitchFamily="34" charset="-122"/>
                 <a:cs typeface="Arial" pitchFamily="34" charset="-120"/>
               </a:rPr>
-              <a:t>Secuencia sintética de 4.000 rondas con 2 expertos. Slides 71 y 73 de la clase 2.</a:t>
+              <a:t>La validación cruzada no mide adaptación</a:t>
+            </a:r>
+            <a:endParaRPr lang="en-US" sz="1900" dirty="0"/>
+          </a:p>
+        </p:txBody>
+      </p:sp>
+      <p:sp>
+        <p:nvSpPr>
+          <p:cNvPr id="15" name="Text 13"/>
+          <p:cNvSpPr txBox="1"/>
+          <p:nvPr/>
+        </p:nvSpPr>
+        <p:spPr>
+          <a:xfrm>
+            <a:off x="4370832" y="3840480"/>
+            <a:ext cx="3429000" cy="1828800"/>
+          </a:xfrm>
+          <a:prstGeom prst="rect">
+            <a:avLst/>
+          </a:prstGeom>
+          <a:noFill/>
+          <a:ln/>
+        </p:spPr>
+        <p:txBody>
+          <a:bodyPr wrap="square" lIns="0" tIns="0" rIns="0" bIns="0" rtlCol="0" anchor="t"/>
+          <a:lstStyle/>
+          <a:p>
+            <a:pPr indent="0" marL="0">
+              <a:lnSpc>
+                <a:spcPct val="100000"/>
+              </a:lnSpc>
+              <a:buNone/>
+            </a:pPr>
+            <a:r>
+              <a:rPr lang="en-US" sz="1500" dirty="0">
+                <a:solidFill>
+                  <a:srgbClr val="5A6274"/>
+                </a:solidFill>
+                <a:latin typeface="Arial" pitchFamily="34" charset="0"/>
+                <a:ea typeface="Arial" pitchFamily="34" charset="-122"/>
+                <a:cs typeface="Arial" pitchFamily="34" charset="-120"/>
+              </a:rPr>
+              <a:t>Sin ataque en el warm-up, eligió mal la regularización de SGD en 8 de 20 semillas: 125 a 153 errores, contra 65 a 83.</a:t>
+            </a:r>
+            <a:endParaRPr lang="en-US" sz="1500" dirty="0"/>
+          </a:p>
+        </p:txBody>
+      </p:sp>
+      <p:sp>
+        <p:nvSpPr>
+          <p:cNvPr id="16" name="Shape 14"/>
+          <p:cNvSpPr/>
+          <p:nvPr/>
+        </p:nvSpPr>
+        <p:spPr>
+          <a:xfrm>
+            <a:off x="7964424" y="1828800"/>
+            <a:ext cx="0" cy="4023360"/>
+          </a:xfrm>
+          <a:prstGeom prst="line">
+            <a:avLst/>
+          </a:prstGeom>
+          <a:noFill/>
+          <a:ln w="9525">
+            <a:solidFill>
+              <a:srgbClr val="D9D6CE"/>
+            </a:solidFill>
+            <a:prstDash val="solid"/>
+          </a:ln>
+        </p:spPr>
+      </p:sp>
+      <p:sp>
+        <p:nvSpPr>
+          <p:cNvPr id="17" name="Text 15"/>
+          <p:cNvSpPr txBox="1"/>
+          <p:nvPr/>
+        </p:nvSpPr>
+        <p:spPr>
+          <a:xfrm>
+            <a:off x="8193024" y="1783080"/>
+            <a:ext cx="3474720" cy="914400"/>
+          </a:xfrm>
+          <a:prstGeom prst="rect">
+            <a:avLst/>
+          </a:prstGeom>
+          <a:noFill/>
+          <a:ln/>
+        </p:spPr>
+        <p:txBody>
+          <a:bodyPr wrap="square" lIns="0" tIns="0" rIns="0" bIns="0" rtlCol="0" anchor="t"/>
+          <a:lstStyle/>
+          <a:p>
+            <a:pPr indent="0" marL="0">
+              <a:lnSpc>
+                <a:spcPct val="100000"/>
+              </a:lnSpc>
+              <a:buNone/>
+            </a:pPr>
+            <a:r>
+              <a:rPr lang="en-US" sz="5400" b="1" dirty="0">
+                <a:solidFill>
+                  <a:srgbClr val="EB6834"/>
+                </a:solidFill>
+                <a:latin typeface="Arial" pitchFamily="34" charset="0"/>
+                <a:ea typeface="Arial" pitchFamily="34" charset="-122"/>
+                <a:cs typeface="Arial" pitchFamily="34" charset="-120"/>
+              </a:rPr>
+              <a:t>0,995</a:t>
+            </a:r>
+            <a:endParaRPr lang="en-US" sz="5400" dirty="0"/>
+          </a:p>
+        </p:txBody>
+      </p:sp>
+      <p:sp>
+        <p:nvSpPr>
+          <p:cNvPr id="18" name="Text 16"/>
+          <p:cNvSpPr txBox="1"/>
+          <p:nvPr/>
+        </p:nvSpPr>
+        <p:spPr>
+          <a:xfrm>
+            <a:off x="8193024" y="2880360"/>
+            <a:ext cx="3429000" cy="868680"/>
+          </a:xfrm>
+          <a:prstGeom prst="rect">
+            <a:avLst/>
+          </a:prstGeom>
+          <a:noFill/>
+          <a:ln/>
+        </p:spPr>
+        <p:txBody>
+          <a:bodyPr wrap="square" lIns="0" tIns="0" rIns="0" bIns="0" rtlCol="0" anchor="t"/>
+          <a:lstStyle/>
+          <a:p>
+            <a:pPr indent="0" marL="0">
+              <a:lnSpc>
+                <a:spcPct val="100000"/>
+              </a:lnSpc>
+              <a:buNone/>
+            </a:pPr>
+            <a:r>
+              <a:rPr lang="en-US" sz="1900" b="1" dirty="0">
+                <a:solidFill>
+                  <a:srgbClr val="1F2430"/>
+                </a:solidFill>
+                <a:latin typeface="Arial" pitchFamily="34" charset="0"/>
+                <a:ea typeface="Arial" pitchFamily="34" charset="-122"/>
+                <a:cs typeface="Arial" pitchFamily="34" charset="-120"/>
+              </a:rPr>
+              <a:t>Combinar necesita un experto que sobreviva</a:t>
+            </a:r>
+            <a:endParaRPr lang="en-US" sz="1900" dirty="0"/>
+          </a:p>
+        </p:txBody>
+      </p:sp>
+      <p:sp>
+        <p:nvSpPr>
+          <p:cNvPr id="19" name="Text 17"/>
+          <p:cNvSpPr txBox="1"/>
+          <p:nvPr/>
+        </p:nvSpPr>
+        <p:spPr>
+          <a:xfrm>
+            <a:off x="8193024" y="3840480"/>
+            <a:ext cx="3429000" cy="1828800"/>
+          </a:xfrm>
+          <a:prstGeom prst="rect">
+            <a:avLst/>
+          </a:prstGeom>
+          <a:noFill/>
+          <a:ln/>
+        </p:spPr>
+        <p:txBody>
+          <a:bodyPr wrap="square" lIns="0" tIns="0" rIns="0" bIns="0" rtlCol="0" anchor="t"/>
+          <a:lstStyle/>
+          <a:p>
+            <a:pPr indent="0" marL="0">
+              <a:lnSpc>
+                <a:spcPct val="100000"/>
+              </a:lnSpc>
+              <a:buNone/>
+            </a:pPr>
+            <a:r>
+              <a:rPr lang="en-US" sz="1500" dirty="0">
+                <a:solidFill>
+                  <a:srgbClr val="5A6274"/>
+                </a:solidFill>
+                <a:latin typeface="Arial" pitchFamily="34" charset="0"/>
+                <a:ea typeface="Arial" pitchFamily="34" charset="-122"/>
+                <a:cs typeface="Arial" pitchFamily="34" charset="-120"/>
+              </a:rPr>
+              <a:t>Si ningún experto resiste el ataque, Hedge deja 0,995 del peso en el modelo dañado y no recupera nada.</a:t>
+            </a:r>
+            <a:endParaRPr lang="en-US" sz="1500" dirty="0"/>
+          </a:p>
+        </p:txBody>
+      </p:sp>
+      <p:sp>
+        <p:nvSpPr>
+          <p:cNvPr id="20" name="Text 18"/>
+          <p:cNvSpPr txBox="1"/>
+          <p:nvPr/>
+        </p:nvSpPr>
+        <p:spPr>
+          <a:xfrm>
+            <a:off x="548640" y="6373368"/>
+            <a:ext cx="10241280" cy="274320"/>
+          </a:xfrm>
+          <a:prstGeom prst="rect">
+            <a:avLst/>
+          </a:prstGeom>
+          <a:noFill/>
+          <a:ln/>
+        </p:spPr>
+        <p:txBody>
+          <a:bodyPr wrap="square" lIns="0" tIns="0" rIns="0" bIns="0" rtlCol="0" anchor="t"/>
+          <a:lstStyle/>
+          <a:p>
+            <a:pPr indent="0" marL="0">
+              <a:lnSpc>
+                <a:spcPct val="100000"/>
+              </a:lnSpc>
+              <a:buNone/>
+            </a:pPr>
+            <a:r>
+              <a:rPr lang="en-US" sz="1000" dirty="0">
+                <a:solidFill>
+                  <a:srgbClr val="9AA1AE"/>
+                </a:solidFill>
+                <a:latin typeface="Arial" pitchFamily="34" charset="0"/>
+                <a:ea typeface="Arial" pitchFamily="34" charset="-122"/>
+                <a:cs typeface="Arial" pitchFamily="34" charset="-120"/>
+              </a:rPr>
+              <a:t>El 0,995 es de la primera versión del experto estructural, con 5 rasgos, en la semilla de desarrollo.</a:t>
             </a:r>
             <a:endParaRPr lang="en-US" sz="1000" dirty="0"/>
           </a:p>
@@ -6726,13 +7219,13 @@
             <a:r>
               <a:rPr lang="en-US" sz="1100" b="1" spc="200" kern="0" dirty="0">
                 <a:solidFill>
-                  <a:srgbClr val="5A6274"/>
+                  <a:srgbClr val="9AA1AE"/>
                 </a:solidFill>
                 <a:latin typeface="Arial" pitchFamily="34" charset="0"/>
                 <a:ea typeface="Arial" pitchFamily="34" charset="-122"/>
                 <a:cs typeface="Arial" pitchFamily="34" charset="-120"/>
               </a:rPr>
-              <a:t>HALLAZGO 3</a:t>
+              <a:t>EN RESUMEN</a:t>
             </a:r>
             <a:endParaRPr lang="en-US" sz="1100" dirty="0"/>
           </a:p>
@@ -6740,146 +7233,318 @@
       </p:sp>
       <p:sp>
         <p:nvSpPr>
-          <p:cNvPr id="3" name="Text 0"/>
-          <p:cNvSpPr/>
-          <p:nvPr>
-            <p:ph idx="100" type="title" hasCustomPrompt="1"/>
-          </p:nvPr>
+          <p:cNvPr id="3" name="Text 1"/>
+          <p:cNvSpPr txBox="1"/>
+          <p:nvPr/>
         </p:nvSpPr>
         <p:spPr>
           <a:xfrm>
             <a:off x="548640" y="731520"/>
-            <a:ext cx="10424160" cy="566928"/>
-          </a:xfrm>
-          <a:prstGeom prst="rect">
-            <a:avLst/>
-          </a:prstGeom>
-          <a:noFill/>
-          <a:ln/>
-        </p:spPr>
-        <p:txBody>
-          <a:bodyPr wrap="square" lIns="0" tIns="0" rIns="0" bIns="0" rtlCol="0" anchor="t"/>
-          <a:lstStyle/>
-          <a:p>
-            <a:pPr indent="0" marL="0">
-              <a:buNone/>
-            </a:pPr>
-            <a:r>
-              <a:rPr lang="en-US" sz="3000" dirty="0">
-                <a:solidFill>
-                  <a:srgbClr val="1F2430"/>
+            <a:ext cx="10972800" cy="640080"/>
+          </a:xfrm>
+          <a:prstGeom prst="rect">
+            <a:avLst/>
+          </a:prstGeom>
+          <a:noFill/>
+          <a:ln/>
+        </p:spPr>
+        <p:txBody>
+          <a:bodyPr wrap="square" lIns="0" tIns="0" rIns="0" bIns="0" rtlCol="0" anchor="t"/>
+          <a:lstStyle/>
+          <a:p>
+            <a:pPr indent="0" marL="0">
+              <a:lnSpc>
+                <a:spcPct val="100000"/>
+              </a:lnSpc>
+              <a:buNone/>
+            </a:pPr>
+            <a:r>
+              <a:rPr lang="en-US" sz="3400" dirty="0">
+                <a:solidFill>
+                  <a:srgbClr val="FFFFFF"/>
                 </a:solidFill>
                 <a:latin typeface="Georgia" pitchFamily="34" charset="0"/>
                 <a:ea typeface="Georgia" pitchFamily="34" charset="-122"/>
                 <a:cs typeface="Georgia" pitchFamily="34" charset="-120"/>
               </a:rPr>
-              <a:t>Cada cota vale para su tasa de aprendizaje</a:t>
-            </a:r>
-            <a:endParaRPr lang="en-US" sz="3000" dirty="0"/>
-          </a:p>
-        </p:txBody>
-      </p:sp>
-      <p:sp>
-        <p:nvSpPr>
-          <p:cNvPr id="4" name="Text 2"/>
-          <p:cNvSpPr txBox="1"/>
-          <p:nvPr/>
-        </p:nvSpPr>
-        <p:spPr>
-          <a:xfrm>
-            <a:off x="548640" y="1307592"/>
-            <a:ext cx="10424160" cy="320040"/>
-          </a:xfrm>
-          <a:prstGeom prst="rect">
-            <a:avLst/>
-          </a:prstGeom>
-          <a:noFill/>
-          <a:ln/>
-        </p:spPr>
-        <p:txBody>
-          <a:bodyPr wrap="square" lIns="0" tIns="0" rIns="0" bIns="0" rtlCol="0" anchor="t"/>
-          <a:lstStyle/>
-          <a:p>
-            <a:pPr indent="0" marL="0">
-              <a:lnSpc>
-                <a:spcPct val="100000"/>
-              </a:lnSpc>
-              <a:buNone/>
-            </a:pPr>
-            <a:r>
-              <a:rPr lang="en-US" sz="1500" dirty="0">
-                <a:solidFill>
-                  <a:srgbClr val="5A6274"/>
+              <a:t>Cuándo combinar y cuándo reentrenar</a:t>
+            </a:r>
+            <a:endParaRPr lang="en-US" sz="3400" dirty="0"/>
+          </a:p>
+        </p:txBody>
+      </p:sp>
+      <p:sp>
+        <p:nvSpPr>
+          <p:cNvPr id="4" name="Shape 2"/>
+          <p:cNvSpPr/>
+          <p:nvPr/>
+        </p:nvSpPr>
+        <p:spPr>
+          <a:xfrm>
+            <a:off x="548640" y="1645920"/>
+            <a:ext cx="11091672" cy="0"/>
+          </a:xfrm>
+          <a:prstGeom prst="line">
+            <a:avLst/>
+          </a:prstGeom>
+          <a:noFill/>
+          <a:ln w="9525">
+            <a:solidFill>
+              <a:srgbClr val="3A4152"/>
+            </a:solidFill>
+            <a:prstDash val="solid"/>
+          </a:ln>
+        </p:spPr>
+      </p:sp>
+      <p:sp>
+        <p:nvSpPr>
+          <p:cNvPr id="5" name="fila 1"/>
+          <p:cNvSpPr/>
+          <p:nvPr/>
+        </p:nvSpPr>
+        <p:spPr>
+          <a:xfrm>
+            <a:off x="548640" y="1901952"/>
+            <a:ext cx="274320" cy="274320"/>
+          </a:xfrm>
+          <a:prstGeom prst="ellipse">
+            <a:avLst/>
+          </a:prstGeom>
+          <a:solidFill>
+            <a:srgbClr val="1BAF7A"/>
+          </a:solidFill>
+          <a:ln/>
+        </p:spPr>
+      </p:sp>
+      <p:sp>
+        <p:nvSpPr>
+          <p:cNvPr id="6" name="Text 4"/>
+          <p:cNvSpPr txBox="1"/>
+          <p:nvPr/>
+        </p:nvSpPr>
+        <p:spPr>
+          <a:xfrm>
+            <a:off x="1051560" y="1828800"/>
+            <a:ext cx="3840480" cy="457200"/>
+          </a:xfrm>
+          <a:prstGeom prst="rect">
+            <a:avLst/>
+          </a:prstGeom>
+          <a:noFill/>
+          <a:ln/>
+        </p:spPr>
+        <p:txBody>
+          <a:bodyPr wrap="square" lIns="0" tIns="0" rIns="0" bIns="0" rtlCol="0" anchor="t"/>
+          <a:lstStyle/>
+          <a:p>
+            <a:pPr indent="0" marL="0">
+              <a:lnSpc>
+                <a:spcPct val="100000"/>
+              </a:lnSpc>
+              <a:buNone/>
+            </a:pPr>
+            <a:r>
+              <a:rPr lang="en-US" sz="2400" dirty="0">
+                <a:solidFill>
+                  <a:srgbClr val="FFFFFF"/>
+                </a:solidFill>
+                <a:latin typeface="Georgia" pitchFamily="34" charset="0"/>
+                <a:ea typeface="Georgia" pitchFamily="34" charset="-122"/>
+                <a:cs typeface="Georgia" pitchFamily="34" charset="-120"/>
+              </a:rPr>
+              <a:t>Etiquetas abundantes</a:t>
+            </a:r>
+            <a:endParaRPr lang="en-US" sz="2400" dirty="0"/>
+          </a:p>
+        </p:txBody>
+      </p:sp>
+      <p:sp>
+        <p:nvSpPr>
+          <p:cNvPr id="7" name="Text 5"/>
+          <p:cNvSpPr txBox="1"/>
+          <p:nvPr/>
+        </p:nvSpPr>
+        <p:spPr>
+          <a:xfrm>
+            <a:off x="5029200" y="1874520"/>
+            <a:ext cx="6583680" cy="731520"/>
+          </a:xfrm>
+          <a:prstGeom prst="rect">
+            <a:avLst/>
+          </a:prstGeom>
+          <a:noFill/>
+          <a:ln/>
+        </p:spPr>
+        <p:txBody>
+          <a:bodyPr wrap="square" lIns="0" tIns="0" rIns="0" bIns="0" rtlCol="0" anchor="t"/>
+          <a:lstStyle/>
+          <a:p>
+            <a:pPr indent="0" marL="0">
+              <a:lnSpc>
+                <a:spcPct val="100000"/>
+              </a:lnSpc>
+              <a:buNone/>
+            </a:pPr>
+            <a:r>
+              <a:rPr lang="en-US" sz="1800" dirty="0">
+                <a:solidFill>
+                  <a:srgbClr val="C8CEDA"/>
                 </a:solidFill>
                 <a:latin typeface="Arial" pitchFamily="34" charset="0"/>
                 <a:ea typeface="Arial" pitchFamily="34" charset="-122"/>
                 <a:cs typeface="Arial" pitchFamily="34" charset="-120"/>
               </a:rPr>
-              <a:t>Regret de Hedge en el stream atacado, con dos formas de elegir η.</a:t>
-            </a:r>
-            <a:endParaRPr lang="en-US" sz="1500" dirty="0"/>
-          </a:p>
-        </p:txBody>
-      </p:sp>
-      <p:sp>
-        <p:nvSpPr>
-          <p:cNvPr id="5" name="Text 3"/>
-          <p:cNvSpPr txBox="1"/>
-          <p:nvPr/>
-        </p:nvSpPr>
-        <p:spPr>
-          <a:xfrm>
-            <a:off x="9235440" y="429768"/>
-            <a:ext cx="1554480" cy="201168"/>
-          </a:xfrm>
-          <a:prstGeom prst="rect">
-            <a:avLst/>
-          </a:prstGeom>
-          <a:noFill/>
-          <a:ln/>
-        </p:spPr>
-        <p:txBody>
-          <a:bodyPr wrap="square" lIns="0" tIns="0" rIns="0" bIns="0" rtlCol="0" anchor="t"/>
-          <a:lstStyle/>
-          <a:p>
-            <a:pPr algn="r" indent="0" marL="0">
-              <a:lnSpc>
-                <a:spcPct val="100000"/>
-              </a:lnSpc>
-              <a:buNone/>
-            </a:pPr>
-            <a:r>
-              <a:rPr lang="en-US" sz="900" b="1" spc="200" kern="0" dirty="0">
-                <a:solidFill>
-                  <a:srgbClr val="9AA1AE"/>
+              <a:t>Reentrenar: SGD online comete 73 errores, contra 133 de Hedge.</a:t>
+            </a:r>
+            <a:endParaRPr lang="en-US" sz="1800" dirty="0"/>
+          </a:p>
+        </p:txBody>
+      </p:sp>
+      <p:sp>
+        <p:nvSpPr>
+          <p:cNvPr id="8" name="Shape 6"/>
+          <p:cNvSpPr/>
+          <p:nvPr/>
+        </p:nvSpPr>
+        <p:spPr>
+          <a:xfrm>
+            <a:off x="548640" y="2697480"/>
+            <a:ext cx="11091672" cy="0"/>
+          </a:xfrm>
+          <a:prstGeom prst="line">
+            <a:avLst/>
+          </a:prstGeom>
+          <a:noFill/>
+          <a:ln w="9525">
+            <a:solidFill>
+              <a:srgbClr val="3A4152"/>
+            </a:solidFill>
+            <a:prstDash val="solid"/>
+          </a:ln>
+        </p:spPr>
+      </p:sp>
+      <p:sp>
+        <p:nvSpPr>
+          <p:cNvPr id="9" name="fila 2"/>
+          <p:cNvSpPr/>
+          <p:nvPr/>
+        </p:nvSpPr>
+        <p:spPr>
+          <a:xfrm>
+            <a:off x="548640" y="2953512"/>
+            <a:ext cx="274320" cy="274320"/>
+          </a:xfrm>
+          <a:prstGeom prst="ellipse">
+            <a:avLst/>
+          </a:prstGeom>
+          <a:solidFill>
+            <a:srgbClr val="2A78D6"/>
+          </a:solidFill>
+          <a:ln/>
+        </p:spPr>
+      </p:sp>
+      <p:sp>
+        <p:nvSpPr>
+          <p:cNvPr id="10" name="Text 8"/>
+          <p:cNvSpPr txBox="1"/>
+          <p:nvPr/>
+        </p:nvSpPr>
+        <p:spPr>
+          <a:xfrm>
+            <a:off x="1051560" y="2880360"/>
+            <a:ext cx="3840480" cy="457200"/>
+          </a:xfrm>
+          <a:prstGeom prst="rect">
+            <a:avLst/>
+          </a:prstGeom>
+          <a:noFill/>
+          <a:ln/>
+        </p:spPr>
+        <p:txBody>
+          <a:bodyPr wrap="square" lIns="0" tIns="0" rIns="0" bIns="0" rtlCol="0" anchor="t"/>
+          <a:lstStyle/>
+          <a:p>
+            <a:pPr indent="0" marL="0">
+              <a:lnSpc>
+                <a:spcPct val="100000"/>
+              </a:lnSpc>
+              <a:buNone/>
+            </a:pPr>
+            <a:r>
+              <a:rPr lang="en-US" sz="2400" dirty="0">
+                <a:solidFill>
+                  <a:srgbClr val="FFFFFF"/>
+                </a:solidFill>
+                <a:latin typeface="Georgia" pitchFamily="34" charset="0"/>
+                <a:ea typeface="Georgia" pitchFamily="34" charset="-122"/>
+                <a:cs typeface="Georgia" pitchFamily="34" charset="-120"/>
+              </a:rPr>
+              <a:t>Etiquetas escasas</a:t>
+            </a:r>
+            <a:endParaRPr lang="en-US" sz="2400" dirty="0"/>
+          </a:p>
+        </p:txBody>
+      </p:sp>
+      <p:sp>
+        <p:nvSpPr>
+          <p:cNvPr id="11" name="Text 9"/>
+          <p:cNvSpPr txBox="1"/>
+          <p:nvPr/>
+        </p:nvSpPr>
+        <p:spPr>
+          <a:xfrm>
+            <a:off x="5029200" y="2926080"/>
+            <a:ext cx="6583680" cy="731520"/>
+          </a:xfrm>
+          <a:prstGeom prst="rect">
+            <a:avLst/>
+          </a:prstGeom>
+          <a:noFill/>
+          <a:ln/>
+        </p:spPr>
+        <p:txBody>
+          <a:bodyPr wrap="square" lIns="0" tIns="0" rIns="0" bIns="0" rtlCol="0" anchor="t"/>
+          <a:lstStyle/>
+          <a:p>
+            <a:pPr indent="0" marL="0">
+              <a:lnSpc>
+                <a:spcPct val="100000"/>
+              </a:lnSpc>
+              <a:buNone/>
+            </a:pPr>
+            <a:r>
+              <a:rPr lang="en-US" sz="1800" dirty="0">
+                <a:solidFill>
+                  <a:srgbClr val="C8CEDA"/>
                 </a:solidFill>
                 <a:latin typeface="Arial" pitchFamily="34" charset="0"/>
                 <a:ea typeface="Arial" pitchFamily="34" charset="-122"/>
                 <a:cs typeface="Arial" pitchFamily="34" charset="-120"/>
               </a:rPr>
-              <a:t>HALLAZGOS</a:t>
-            </a:r>
-            <a:endParaRPr lang="en-US" sz="900" dirty="0"/>
-          </a:p>
-        </p:txBody>
-      </p:sp>
-      <p:sp>
-        <p:nvSpPr>
-          <p:cNvPr id="6" name="hallazgo 1"/>
-          <p:cNvSpPr/>
-          <p:nvPr/>
-        </p:nvSpPr>
-        <p:spPr>
-          <a:xfrm>
-            <a:off x="10899648" y="457200"/>
-            <a:ext cx="137160" cy="137160"/>
-          </a:xfrm>
-          <a:prstGeom prst="ellipse">
-            <a:avLst/>
-          </a:prstGeom>
-          <a:ln w="15875">
+              <a:t>Combinar expertos diversos, con al menos uno robusto al ataque.</a:t>
+            </a:r>
+            <a:endParaRPr lang="en-US" sz="1800" dirty="0"/>
+          </a:p>
+        </p:txBody>
+      </p:sp>
+      <p:sp>
+        <p:nvSpPr>
+          <p:cNvPr id="12" name="Shape 10"/>
+          <p:cNvSpPr/>
+          <p:nvPr/>
+        </p:nvSpPr>
+        <p:spPr>
+          <a:xfrm>
+            <a:off x="548640" y="3749040"/>
+            <a:ext cx="11091672" cy="0"/>
+          </a:xfrm>
+          <a:prstGeom prst="line">
+            <a:avLst/>
+          </a:prstGeom>
+          <a:noFill/>
+          <a:ln w="9525">
             <a:solidFill>
-              <a:srgbClr val="9AA1AE"/>
+              <a:srgbClr val="3A4152"/>
             </a:solidFill>
             <a:prstDash val="solid"/>
           </a:ln>
@@ -6887,21 +7552,126 @@
       </p:sp>
       <p:sp>
         <p:nvSpPr>
-          <p:cNvPr id="7" name="hallazgo 2"/>
-          <p:cNvSpPr/>
-          <p:nvPr/>
-        </p:nvSpPr>
-        <p:spPr>
-          <a:xfrm>
-            <a:off x="11100816" y="457200"/>
-            <a:ext cx="137160" cy="137160"/>
+          <p:cNvPr id="13" name="fila 3"/>
+          <p:cNvSpPr/>
+          <p:nvPr/>
+        </p:nvSpPr>
+        <p:spPr>
+          <a:xfrm>
+            <a:off x="548640" y="4005072"/>
+            <a:ext cx="274320" cy="274320"/>
           </a:xfrm>
           <a:prstGeom prst="ellipse">
             <a:avLst/>
           </a:prstGeom>
-          <a:ln w="15875">
+          <a:solidFill>
+            <a:srgbClr val="C8CEDA"/>
+          </a:solidFill>
+          <a:ln/>
+        </p:spPr>
+      </p:sp>
+      <p:sp>
+        <p:nvSpPr>
+          <p:cNvPr id="14" name="Text 12"/>
+          <p:cNvSpPr txBox="1"/>
+          <p:nvPr/>
+        </p:nvSpPr>
+        <p:spPr>
+          <a:xfrm>
+            <a:off x="1051560" y="3931920"/>
+            <a:ext cx="3840480" cy="457200"/>
+          </a:xfrm>
+          <a:prstGeom prst="rect">
+            <a:avLst/>
+          </a:prstGeom>
+          <a:noFill/>
+          <a:ln/>
+        </p:spPr>
+        <p:txBody>
+          <a:bodyPr wrap="square" lIns="0" tIns="0" rIns="0" bIns="0" rtlCol="0" anchor="t"/>
+          <a:lstStyle/>
+          <a:p>
+            <a:pPr indent="0" marL="0">
+              <a:lnSpc>
+                <a:spcPct val="100000"/>
+              </a:lnSpc>
+              <a:buNone/>
+            </a:pPr>
+            <a:r>
+              <a:rPr lang="en-US" sz="2400" dirty="0">
+                <a:solidFill>
+                  <a:srgbClr val="FFFFFF"/>
+                </a:solidFill>
+                <a:latin typeface="Georgia" pitchFamily="34" charset="0"/>
+                <a:ea typeface="Georgia" pitchFamily="34" charset="-122"/>
+                <a:cs typeface="Georgia" pitchFamily="34" charset="-120"/>
+              </a:rPr>
+              <a:t>Siempre</a:t>
+            </a:r>
+            <a:endParaRPr lang="en-US" sz="2400" dirty="0"/>
+          </a:p>
+        </p:txBody>
+      </p:sp>
+      <p:sp>
+        <p:nvSpPr>
+          <p:cNvPr id="15" name="Text 13"/>
+          <p:cNvSpPr txBox="1"/>
+          <p:nvPr/>
+        </p:nvSpPr>
+        <p:spPr>
+          <a:xfrm>
+            <a:off x="5029200" y="3977640"/>
+            <a:ext cx="6583680" cy="731520"/>
+          </a:xfrm>
+          <a:prstGeom prst="rect">
+            <a:avLst/>
+          </a:prstGeom>
+          <a:noFill/>
+          <a:ln/>
+        </p:spPr>
+        <p:txBody>
+          <a:bodyPr wrap="square" lIns="0" tIns="0" rIns="0" bIns="0" rtlCol="0" anchor="t"/>
+          <a:lstStyle/>
+          <a:p>
+            <a:pPr indent="0" marL="0">
+              <a:lnSpc>
+                <a:spcPct val="100000"/>
+              </a:lnSpc>
+              <a:buNone/>
+            </a:pPr>
+            <a:r>
+              <a:rPr lang="en-US" sz="1800" dirty="0">
+                <a:solidFill>
+                  <a:srgbClr val="C8CEDA"/>
+                </a:solidFill>
+                <a:latin typeface="Arial" pitchFamily="34" charset="0"/>
+                <a:ea typeface="Arial" pitchFamily="34" charset="-122"/>
+                <a:cs typeface="Arial" pitchFamily="34" charset="-120"/>
+              </a:rPr>
+              <a:t>Medir spam atrapado y legítimo bloqueado por separado, no accuracy.</a:t>
+            </a:r>
+            <a:endParaRPr lang="en-US" sz="1800" dirty="0"/>
+          </a:p>
+        </p:txBody>
+      </p:sp>
+      <p:sp>
+        <p:nvSpPr>
+          <p:cNvPr id="16" name="Shape 14"/>
+          <p:cNvSpPr/>
+          <p:nvPr/>
+        </p:nvSpPr>
+        <p:spPr>
+          <a:xfrm>
+            <a:off x="548640" y="4800600"/>
+            <a:ext cx="11091672" cy="0"/>
+          </a:xfrm>
+          <a:prstGeom prst="line">
+            <a:avLst/>
+          </a:prstGeom>
+          <a:noFill/>
+          <a:ln w="9525">
             <a:solidFill>
-              <a:srgbClr val="9AA1AE"/>
+              <a:srgbClr val="3A4152"/>
             </a:solidFill>
             <a:prstDash val="solid"/>
           </a:ln>
@@ -6909,472 +7679,43 @@
       </p:sp>
       <p:sp>
         <p:nvSpPr>
-          <p:cNvPr id="8" name="hallazgo 3 (actual)"/>
-          <p:cNvSpPr/>
-          <p:nvPr/>
-        </p:nvSpPr>
-        <p:spPr>
-          <a:xfrm>
-            <a:off x="11301984" y="457200"/>
-            <a:ext cx="137160" cy="137160"/>
-          </a:xfrm>
-          <a:prstGeom prst="ellipse">
-            <a:avLst/>
-          </a:prstGeom>
-          <a:solidFill>
-            <a:srgbClr val="1F2430"/>
-          </a:solidFill>
-          <a:ln/>
-        </p:spPr>
-      </p:sp>
-      <p:sp>
-        <p:nvSpPr>
-          <p:cNvPr id="9" name="hallazgo 4"/>
-          <p:cNvSpPr/>
-          <p:nvPr/>
-        </p:nvSpPr>
-        <p:spPr>
-          <a:xfrm>
-            <a:off x="11503152" y="457200"/>
-            <a:ext cx="137160" cy="137160"/>
-          </a:xfrm>
-          <a:prstGeom prst="ellipse">
-            <a:avLst/>
-          </a:prstGeom>
-          <a:ln w="15875">
-            <a:solidFill>
-              <a:srgbClr val="9AA1AE"/>
-            </a:solidFill>
-            <a:prstDash val="solid"/>
-          </a:ln>
-        </p:spPr>
-      </p:sp>
-      <p:pic>
-        <p:nvPicPr>
-          <p:cNvPr id="10" name="Image 0" descr="Regret de Hedge con eta de peor caso: 31, bajo su cota de 60. Con eta small-loss: 15, bajo su cota de 25.">    </p:cNvPr>
-          <p:cNvPicPr>
-            <a:picLocks noChangeAspect="1"/>
-          </p:cNvPicPr>
-          <p:nvPr/>
-        </p:nvPicPr>
-        <p:blipFill>
-          <a:blip r:embed="rId1"/>
-          <a:stretch>
-            <a:fillRect/>
-          </a:stretch>
-        </p:blipFill>
-        <p:spPr>
-          <a:xfrm>
-            <a:off x="411480" y="1783080"/>
-            <a:ext cx="6495445" cy="4434840"/>
-          </a:xfrm>
-          <a:prstGeom prst="rect">
-            <a:avLst/>
-          </a:prstGeom>
-        </p:spPr>
-      </p:pic>
-      <p:sp>
-        <p:nvSpPr>
-          <p:cNvPr id="11" name="Text 8"/>
-          <p:cNvSpPr txBox="1"/>
-          <p:nvPr/>
-        </p:nvSpPr>
-        <p:spPr>
-          <a:xfrm>
-            <a:off x="7726680" y="1920240"/>
-            <a:ext cx="3931920" cy="868680"/>
-          </a:xfrm>
-          <a:prstGeom prst="rect">
-            <a:avLst/>
-          </a:prstGeom>
-          <a:noFill/>
-          <a:ln/>
-        </p:spPr>
-        <p:txBody>
-          <a:bodyPr wrap="square" lIns="0" tIns="0" rIns="0" bIns="0" rtlCol="0" anchor="t"/>
-          <a:lstStyle/>
-          <a:p>
-            <a:pPr indent="0" marL="0">
-              <a:lnSpc>
-                <a:spcPct val="100000"/>
-              </a:lnSpc>
-              <a:buNone/>
-            </a:pPr>
-            <a:r>
-              <a:rPr lang="en-US" sz="2000" dirty="0">
-                <a:solidFill>
-                  <a:srgbClr val="1F2430"/>
+          <p:cNvPr id="17" name="Text 15"/>
+          <p:cNvSpPr txBox="1"/>
+          <p:nvPr/>
+        </p:nvSpPr>
+        <p:spPr>
+          <a:xfrm>
+            <a:off x="548640" y="5257800"/>
+            <a:ext cx="11064240" cy="640080"/>
+          </a:xfrm>
+          <a:prstGeom prst="rect">
+            <a:avLst/>
+          </a:prstGeom>
+          <a:noFill/>
+          <a:ln/>
+        </p:spPr>
+        <p:txBody>
+          <a:bodyPr wrap="square" lIns="0" tIns="0" rIns="0" bIns="0" rtlCol="0" anchor="t"/>
+          <a:lstStyle/>
+          <a:p>
+            <a:pPr indent="0" marL="0">
+              <a:lnSpc>
+                <a:spcPct val="100000"/>
+              </a:lnSpc>
+              <a:buNone/>
+            </a:pPr>
+            <a:r>
+              <a:rPr lang="en-US" sz="2000" i="1" dirty="0">
+                <a:solidFill>
+                  <a:srgbClr val="AFCBEE"/>
                 </a:solidFill>
                 <a:latin typeface="Georgia" pitchFamily="34" charset="0"/>
                 <a:ea typeface="Georgia" pitchFamily="34" charset="-122"/>
                 <a:cs typeface="Georgia" pitchFamily="34" charset="-120"/>
               </a:rPr>
-              <a:t>Las dos cotas se cumplen en las 20 semillas, cada una con su propio η.</a:t>
+              <a:t>Pregunta abierta: ¿y si el modelo que reentrena fuera uno más de los expertos de Hedge? No lo probamos.</a:t>
             </a:r>
             <a:endParaRPr lang="en-US" sz="2000" dirty="0"/>
-          </a:p>
-        </p:txBody>
-      </p:sp>
-      <p:sp>
-        <p:nvSpPr>
-          <p:cNvPr id="12" name="punto η de peor caso"/>
-          <p:cNvSpPr/>
-          <p:nvPr/>
-        </p:nvSpPr>
-        <p:spPr>
-          <a:xfrm>
-            <a:off x="7726680" y="3072384"/>
-            <a:ext cx="219456" cy="219456"/>
-          </a:xfrm>
-          <a:prstGeom prst="ellipse">
-            <a:avLst/>
-          </a:prstGeom>
-          <a:solidFill>
-            <a:srgbClr val="2A78D6"/>
-          </a:solidFill>
-          <a:ln/>
-        </p:spPr>
-      </p:sp>
-      <p:sp>
-        <p:nvSpPr>
-          <p:cNvPr id="13" name="Text 10"/>
-          <p:cNvSpPr txBox="1"/>
-          <p:nvPr/>
-        </p:nvSpPr>
-        <p:spPr>
-          <a:xfrm>
-            <a:off x="8110728" y="3017520"/>
-            <a:ext cx="3547872" cy="292608"/>
-          </a:xfrm>
-          <a:prstGeom prst="rect">
-            <a:avLst/>
-          </a:prstGeom>
-          <a:noFill/>
-          <a:ln/>
-        </p:spPr>
-        <p:txBody>
-          <a:bodyPr wrap="square" lIns="0" tIns="0" rIns="0" bIns="0" rtlCol="0" anchor="t"/>
-          <a:lstStyle/>
-          <a:p>
-            <a:pPr indent="0" marL="0">
-              <a:lnSpc>
-                <a:spcPct val="100000"/>
-              </a:lnSpc>
-              <a:buNone/>
-            </a:pPr>
-            <a:r>
-              <a:rPr lang="en-US" sz="1600" b="1" dirty="0">
-                <a:solidFill>
-                  <a:srgbClr val="1F2430"/>
-                </a:solidFill>
-                <a:latin typeface="Arial" pitchFamily="34" charset="0"/>
-                <a:ea typeface="Arial" pitchFamily="34" charset="-122"/>
-                <a:cs typeface="Arial" pitchFamily="34" charset="-120"/>
-              </a:rPr>
-              <a:t>η de peor caso</a:t>
-            </a:r>
-            <a:endParaRPr lang="en-US" sz="1600" dirty="0"/>
-          </a:p>
-        </p:txBody>
-      </p:sp>
-      <p:sp>
-        <p:nvSpPr>
-          <p:cNvPr id="14" name="Text 11"/>
-          <p:cNvSpPr txBox="1"/>
-          <p:nvPr/>
-        </p:nvSpPr>
-        <p:spPr>
-          <a:xfrm>
-            <a:off x="8110728" y="3346704"/>
-            <a:ext cx="3547872" cy="457200"/>
-          </a:xfrm>
-          <a:prstGeom prst="rect">
-            <a:avLst/>
-          </a:prstGeom>
-          <a:noFill/>
-          <a:ln/>
-        </p:spPr>
-        <p:txBody>
-          <a:bodyPr wrap="square" lIns="0" tIns="0" rIns="0" bIns="0" rtlCol="0" anchor="t"/>
-          <a:lstStyle/>
-          <a:p>
-            <a:pPr indent="0" marL="0">
-              <a:lnSpc>
-                <a:spcPct val="100000"/>
-              </a:lnSpc>
-              <a:buNone/>
-            </a:pPr>
-            <a:r>
-              <a:rPr lang="en-US" sz="1300" dirty="0">
-                <a:solidFill>
-                  <a:srgbClr val="5A6274"/>
-                </a:solidFill>
-                <a:latin typeface="Arial" pitchFamily="34" charset="0"/>
-                <a:ea typeface="Arial" pitchFamily="34" charset="-122"/>
-                <a:cs typeface="Arial" pitchFamily="34" charset="-120"/>
-              </a:rPr>
-              <a:t>sintonizado por T: regret 31, cota 60</a:t>
-            </a:r>
-            <a:endParaRPr lang="en-US" sz="1300" dirty="0"/>
-          </a:p>
-        </p:txBody>
-      </p:sp>
-      <p:sp>
-        <p:nvSpPr>
-          <p:cNvPr id="15" name="punto η small-loss"/>
-          <p:cNvSpPr/>
-          <p:nvPr/>
-        </p:nvSpPr>
-        <p:spPr>
-          <a:xfrm>
-            <a:off x="7726680" y="3895344"/>
-            <a:ext cx="219456" cy="219456"/>
-          </a:xfrm>
-          <a:prstGeom prst="ellipse">
-            <a:avLst/>
-          </a:prstGeom>
-          <a:solidFill>
-            <a:srgbClr val="E87BA4"/>
-          </a:solidFill>
-          <a:ln/>
-        </p:spPr>
-      </p:sp>
-      <p:sp>
-        <p:nvSpPr>
-          <p:cNvPr id="16" name="Text 13"/>
-          <p:cNvSpPr txBox="1"/>
-          <p:nvPr/>
-        </p:nvSpPr>
-        <p:spPr>
-          <a:xfrm>
-            <a:off x="8110728" y="3840480"/>
-            <a:ext cx="3547872" cy="292608"/>
-          </a:xfrm>
-          <a:prstGeom prst="rect">
-            <a:avLst/>
-          </a:prstGeom>
-          <a:noFill/>
-          <a:ln/>
-        </p:spPr>
-        <p:txBody>
-          <a:bodyPr wrap="square" lIns="0" tIns="0" rIns="0" bIns="0" rtlCol="0" anchor="t"/>
-          <a:lstStyle/>
-          <a:p>
-            <a:pPr indent="0" marL="0">
-              <a:lnSpc>
-                <a:spcPct val="100000"/>
-              </a:lnSpc>
-              <a:buNone/>
-            </a:pPr>
-            <a:r>
-              <a:rPr lang="en-US" sz="1600" b="1" dirty="0">
-                <a:solidFill>
-                  <a:srgbClr val="1F2430"/>
-                </a:solidFill>
-                <a:latin typeface="Arial" pitchFamily="34" charset="0"/>
-                <a:ea typeface="Arial" pitchFamily="34" charset="-122"/>
-                <a:cs typeface="Arial" pitchFamily="34" charset="-120"/>
-              </a:rPr>
-              <a:t>η small-loss</a:t>
-            </a:r>
-            <a:endParaRPr lang="en-US" sz="1600" dirty="0"/>
-          </a:p>
-        </p:txBody>
-      </p:sp>
-      <p:sp>
-        <p:nvSpPr>
-          <p:cNvPr id="17" name="Text 14"/>
-          <p:cNvSpPr txBox="1"/>
-          <p:nvPr/>
-        </p:nvSpPr>
-        <p:spPr>
-          <a:xfrm>
-            <a:off x="8110728" y="4169664"/>
-            <a:ext cx="3547872" cy="457200"/>
-          </a:xfrm>
-          <a:prstGeom prst="rect">
-            <a:avLst/>
-          </a:prstGeom>
-          <a:noFill/>
-          <a:ln/>
-        </p:spPr>
-        <p:txBody>
-          <a:bodyPr wrap="square" lIns="0" tIns="0" rIns="0" bIns="0" rtlCol="0" anchor="t"/>
-          <a:lstStyle/>
-          <a:p>
-            <a:pPr indent="0" marL="0">
-              <a:lnSpc>
-                <a:spcPct val="100000"/>
-              </a:lnSpc>
-              <a:buNone/>
-            </a:pPr>
-            <a:r>
-              <a:rPr lang="en-US" sz="1300" dirty="0">
-                <a:solidFill>
-                  <a:srgbClr val="5A6274"/>
-                </a:solidFill>
-                <a:latin typeface="Arial" pitchFamily="34" charset="0"/>
-                <a:ea typeface="Arial" pitchFamily="34" charset="-122"/>
-                <a:cs typeface="Arial" pitchFamily="34" charset="-120"/>
-              </a:rPr>
-              <a:t>sintonizado por la pérdida del mejor: regret 15, cota 25</a:t>
-            </a:r>
-            <a:endParaRPr lang="en-US" sz="1300" dirty="0"/>
-          </a:p>
-        </p:txBody>
-      </p:sp>
-      <p:sp>
-        <p:nvSpPr>
-          <p:cNvPr id="18" name="Shape 15"/>
-          <p:cNvSpPr/>
-          <p:nvPr/>
-        </p:nvSpPr>
-        <p:spPr>
-          <a:xfrm>
-            <a:off x="7726680" y="4709160"/>
-            <a:ext cx="3913632" cy="0"/>
-          </a:xfrm>
-          <a:prstGeom prst="line">
-            <a:avLst/>
-          </a:prstGeom>
-          <a:noFill/>
-          <a:ln w="9525">
-            <a:solidFill>
-              <a:srgbClr val="D9D6CE"/>
-            </a:solidFill>
-            <a:prstDash val="solid"/>
-          </a:ln>
-        </p:spPr>
-      </p:sp>
-      <p:sp>
-        <p:nvSpPr>
-          <p:cNvPr id="19" name="Text 16"/>
-          <p:cNvSpPr txBox="1"/>
-          <p:nvPr/>
-        </p:nvSpPr>
-        <p:spPr>
-          <a:xfrm>
-            <a:off x="7726680" y="4846320"/>
-            <a:ext cx="3931920" cy="914400"/>
-          </a:xfrm>
-          <a:prstGeom prst="rect">
-            <a:avLst/>
-          </a:prstGeom>
-          <a:noFill/>
-          <a:ln/>
-        </p:spPr>
-        <p:txBody>
-          <a:bodyPr wrap="square" lIns="0" tIns="0" rIns="0" bIns="0" rtlCol="0" anchor="t"/>
-          <a:lstStyle/>
-          <a:p>
-            <a:pPr indent="0" marL="0">
-              <a:lnSpc>
-                <a:spcPct val="100000"/>
-              </a:lnSpc>
-              <a:buNone/>
-            </a:pPr>
-            <a:r>
-              <a:rPr lang="en-US" sz="1400" dirty="0">
-                <a:solidFill>
-                  <a:srgbClr val="5A6274"/>
-                </a:solidFill>
-                <a:latin typeface="Arial" pitchFamily="34" charset="0"/>
-                <a:ea typeface="Arial" pitchFamily="34" charset="-122"/>
-                <a:cs typeface="Arial" pitchFamily="34" charset="-120"/>
-              </a:rPr>
-              <a:t>La small-loss es mejor algoritmo, pero necesita saber de antemano cuántos errores comete el mejor experto: información de oráculo.</a:t>
-            </a:r>
-            <a:endParaRPr lang="en-US" sz="1400" dirty="0"/>
-          </a:p>
-        </p:txBody>
-      </p:sp>
-      <p:sp>
-        <p:nvSpPr>
-          <p:cNvPr id="20" name="Text 17"/>
-          <p:cNvSpPr txBox="1"/>
-          <p:nvPr/>
-        </p:nvSpPr>
-        <p:spPr>
-          <a:xfrm>
-            <a:off x="548640" y="6373368"/>
-            <a:ext cx="10241280" cy="274320"/>
-          </a:xfrm>
-          <a:prstGeom prst="rect">
-            <a:avLst/>
-          </a:prstGeom>
-          <a:noFill/>
-          <a:ln/>
-        </p:spPr>
-        <p:txBody>
-          <a:bodyPr wrap="square" lIns="0" tIns="0" rIns="0" bIns="0" rtlCol="0" anchor="t"/>
-          <a:lstStyle/>
-          <a:p>
-            <a:pPr indent="0" marL="0">
-              <a:lnSpc>
-                <a:spcPct val="100000"/>
-              </a:lnSpc>
-              <a:buNone/>
-            </a:pPr>
-            <a:r>
-              <a:rPr lang="en-US" sz="1000" dirty="0">
-                <a:solidFill>
-                  <a:srgbClr val="9AA1AE"/>
-                </a:solidFill>
-                <a:latin typeface="Arial" pitchFamily="34" charset="0"/>
-                <a:ea typeface="Arial" pitchFamily="34" charset="-122"/>
-                <a:cs typeface="Arial" pitchFamily="34" charset="-120"/>
-              </a:rPr>
-              <a:t>La √(2T ln K) de la clase vale 120: correcta, pero el doble de lo necesario. Media de 20 permutaciones (semillas) del SMS Spam Collection.</a:t>
-            </a:r>
-            <a:endParaRPr lang="en-US" sz="1000" dirty="0"/>
-          </a:p>
-        </p:txBody>
-      </p:sp>
-      <p:sp>
-        <p:nvSpPr>
-          <p:cNvPr id="25" name="Slide Number Placeholder 0"/>
-          <p:cNvSpPr>
-            <a:spLocks noGrp="1"/>
-          </p:cNvSpPr>
-          <p:nvPr>
-            <p:ph type="sldNum" sz="quarter" idx="4294967295"/>
-          </p:nvPr>
-        </p:nvSpPr>
-        <p:spPr>
-          <a:xfrm>
-            <a:off x="11091672" y="6373368"/>
-            <a:ext cx="548640" cy="274320"/>
-          </a:xfrm>
-          <a:prstGeom prst="rect">
-            <a:avLst/>
-          </a:prstGeom>
-          <a:extLst>
-            <a:ext uri="{C572A759-6A51-4108-AA02-DFA0A04FC94B}">
-              <ma14:wrappingTextBoxFlag xmlns:ma14="http://schemas.microsoft.com/office/mac/drawingml/2011/main" val="0"/>
-            </a:ext>
-          </a:extLst>
-        </p:spPr>
-        <p:txBody>
-          <a:bodyPr/>
-          <a:lstStyle>
-            <a:lvl1pPr>
-              <a:defRPr sz="1000">
-                <a:solidFill>
-                  <a:srgbClr val="9AA1AE"/>
-                </a:solidFill>
-                <a:latin typeface="Arial"/>
-                <a:ea typeface="Arial"/>
-                <a:cs typeface="Arial"/>
-              </a:defRPr>
-            </a:lvl1pPr>
-          </a:lstStyle>
-          <a:p>
-            <a:pPr algn="r"/>
-            <a:fld id="{F7021451-1387-4CA6-816F-3879F97B5CBC}" type="slidenum">
-              <a:rPr b="0" lang="en-US"/>
-              <a:t>16</a:t>
-            </a:fld>
-            <a:endParaRPr lang="en-US"/>
           </a:p>
         </p:txBody>
       </p:sp>
@@ -7442,7 +7783,7 @@
                 <a:ea typeface="Arial" pitchFamily="34" charset="-122"/>
                 <a:cs typeface="Arial" pitchFamily="34" charset="-120"/>
               </a:rPr>
-              <a:t>HALLAZGO 4 · LECCIONES DE MÉTODO</a:t>
+              <a:t>LIMITACIONES</a:t>
             </a:r>
             <a:endParaRPr lang="en-US" sz="1100" dirty="0"/>
           </a:p>
@@ -7483,7 +7824,7 @@
                 <a:ea typeface="Georgia" pitchFamily="34" charset="-122"/>
                 <a:cs typeface="Georgia" pitchFamily="34" charset="-120"/>
               </a:rPr>
-              <a:t>Tres cosas que sirven fuera de este trabajo</a:t>
+              <a:t>Lo que este trabajo no muestra</a:t>
             </a:r>
             <a:endParaRPr lang="en-US" sz="3000" dirty="0"/>
           </a:p>
@@ -7599,7 +7940,7 @@
       </p:sp>
       <p:sp>
         <p:nvSpPr>
-          <p:cNvPr id="8" name="hallazgo 4 (actual)"/>
+          <p:cNvPr id="8" name="hallazgo 4"/>
           <p:cNvSpPr/>
           <p:nvPr/>
         </p:nvSpPr>
@@ -7611,91 +7952,288 @@
           <a:prstGeom prst="ellipse">
             <a:avLst/>
           </a:prstGeom>
-          <a:solidFill>
-            <a:srgbClr val="1F2430"/>
-          </a:solidFill>
-          <a:ln/>
-        </p:spPr>
-      </p:sp>
-      <p:sp>
-        <p:nvSpPr>
-          <p:cNvPr id="9" name="Text 7"/>
-          <p:cNvSpPr txBox="1"/>
-          <p:nvPr/>
-        </p:nvSpPr>
-        <p:spPr>
-          <a:xfrm>
-            <a:off x="548640" y="1783080"/>
-            <a:ext cx="3474720" cy="914400"/>
-          </a:xfrm>
-          <a:prstGeom prst="rect">
-            <a:avLst/>
-          </a:prstGeom>
-          <a:noFill/>
-          <a:ln/>
-        </p:spPr>
-        <p:txBody>
-          <a:bodyPr wrap="square" lIns="0" tIns="0" rIns="0" bIns="0" rtlCol="0" anchor="t"/>
-          <a:lstStyle/>
-          <a:p>
-            <a:pPr indent="0" marL="0">
-              <a:lnSpc>
-                <a:spcPct val="100000"/>
-              </a:lnSpc>
-              <a:buNone/>
-            </a:pPr>
-            <a:r>
-              <a:rPr lang="en-US" sz="5400" b="1" dirty="0">
+          <a:ln w="15875">
+            <a:solidFill>
+              <a:srgbClr val="9AA1AE"/>
+            </a:solidFill>
+            <a:prstDash val="solid"/>
+          </a:ln>
+        </p:spPr>
+      </p:sp>
+      <p:sp>
+        <p:nvSpPr>
+          <p:cNvPr id="9" name="Shape 7"/>
+          <p:cNvSpPr/>
+          <p:nvPr/>
+        </p:nvSpPr>
+        <p:spPr>
+          <a:xfrm>
+            <a:off x="548640" y="1828800"/>
+            <a:ext cx="3520440" cy="0"/>
+          </a:xfrm>
+          <a:prstGeom prst="line">
+            <a:avLst/>
+          </a:prstGeom>
+          <a:noFill/>
+          <a:ln w="9525">
+            <a:solidFill>
+              <a:srgbClr val="1F2430"/>
+            </a:solidFill>
+            <a:prstDash val="solid"/>
+          </a:ln>
+        </p:spPr>
+      </p:sp>
+      <p:sp>
+        <p:nvSpPr>
+          <p:cNvPr id="10" name="Text 8"/>
+          <p:cNvSpPr txBox="1"/>
+          <p:nvPr/>
+        </p:nvSpPr>
+        <p:spPr>
+          <a:xfrm>
+            <a:off x="548640" y="2011680"/>
+            <a:ext cx="3474720" cy="640080"/>
+          </a:xfrm>
+          <a:prstGeom prst="rect">
+            <a:avLst/>
+          </a:prstGeom>
+          <a:noFill/>
+          <a:ln/>
+        </p:spPr>
+        <p:txBody>
+          <a:bodyPr wrap="square" lIns="0" tIns="0" rIns="0" bIns="0" rtlCol="0" anchor="t"/>
+          <a:lstStyle/>
+          <a:p>
+            <a:pPr indent="0" marL="0">
+              <a:lnSpc>
+                <a:spcPct val="100000"/>
+              </a:lnSpc>
+              <a:buNone/>
+            </a:pPr>
+            <a:r>
+              <a:rPr lang="en-US" sz="1900" dirty="0">
                 <a:solidFill>
                   <a:srgbClr val="1F2430"/>
+                </a:solidFill>
+                <a:latin typeface="Georgia" pitchFamily="34" charset="0"/>
+                <a:ea typeface="Georgia" pitchFamily="34" charset="-122"/>
+                <a:cs typeface="Georgia" pitchFamily="34" charset="-120"/>
+              </a:rPr>
+              <a:t>Drift sintético</a:t>
+            </a:r>
+            <a:endParaRPr lang="en-US" sz="1900" dirty="0"/>
+          </a:p>
+        </p:txBody>
+      </p:sp>
+      <p:sp>
+        <p:nvSpPr>
+          <p:cNvPr id="11" name="Text 9"/>
+          <p:cNvSpPr txBox="1"/>
+          <p:nvPr/>
+        </p:nvSpPr>
+        <p:spPr>
+          <a:xfrm>
+            <a:off x="548640" y="2697480"/>
+            <a:ext cx="3474720" cy="868680"/>
+          </a:xfrm>
+          <a:prstGeom prst="rect">
+            <a:avLst/>
+          </a:prstGeom>
+          <a:noFill/>
+          <a:ln/>
+        </p:spPr>
+        <p:txBody>
+          <a:bodyPr wrap="square" lIns="0" tIns="0" rIns="0" bIns="0" rtlCol="0" anchor="t"/>
+          <a:lstStyle/>
+          <a:p>
+            <a:pPr indent="0" marL="0">
+              <a:lnSpc>
+                <a:spcPct val="100000"/>
+              </a:lnSpc>
+              <a:buNone/>
+            </a:pPr>
+            <a:r>
+              <a:rPr lang="en-US" sz="1500" dirty="0">
+                <a:solidFill>
+                  <a:srgbClr val="5A6274"/>
                 </a:solidFill>
                 <a:latin typeface="Arial" pitchFamily="34" charset="0"/>
                 <a:ea typeface="Arial" pitchFamily="34" charset="-122"/>
                 <a:cs typeface="Arial" pitchFamily="34" charset="-120"/>
               </a:rPr>
-              <a:t>87%</a:t>
-            </a:r>
-            <a:endParaRPr lang="en-US" sz="5400" dirty="0"/>
-          </a:p>
-        </p:txBody>
-      </p:sp>
-      <p:sp>
-        <p:nvSpPr>
-          <p:cNvPr id="10" name="Text 8"/>
-          <p:cNvSpPr txBox="1"/>
-          <p:nvPr/>
-        </p:nvSpPr>
-        <p:spPr>
-          <a:xfrm>
-            <a:off x="548640" y="2880360"/>
-            <a:ext cx="3429000" cy="868680"/>
-          </a:xfrm>
-          <a:prstGeom prst="rect">
-            <a:avLst/>
-          </a:prstGeom>
-          <a:noFill/>
-          <a:ln/>
-        </p:spPr>
-        <p:txBody>
-          <a:bodyPr wrap="square" lIns="0" tIns="0" rIns="0" bIns="0" rtlCol="0" anchor="t"/>
-          <a:lstStyle/>
-          <a:p>
-            <a:pPr indent="0" marL="0">
-              <a:lnSpc>
-                <a:spcPct val="100000"/>
-              </a:lnSpc>
-              <a:buNone/>
-            </a:pPr>
-            <a:r>
-              <a:rPr lang="en-US" sz="1900" b="1" dirty="0">
+              <a:t>El corpus no tiene fechas: el orden y el ataque son nuestros.</a:t>
+            </a:r>
+            <a:endParaRPr lang="en-US" sz="1500" dirty="0"/>
+          </a:p>
+        </p:txBody>
+      </p:sp>
+      <p:sp>
+        <p:nvSpPr>
+          <p:cNvPr id="12" name="Shape 10"/>
+          <p:cNvSpPr/>
+          <p:nvPr/>
+        </p:nvSpPr>
+        <p:spPr>
+          <a:xfrm>
+            <a:off x="4370832" y="1828800"/>
+            <a:ext cx="3520440" cy="0"/>
+          </a:xfrm>
+          <a:prstGeom prst="line">
+            <a:avLst/>
+          </a:prstGeom>
+          <a:noFill/>
+          <a:ln w="9525">
+            <a:solidFill>
+              <a:srgbClr val="1F2430"/>
+            </a:solidFill>
+            <a:prstDash val="solid"/>
+          </a:ln>
+        </p:spPr>
+      </p:sp>
+      <p:sp>
+        <p:nvSpPr>
+          <p:cNvPr id="13" name="Text 11"/>
+          <p:cNvSpPr txBox="1"/>
+          <p:nvPr/>
+        </p:nvSpPr>
+        <p:spPr>
+          <a:xfrm>
+            <a:off x="4370832" y="2011680"/>
+            <a:ext cx="3474720" cy="640080"/>
+          </a:xfrm>
+          <a:prstGeom prst="rect">
+            <a:avLst/>
+          </a:prstGeom>
+          <a:noFill/>
+          <a:ln/>
+        </p:spPr>
+        <p:txBody>
+          <a:bodyPr wrap="square" lIns="0" tIns="0" rIns="0" bIns="0" rtlCol="0" anchor="t"/>
+          <a:lstStyle/>
+          <a:p>
+            <a:pPr indent="0" marL="0">
+              <a:lnSpc>
+                <a:spcPct val="100000"/>
+              </a:lnSpc>
+              <a:buNone/>
+            </a:pPr>
+            <a:r>
+              <a:rPr lang="en-US" sz="1900" dirty="0">
                 <a:solidFill>
                   <a:srgbClr val="1F2430"/>
+                </a:solidFill>
+                <a:latin typeface="Georgia" pitchFamily="34" charset="0"/>
+                <a:ea typeface="Georgia" pitchFamily="34" charset="-122"/>
+                <a:cs typeface="Georgia" pitchFamily="34" charset="-120"/>
+              </a:rPr>
+              <a:t>Adversario que no reacciona</a:t>
+            </a:r>
+            <a:endParaRPr lang="en-US" sz="1900" dirty="0"/>
+          </a:p>
+        </p:txBody>
+      </p:sp>
+      <p:sp>
+        <p:nvSpPr>
+          <p:cNvPr id="14" name="Text 12"/>
+          <p:cNvSpPr txBox="1"/>
+          <p:nvPr/>
+        </p:nvSpPr>
+        <p:spPr>
+          <a:xfrm>
+            <a:off x="4370832" y="2697480"/>
+            <a:ext cx="3474720" cy="868680"/>
+          </a:xfrm>
+          <a:prstGeom prst="rect">
+            <a:avLst/>
+          </a:prstGeom>
+          <a:noFill/>
+          <a:ln/>
+        </p:spPr>
+        <p:txBody>
+          <a:bodyPr wrap="square" lIns="0" tIns="0" rIns="0" bIns="0" rtlCol="0" anchor="t"/>
+          <a:lstStyle/>
+          <a:p>
+            <a:pPr indent="0" marL="0">
+              <a:lnSpc>
+                <a:spcPct val="100000"/>
+              </a:lnSpc>
+              <a:buNone/>
+            </a:pPr>
+            <a:r>
+              <a:rPr lang="en-US" sz="1500" dirty="0">
+                <a:solidFill>
+                  <a:srgbClr val="5A6274"/>
                 </a:solidFill>
                 <a:latin typeface="Arial" pitchFamily="34" charset="0"/>
                 <a:ea typeface="Arial" pitchFamily="34" charset="-122"/>
                 <a:cs typeface="Arial" pitchFamily="34" charset="-120"/>
               </a:rPr>
-              <a:t>La accuracy engaña</a:t>
+              <a:t>Uno adaptativo degradaría las tasas de √T a T^(2/3).</a:t>
+            </a:r>
+            <a:endParaRPr lang="en-US" sz="1500" dirty="0"/>
+          </a:p>
+        </p:txBody>
+      </p:sp>
+      <p:sp>
+        <p:nvSpPr>
+          <p:cNvPr id="15" name="Shape 13"/>
+          <p:cNvSpPr/>
+          <p:nvPr/>
+        </p:nvSpPr>
+        <p:spPr>
+          <a:xfrm>
+            <a:off x="8193024" y="1828800"/>
+            <a:ext cx="3520440" cy="0"/>
+          </a:xfrm>
+          <a:prstGeom prst="line">
+            <a:avLst/>
+          </a:prstGeom>
+          <a:noFill/>
+          <a:ln w="9525">
+            <a:solidFill>
+              <a:srgbClr val="1F2430"/>
+            </a:solidFill>
+            <a:prstDash val="solid"/>
+          </a:ln>
+        </p:spPr>
+      </p:sp>
+      <p:sp>
+        <p:nvSpPr>
+          <p:cNvPr id="16" name="Text 14"/>
+          <p:cNvSpPr txBox="1"/>
+          <p:nvPr/>
+        </p:nvSpPr>
+        <p:spPr>
+          <a:xfrm>
+            <a:off x="8193024" y="2011680"/>
+            <a:ext cx="3474720" cy="640080"/>
+          </a:xfrm>
+          <a:prstGeom prst="rect">
+            <a:avLst/>
+          </a:prstGeom>
+          <a:noFill/>
+          <a:ln/>
+        </p:spPr>
+        <p:txBody>
+          <a:bodyPr wrap="square" lIns="0" tIns="0" rIns="0" bIns="0" rtlCol="0" anchor="t"/>
+          <a:lstStyle/>
+          <a:p>
+            <a:pPr indent="0" marL="0">
+              <a:lnSpc>
+                <a:spcPct val="100000"/>
+              </a:lnSpc>
+              <a:buNone/>
+            </a:pPr>
+            <a:r>
+              <a:rPr lang="en-US" sz="1900" dirty="0">
+                <a:solidFill>
+                  <a:srgbClr val="1F2430"/>
+                </a:solidFill>
+                <a:latin typeface="Georgia" pitchFamily="34" charset="0"/>
+                <a:ea typeface="Georgia" pitchFamily="34" charset="-122"/>
+                <a:cs typeface="Georgia" pitchFamily="34" charset="-120"/>
+              </a:rPr>
+              <a:t>Experto robusto por construcción</a:t>
             </a:r>
             <a:endParaRPr lang="en-US" sz="1900" dirty="0"/>
           </a:p>
@@ -7703,14 +8241,14 @@
       </p:sp>
       <p:sp>
         <p:nvSpPr>
-          <p:cNvPr id="11" name="Text 9"/>
-          <p:cNvSpPr txBox="1"/>
-          <p:nvPr/>
-        </p:nvSpPr>
-        <p:spPr>
-          <a:xfrm>
-            <a:off x="548640" y="3840480"/>
-            <a:ext cx="3429000" cy="1828800"/>
+          <p:cNvPr id="17" name="Text 15"/>
+          <p:cNvSpPr txBox="1"/>
+          <p:nvPr/>
+        </p:nvSpPr>
+        <p:spPr>
+          <a:xfrm>
+            <a:off x="8193024" y="2697480"/>
+            <a:ext cx="3474720" cy="868680"/>
           </a:xfrm>
           <a:prstGeom prst="rect">
             <a:avLst/>
@@ -7737,7 +8275,7 @@
                 <a:ea typeface="Arial" pitchFamily="34" charset="-122"/>
                 <a:cs typeface="Arial" pitchFamily="34" charset="-120"/>
               </a:rPr>
-              <a:t>Con 13% de spam, no marcar nada acierta el 87%. Medimos spam atrapado, legítimo bloqueado y MCC.</a:t>
+              <a:t>El ataque no toca dígitos ni símbolos; uno que lo hiciera lo rompería.</a:t>
             </a:r>
             <a:endParaRPr lang="en-US" sz="1500" dirty="0"/>
           </a:p>
@@ -7745,14 +8283,14 @@
       </p:sp>
       <p:sp>
         <p:nvSpPr>
-          <p:cNvPr id="12" name="Shape 10"/>
-          <p:cNvSpPr/>
-          <p:nvPr/>
-        </p:nvSpPr>
-        <p:spPr>
-          <a:xfrm>
-            <a:off x="4142232" y="1828800"/>
-            <a:ext cx="0" cy="4023360"/>
+          <p:cNvPr id="18" name="Shape 16"/>
+          <p:cNvSpPr/>
+          <p:nvPr/>
+        </p:nvSpPr>
+        <p:spPr>
+          <a:xfrm>
+            <a:off x="548640" y="3931920"/>
+            <a:ext cx="3520440" cy="0"/>
           </a:xfrm>
           <a:prstGeom prst="line">
             <a:avLst/>
@@ -7760,7 +8298,7 @@
           <a:noFill/>
           <a:ln w="9525">
             <a:solidFill>
-              <a:srgbClr val="D9D6CE"/>
+              <a:srgbClr val="1F2430"/>
             </a:solidFill>
             <a:prstDash val="solid"/>
           </a:ln>
@@ -7768,83 +8306,255 @@
       </p:sp>
       <p:sp>
         <p:nvSpPr>
-          <p:cNvPr id="13" name="Text 11"/>
-          <p:cNvSpPr txBox="1"/>
-          <p:nvPr/>
-        </p:nvSpPr>
-        <p:spPr>
-          <a:xfrm>
-            <a:off x="4370832" y="1783080"/>
-            <a:ext cx="3474720" cy="914400"/>
-          </a:xfrm>
-          <a:prstGeom prst="rect">
-            <a:avLst/>
-          </a:prstGeom>
-          <a:noFill/>
-          <a:ln/>
-        </p:spPr>
-        <p:txBody>
-          <a:bodyPr wrap="square" lIns="0" tIns="0" rIns="0" bIns="0" rtlCol="0" anchor="t"/>
-          <a:lstStyle/>
-          <a:p>
-            <a:pPr indent="0" marL="0">
-              <a:lnSpc>
-                <a:spcPct val="100000"/>
-              </a:lnSpc>
-              <a:buNone/>
-            </a:pPr>
-            <a:r>
-              <a:rPr lang="en-US" sz="5400" b="1" dirty="0">
-                <a:solidFill>
-                  <a:srgbClr val="1BAF7A"/>
+          <p:cNvPr id="19" name="Text 17"/>
+          <p:cNvSpPr txBox="1"/>
+          <p:nvPr/>
+        </p:nvSpPr>
+        <p:spPr>
+          <a:xfrm>
+            <a:off x="548640" y="4114800"/>
+            <a:ext cx="3474720" cy="640080"/>
+          </a:xfrm>
+          <a:prstGeom prst="rect">
+            <a:avLst/>
+          </a:prstGeom>
+          <a:noFill/>
+          <a:ln/>
+        </p:spPr>
+        <p:txBody>
+          <a:bodyPr wrap="square" lIns="0" tIns="0" rIns="0" bIns="0" rtlCol="0" anchor="t"/>
+          <a:lstStyle/>
+          <a:p>
+            <a:pPr indent="0" marL="0">
+              <a:lnSpc>
+                <a:spcPct val="100000"/>
+              </a:lnSpc>
+              <a:buNone/>
+            </a:pPr>
+            <a:r>
+              <a:rPr lang="en-US" sz="1900" dirty="0">
+                <a:solidFill>
+                  <a:srgbClr val="1F2430"/>
+                </a:solidFill>
+                <a:latin typeface="Georgia" pitchFamily="34" charset="0"/>
+                <a:ea typeface="Georgia" pitchFamily="34" charset="-122"/>
+                <a:cs typeface="Georgia" pitchFamily="34" charset="-120"/>
+              </a:rPr>
+              <a:t>Pérdida 0-1 simétrica</a:t>
+            </a:r>
+            <a:endParaRPr lang="en-US" sz="1900" dirty="0"/>
+          </a:p>
+        </p:txBody>
+      </p:sp>
+      <p:sp>
+        <p:nvSpPr>
+          <p:cNvPr id="20" name="Text 18"/>
+          <p:cNvSpPr txBox="1"/>
+          <p:nvPr/>
+        </p:nvSpPr>
+        <p:spPr>
+          <a:xfrm>
+            <a:off x="548640" y="4800600"/>
+            <a:ext cx="3474720" cy="868680"/>
+          </a:xfrm>
+          <a:prstGeom prst="rect">
+            <a:avLst/>
+          </a:prstGeom>
+          <a:noFill/>
+          <a:ln/>
+        </p:spPr>
+        <p:txBody>
+          <a:bodyPr wrap="square" lIns="0" tIns="0" rIns="0" bIns="0" rtlCol="0" anchor="t"/>
+          <a:lstStyle/>
+          <a:p>
+            <a:pPr indent="0" marL="0">
+              <a:lnSpc>
+                <a:spcPct val="100000"/>
+              </a:lnSpc>
+              <a:buNone/>
+            </a:pPr>
+            <a:r>
+              <a:rPr lang="en-US" sz="1500" dirty="0">
+                <a:solidFill>
+                  <a:srgbClr val="5A6274"/>
                 </a:solidFill>
                 <a:latin typeface="Arial" pitchFamily="34" charset="0"/>
                 <a:ea typeface="Arial" pitchFamily="34" charset="-122"/>
                 <a:cs typeface="Arial" pitchFamily="34" charset="-120"/>
               </a:rPr>
-              <a:t>8 de 20</a:t>
-            </a:r>
-            <a:endParaRPr lang="en-US" sz="5400" dirty="0"/>
-          </a:p>
-        </p:txBody>
-      </p:sp>
-      <p:sp>
-        <p:nvSpPr>
-          <p:cNvPr id="14" name="Text 12"/>
-          <p:cNvSpPr txBox="1"/>
-          <p:nvPr/>
-        </p:nvSpPr>
-        <p:spPr>
-          <a:xfrm>
-            <a:off x="4370832" y="2880360"/>
-            <a:ext cx="3429000" cy="868680"/>
-          </a:xfrm>
-          <a:prstGeom prst="rect">
-            <a:avLst/>
-          </a:prstGeom>
-          <a:noFill/>
-          <a:ln/>
-        </p:spPr>
-        <p:txBody>
-          <a:bodyPr wrap="square" lIns="0" tIns="0" rIns="0" bIns="0" rtlCol="0" anchor="t"/>
-          <a:lstStyle/>
-          <a:p>
-            <a:pPr indent="0" marL="0">
-              <a:lnSpc>
-                <a:spcPct val="100000"/>
-              </a:lnSpc>
-              <a:buNone/>
-            </a:pPr>
-            <a:r>
-              <a:rPr lang="en-US" sz="1900" b="1" dirty="0">
+              <a:t>Bloquear un mensaje legítimo cuesta más que dejar pasar spam.</a:t>
+            </a:r>
+            <a:endParaRPr lang="en-US" sz="1500" dirty="0"/>
+          </a:p>
+        </p:txBody>
+      </p:sp>
+      <p:sp>
+        <p:nvSpPr>
+          <p:cNvPr id="21" name="Shape 19"/>
+          <p:cNvSpPr/>
+          <p:nvPr/>
+        </p:nvSpPr>
+        <p:spPr>
+          <a:xfrm>
+            <a:off x="4370832" y="3931920"/>
+            <a:ext cx="3520440" cy="0"/>
+          </a:xfrm>
+          <a:prstGeom prst="line">
+            <a:avLst/>
+          </a:prstGeom>
+          <a:noFill/>
+          <a:ln w="9525">
+            <a:solidFill>
+              <a:srgbClr val="1F2430"/>
+            </a:solidFill>
+            <a:prstDash val="solid"/>
+          </a:ln>
+        </p:spPr>
+      </p:sp>
+      <p:sp>
+        <p:nvSpPr>
+          <p:cNvPr id="22" name="Text 20"/>
+          <p:cNvSpPr txBox="1"/>
+          <p:nvPr/>
+        </p:nvSpPr>
+        <p:spPr>
+          <a:xfrm>
+            <a:off x="4370832" y="4114800"/>
+            <a:ext cx="3474720" cy="640080"/>
+          </a:xfrm>
+          <a:prstGeom prst="rect">
+            <a:avLst/>
+          </a:prstGeom>
+          <a:noFill/>
+          <a:ln/>
+        </p:spPr>
+        <p:txBody>
+          <a:bodyPr wrap="square" lIns="0" tIns="0" rIns="0" bIns="0" rtlCol="0" anchor="t"/>
+          <a:lstStyle/>
+          <a:p>
+            <a:pPr indent="0" marL="0">
+              <a:lnSpc>
+                <a:spcPct val="100000"/>
+              </a:lnSpc>
+              <a:buNone/>
+            </a:pPr>
+            <a:r>
+              <a:rPr lang="en-US" sz="1900" dirty="0">
                 <a:solidFill>
                   <a:srgbClr val="1F2430"/>
+                </a:solidFill>
+                <a:latin typeface="Georgia" pitchFamily="34" charset="0"/>
+                <a:ea typeface="Georgia" pitchFamily="34" charset="-122"/>
+                <a:cs typeface="Georgia" pitchFamily="34" charset="-120"/>
+              </a:rPr>
+              <a:t>Etiqueta de dos lados</a:t>
+            </a:r>
+            <a:endParaRPr lang="en-US" sz="1900" dirty="0"/>
+          </a:p>
+        </p:txBody>
+      </p:sp>
+      <p:sp>
+        <p:nvSpPr>
+          <p:cNvPr id="23" name="Text 21"/>
+          <p:cNvSpPr txBox="1"/>
+          <p:nvPr/>
+        </p:nvSpPr>
+        <p:spPr>
+          <a:xfrm>
+            <a:off x="4370832" y="4800600"/>
+            <a:ext cx="3474720" cy="868680"/>
+          </a:xfrm>
+          <a:prstGeom prst="rect">
+            <a:avLst/>
+          </a:prstGeom>
+          <a:noFill/>
+          <a:ln/>
+        </p:spPr>
+        <p:txBody>
+          <a:bodyPr wrap="square" lIns="0" tIns="0" rIns="0" bIns="0" rtlCol="0" anchor="t"/>
+          <a:lstStyle/>
+          <a:p>
+            <a:pPr indent="0" marL="0">
+              <a:lnSpc>
+                <a:spcPct val="100000"/>
+              </a:lnSpc>
+              <a:buNone/>
+            </a:pPr>
+            <a:r>
+              <a:rPr lang="en-US" sz="1500" dirty="0">
+                <a:solidFill>
+                  <a:srgbClr val="5A6274"/>
                 </a:solidFill>
                 <a:latin typeface="Arial" pitchFamily="34" charset="0"/>
                 <a:ea typeface="Arial" pitchFamily="34" charset="-122"/>
                 <a:cs typeface="Arial" pitchFamily="34" charset="-120"/>
               </a:rPr>
-              <a:t>La validación cruzada no mide adaptación</a:t>
+              <a:t>En la práctica solo se ven los errores de lo que se entrega.</a:t>
+            </a:r>
+            <a:endParaRPr lang="en-US" sz="1500" dirty="0"/>
+          </a:p>
+        </p:txBody>
+      </p:sp>
+      <p:sp>
+        <p:nvSpPr>
+          <p:cNvPr id="24" name="Shape 22"/>
+          <p:cNvSpPr/>
+          <p:nvPr/>
+        </p:nvSpPr>
+        <p:spPr>
+          <a:xfrm>
+            <a:off x="8193024" y="3931920"/>
+            <a:ext cx="3520440" cy="0"/>
+          </a:xfrm>
+          <a:prstGeom prst="line">
+            <a:avLst/>
+          </a:prstGeom>
+          <a:noFill/>
+          <a:ln w="9525">
+            <a:solidFill>
+              <a:srgbClr val="1F2430"/>
+            </a:solidFill>
+            <a:prstDash val="solid"/>
+          </a:ln>
+        </p:spPr>
+      </p:sp>
+      <p:sp>
+        <p:nvSpPr>
+          <p:cNvPr id="25" name="Text 23"/>
+          <p:cNvSpPr txBox="1"/>
+          <p:nvPr/>
+        </p:nvSpPr>
+        <p:spPr>
+          <a:xfrm>
+            <a:off x="8193024" y="4114800"/>
+            <a:ext cx="3474720" cy="640080"/>
+          </a:xfrm>
+          <a:prstGeom prst="rect">
+            <a:avLst/>
+          </a:prstGeom>
+          <a:noFill/>
+          <a:ln/>
+        </p:spPr>
+        <p:txBody>
+          <a:bodyPr wrap="square" lIns="0" tIns="0" rIns="0" bIns="0" rtlCol="0" anchor="t"/>
+          <a:lstStyle/>
+          <a:p>
+            <a:pPr indent="0" marL="0">
+              <a:lnSpc>
+                <a:spcPct val="100000"/>
+              </a:lnSpc>
+              <a:buNone/>
+            </a:pPr>
+            <a:r>
+              <a:rPr lang="en-US" sz="1900" dirty="0">
+                <a:solidFill>
+                  <a:srgbClr val="1F2430"/>
+                </a:solidFill>
+                <a:latin typeface="Georgia" pitchFamily="34" charset="0"/>
+                <a:ea typeface="Georgia" pitchFamily="34" charset="-122"/>
+                <a:cs typeface="Georgia" pitchFamily="34" charset="-120"/>
+              </a:rPr>
+              <a:t>Un solo corpus</a:t>
             </a:r>
             <a:endParaRPr lang="en-US" sz="1900" dirty="0"/>
           </a:p>
@@ -7852,14 +8562,14 @@
       </p:sp>
       <p:sp>
         <p:nvSpPr>
-          <p:cNvPr id="15" name="Text 13"/>
-          <p:cNvSpPr txBox="1"/>
-          <p:nvPr/>
-        </p:nvSpPr>
-        <p:spPr>
-          <a:xfrm>
-            <a:off x="4370832" y="3840480"/>
-            <a:ext cx="3429000" cy="1828800"/>
+          <p:cNvPr id="26" name="Text 24"/>
+          <p:cNvSpPr txBox="1"/>
+          <p:nvPr/>
+        </p:nvSpPr>
+        <p:spPr>
+          <a:xfrm>
+            <a:off x="8193024" y="4800600"/>
+            <a:ext cx="3474720" cy="868680"/>
           </a:xfrm>
           <a:prstGeom prst="rect">
             <a:avLst/>
@@ -7886,7 +8596,7 @@
                 <a:ea typeface="Arial" pitchFamily="34" charset="-122"/>
                 <a:cs typeface="Arial" pitchFamily="34" charset="-120"/>
               </a:rPr>
-              <a:t>Sin ataque en el warm-up, eligió mal la regularización de SGD en 8 de 20 semillas: 125 a 153 errores, contra 65 a 83.</a:t>
+              <a:t>5.574 SMS en inglés, ~305 spams atacados por semilla.</a:t>
             </a:r>
             <a:endParaRPr lang="en-US" sz="1500" dirty="0"/>
           </a:p>
@@ -7894,190 +8604,41 @@
       </p:sp>
       <p:sp>
         <p:nvSpPr>
-          <p:cNvPr id="16" name="Shape 14"/>
-          <p:cNvSpPr/>
-          <p:nvPr/>
-        </p:nvSpPr>
-        <p:spPr>
-          <a:xfrm>
-            <a:off x="7964424" y="1828800"/>
-            <a:ext cx="0" cy="4023360"/>
-          </a:xfrm>
-          <a:prstGeom prst="line">
-            <a:avLst/>
-          </a:prstGeom>
-          <a:noFill/>
-          <a:ln w="9525">
-            <a:solidFill>
-              <a:srgbClr val="D9D6CE"/>
-            </a:solidFill>
-            <a:prstDash val="solid"/>
-          </a:ln>
-        </p:spPr>
-      </p:sp>
-      <p:sp>
-        <p:nvSpPr>
-          <p:cNvPr id="17" name="Text 15"/>
-          <p:cNvSpPr txBox="1"/>
-          <p:nvPr/>
-        </p:nvSpPr>
-        <p:spPr>
-          <a:xfrm>
-            <a:off x="8193024" y="1783080"/>
-            <a:ext cx="3474720" cy="914400"/>
-          </a:xfrm>
-          <a:prstGeom prst="rect">
-            <a:avLst/>
-          </a:prstGeom>
-          <a:noFill/>
-          <a:ln/>
-        </p:spPr>
-        <p:txBody>
-          <a:bodyPr wrap="square" lIns="0" tIns="0" rIns="0" bIns="0" rtlCol="0" anchor="t"/>
-          <a:lstStyle/>
-          <a:p>
-            <a:pPr indent="0" marL="0">
-              <a:lnSpc>
-                <a:spcPct val="100000"/>
-              </a:lnSpc>
-              <a:buNone/>
-            </a:pPr>
-            <a:r>
-              <a:rPr lang="en-US" sz="5400" b="1" dirty="0">
-                <a:solidFill>
-                  <a:srgbClr val="EB6834"/>
+          <p:cNvPr id="27" name="Text 25"/>
+          <p:cNvSpPr txBox="1"/>
+          <p:nvPr/>
+        </p:nvSpPr>
+        <p:spPr>
+          <a:xfrm>
+            <a:off x="548640" y="6373368"/>
+            <a:ext cx="10241280" cy="274320"/>
+          </a:xfrm>
+          <a:prstGeom prst="rect">
+            <a:avLst/>
+          </a:prstGeom>
+          <a:noFill/>
+          <a:ln/>
+        </p:spPr>
+        <p:txBody>
+          <a:bodyPr wrap="square" lIns="0" tIns="0" rIns="0" bIns="0" rtlCol="0" anchor="t"/>
+          <a:lstStyle/>
+          <a:p>
+            <a:pPr indent="0" marL="0">
+              <a:lnSpc>
+                <a:spcPct val="100000"/>
+              </a:lnSpc>
+              <a:buNone/>
+            </a:pPr>
+            <a:r>
+              <a:rPr lang="en-US" sz="1000" dirty="0">
+                <a:solidFill>
+                  <a:srgbClr val="9AA1AE"/>
                 </a:solidFill>
                 <a:latin typeface="Arial" pitchFamily="34" charset="0"/>
                 <a:ea typeface="Arial" pitchFamily="34" charset="-122"/>
                 <a:cs typeface="Arial" pitchFamily="34" charset="-120"/>
               </a:rPr>
-              <a:t>0,995</a:t>
-            </a:r>
-            <a:endParaRPr lang="en-US" sz="5400" dirty="0"/>
-          </a:p>
-        </p:txBody>
-      </p:sp>
-      <p:sp>
-        <p:nvSpPr>
-          <p:cNvPr id="18" name="Text 16"/>
-          <p:cNvSpPr txBox="1"/>
-          <p:nvPr/>
-        </p:nvSpPr>
-        <p:spPr>
-          <a:xfrm>
-            <a:off x="8193024" y="2880360"/>
-            <a:ext cx="3429000" cy="868680"/>
-          </a:xfrm>
-          <a:prstGeom prst="rect">
-            <a:avLst/>
-          </a:prstGeom>
-          <a:noFill/>
-          <a:ln/>
-        </p:spPr>
-        <p:txBody>
-          <a:bodyPr wrap="square" lIns="0" tIns="0" rIns="0" bIns="0" rtlCol="0" anchor="t"/>
-          <a:lstStyle/>
-          <a:p>
-            <a:pPr indent="0" marL="0">
-              <a:lnSpc>
-                <a:spcPct val="100000"/>
-              </a:lnSpc>
-              <a:buNone/>
-            </a:pPr>
-            <a:r>
-              <a:rPr lang="en-US" sz="1900" b="1" dirty="0">
-                <a:solidFill>
-                  <a:srgbClr val="1F2430"/>
-                </a:solidFill>
-                <a:latin typeface="Arial" pitchFamily="34" charset="0"/>
-                <a:ea typeface="Arial" pitchFamily="34" charset="-122"/>
-                <a:cs typeface="Arial" pitchFamily="34" charset="-120"/>
-              </a:rPr>
-              <a:t>Combinar necesita un experto que sobreviva</a:t>
-            </a:r>
-            <a:endParaRPr lang="en-US" sz="1900" dirty="0"/>
-          </a:p>
-        </p:txBody>
-      </p:sp>
-      <p:sp>
-        <p:nvSpPr>
-          <p:cNvPr id="19" name="Text 17"/>
-          <p:cNvSpPr txBox="1"/>
-          <p:nvPr/>
-        </p:nvSpPr>
-        <p:spPr>
-          <a:xfrm>
-            <a:off x="8193024" y="3840480"/>
-            <a:ext cx="3429000" cy="1828800"/>
-          </a:xfrm>
-          <a:prstGeom prst="rect">
-            <a:avLst/>
-          </a:prstGeom>
-          <a:noFill/>
-          <a:ln/>
-        </p:spPr>
-        <p:txBody>
-          <a:bodyPr wrap="square" lIns="0" tIns="0" rIns="0" bIns="0" rtlCol="0" anchor="t"/>
-          <a:lstStyle/>
-          <a:p>
-            <a:pPr indent="0" marL="0">
-              <a:lnSpc>
-                <a:spcPct val="100000"/>
-              </a:lnSpc>
-              <a:buNone/>
-            </a:pPr>
-            <a:r>
-              <a:rPr lang="en-US" sz="1500" dirty="0">
-                <a:solidFill>
-                  <a:srgbClr val="5A6274"/>
-                </a:solidFill>
-                <a:latin typeface="Arial" pitchFamily="34" charset="0"/>
-                <a:ea typeface="Arial" pitchFamily="34" charset="-122"/>
-                <a:cs typeface="Arial" pitchFamily="34" charset="-120"/>
-              </a:rPr>
-              <a:t>Si ningún experto resiste el ataque, Hedge deja 0,995 del peso en el modelo dañado y no recupera nada.</a:t>
-            </a:r>
-            <a:endParaRPr lang="en-US" sz="1500" dirty="0"/>
-          </a:p>
-        </p:txBody>
-      </p:sp>
-      <p:sp>
-        <p:nvSpPr>
-          <p:cNvPr id="20" name="Text 18"/>
-          <p:cNvSpPr txBox="1"/>
-          <p:nvPr/>
-        </p:nvSpPr>
-        <p:spPr>
-          <a:xfrm>
-            <a:off x="548640" y="6373368"/>
-            <a:ext cx="10241280" cy="274320"/>
-          </a:xfrm>
-          <a:prstGeom prst="rect">
-            <a:avLst/>
-          </a:prstGeom>
-          <a:noFill/>
-          <a:ln/>
-        </p:spPr>
-        <p:txBody>
-          <a:bodyPr wrap="square" lIns="0" tIns="0" rIns="0" bIns="0" rtlCol="0" anchor="t"/>
-          <a:lstStyle/>
-          <a:p>
-            <a:pPr indent="0" marL="0">
-              <a:lnSpc>
-                <a:spcPct val="100000"/>
-              </a:lnSpc>
-              <a:buNone/>
-            </a:pPr>
-            <a:r>
-              <a:rPr lang="en-US" sz="1000" dirty="0">
-                <a:solidFill>
-                  <a:srgbClr val="9AA1AE"/>
-                </a:solidFill>
-                <a:latin typeface="Arial" pitchFamily="34" charset="0"/>
-                <a:ea typeface="Arial" pitchFamily="34" charset="-122"/>
-                <a:cs typeface="Arial" pitchFamily="34" charset="-120"/>
-              </a:rPr>
-              <a:t>El 0,995 es de la primera versión del experto estructural, con 5 rasgos, en la semilla de desarrollo.</a:t>
+              <a:t>Detalle en la sección de limitaciones del paper.</a:t>
             </a:r>
             <a:endParaRPr lang="en-US" sz="1000" dirty="0"/>
           </a:p>
@@ -8167,79 +8728,79 @@
         </p:nvSpPr>
         <p:spPr>
           <a:xfrm>
-            <a:off x="548640" y="411480"/>
-            <a:ext cx="7315200" cy="228600"/>
-          </a:xfrm>
-          <a:prstGeom prst="rect">
-            <a:avLst/>
-          </a:prstGeom>
-          <a:noFill/>
-          <a:ln/>
-        </p:spPr>
-        <p:txBody>
-          <a:bodyPr wrap="square" lIns="0" tIns="0" rIns="0" bIns="0" rtlCol="0" anchor="t"/>
-          <a:lstStyle/>
-          <a:p>
-            <a:pPr indent="0" marL="0">
-              <a:lnSpc>
-                <a:spcPct val="100000"/>
-              </a:lnSpc>
-              <a:buNone/>
-            </a:pPr>
-            <a:r>
-              <a:rPr lang="en-US" sz="1100" b="1" spc="200" kern="0" dirty="0">
-                <a:solidFill>
-                  <a:srgbClr val="9AA1AE"/>
+            <a:off x="731520" y="1920240"/>
+            <a:ext cx="7315200" cy="1097280"/>
+          </a:xfrm>
+          <a:prstGeom prst="rect">
+            <a:avLst/>
+          </a:prstGeom>
+          <a:noFill/>
+          <a:ln/>
+        </p:spPr>
+        <p:txBody>
+          <a:bodyPr wrap="square" lIns="0" tIns="0" rIns="0" bIns="0" rtlCol="0" anchor="t"/>
+          <a:lstStyle/>
+          <a:p>
+            <a:pPr indent="0" marL="0">
+              <a:lnSpc>
+                <a:spcPct val="100000"/>
+              </a:lnSpc>
+              <a:buNone/>
+            </a:pPr>
+            <a:r>
+              <a:rPr lang="en-US" sz="6400" dirty="0">
+                <a:solidFill>
+                  <a:srgbClr val="FFFFFF"/>
+                </a:solidFill>
+                <a:latin typeface="Georgia" pitchFamily="34" charset="0"/>
+                <a:ea typeface="Georgia" pitchFamily="34" charset="-122"/>
+                <a:cs typeface="Georgia" pitchFamily="34" charset="-120"/>
+              </a:rPr>
+              <a:t>¿Preguntas?</a:t>
+            </a:r>
+            <a:endParaRPr lang="en-US" sz="6400" dirty="0"/>
+          </a:p>
+        </p:txBody>
+      </p:sp>
+      <p:sp>
+        <p:nvSpPr>
+          <p:cNvPr id="3" name="Text 1"/>
+          <p:cNvSpPr txBox="1"/>
+          <p:nvPr/>
+        </p:nvSpPr>
+        <p:spPr>
+          <a:xfrm>
+            <a:off x="731520" y="3200400"/>
+            <a:ext cx="8229600" cy="411480"/>
+          </a:xfrm>
+          <a:prstGeom prst="rect">
+            <a:avLst/>
+          </a:prstGeom>
+          <a:noFill/>
+          <a:ln/>
+        </p:spPr>
+        <p:txBody>
+          <a:bodyPr wrap="square" lIns="0" tIns="0" rIns="0" bIns="0" rtlCol="0" anchor="t"/>
+          <a:lstStyle/>
+          <a:p>
+            <a:pPr indent="0" marL="0">
+              <a:lnSpc>
+                <a:spcPct val="100000"/>
+              </a:lnSpc>
+              <a:buNone/>
+            </a:pPr>
+            <a:r>
+              <a:rPr lang="en-US" sz="2000" dirty="0">
+                <a:solidFill>
+                  <a:srgbClr val="C8CEDA"/>
                 </a:solidFill>
                 <a:latin typeface="Arial" pitchFamily="34" charset="0"/>
                 <a:ea typeface="Arial" pitchFamily="34" charset="-122"/>
                 <a:cs typeface="Arial" pitchFamily="34" charset="-120"/>
               </a:rPr>
-              <a:t>EN RESUMEN</a:t>
-            </a:r>
-            <a:endParaRPr lang="en-US" sz="1100" dirty="0"/>
-          </a:p>
-        </p:txBody>
-      </p:sp>
-      <p:sp>
-        <p:nvSpPr>
-          <p:cNvPr id="3" name="Text 1"/>
-          <p:cNvSpPr txBox="1"/>
-          <p:nvPr/>
-        </p:nvSpPr>
-        <p:spPr>
-          <a:xfrm>
-            <a:off x="548640" y="731520"/>
-            <a:ext cx="10972800" cy="640080"/>
-          </a:xfrm>
-          <a:prstGeom prst="rect">
-            <a:avLst/>
-          </a:prstGeom>
-          <a:noFill/>
-          <a:ln/>
-        </p:spPr>
-        <p:txBody>
-          <a:bodyPr wrap="square" lIns="0" tIns="0" rIns="0" bIns="0" rtlCol="0" anchor="t"/>
-          <a:lstStyle/>
-          <a:p>
-            <a:pPr indent="0" marL="0">
-              <a:lnSpc>
-                <a:spcPct val="100000"/>
-              </a:lnSpc>
-              <a:buNone/>
-            </a:pPr>
-            <a:r>
-              <a:rPr lang="en-US" sz="3400" dirty="0">
-                <a:solidFill>
-                  <a:srgbClr val="FFFFFF"/>
-                </a:solidFill>
-                <a:latin typeface="Georgia" pitchFamily="34" charset="0"/>
-                <a:ea typeface="Georgia" pitchFamily="34" charset="-122"/>
-                <a:cs typeface="Georgia" pitchFamily="34" charset="-120"/>
-              </a:rPr>
-              <a:t>Cuándo combinar y cuándo reentrenar</a:t>
-            </a:r>
-            <a:endParaRPr lang="en-US" sz="3400" dirty="0"/>
+              <a:t>Combinar o reentrenar · Pablo Díaz y Ezequiel Martinez</a:t>
+            </a:r>
+            <a:endParaRPr lang="en-US" sz="2000" dirty="0"/>
           </a:p>
         </p:txBody>
       </p:sp>
@@ -8251,8 +8812,8 @@
         </p:nvSpPr>
         <p:spPr>
           <a:xfrm>
-            <a:off x="548640" y="1645920"/>
-            <a:ext cx="11091672" cy="0"/>
+            <a:off x="731520" y="4480560"/>
+            <a:ext cx="5486400" cy="0"/>
           </a:xfrm>
           <a:prstGeom prst="line">
             <a:avLst/>
@@ -8268,1399 +8829,187 @@
       </p:sp>
       <p:sp>
         <p:nvSpPr>
-          <p:cNvPr id="5" name="fila 1"/>
-          <p:cNvSpPr/>
-          <p:nvPr/>
-        </p:nvSpPr>
-        <p:spPr>
-          <a:xfrm>
-            <a:off x="548640" y="1901952"/>
-            <a:ext cx="274320" cy="274320"/>
-          </a:xfrm>
-          <a:prstGeom prst="ellipse">
-            <a:avLst/>
-          </a:prstGeom>
-          <a:solidFill>
-            <a:srgbClr val="1BAF7A"/>
-          </a:solidFill>
-          <a:ln/>
-        </p:spPr>
-      </p:sp>
-      <p:sp>
-        <p:nvSpPr>
-          <p:cNvPr id="6" name="Text 4"/>
-          <p:cNvSpPr txBox="1"/>
-          <p:nvPr/>
-        </p:nvSpPr>
-        <p:spPr>
-          <a:xfrm>
-            <a:off x="1051560" y="1828800"/>
-            <a:ext cx="3840480" cy="457200"/>
-          </a:xfrm>
-          <a:prstGeom prst="rect">
-            <a:avLst/>
-          </a:prstGeom>
-          <a:noFill/>
-          <a:ln/>
-        </p:spPr>
-        <p:txBody>
-          <a:bodyPr wrap="square" lIns="0" tIns="0" rIns="0" bIns="0" rtlCol="0" anchor="t"/>
-          <a:lstStyle/>
-          <a:p>
-            <a:pPr indent="0" marL="0">
-              <a:lnSpc>
-                <a:spcPct val="100000"/>
-              </a:lnSpc>
-              <a:buNone/>
-            </a:pPr>
-            <a:r>
-              <a:rPr lang="en-US" sz="2400" dirty="0">
-                <a:solidFill>
-                  <a:srgbClr val="FFFFFF"/>
-                </a:solidFill>
-                <a:latin typeface="Georgia" pitchFamily="34" charset="0"/>
-                <a:ea typeface="Georgia" pitchFamily="34" charset="-122"/>
-                <a:cs typeface="Georgia" pitchFamily="34" charset="-120"/>
-              </a:rPr>
-              <a:t>Etiquetas abundantes</a:t>
-            </a:r>
-            <a:endParaRPr lang="en-US" sz="2400" dirty="0"/>
-          </a:p>
-        </p:txBody>
-      </p:sp>
-      <p:sp>
-        <p:nvSpPr>
-          <p:cNvPr id="7" name="Text 5"/>
-          <p:cNvSpPr txBox="1"/>
-          <p:nvPr/>
-        </p:nvSpPr>
-        <p:spPr>
-          <a:xfrm>
-            <a:off x="5029200" y="1874520"/>
-            <a:ext cx="6583680" cy="731520"/>
-          </a:xfrm>
-          <a:prstGeom prst="rect">
-            <a:avLst/>
-          </a:prstGeom>
-          <a:noFill/>
-          <a:ln/>
-        </p:spPr>
-        <p:txBody>
-          <a:bodyPr wrap="square" lIns="0" tIns="0" rIns="0" bIns="0" rtlCol="0" anchor="t"/>
-          <a:lstStyle/>
-          <a:p>
-            <a:pPr indent="0" marL="0">
-              <a:lnSpc>
-                <a:spcPct val="100000"/>
-              </a:lnSpc>
-              <a:buNone/>
-            </a:pPr>
-            <a:r>
-              <a:rPr lang="en-US" sz="1800" dirty="0">
-                <a:solidFill>
-                  <a:srgbClr val="C8CEDA"/>
+          <p:cNvPr id="5" name="Text 3"/>
+          <p:cNvSpPr txBox="1"/>
+          <p:nvPr/>
+        </p:nvSpPr>
+        <p:spPr>
+          <a:xfrm>
+            <a:off x="731520" y="4663440"/>
+            <a:ext cx="7315200" cy="274320"/>
+          </a:xfrm>
+          <a:prstGeom prst="rect">
+            <a:avLst/>
+          </a:prstGeom>
+          <a:noFill/>
+          <a:ln/>
+        </p:spPr>
+        <p:txBody>
+          <a:bodyPr wrap="square" lIns="0" tIns="0" rIns="0" bIns="0" rtlCol="0" anchor="t"/>
+          <a:lstStyle/>
+          <a:p>
+            <a:pPr indent="0" marL="0">
+              <a:lnSpc>
+                <a:spcPct val="100000"/>
+              </a:lnSpc>
+              <a:buNone/>
+            </a:pPr>
+            <a:r>
+              <a:rPr lang="en-US" sz="1300" dirty="0">
+                <a:solidFill>
+                  <a:srgbClr val="9AA1AE"/>
                 </a:solidFill>
                 <a:latin typeface="Arial" pitchFamily="34" charset="0"/>
                 <a:ea typeface="Arial" pitchFamily="34" charset="-122"/>
                 <a:cs typeface="Arial" pitchFamily="34" charset="-120"/>
               </a:rPr>
-              <a:t>Reentrenar: SGD online comete 73 errores, contra 133 de Hedge.</a:t>
-            </a:r>
-            <a:endParaRPr lang="en-US" sz="1800" dirty="0"/>
-          </a:p>
-        </p:txBody>
-      </p:sp>
-      <p:sp>
-        <p:nvSpPr>
-          <p:cNvPr id="8" name="Shape 6"/>
-          <p:cNvSpPr/>
-          <p:nvPr/>
-        </p:nvSpPr>
-        <p:spPr>
-          <a:xfrm>
-            <a:off x="548640" y="2697480"/>
-            <a:ext cx="11091672" cy="0"/>
-          </a:xfrm>
-          <a:prstGeom prst="line">
-            <a:avLst/>
-          </a:prstGeom>
-          <a:noFill/>
-          <a:ln w="9525">
-            <a:solidFill>
-              <a:srgbClr val="3A4152"/>
-            </a:solidFill>
-            <a:prstDash val="solid"/>
-          </a:ln>
-        </p:spPr>
-      </p:sp>
-      <p:sp>
-        <p:nvSpPr>
-          <p:cNvPr id="9" name="fila 2"/>
-          <p:cNvSpPr/>
-          <p:nvPr/>
-        </p:nvSpPr>
-        <p:spPr>
-          <a:xfrm>
-            <a:off x="548640" y="2953512"/>
-            <a:ext cx="274320" cy="274320"/>
-          </a:xfrm>
-          <a:prstGeom prst="ellipse">
-            <a:avLst/>
-          </a:prstGeom>
-          <a:solidFill>
-            <a:srgbClr val="2A78D6"/>
-          </a:solidFill>
-          <a:ln/>
-        </p:spPr>
-      </p:sp>
-      <p:sp>
-        <p:nvSpPr>
-          <p:cNvPr id="10" name="Text 8"/>
-          <p:cNvSpPr txBox="1"/>
-          <p:nvPr/>
-        </p:nvSpPr>
-        <p:spPr>
-          <a:xfrm>
-            <a:off x="1051560" y="2880360"/>
-            <a:ext cx="3840480" cy="457200"/>
-          </a:xfrm>
-          <a:prstGeom prst="rect">
-            <a:avLst/>
-          </a:prstGeom>
-          <a:noFill/>
-          <a:ln/>
-        </p:spPr>
-        <p:txBody>
-          <a:bodyPr wrap="square" lIns="0" tIns="0" rIns="0" bIns="0" rtlCol="0" anchor="t"/>
-          <a:lstStyle/>
-          <a:p>
-            <a:pPr indent="0" marL="0">
-              <a:lnSpc>
-                <a:spcPct val="100000"/>
-              </a:lnSpc>
-              <a:buNone/>
-            </a:pPr>
-            <a:r>
-              <a:rPr lang="en-US" sz="2400" dirty="0">
-                <a:solidFill>
-                  <a:srgbClr val="FFFFFF"/>
-                </a:solidFill>
-                <a:latin typeface="Georgia" pitchFamily="34" charset="0"/>
-                <a:ea typeface="Georgia" pitchFamily="34" charset="-122"/>
-                <a:cs typeface="Georgia" pitchFamily="34" charset="-120"/>
-              </a:rPr>
-              <a:t>Etiquetas escasas</a:t>
-            </a:r>
-            <a:endParaRPr lang="en-US" sz="2400" dirty="0"/>
-          </a:p>
-        </p:txBody>
-      </p:sp>
-      <p:sp>
-        <p:nvSpPr>
-          <p:cNvPr id="11" name="Text 9"/>
-          <p:cNvSpPr txBox="1"/>
-          <p:nvPr/>
-        </p:nvSpPr>
-        <p:spPr>
-          <a:xfrm>
-            <a:off x="5029200" y="2926080"/>
-            <a:ext cx="6583680" cy="731520"/>
-          </a:xfrm>
-          <a:prstGeom prst="rect">
-            <a:avLst/>
-          </a:prstGeom>
-          <a:noFill/>
-          <a:ln/>
-        </p:spPr>
-        <p:txBody>
-          <a:bodyPr wrap="square" lIns="0" tIns="0" rIns="0" bIns="0" rtlCol="0" anchor="t"/>
-          <a:lstStyle/>
-          <a:p>
-            <a:pPr indent="0" marL="0">
-              <a:lnSpc>
-                <a:spcPct val="100000"/>
-              </a:lnSpc>
-              <a:buNone/>
-            </a:pPr>
-            <a:r>
-              <a:rPr lang="en-US" sz="1800" dirty="0">
-                <a:solidFill>
-                  <a:srgbClr val="C8CEDA"/>
+              <a:t>Código, datos y paper</a:t>
+            </a:r>
+            <a:endParaRPr lang="en-US" sz="1300" dirty="0"/>
+          </a:p>
+        </p:txBody>
+      </p:sp>
+      <p:sp>
+        <p:nvSpPr>
+          <p:cNvPr id="6" name="Text 4"/>
+          <p:cNvSpPr txBox="1"/>
+          <p:nvPr/>
+        </p:nvSpPr>
+        <p:spPr>
+          <a:xfrm>
+            <a:off x="731520" y="4983480"/>
+            <a:ext cx="8229600" cy="411480"/>
+          </a:xfrm>
+          <a:prstGeom prst="rect">
+            <a:avLst/>
+          </a:prstGeom>
+          <a:noFill/>
+          <a:ln/>
+        </p:spPr>
+        <p:txBody>
+          <a:bodyPr wrap="square" lIns="0" tIns="0" rIns="0" bIns="0" rtlCol="0" anchor="t"/>
+          <a:lstStyle/>
+          <a:p>
+            <a:pPr indent="0" marL="0">
+              <a:lnSpc>
+                <a:spcPct val="100000"/>
+              </a:lnSpc>
+              <a:buNone/>
+            </a:pPr>
+            <a:r>
+              <a:rPr lang="en-US" sz="2000" b="1" dirty="0">
+                <a:solidFill>
+                  <a:srgbClr val="AFCBEE"/>
                 </a:solidFill>
                 <a:latin typeface="Arial" pitchFamily="34" charset="0"/>
                 <a:ea typeface="Arial" pitchFamily="34" charset="-122"/>
                 <a:cs typeface="Arial" pitchFamily="34" charset="-120"/>
               </a:rPr>
-              <a:t>Combinar expertos diversos, con al menos uno robusto al ataque.</a:t>
-            </a:r>
-            <a:endParaRPr lang="en-US" sz="1800" dirty="0"/>
-          </a:p>
-        </p:txBody>
-      </p:sp>
-      <p:sp>
-        <p:nvSpPr>
-          <p:cNvPr id="12" name="Shape 10"/>
-          <p:cNvSpPr/>
-          <p:nvPr/>
-        </p:nvSpPr>
-        <p:spPr>
-          <a:xfrm>
-            <a:off x="548640" y="3749040"/>
-            <a:ext cx="11091672" cy="0"/>
-          </a:xfrm>
-          <a:prstGeom prst="line">
-            <a:avLst/>
-          </a:prstGeom>
-          <a:noFill/>
-          <a:ln w="9525">
-            <a:solidFill>
-              <a:srgbClr val="3A4152"/>
-            </a:solidFill>
-            <a:prstDash val="solid"/>
-          </a:ln>
-        </p:spPr>
-      </p:sp>
-      <p:sp>
-        <p:nvSpPr>
-          <p:cNvPr id="13" name="fila 3"/>
-          <p:cNvSpPr/>
-          <p:nvPr/>
-        </p:nvSpPr>
-        <p:spPr>
-          <a:xfrm>
-            <a:off x="548640" y="4005072"/>
-            <a:ext cx="274320" cy="274320"/>
+              <a:t>github.com/pmdiaz/spam-detection-hedge</a:t>
+            </a:r>
+            <a:endParaRPr lang="en-US" sz="2000" dirty="0"/>
+          </a:p>
+        </p:txBody>
+      </p:sp>
+      <p:sp>
+        <p:nvSpPr>
+          <p:cNvPr id="7" name="experto 1"/>
+          <p:cNvSpPr/>
+          <p:nvPr/>
+        </p:nvSpPr>
+        <p:spPr>
+          <a:xfrm>
+            <a:off x="9418320" y="5029200"/>
+            <a:ext cx="329184" cy="329184"/>
           </a:xfrm>
           <a:prstGeom prst="ellipse">
             <a:avLst/>
           </a:prstGeom>
           <a:solidFill>
-            <a:srgbClr val="C8CEDA"/>
+            <a:srgbClr val="EB6834"/>
           </a:solidFill>
           <a:ln/>
         </p:spPr>
       </p:sp>
       <p:sp>
         <p:nvSpPr>
-          <p:cNvPr id="14" name="Text 12"/>
-          <p:cNvSpPr txBox="1"/>
-          <p:nvPr/>
-        </p:nvSpPr>
-        <p:spPr>
-          <a:xfrm>
-            <a:off x="1051560" y="3931920"/>
-            <a:ext cx="3840480" cy="457200"/>
-          </a:xfrm>
-          <a:prstGeom prst="rect">
-            <a:avLst/>
-          </a:prstGeom>
-          <a:noFill/>
-          <a:ln/>
-        </p:spPr>
-        <p:txBody>
-          <a:bodyPr wrap="square" lIns="0" tIns="0" rIns="0" bIns="0" rtlCol="0" anchor="t"/>
-          <a:lstStyle/>
-          <a:p>
-            <a:pPr indent="0" marL="0">
-              <a:lnSpc>
-                <a:spcPct val="100000"/>
-              </a:lnSpc>
-              <a:buNone/>
-            </a:pPr>
-            <a:r>
-              <a:rPr lang="en-US" sz="2400" dirty="0">
-                <a:solidFill>
-                  <a:srgbClr val="FFFFFF"/>
-                </a:solidFill>
-                <a:latin typeface="Georgia" pitchFamily="34" charset="0"/>
-                <a:ea typeface="Georgia" pitchFamily="34" charset="-122"/>
-                <a:cs typeface="Georgia" pitchFamily="34" charset="-120"/>
-              </a:rPr>
-              <a:t>Siempre</a:t>
-            </a:r>
-            <a:endParaRPr lang="en-US" sz="2400" dirty="0"/>
-          </a:p>
-        </p:txBody>
-      </p:sp>
-      <p:sp>
-        <p:nvSpPr>
-          <p:cNvPr id="15" name="Text 13"/>
-          <p:cNvSpPr txBox="1"/>
-          <p:nvPr/>
-        </p:nvSpPr>
-        <p:spPr>
-          <a:xfrm>
-            <a:off x="5029200" y="3977640"/>
-            <a:ext cx="6583680" cy="731520"/>
-          </a:xfrm>
-          <a:prstGeom prst="rect">
-            <a:avLst/>
-          </a:prstGeom>
-          <a:noFill/>
-          <a:ln/>
-        </p:spPr>
-        <p:txBody>
-          <a:bodyPr wrap="square" lIns="0" tIns="0" rIns="0" bIns="0" rtlCol="0" anchor="t"/>
-          <a:lstStyle/>
-          <a:p>
-            <a:pPr indent="0" marL="0">
-              <a:lnSpc>
-                <a:spcPct val="100000"/>
-              </a:lnSpc>
-              <a:buNone/>
-            </a:pPr>
-            <a:r>
-              <a:rPr lang="en-US" sz="1800" dirty="0">
-                <a:solidFill>
-                  <a:srgbClr val="C8CEDA"/>
-                </a:solidFill>
-                <a:latin typeface="Arial" pitchFamily="34" charset="0"/>
-                <a:ea typeface="Arial" pitchFamily="34" charset="-122"/>
-                <a:cs typeface="Arial" pitchFamily="34" charset="-120"/>
-              </a:rPr>
-              <a:t>Medir spam atrapado y legítimo bloqueado por separado, no accuracy.</a:t>
-            </a:r>
-            <a:endParaRPr lang="en-US" sz="1800" dirty="0"/>
-          </a:p>
-        </p:txBody>
-      </p:sp>
-      <p:sp>
-        <p:nvSpPr>
-          <p:cNvPr id="16" name="Shape 14"/>
-          <p:cNvSpPr/>
-          <p:nvPr/>
-        </p:nvSpPr>
-        <p:spPr>
-          <a:xfrm>
-            <a:off x="548640" y="4800600"/>
-            <a:ext cx="11091672" cy="0"/>
-          </a:xfrm>
-          <a:prstGeom prst="line">
-            <a:avLst/>
-          </a:prstGeom>
-          <a:noFill/>
-          <a:ln w="9525">
-            <a:solidFill>
-              <a:srgbClr val="3A4152"/>
-            </a:solidFill>
-            <a:prstDash val="solid"/>
-          </a:ln>
-        </p:spPr>
-      </p:sp>
-      <p:sp>
-        <p:nvSpPr>
-          <p:cNvPr id="17" name="Text 15"/>
-          <p:cNvSpPr txBox="1"/>
-          <p:nvPr/>
-        </p:nvSpPr>
-        <p:spPr>
-          <a:xfrm>
-            <a:off x="548640" y="5257800"/>
-            <a:ext cx="11064240" cy="640080"/>
-          </a:xfrm>
-          <a:prstGeom prst="rect">
-            <a:avLst/>
-          </a:prstGeom>
-          <a:noFill/>
-          <a:ln/>
-        </p:spPr>
-        <p:txBody>
-          <a:bodyPr wrap="square" lIns="0" tIns="0" rIns="0" bIns="0" rtlCol="0" anchor="t"/>
-          <a:lstStyle/>
-          <a:p>
-            <a:pPr indent="0" marL="0">
-              <a:lnSpc>
-                <a:spcPct val="100000"/>
-              </a:lnSpc>
-              <a:buNone/>
-            </a:pPr>
-            <a:r>
-              <a:rPr lang="en-US" sz="2000" i="1" dirty="0">
-                <a:solidFill>
-                  <a:srgbClr val="AFCBEE"/>
-                </a:solidFill>
-                <a:latin typeface="Georgia" pitchFamily="34" charset="0"/>
-                <a:ea typeface="Georgia" pitchFamily="34" charset="-122"/>
-                <a:cs typeface="Georgia" pitchFamily="34" charset="-120"/>
-              </a:rPr>
-              <a:t>Pregunta abierta: ¿y si el modelo que reentrena fuera uno más de los expertos de Hedge? No lo probamos.</a:t>
-            </a:r>
-            <a:endParaRPr lang="en-US" sz="2000" dirty="0"/>
-          </a:p>
-        </p:txBody>
-      </p:sp>
-    </p:spTree>
-  </p:cSld>
-  <p:clrMapOvr>
-    <a:masterClrMapping/>
-  </p:clrMapOvr>
-  <p:transition spd="med">
-    <p:fade/>
-  </p:transition>
-</p:sld>
-</file>
-
-<file path=ppt/slides/slide19.xml><?xml version="1.0" encoding="utf-8"?>
-<p:sld xmlns:a="http://schemas.openxmlformats.org/drawingml/2006/main" xmlns:r="http://schemas.openxmlformats.org/officeDocument/2006/relationships" xmlns:p="http://schemas.openxmlformats.org/presentationml/2006/main">
-  <p:cSld name="Slide 19">
-    <p:spTree>
-      <p:nvGrpSpPr>
-        <p:cNvPr id="1" name=""/>
-        <p:cNvGrpSpPr/>
-        <p:nvPr/>
-      </p:nvGrpSpPr>
-      <p:grpSpPr>
-        <a:xfrm>
-          <a:off x="0" y="0"/>
-          <a:ext cx="0" cy="0"/>
-          <a:chOff x="0" y="0"/>
-          <a:chExt cx="0" cy="0"/>
-        </a:xfrm>
-      </p:grpSpPr>
-      <p:sp>
-        <p:nvSpPr>
-          <p:cNvPr id="2" name="Text 0"/>
-          <p:cNvSpPr txBox="1"/>
-          <p:nvPr/>
-        </p:nvSpPr>
-        <p:spPr>
-          <a:xfrm>
-            <a:off x="548640" y="411480"/>
-            <a:ext cx="7315200" cy="228600"/>
-          </a:xfrm>
-          <a:prstGeom prst="rect">
-            <a:avLst/>
-          </a:prstGeom>
-          <a:noFill/>
-          <a:ln/>
-        </p:spPr>
-        <p:txBody>
-          <a:bodyPr wrap="square" lIns="0" tIns="0" rIns="0" bIns="0" rtlCol="0" anchor="t"/>
-          <a:lstStyle/>
-          <a:p>
-            <a:pPr indent="0" marL="0">
-              <a:lnSpc>
-                <a:spcPct val="100000"/>
-              </a:lnSpc>
-              <a:buNone/>
-            </a:pPr>
-            <a:r>
-              <a:rPr lang="en-US" sz="1100" b="1" spc="200" kern="0" dirty="0">
-                <a:solidFill>
-                  <a:srgbClr val="5A6274"/>
-                </a:solidFill>
-                <a:latin typeface="Arial" pitchFamily="34" charset="0"/>
-                <a:ea typeface="Arial" pitchFamily="34" charset="-122"/>
-                <a:cs typeface="Arial" pitchFamily="34" charset="-120"/>
-              </a:rPr>
-              <a:t>LIMITACIONES</a:t>
-            </a:r>
-            <a:endParaRPr lang="en-US" sz="1100" dirty="0"/>
-          </a:p>
-        </p:txBody>
-      </p:sp>
-      <p:sp>
-        <p:nvSpPr>
-          <p:cNvPr id="3" name="Text 0"/>
-          <p:cNvSpPr/>
-          <p:nvPr>
-            <p:ph idx="100" type="title" hasCustomPrompt="1"/>
-          </p:nvPr>
-        </p:nvSpPr>
-        <p:spPr>
-          <a:xfrm>
-            <a:off x="548640" y="731520"/>
-            <a:ext cx="10424160" cy="566928"/>
-          </a:xfrm>
-          <a:prstGeom prst="rect">
-            <a:avLst/>
-          </a:prstGeom>
-          <a:noFill/>
-          <a:ln/>
-        </p:spPr>
-        <p:txBody>
-          <a:bodyPr wrap="square" lIns="0" tIns="0" rIns="0" bIns="0" rtlCol="0" anchor="t"/>
-          <a:lstStyle/>
-          <a:p>
-            <a:pPr indent="0" marL="0">
-              <a:buNone/>
-            </a:pPr>
-            <a:r>
-              <a:rPr lang="en-US" sz="3000" dirty="0">
-                <a:solidFill>
-                  <a:srgbClr val="1F2430"/>
-                </a:solidFill>
-                <a:latin typeface="Georgia" pitchFamily="34" charset="0"/>
-                <a:ea typeface="Georgia" pitchFamily="34" charset="-122"/>
-                <a:cs typeface="Georgia" pitchFamily="34" charset="-120"/>
-              </a:rPr>
-              <a:t>Lo que este trabajo no muestra</a:t>
-            </a:r>
-            <a:endParaRPr lang="en-US" sz="3000" dirty="0"/>
-          </a:p>
-        </p:txBody>
-      </p:sp>
-      <p:sp>
-        <p:nvSpPr>
-          <p:cNvPr id="4" name="Text 2"/>
-          <p:cNvSpPr txBox="1"/>
-          <p:nvPr/>
-        </p:nvSpPr>
-        <p:spPr>
-          <a:xfrm>
-            <a:off x="9235440" y="429768"/>
-            <a:ext cx="1554480" cy="201168"/>
-          </a:xfrm>
-          <a:prstGeom prst="rect">
-            <a:avLst/>
-          </a:prstGeom>
-          <a:noFill/>
-          <a:ln/>
-        </p:spPr>
-        <p:txBody>
-          <a:bodyPr wrap="square" lIns="0" tIns="0" rIns="0" bIns="0" rtlCol="0" anchor="t"/>
-          <a:lstStyle/>
-          <a:p>
-            <a:pPr algn="r" indent="0" marL="0">
-              <a:lnSpc>
-                <a:spcPct val="100000"/>
-              </a:lnSpc>
-              <a:buNone/>
-            </a:pPr>
-            <a:r>
-              <a:rPr lang="en-US" sz="900" b="1" spc="200" kern="0" dirty="0">
-                <a:solidFill>
-                  <a:srgbClr val="9AA1AE"/>
-                </a:solidFill>
-                <a:latin typeface="Arial" pitchFamily="34" charset="0"/>
-                <a:ea typeface="Arial" pitchFamily="34" charset="-122"/>
-                <a:cs typeface="Arial" pitchFamily="34" charset="-120"/>
-              </a:rPr>
-              <a:t>HALLAZGOS</a:t>
-            </a:r>
-            <a:endParaRPr lang="en-US" sz="900" dirty="0"/>
-          </a:p>
-        </p:txBody>
-      </p:sp>
-      <p:sp>
-        <p:nvSpPr>
-          <p:cNvPr id="5" name="hallazgo 1"/>
-          <p:cNvSpPr/>
-          <p:nvPr/>
-        </p:nvSpPr>
-        <p:spPr>
-          <a:xfrm>
-            <a:off x="10899648" y="457200"/>
-            <a:ext cx="137160" cy="137160"/>
+          <p:cNvPr id="8" name="experto 2"/>
+          <p:cNvSpPr/>
+          <p:nvPr/>
+        </p:nvSpPr>
+        <p:spPr>
+          <a:xfrm>
+            <a:off x="9875520" y="5029200"/>
+            <a:ext cx="329184" cy="329184"/>
           </a:xfrm>
           <a:prstGeom prst="ellipse">
             <a:avLst/>
           </a:prstGeom>
-          <a:ln w="15875">
-            <a:solidFill>
-              <a:srgbClr val="9AA1AE"/>
-            </a:solidFill>
-            <a:prstDash val="solid"/>
-          </a:ln>
-        </p:spPr>
-      </p:sp>
-      <p:sp>
-        <p:nvSpPr>
-          <p:cNvPr id="6" name="hallazgo 2"/>
-          <p:cNvSpPr/>
-          <p:nvPr/>
-        </p:nvSpPr>
-        <p:spPr>
-          <a:xfrm>
-            <a:off x="11100816" y="457200"/>
-            <a:ext cx="137160" cy="137160"/>
+          <a:solidFill>
+            <a:srgbClr val="008300"/>
+          </a:solidFill>
+          <a:ln/>
+        </p:spPr>
+      </p:sp>
+      <p:sp>
+        <p:nvSpPr>
+          <p:cNvPr id="9" name="experto 3"/>
+          <p:cNvSpPr/>
+          <p:nvPr/>
+        </p:nvSpPr>
+        <p:spPr>
+          <a:xfrm>
+            <a:off x="10332720" y="5029200"/>
+            <a:ext cx="329184" cy="329184"/>
           </a:xfrm>
           <a:prstGeom prst="ellipse">
             <a:avLst/>
           </a:prstGeom>
-          <a:ln w="15875">
-            <a:solidFill>
-              <a:srgbClr val="9AA1AE"/>
-            </a:solidFill>
-            <a:prstDash val="solid"/>
-          </a:ln>
-        </p:spPr>
-      </p:sp>
-      <p:sp>
-        <p:nvSpPr>
-          <p:cNvPr id="7" name="hallazgo 3"/>
-          <p:cNvSpPr/>
-          <p:nvPr/>
-        </p:nvSpPr>
-        <p:spPr>
-          <a:xfrm>
-            <a:off x="11301984" y="457200"/>
-            <a:ext cx="137160" cy="137160"/>
+          <a:solidFill>
+            <a:srgbClr val="008300"/>
+          </a:solidFill>
+          <a:ln/>
+        </p:spPr>
+      </p:sp>
+      <p:sp>
+        <p:nvSpPr>
+          <p:cNvPr id="10" name="experto 4"/>
+          <p:cNvSpPr/>
+          <p:nvPr/>
+        </p:nvSpPr>
+        <p:spPr>
+          <a:xfrm>
+            <a:off x="10789920" y="5029200"/>
+            <a:ext cx="329184" cy="329184"/>
           </a:xfrm>
           <a:prstGeom prst="ellipse">
             <a:avLst/>
           </a:prstGeom>
-          <a:ln w="15875">
-            <a:solidFill>
-              <a:srgbClr val="9AA1AE"/>
-            </a:solidFill>
-            <a:prstDash val="solid"/>
-          </a:ln>
-        </p:spPr>
-      </p:sp>
-      <p:sp>
-        <p:nvSpPr>
-          <p:cNvPr id="8" name="hallazgo 4"/>
-          <p:cNvSpPr/>
-          <p:nvPr/>
-        </p:nvSpPr>
-        <p:spPr>
-          <a:xfrm>
-            <a:off x="11503152" y="457200"/>
-            <a:ext cx="137160" cy="137160"/>
+          <a:solidFill>
+            <a:srgbClr val="008300"/>
+          </a:solidFill>
+          <a:ln/>
+        </p:spPr>
+      </p:sp>
+      <p:sp>
+        <p:nvSpPr>
+          <p:cNvPr id="11" name="experto 5"/>
+          <p:cNvSpPr/>
+          <p:nvPr/>
+        </p:nvSpPr>
+        <p:spPr>
+          <a:xfrm>
+            <a:off x="11247120" y="5029200"/>
+            <a:ext cx="329184" cy="329184"/>
           </a:xfrm>
           <a:prstGeom prst="ellipse">
             <a:avLst/>
           </a:prstGeom>
-          <a:ln w="15875">
-            <a:solidFill>
-              <a:srgbClr val="9AA1AE"/>
-            </a:solidFill>
-            <a:prstDash val="solid"/>
-          </a:ln>
-        </p:spPr>
-      </p:sp>
-      <p:sp>
-        <p:nvSpPr>
-          <p:cNvPr id="9" name="Shape 7"/>
-          <p:cNvSpPr/>
-          <p:nvPr/>
-        </p:nvSpPr>
-        <p:spPr>
-          <a:xfrm>
-            <a:off x="548640" y="1828800"/>
-            <a:ext cx="3520440" cy="0"/>
-          </a:xfrm>
-          <a:prstGeom prst="line">
-            <a:avLst/>
-          </a:prstGeom>
-          <a:noFill/>
-          <a:ln w="9525">
-            <a:solidFill>
-              <a:srgbClr val="1F2430"/>
-            </a:solidFill>
-            <a:prstDash val="solid"/>
-          </a:ln>
-        </p:spPr>
-      </p:sp>
-      <p:sp>
-        <p:nvSpPr>
-          <p:cNvPr id="10" name="Text 8"/>
-          <p:cNvSpPr txBox="1"/>
-          <p:nvPr/>
-        </p:nvSpPr>
-        <p:spPr>
-          <a:xfrm>
-            <a:off x="548640" y="2011680"/>
-            <a:ext cx="3474720" cy="640080"/>
-          </a:xfrm>
-          <a:prstGeom prst="rect">
-            <a:avLst/>
-          </a:prstGeom>
-          <a:noFill/>
-          <a:ln/>
-        </p:spPr>
-        <p:txBody>
-          <a:bodyPr wrap="square" lIns="0" tIns="0" rIns="0" bIns="0" rtlCol="0" anchor="t"/>
-          <a:lstStyle/>
-          <a:p>
-            <a:pPr indent="0" marL="0">
-              <a:lnSpc>
-                <a:spcPct val="100000"/>
-              </a:lnSpc>
-              <a:buNone/>
-            </a:pPr>
-            <a:r>
-              <a:rPr lang="en-US" sz="1900" dirty="0">
-                <a:solidFill>
-                  <a:srgbClr val="1F2430"/>
-                </a:solidFill>
-                <a:latin typeface="Georgia" pitchFamily="34" charset="0"/>
-                <a:ea typeface="Georgia" pitchFamily="34" charset="-122"/>
-                <a:cs typeface="Georgia" pitchFamily="34" charset="-120"/>
-              </a:rPr>
-              <a:t>Drift sintético</a:t>
-            </a:r>
-            <a:endParaRPr lang="en-US" sz="1900" dirty="0"/>
-          </a:p>
-        </p:txBody>
-      </p:sp>
-      <p:sp>
-        <p:nvSpPr>
-          <p:cNvPr id="11" name="Text 9"/>
-          <p:cNvSpPr txBox="1"/>
-          <p:nvPr/>
-        </p:nvSpPr>
-        <p:spPr>
-          <a:xfrm>
-            <a:off x="548640" y="2697480"/>
-            <a:ext cx="3474720" cy="868680"/>
-          </a:xfrm>
-          <a:prstGeom prst="rect">
-            <a:avLst/>
-          </a:prstGeom>
-          <a:noFill/>
-          <a:ln/>
-        </p:spPr>
-        <p:txBody>
-          <a:bodyPr wrap="square" lIns="0" tIns="0" rIns="0" bIns="0" rtlCol="0" anchor="t"/>
-          <a:lstStyle/>
-          <a:p>
-            <a:pPr indent="0" marL="0">
-              <a:lnSpc>
-                <a:spcPct val="100000"/>
-              </a:lnSpc>
-              <a:buNone/>
-            </a:pPr>
-            <a:r>
-              <a:rPr lang="en-US" sz="1500" dirty="0">
-                <a:solidFill>
-                  <a:srgbClr val="5A6274"/>
-                </a:solidFill>
-                <a:latin typeface="Arial" pitchFamily="34" charset="0"/>
-                <a:ea typeface="Arial" pitchFamily="34" charset="-122"/>
-                <a:cs typeface="Arial" pitchFamily="34" charset="-120"/>
-              </a:rPr>
-              <a:t>El corpus no tiene fechas: el orden y el ataque son nuestros.</a:t>
-            </a:r>
-            <a:endParaRPr lang="en-US" sz="1500" dirty="0"/>
-          </a:p>
-        </p:txBody>
-      </p:sp>
-      <p:sp>
-        <p:nvSpPr>
-          <p:cNvPr id="12" name="Shape 10"/>
-          <p:cNvSpPr/>
-          <p:nvPr/>
-        </p:nvSpPr>
-        <p:spPr>
-          <a:xfrm>
-            <a:off x="4370832" y="1828800"/>
-            <a:ext cx="3520440" cy="0"/>
-          </a:xfrm>
-          <a:prstGeom prst="line">
-            <a:avLst/>
-          </a:prstGeom>
-          <a:noFill/>
-          <a:ln w="9525">
-            <a:solidFill>
-              <a:srgbClr val="1F2430"/>
-            </a:solidFill>
-            <a:prstDash val="solid"/>
-          </a:ln>
-        </p:spPr>
-      </p:sp>
-      <p:sp>
-        <p:nvSpPr>
-          <p:cNvPr id="13" name="Text 11"/>
-          <p:cNvSpPr txBox="1"/>
-          <p:nvPr/>
-        </p:nvSpPr>
-        <p:spPr>
-          <a:xfrm>
-            <a:off x="4370832" y="2011680"/>
-            <a:ext cx="3474720" cy="640080"/>
-          </a:xfrm>
-          <a:prstGeom prst="rect">
-            <a:avLst/>
-          </a:prstGeom>
-          <a:noFill/>
-          <a:ln/>
-        </p:spPr>
-        <p:txBody>
-          <a:bodyPr wrap="square" lIns="0" tIns="0" rIns="0" bIns="0" rtlCol="0" anchor="t"/>
-          <a:lstStyle/>
-          <a:p>
-            <a:pPr indent="0" marL="0">
-              <a:lnSpc>
-                <a:spcPct val="100000"/>
-              </a:lnSpc>
-              <a:buNone/>
-            </a:pPr>
-            <a:r>
-              <a:rPr lang="en-US" sz="1900" dirty="0">
-                <a:solidFill>
-                  <a:srgbClr val="1F2430"/>
-                </a:solidFill>
-                <a:latin typeface="Georgia" pitchFamily="34" charset="0"/>
-                <a:ea typeface="Georgia" pitchFamily="34" charset="-122"/>
-                <a:cs typeface="Georgia" pitchFamily="34" charset="-120"/>
-              </a:rPr>
-              <a:t>Adversario que no reacciona</a:t>
-            </a:r>
-            <a:endParaRPr lang="en-US" sz="1900" dirty="0"/>
-          </a:p>
-        </p:txBody>
-      </p:sp>
-      <p:sp>
-        <p:nvSpPr>
-          <p:cNvPr id="14" name="Text 12"/>
-          <p:cNvSpPr txBox="1"/>
-          <p:nvPr/>
-        </p:nvSpPr>
-        <p:spPr>
-          <a:xfrm>
-            <a:off x="4370832" y="2697480"/>
-            <a:ext cx="3474720" cy="868680"/>
-          </a:xfrm>
-          <a:prstGeom prst="rect">
-            <a:avLst/>
-          </a:prstGeom>
-          <a:noFill/>
-          <a:ln/>
-        </p:spPr>
-        <p:txBody>
-          <a:bodyPr wrap="square" lIns="0" tIns="0" rIns="0" bIns="0" rtlCol="0" anchor="t"/>
-          <a:lstStyle/>
-          <a:p>
-            <a:pPr indent="0" marL="0">
-              <a:lnSpc>
-                <a:spcPct val="100000"/>
-              </a:lnSpc>
-              <a:buNone/>
-            </a:pPr>
-            <a:r>
-              <a:rPr lang="en-US" sz="1500" dirty="0">
-                <a:solidFill>
-                  <a:srgbClr val="5A6274"/>
-                </a:solidFill>
-                <a:latin typeface="Arial" pitchFamily="34" charset="0"/>
-                <a:ea typeface="Arial" pitchFamily="34" charset="-122"/>
-                <a:cs typeface="Arial" pitchFamily="34" charset="-120"/>
-              </a:rPr>
-              <a:t>Uno adaptativo degradaría las tasas de √T a T^(2/3).</a:t>
-            </a:r>
-            <a:endParaRPr lang="en-US" sz="1500" dirty="0"/>
-          </a:p>
-        </p:txBody>
-      </p:sp>
-      <p:sp>
-        <p:nvSpPr>
-          <p:cNvPr id="15" name="Shape 13"/>
-          <p:cNvSpPr/>
-          <p:nvPr/>
-        </p:nvSpPr>
-        <p:spPr>
-          <a:xfrm>
-            <a:off x="8193024" y="1828800"/>
-            <a:ext cx="3520440" cy="0"/>
-          </a:xfrm>
-          <a:prstGeom prst="line">
-            <a:avLst/>
-          </a:prstGeom>
-          <a:noFill/>
-          <a:ln w="9525">
-            <a:solidFill>
-              <a:srgbClr val="1F2430"/>
-            </a:solidFill>
-            <a:prstDash val="solid"/>
-          </a:ln>
-        </p:spPr>
-      </p:sp>
-      <p:sp>
-        <p:nvSpPr>
-          <p:cNvPr id="16" name="Text 14"/>
-          <p:cNvSpPr txBox="1"/>
-          <p:nvPr/>
-        </p:nvSpPr>
-        <p:spPr>
-          <a:xfrm>
-            <a:off x="8193024" y="2011680"/>
-            <a:ext cx="3474720" cy="640080"/>
-          </a:xfrm>
-          <a:prstGeom prst="rect">
-            <a:avLst/>
-          </a:prstGeom>
-          <a:noFill/>
-          <a:ln/>
-        </p:spPr>
-        <p:txBody>
-          <a:bodyPr wrap="square" lIns="0" tIns="0" rIns="0" bIns="0" rtlCol="0" anchor="t"/>
-          <a:lstStyle/>
-          <a:p>
-            <a:pPr indent="0" marL="0">
-              <a:lnSpc>
-                <a:spcPct val="100000"/>
-              </a:lnSpc>
-              <a:buNone/>
-            </a:pPr>
-            <a:r>
-              <a:rPr lang="en-US" sz="1900" dirty="0">
-                <a:solidFill>
-                  <a:srgbClr val="1F2430"/>
-                </a:solidFill>
-                <a:latin typeface="Georgia" pitchFamily="34" charset="0"/>
-                <a:ea typeface="Georgia" pitchFamily="34" charset="-122"/>
-                <a:cs typeface="Georgia" pitchFamily="34" charset="-120"/>
-              </a:rPr>
-              <a:t>Experto robusto por construcción</a:t>
-            </a:r>
-            <a:endParaRPr lang="en-US" sz="1900" dirty="0"/>
-          </a:p>
-        </p:txBody>
-      </p:sp>
-      <p:sp>
-        <p:nvSpPr>
-          <p:cNvPr id="17" name="Text 15"/>
-          <p:cNvSpPr txBox="1"/>
-          <p:nvPr/>
-        </p:nvSpPr>
-        <p:spPr>
-          <a:xfrm>
-            <a:off x="8193024" y="2697480"/>
-            <a:ext cx="3474720" cy="868680"/>
-          </a:xfrm>
-          <a:prstGeom prst="rect">
-            <a:avLst/>
-          </a:prstGeom>
-          <a:noFill/>
-          <a:ln/>
-        </p:spPr>
-        <p:txBody>
-          <a:bodyPr wrap="square" lIns="0" tIns="0" rIns="0" bIns="0" rtlCol="0" anchor="t"/>
-          <a:lstStyle/>
-          <a:p>
-            <a:pPr indent="0" marL="0">
-              <a:lnSpc>
-                <a:spcPct val="100000"/>
-              </a:lnSpc>
-              <a:buNone/>
-            </a:pPr>
-            <a:r>
-              <a:rPr lang="en-US" sz="1500" dirty="0">
-                <a:solidFill>
-                  <a:srgbClr val="5A6274"/>
-                </a:solidFill>
-                <a:latin typeface="Arial" pitchFamily="34" charset="0"/>
-                <a:ea typeface="Arial" pitchFamily="34" charset="-122"/>
-                <a:cs typeface="Arial" pitchFamily="34" charset="-120"/>
-              </a:rPr>
-              <a:t>El ataque no toca dígitos ni símbolos; uno que lo hiciera lo rompería.</a:t>
-            </a:r>
-            <a:endParaRPr lang="en-US" sz="1500" dirty="0"/>
-          </a:p>
-        </p:txBody>
-      </p:sp>
-      <p:sp>
-        <p:nvSpPr>
-          <p:cNvPr id="18" name="Shape 16"/>
-          <p:cNvSpPr/>
-          <p:nvPr/>
-        </p:nvSpPr>
-        <p:spPr>
-          <a:xfrm>
-            <a:off x="548640" y="3931920"/>
-            <a:ext cx="3520440" cy="0"/>
-          </a:xfrm>
-          <a:prstGeom prst="line">
-            <a:avLst/>
-          </a:prstGeom>
-          <a:noFill/>
-          <a:ln w="9525">
-            <a:solidFill>
-              <a:srgbClr val="1F2430"/>
-            </a:solidFill>
-            <a:prstDash val="solid"/>
-          </a:ln>
-        </p:spPr>
-      </p:sp>
-      <p:sp>
-        <p:nvSpPr>
-          <p:cNvPr id="19" name="Text 17"/>
-          <p:cNvSpPr txBox="1"/>
-          <p:nvPr/>
-        </p:nvSpPr>
-        <p:spPr>
-          <a:xfrm>
-            <a:off x="548640" y="4114800"/>
-            <a:ext cx="3474720" cy="640080"/>
-          </a:xfrm>
-          <a:prstGeom prst="rect">
-            <a:avLst/>
-          </a:prstGeom>
-          <a:noFill/>
-          <a:ln/>
-        </p:spPr>
-        <p:txBody>
-          <a:bodyPr wrap="square" lIns="0" tIns="0" rIns="0" bIns="0" rtlCol="0" anchor="t"/>
-          <a:lstStyle/>
-          <a:p>
-            <a:pPr indent="0" marL="0">
-              <a:lnSpc>
-                <a:spcPct val="100000"/>
-              </a:lnSpc>
-              <a:buNone/>
-            </a:pPr>
-            <a:r>
-              <a:rPr lang="en-US" sz="1900" dirty="0">
-                <a:solidFill>
-                  <a:srgbClr val="1F2430"/>
-                </a:solidFill>
-                <a:latin typeface="Georgia" pitchFamily="34" charset="0"/>
-                <a:ea typeface="Georgia" pitchFamily="34" charset="-122"/>
-                <a:cs typeface="Georgia" pitchFamily="34" charset="-120"/>
-              </a:rPr>
-              <a:t>Pérdida 0-1 simétrica</a:t>
-            </a:r>
-            <a:endParaRPr lang="en-US" sz="1900" dirty="0"/>
-          </a:p>
-        </p:txBody>
-      </p:sp>
-      <p:sp>
-        <p:nvSpPr>
-          <p:cNvPr id="20" name="Text 18"/>
-          <p:cNvSpPr txBox="1"/>
-          <p:nvPr/>
-        </p:nvSpPr>
-        <p:spPr>
-          <a:xfrm>
-            <a:off x="548640" y="4800600"/>
-            <a:ext cx="3474720" cy="868680"/>
-          </a:xfrm>
-          <a:prstGeom prst="rect">
-            <a:avLst/>
-          </a:prstGeom>
-          <a:noFill/>
-          <a:ln/>
-        </p:spPr>
-        <p:txBody>
-          <a:bodyPr wrap="square" lIns="0" tIns="0" rIns="0" bIns="0" rtlCol="0" anchor="t"/>
-          <a:lstStyle/>
-          <a:p>
-            <a:pPr indent="0" marL="0">
-              <a:lnSpc>
-                <a:spcPct val="100000"/>
-              </a:lnSpc>
-              <a:buNone/>
-            </a:pPr>
-            <a:r>
-              <a:rPr lang="en-US" sz="1500" dirty="0">
-                <a:solidFill>
-                  <a:srgbClr val="5A6274"/>
-                </a:solidFill>
-                <a:latin typeface="Arial" pitchFamily="34" charset="0"/>
-                <a:ea typeface="Arial" pitchFamily="34" charset="-122"/>
-                <a:cs typeface="Arial" pitchFamily="34" charset="-120"/>
-              </a:rPr>
-              <a:t>Bloquear un mensaje legítimo cuesta más que dejar pasar spam.</a:t>
-            </a:r>
-            <a:endParaRPr lang="en-US" sz="1500" dirty="0"/>
-          </a:p>
-        </p:txBody>
-      </p:sp>
-      <p:sp>
-        <p:nvSpPr>
-          <p:cNvPr id="21" name="Shape 19"/>
-          <p:cNvSpPr/>
-          <p:nvPr/>
-        </p:nvSpPr>
-        <p:spPr>
-          <a:xfrm>
-            <a:off x="4370832" y="3931920"/>
-            <a:ext cx="3520440" cy="0"/>
-          </a:xfrm>
-          <a:prstGeom prst="line">
-            <a:avLst/>
-          </a:prstGeom>
-          <a:noFill/>
-          <a:ln w="9525">
-            <a:solidFill>
-              <a:srgbClr val="1F2430"/>
-            </a:solidFill>
-            <a:prstDash val="solid"/>
-          </a:ln>
-        </p:spPr>
-      </p:sp>
-      <p:sp>
-        <p:nvSpPr>
-          <p:cNvPr id="22" name="Text 20"/>
-          <p:cNvSpPr txBox="1"/>
-          <p:nvPr/>
-        </p:nvSpPr>
-        <p:spPr>
-          <a:xfrm>
-            <a:off x="4370832" y="4114800"/>
-            <a:ext cx="3474720" cy="640080"/>
-          </a:xfrm>
-          <a:prstGeom prst="rect">
-            <a:avLst/>
-          </a:prstGeom>
-          <a:noFill/>
-          <a:ln/>
-        </p:spPr>
-        <p:txBody>
-          <a:bodyPr wrap="square" lIns="0" tIns="0" rIns="0" bIns="0" rtlCol="0" anchor="t"/>
-          <a:lstStyle/>
-          <a:p>
-            <a:pPr indent="0" marL="0">
-              <a:lnSpc>
-                <a:spcPct val="100000"/>
-              </a:lnSpc>
-              <a:buNone/>
-            </a:pPr>
-            <a:r>
-              <a:rPr lang="en-US" sz="1900" dirty="0">
-                <a:solidFill>
-                  <a:srgbClr val="1F2430"/>
-                </a:solidFill>
-                <a:latin typeface="Georgia" pitchFamily="34" charset="0"/>
-                <a:ea typeface="Georgia" pitchFamily="34" charset="-122"/>
-                <a:cs typeface="Georgia" pitchFamily="34" charset="-120"/>
-              </a:rPr>
-              <a:t>Etiqueta de dos lados</a:t>
-            </a:r>
-            <a:endParaRPr lang="en-US" sz="1900" dirty="0"/>
-          </a:p>
-        </p:txBody>
-      </p:sp>
-      <p:sp>
-        <p:nvSpPr>
-          <p:cNvPr id="23" name="Text 21"/>
-          <p:cNvSpPr txBox="1"/>
-          <p:nvPr/>
-        </p:nvSpPr>
-        <p:spPr>
-          <a:xfrm>
-            <a:off x="4370832" y="4800600"/>
-            <a:ext cx="3474720" cy="868680"/>
-          </a:xfrm>
-          <a:prstGeom prst="rect">
-            <a:avLst/>
-          </a:prstGeom>
-          <a:noFill/>
-          <a:ln/>
-        </p:spPr>
-        <p:txBody>
-          <a:bodyPr wrap="square" lIns="0" tIns="0" rIns="0" bIns="0" rtlCol="0" anchor="t"/>
-          <a:lstStyle/>
-          <a:p>
-            <a:pPr indent="0" marL="0">
-              <a:lnSpc>
-                <a:spcPct val="100000"/>
-              </a:lnSpc>
-              <a:buNone/>
-            </a:pPr>
-            <a:r>
-              <a:rPr lang="en-US" sz="1500" dirty="0">
-                <a:solidFill>
-                  <a:srgbClr val="5A6274"/>
-                </a:solidFill>
-                <a:latin typeface="Arial" pitchFamily="34" charset="0"/>
-                <a:ea typeface="Arial" pitchFamily="34" charset="-122"/>
-                <a:cs typeface="Arial" pitchFamily="34" charset="-120"/>
-              </a:rPr>
-              <a:t>En la práctica solo se ven los errores de lo que se entrega.</a:t>
-            </a:r>
-            <a:endParaRPr lang="en-US" sz="1500" dirty="0"/>
-          </a:p>
-        </p:txBody>
-      </p:sp>
-      <p:sp>
-        <p:nvSpPr>
-          <p:cNvPr id="24" name="Shape 22"/>
-          <p:cNvSpPr/>
-          <p:nvPr/>
-        </p:nvSpPr>
-        <p:spPr>
-          <a:xfrm>
-            <a:off x="8193024" y="3931920"/>
-            <a:ext cx="3520440" cy="0"/>
-          </a:xfrm>
-          <a:prstGeom prst="line">
-            <a:avLst/>
-          </a:prstGeom>
-          <a:noFill/>
-          <a:ln w="9525">
-            <a:solidFill>
-              <a:srgbClr val="1F2430"/>
-            </a:solidFill>
-            <a:prstDash val="solid"/>
-          </a:ln>
-        </p:spPr>
-      </p:sp>
-      <p:sp>
-        <p:nvSpPr>
-          <p:cNvPr id="25" name="Text 23"/>
-          <p:cNvSpPr txBox="1"/>
-          <p:nvPr/>
-        </p:nvSpPr>
-        <p:spPr>
-          <a:xfrm>
-            <a:off x="8193024" y="4114800"/>
-            <a:ext cx="3474720" cy="640080"/>
-          </a:xfrm>
-          <a:prstGeom prst="rect">
-            <a:avLst/>
-          </a:prstGeom>
-          <a:noFill/>
-          <a:ln/>
-        </p:spPr>
-        <p:txBody>
-          <a:bodyPr wrap="square" lIns="0" tIns="0" rIns="0" bIns="0" rtlCol="0" anchor="t"/>
-          <a:lstStyle/>
-          <a:p>
-            <a:pPr indent="0" marL="0">
-              <a:lnSpc>
-                <a:spcPct val="100000"/>
-              </a:lnSpc>
-              <a:buNone/>
-            </a:pPr>
-            <a:r>
-              <a:rPr lang="en-US" sz="1900" dirty="0">
-                <a:solidFill>
-                  <a:srgbClr val="1F2430"/>
-                </a:solidFill>
-                <a:latin typeface="Georgia" pitchFamily="34" charset="0"/>
-                <a:ea typeface="Georgia" pitchFamily="34" charset="-122"/>
-                <a:cs typeface="Georgia" pitchFamily="34" charset="-120"/>
-              </a:rPr>
-              <a:t>Un solo corpus</a:t>
-            </a:r>
-            <a:endParaRPr lang="en-US" sz="1900" dirty="0"/>
-          </a:p>
-        </p:txBody>
-      </p:sp>
-      <p:sp>
-        <p:nvSpPr>
-          <p:cNvPr id="26" name="Text 24"/>
-          <p:cNvSpPr txBox="1"/>
-          <p:nvPr/>
-        </p:nvSpPr>
-        <p:spPr>
-          <a:xfrm>
-            <a:off x="8193024" y="4800600"/>
-            <a:ext cx="3474720" cy="868680"/>
-          </a:xfrm>
-          <a:prstGeom prst="rect">
-            <a:avLst/>
-          </a:prstGeom>
-          <a:noFill/>
-          <a:ln/>
-        </p:spPr>
-        <p:txBody>
-          <a:bodyPr wrap="square" lIns="0" tIns="0" rIns="0" bIns="0" rtlCol="0" anchor="t"/>
-          <a:lstStyle/>
-          <a:p>
-            <a:pPr indent="0" marL="0">
-              <a:lnSpc>
-                <a:spcPct val="100000"/>
-              </a:lnSpc>
-              <a:buNone/>
-            </a:pPr>
-            <a:r>
-              <a:rPr lang="en-US" sz="1500" dirty="0">
-                <a:solidFill>
-                  <a:srgbClr val="5A6274"/>
-                </a:solidFill>
-                <a:latin typeface="Arial" pitchFamily="34" charset="0"/>
-                <a:ea typeface="Arial" pitchFamily="34" charset="-122"/>
-                <a:cs typeface="Arial" pitchFamily="34" charset="-120"/>
-              </a:rPr>
-              <a:t>5.574 SMS en inglés, ~305 spams atacados por semilla.</a:t>
-            </a:r>
-            <a:endParaRPr lang="en-US" sz="1500" dirty="0"/>
-          </a:p>
-        </p:txBody>
-      </p:sp>
-      <p:sp>
-        <p:nvSpPr>
-          <p:cNvPr id="27" name="Text 25"/>
-          <p:cNvSpPr txBox="1"/>
-          <p:nvPr/>
-        </p:nvSpPr>
-        <p:spPr>
-          <a:xfrm>
-            <a:off x="548640" y="6373368"/>
-            <a:ext cx="10241280" cy="274320"/>
-          </a:xfrm>
-          <a:prstGeom prst="rect">
-            <a:avLst/>
-          </a:prstGeom>
-          <a:noFill/>
-          <a:ln/>
-        </p:spPr>
-        <p:txBody>
-          <a:bodyPr wrap="square" lIns="0" tIns="0" rIns="0" bIns="0" rtlCol="0" anchor="t"/>
-          <a:lstStyle/>
-          <a:p>
-            <a:pPr indent="0" marL="0">
-              <a:lnSpc>
-                <a:spcPct val="100000"/>
-              </a:lnSpc>
-              <a:buNone/>
-            </a:pPr>
-            <a:r>
-              <a:rPr lang="en-US" sz="1000" dirty="0">
-                <a:solidFill>
-                  <a:srgbClr val="9AA1AE"/>
-                </a:solidFill>
-                <a:latin typeface="Arial" pitchFamily="34" charset="0"/>
-                <a:ea typeface="Arial" pitchFamily="34" charset="-122"/>
-                <a:cs typeface="Arial" pitchFamily="34" charset="-120"/>
-              </a:rPr>
-              <a:t>Detalle en la sección de limitaciones del paper.</a:t>
-            </a:r>
-            <a:endParaRPr lang="en-US" sz="1000" dirty="0"/>
-          </a:p>
-        </p:txBody>
-      </p:sp>
-      <p:sp>
-        <p:nvSpPr>
-          <p:cNvPr id="25" name="Slide Number Placeholder 0"/>
-          <p:cNvSpPr>
-            <a:spLocks noGrp="1"/>
-          </p:cNvSpPr>
-          <p:nvPr>
-            <p:ph type="sldNum" sz="quarter" idx="4294967295"/>
-          </p:nvPr>
-        </p:nvSpPr>
-        <p:spPr>
-          <a:xfrm>
-            <a:off x="11091672" y="6373368"/>
-            <a:ext cx="548640" cy="274320"/>
-          </a:xfrm>
-          <a:prstGeom prst="rect">
-            <a:avLst/>
-          </a:prstGeom>
-          <a:extLst>
-            <a:ext uri="{C572A759-6A51-4108-AA02-DFA0A04FC94B}">
-              <ma14:wrappingTextBoxFlag xmlns:ma14="http://schemas.microsoft.com/office/mac/drawingml/2011/main" val="0"/>
-            </a:ext>
-          </a:extLst>
-        </p:spPr>
-        <p:txBody>
-          <a:bodyPr/>
-          <a:lstStyle>
-            <a:lvl1pPr>
-              <a:defRPr sz="1000">
-                <a:solidFill>
-                  <a:srgbClr val="9AA1AE"/>
-                </a:solidFill>
-                <a:latin typeface="Arial"/>
-                <a:ea typeface="Arial"/>
-                <a:cs typeface="Arial"/>
-              </a:defRPr>
-            </a:lvl1pPr>
-          </a:lstStyle>
-          <a:p>
-            <a:pPr algn="r"/>
-            <a:fld id="{F7021451-1387-4CA6-816F-3879F97B5CBC}" type="slidenum">
-              <a:rPr b="0" lang="en-US"/>
-              <a:t>19</a:t>
-            </a:fld>
-            <a:endParaRPr lang="en-US"/>
-          </a:p>
-        </p:txBody>
+          <a:solidFill>
+            <a:srgbClr val="4A3AA7"/>
+          </a:solidFill>
+          <a:ln/>
+        </p:spPr>
       </p:sp>
     </p:spTree>
   </p:cSld>
@@ -10427,325 +9776,6 @@
 </p:sld>
 </file>
 
-<file path=ppt/slides/slide20.xml><?xml version="1.0" encoding="utf-8"?>
-<p:sld xmlns:a="http://schemas.openxmlformats.org/drawingml/2006/main" xmlns:r="http://schemas.openxmlformats.org/officeDocument/2006/relationships" xmlns:p="http://schemas.openxmlformats.org/presentationml/2006/main">
-  <p:cSld name="Slide 20">
-    <p:spTree>
-      <p:nvGrpSpPr>
-        <p:cNvPr id="1" name=""/>
-        <p:cNvGrpSpPr/>
-        <p:nvPr/>
-      </p:nvGrpSpPr>
-      <p:grpSpPr>
-        <a:xfrm>
-          <a:off x="0" y="0"/>
-          <a:ext cx="0" cy="0"/>
-          <a:chOff x="0" y="0"/>
-          <a:chExt cx="0" cy="0"/>
-        </a:xfrm>
-      </p:grpSpPr>
-      <p:sp>
-        <p:nvSpPr>
-          <p:cNvPr id="2" name="Text 0"/>
-          <p:cNvSpPr txBox="1"/>
-          <p:nvPr/>
-        </p:nvSpPr>
-        <p:spPr>
-          <a:xfrm>
-            <a:off x="731520" y="1920240"/>
-            <a:ext cx="7315200" cy="1097280"/>
-          </a:xfrm>
-          <a:prstGeom prst="rect">
-            <a:avLst/>
-          </a:prstGeom>
-          <a:noFill/>
-          <a:ln/>
-        </p:spPr>
-        <p:txBody>
-          <a:bodyPr wrap="square" lIns="0" tIns="0" rIns="0" bIns="0" rtlCol="0" anchor="t"/>
-          <a:lstStyle/>
-          <a:p>
-            <a:pPr indent="0" marL="0">
-              <a:lnSpc>
-                <a:spcPct val="100000"/>
-              </a:lnSpc>
-              <a:buNone/>
-            </a:pPr>
-            <a:r>
-              <a:rPr lang="en-US" sz="6400" dirty="0">
-                <a:solidFill>
-                  <a:srgbClr val="FFFFFF"/>
-                </a:solidFill>
-                <a:latin typeface="Georgia" pitchFamily="34" charset="0"/>
-                <a:ea typeface="Georgia" pitchFamily="34" charset="-122"/>
-                <a:cs typeface="Georgia" pitchFamily="34" charset="-120"/>
-              </a:rPr>
-              <a:t>¿Preguntas?</a:t>
-            </a:r>
-            <a:endParaRPr lang="en-US" sz="6400" dirty="0"/>
-          </a:p>
-        </p:txBody>
-      </p:sp>
-      <p:sp>
-        <p:nvSpPr>
-          <p:cNvPr id="3" name="Text 1"/>
-          <p:cNvSpPr txBox="1"/>
-          <p:nvPr/>
-        </p:nvSpPr>
-        <p:spPr>
-          <a:xfrm>
-            <a:off x="731520" y="3200400"/>
-            <a:ext cx="8229600" cy="411480"/>
-          </a:xfrm>
-          <a:prstGeom prst="rect">
-            <a:avLst/>
-          </a:prstGeom>
-          <a:noFill/>
-          <a:ln/>
-        </p:spPr>
-        <p:txBody>
-          <a:bodyPr wrap="square" lIns="0" tIns="0" rIns="0" bIns="0" rtlCol="0" anchor="t"/>
-          <a:lstStyle/>
-          <a:p>
-            <a:pPr indent="0" marL="0">
-              <a:lnSpc>
-                <a:spcPct val="100000"/>
-              </a:lnSpc>
-              <a:buNone/>
-            </a:pPr>
-            <a:r>
-              <a:rPr lang="en-US" sz="2000" dirty="0">
-                <a:solidFill>
-                  <a:srgbClr val="C8CEDA"/>
-                </a:solidFill>
-                <a:latin typeface="Arial" pitchFamily="34" charset="0"/>
-                <a:ea typeface="Arial" pitchFamily="34" charset="-122"/>
-                <a:cs typeface="Arial" pitchFamily="34" charset="-120"/>
-              </a:rPr>
-              <a:t>Combinar o reentrenar · Pablo Díaz y Ezequiel Martinez</a:t>
-            </a:r>
-            <a:endParaRPr lang="en-US" sz="2000" dirty="0"/>
-          </a:p>
-        </p:txBody>
-      </p:sp>
-      <p:sp>
-        <p:nvSpPr>
-          <p:cNvPr id="4" name="Shape 2"/>
-          <p:cNvSpPr/>
-          <p:nvPr/>
-        </p:nvSpPr>
-        <p:spPr>
-          <a:xfrm>
-            <a:off x="731520" y="4480560"/>
-            <a:ext cx="5486400" cy="0"/>
-          </a:xfrm>
-          <a:prstGeom prst="line">
-            <a:avLst/>
-          </a:prstGeom>
-          <a:noFill/>
-          <a:ln w="9525">
-            <a:solidFill>
-              <a:srgbClr val="3A4152"/>
-            </a:solidFill>
-            <a:prstDash val="solid"/>
-          </a:ln>
-        </p:spPr>
-      </p:sp>
-      <p:sp>
-        <p:nvSpPr>
-          <p:cNvPr id="5" name="Text 3"/>
-          <p:cNvSpPr txBox="1"/>
-          <p:nvPr/>
-        </p:nvSpPr>
-        <p:spPr>
-          <a:xfrm>
-            <a:off x="731520" y="4663440"/>
-            <a:ext cx="7315200" cy="274320"/>
-          </a:xfrm>
-          <a:prstGeom prst="rect">
-            <a:avLst/>
-          </a:prstGeom>
-          <a:noFill/>
-          <a:ln/>
-        </p:spPr>
-        <p:txBody>
-          <a:bodyPr wrap="square" lIns="0" tIns="0" rIns="0" bIns="0" rtlCol="0" anchor="t"/>
-          <a:lstStyle/>
-          <a:p>
-            <a:pPr indent="0" marL="0">
-              <a:lnSpc>
-                <a:spcPct val="100000"/>
-              </a:lnSpc>
-              <a:buNone/>
-            </a:pPr>
-            <a:r>
-              <a:rPr lang="en-US" sz="1300" dirty="0">
-                <a:solidFill>
-                  <a:srgbClr val="9AA1AE"/>
-                </a:solidFill>
-                <a:latin typeface="Arial" pitchFamily="34" charset="0"/>
-                <a:ea typeface="Arial" pitchFamily="34" charset="-122"/>
-                <a:cs typeface="Arial" pitchFamily="34" charset="-120"/>
-              </a:rPr>
-              <a:t>Código, datos y paper</a:t>
-            </a:r>
-            <a:endParaRPr lang="en-US" sz="1300" dirty="0"/>
-          </a:p>
-        </p:txBody>
-      </p:sp>
-      <p:sp>
-        <p:nvSpPr>
-          <p:cNvPr id="6" name="Text 4"/>
-          <p:cNvSpPr txBox="1"/>
-          <p:nvPr/>
-        </p:nvSpPr>
-        <p:spPr>
-          <a:xfrm>
-            <a:off x="731520" y="4983480"/>
-            <a:ext cx="8229600" cy="411480"/>
-          </a:xfrm>
-          <a:prstGeom prst="rect">
-            <a:avLst/>
-          </a:prstGeom>
-          <a:noFill/>
-          <a:ln/>
-        </p:spPr>
-        <p:txBody>
-          <a:bodyPr wrap="square" lIns="0" tIns="0" rIns="0" bIns="0" rtlCol="0" anchor="t"/>
-          <a:lstStyle/>
-          <a:p>
-            <a:pPr indent="0" marL="0">
-              <a:lnSpc>
-                <a:spcPct val="100000"/>
-              </a:lnSpc>
-              <a:buNone/>
-            </a:pPr>
-            <a:r>
-              <a:rPr lang="en-US" sz="2000" b="1" dirty="0">
-                <a:solidFill>
-                  <a:srgbClr val="AFCBEE"/>
-                </a:solidFill>
-                <a:latin typeface="Arial" pitchFamily="34" charset="0"/>
-                <a:ea typeface="Arial" pitchFamily="34" charset="-122"/>
-                <a:cs typeface="Arial" pitchFamily="34" charset="-120"/>
-              </a:rPr>
-              <a:t>github.com/pmdiaz/spam-detection-hedge</a:t>
-            </a:r>
-            <a:endParaRPr lang="en-US" sz="2000" dirty="0"/>
-          </a:p>
-        </p:txBody>
-      </p:sp>
-      <p:sp>
-        <p:nvSpPr>
-          <p:cNvPr id="7" name="experto 1"/>
-          <p:cNvSpPr/>
-          <p:nvPr/>
-        </p:nvSpPr>
-        <p:spPr>
-          <a:xfrm>
-            <a:off x="9418320" y="5029200"/>
-            <a:ext cx="329184" cy="329184"/>
-          </a:xfrm>
-          <a:prstGeom prst="ellipse">
-            <a:avLst/>
-          </a:prstGeom>
-          <a:solidFill>
-            <a:srgbClr val="EB6834"/>
-          </a:solidFill>
-          <a:ln/>
-        </p:spPr>
-      </p:sp>
-      <p:sp>
-        <p:nvSpPr>
-          <p:cNvPr id="8" name="experto 2"/>
-          <p:cNvSpPr/>
-          <p:nvPr/>
-        </p:nvSpPr>
-        <p:spPr>
-          <a:xfrm>
-            <a:off x="9875520" y="5029200"/>
-            <a:ext cx="329184" cy="329184"/>
-          </a:xfrm>
-          <a:prstGeom prst="ellipse">
-            <a:avLst/>
-          </a:prstGeom>
-          <a:solidFill>
-            <a:srgbClr val="008300"/>
-          </a:solidFill>
-          <a:ln/>
-        </p:spPr>
-      </p:sp>
-      <p:sp>
-        <p:nvSpPr>
-          <p:cNvPr id="9" name="experto 3"/>
-          <p:cNvSpPr/>
-          <p:nvPr/>
-        </p:nvSpPr>
-        <p:spPr>
-          <a:xfrm>
-            <a:off x="10332720" y="5029200"/>
-            <a:ext cx="329184" cy="329184"/>
-          </a:xfrm>
-          <a:prstGeom prst="ellipse">
-            <a:avLst/>
-          </a:prstGeom>
-          <a:solidFill>
-            <a:srgbClr val="008300"/>
-          </a:solidFill>
-          <a:ln/>
-        </p:spPr>
-      </p:sp>
-      <p:sp>
-        <p:nvSpPr>
-          <p:cNvPr id="10" name="experto 4"/>
-          <p:cNvSpPr/>
-          <p:nvPr/>
-        </p:nvSpPr>
-        <p:spPr>
-          <a:xfrm>
-            <a:off x="10789920" y="5029200"/>
-            <a:ext cx="329184" cy="329184"/>
-          </a:xfrm>
-          <a:prstGeom prst="ellipse">
-            <a:avLst/>
-          </a:prstGeom>
-          <a:solidFill>
-            <a:srgbClr val="008300"/>
-          </a:solidFill>
-          <a:ln/>
-        </p:spPr>
-      </p:sp>
-      <p:sp>
-        <p:nvSpPr>
-          <p:cNvPr id="11" name="experto 5"/>
-          <p:cNvSpPr/>
-          <p:nvPr/>
-        </p:nvSpPr>
-        <p:spPr>
-          <a:xfrm>
-            <a:off x="11247120" y="5029200"/>
-            <a:ext cx="329184" cy="329184"/>
-          </a:xfrm>
-          <a:prstGeom prst="ellipse">
-            <a:avLst/>
-          </a:prstGeom>
-          <a:solidFill>
-            <a:srgbClr val="4A3AA7"/>
-          </a:solidFill>
-          <a:ln/>
-        </p:spPr>
-      </p:sp>
-    </p:spTree>
-  </p:cSld>
-  <p:clrMapOvr>
-    <a:masterClrMapping/>
-  </p:clrMapOvr>
-  <p:transition spd="med">
-    <p:fade/>
-  </p:transition>
-</p:sld>
-</file>
-
 <file path=ppt/slides/slide3.xml><?xml version="1.0" encoding="utf-8"?>
 <p:sld xmlns:a="http://schemas.openxmlformats.org/drawingml/2006/main" xmlns:r="http://schemas.openxmlformats.org/officeDocument/2006/relationships" xmlns:p="http://schemas.openxmlformats.org/presentationml/2006/main">
   <p:cSld name="Slide 3">
@@ -16948,277 +15978,33 @@
           <a:chExt cx="0" cy="0"/>
         </a:xfrm>
       </p:grpSpPr>
-      <p:sp>
-        <p:nvSpPr>
-          <p:cNvPr id="2" name="Text 0"/>
-          <p:cNvSpPr txBox="1"/>
-          <p:nvPr/>
-        </p:nvSpPr>
-        <p:spPr>
-          <a:xfrm>
-            <a:off x="548640" y="411480"/>
-            <a:ext cx="7315200" cy="228600"/>
-          </a:xfrm>
-          <a:prstGeom prst="rect">
-            <a:avLst/>
-          </a:prstGeom>
-          <a:noFill/>
-          <a:ln/>
-        </p:spPr>
-        <p:txBody>
-          <a:bodyPr wrap="square" lIns="0" tIns="0" rIns="0" bIns="0" rtlCol="0" anchor="t"/>
-          <a:lstStyle/>
-          <a:p>
-            <a:pPr indent="0" marL="0">
-              <a:lnSpc>
-                <a:spcPct val="100000"/>
-              </a:lnSpc>
-              <a:buNone/>
-            </a:pPr>
-            <a:r>
-              <a:rPr lang="en-US" sz="1100" b="1" spc="200" kern="0" dirty="0">
-                <a:solidFill>
-                  <a:srgbClr val="5A6274"/>
-                </a:solidFill>
-                <a:latin typeface="Arial" pitchFamily="34" charset="0"/>
-                <a:ea typeface="Arial" pitchFamily="34" charset="-122"/>
-                <a:cs typeface="Arial" pitchFamily="34" charset="-120"/>
-              </a:rPr>
-              <a:t>HALLAZGO 1</a:t>
-            </a:r>
-            <a:endParaRPr lang="en-US" sz="1100" dirty="0"/>
-          </a:p>
-        </p:txBody>
-      </p:sp>
-      <p:sp>
-        <p:nvSpPr>
-          <p:cNvPr id="3" name="Text 0"/>
-          <p:cNvSpPr/>
-          <p:nvPr>
-            <p:ph idx="100" type="title" hasCustomPrompt="1"/>
-          </p:nvPr>
-        </p:nvSpPr>
-        <p:spPr>
-          <a:xfrm>
-            <a:off x="548640" y="731520"/>
-            <a:ext cx="10424160" cy="566928"/>
-          </a:xfrm>
-          <a:prstGeom prst="rect">
-            <a:avLst/>
-          </a:prstGeom>
-          <a:noFill/>
-          <a:ln/>
-        </p:spPr>
-        <p:txBody>
-          <a:bodyPr wrap="square" lIns="0" tIns="0" rIns="0" bIns="0" rtlCol="0" anchor="t"/>
-          <a:lstStyle/>
-          <a:p>
-            <a:pPr indent="0" marL="0">
-              <a:buNone/>
-            </a:pPr>
-            <a:r>
-              <a:rPr lang="en-US" sz="3000" dirty="0">
-                <a:solidFill>
-                  <a:srgbClr val="1F2430"/>
-                </a:solidFill>
-                <a:latin typeface="Georgia" pitchFamily="34" charset="0"/>
-                <a:ea typeface="Georgia" pitchFamily="34" charset="-122"/>
-                <a:cs typeface="Georgia" pitchFamily="34" charset="-120"/>
-              </a:rPr>
-              <a:t>Con el ataque, el estático cae y no se recupera</a:t>
-            </a:r>
-            <a:endParaRPr lang="en-US" sz="3000" dirty="0"/>
-          </a:p>
-        </p:txBody>
-      </p:sp>
-      <p:sp>
-        <p:nvSpPr>
-          <p:cNvPr id="4" name="Text 2"/>
-          <p:cNvSpPr txBox="1"/>
-          <p:nvPr/>
-        </p:nvSpPr>
-        <p:spPr>
-          <a:xfrm>
-            <a:off x="548640" y="1307592"/>
-            <a:ext cx="10424160" cy="320040"/>
-          </a:xfrm>
-          <a:prstGeom prst="rect">
-            <a:avLst/>
-          </a:prstGeom>
-          <a:noFill/>
-          <a:ln/>
-        </p:spPr>
-        <p:txBody>
-          <a:bodyPr wrap="square" lIns="0" tIns="0" rIns="0" bIns="0" rtlCol="0" anchor="t"/>
-          <a:lstStyle/>
-          <a:p>
-            <a:pPr indent="0" marL="0">
-              <a:lnSpc>
-                <a:spcPct val="100000"/>
-              </a:lnSpc>
-              <a:buNone/>
-            </a:pPr>
-            <a:r>
-              <a:rPr lang="en-US" sz="1500" dirty="0">
-                <a:solidFill>
-                  <a:srgbClr val="5A6274"/>
-                </a:solidFill>
-                <a:latin typeface="Arial" pitchFamily="34" charset="0"/>
-                <a:ea typeface="Arial" pitchFamily="34" charset="-122"/>
-                <a:cs typeface="Arial" pitchFamily="34" charset="-120"/>
-              </a:rPr>
-              <a:t>Spam atrapado en una ventana móvil de 300 mensajes.</a:t>
-            </a:r>
-            <a:endParaRPr lang="en-US" sz="1500" dirty="0"/>
-          </a:p>
-        </p:txBody>
-      </p:sp>
-      <p:sp>
-        <p:nvSpPr>
-          <p:cNvPr id="5" name="Text 3"/>
-          <p:cNvSpPr txBox="1"/>
-          <p:nvPr/>
-        </p:nvSpPr>
-        <p:spPr>
-          <a:xfrm>
-            <a:off x="9235440" y="429768"/>
-            <a:ext cx="1554480" cy="201168"/>
-          </a:xfrm>
-          <a:prstGeom prst="rect">
-            <a:avLst/>
-          </a:prstGeom>
-          <a:noFill/>
-          <a:ln/>
-        </p:spPr>
-        <p:txBody>
-          <a:bodyPr wrap="square" lIns="0" tIns="0" rIns="0" bIns="0" rtlCol="0" anchor="t"/>
-          <a:lstStyle/>
-          <a:p>
-            <a:pPr algn="r" indent="0" marL="0">
-              <a:lnSpc>
-                <a:spcPct val="100000"/>
-              </a:lnSpc>
-              <a:buNone/>
-            </a:pPr>
-            <a:r>
-              <a:rPr lang="en-US" sz="900" b="1" spc="200" kern="0" dirty="0">
-                <a:solidFill>
-                  <a:srgbClr val="9AA1AE"/>
-                </a:solidFill>
-                <a:latin typeface="Arial" pitchFamily="34" charset="0"/>
-                <a:ea typeface="Arial" pitchFamily="34" charset="-122"/>
-                <a:cs typeface="Arial" pitchFamily="34" charset="-120"/>
-              </a:rPr>
-              <a:t>HALLAZGOS</a:t>
-            </a:r>
-            <a:endParaRPr lang="en-US" sz="900" dirty="0"/>
-          </a:p>
-        </p:txBody>
-      </p:sp>
-      <p:sp>
-        <p:nvSpPr>
-          <p:cNvPr id="6" name="hallazgo 1 (actual)"/>
-          <p:cNvSpPr/>
-          <p:nvPr/>
-        </p:nvSpPr>
-        <p:spPr>
-          <a:xfrm>
-            <a:off x="10899648" y="457200"/>
-            <a:ext cx="137160" cy="137160"/>
-          </a:xfrm>
-          <a:prstGeom prst="ellipse">
-            <a:avLst/>
-          </a:prstGeom>
-          <a:solidFill>
-            <a:srgbClr val="1F2430"/>
-          </a:solidFill>
-          <a:ln/>
-        </p:spPr>
-      </p:sp>
-      <p:sp>
-        <p:nvSpPr>
-          <p:cNvPr id="7" name="hallazgo 2"/>
-          <p:cNvSpPr/>
-          <p:nvPr/>
-        </p:nvSpPr>
-        <p:spPr>
-          <a:xfrm>
-            <a:off x="11100816" y="457200"/>
-            <a:ext cx="137160" cy="137160"/>
-          </a:xfrm>
-          <a:prstGeom prst="ellipse">
-            <a:avLst/>
-          </a:prstGeom>
-          <a:ln w="15875">
-            <a:solidFill>
-              <a:srgbClr val="9AA1AE"/>
-            </a:solidFill>
-            <a:prstDash val="solid"/>
-          </a:ln>
-        </p:spPr>
-      </p:sp>
-      <p:sp>
-        <p:nvSpPr>
-          <p:cNvPr id="8" name="hallazgo 3"/>
-          <p:cNvSpPr/>
-          <p:nvPr/>
-        </p:nvSpPr>
-        <p:spPr>
-          <a:xfrm>
-            <a:off x="11301984" y="457200"/>
-            <a:ext cx="137160" cy="137160"/>
-          </a:xfrm>
-          <a:prstGeom prst="ellipse">
-            <a:avLst/>
-          </a:prstGeom>
-          <a:ln w="15875">
-            <a:solidFill>
-              <a:srgbClr val="9AA1AE"/>
-            </a:solidFill>
-            <a:prstDash val="solid"/>
-          </a:ln>
-        </p:spPr>
-      </p:sp>
-      <p:sp>
-        <p:nvSpPr>
-          <p:cNvPr id="9" name="hallazgo 4"/>
-          <p:cNvSpPr/>
-          <p:nvPr/>
-        </p:nvSpPr>
-        <p:spPr>
-          <a:xfrm>
-            <a:off x="11503152" y="457200"/>
-            <a:ext cx="137160" cy="137160"/>
-          </a:xfrm>
-          <a:prstGeom prst="ellipse">
-            <a:avLst/>
-          </a:prstGeom>
-          <a:ln w="15875">
-            <a:solidFill>
-              <a:srgbClr val="9AA1AE"/>
-            </a:solidFill>
-            <a:prstDash val="solid"/>
-          </a:ln>
-        </p:spPr>
-      </p:sp>
       <p:pic>
         <p:nvPicPr>
-          <p:cNvPr id="10" name="Image 0" descr="Spam atrapado por el estático: ~85% antes del ataque, cae a 43% y no se recupera.">    </p:cNvPr>
+          <p:cNvPr id="3" name="animación del ataque">
+            <a:hlinkClick r:id="" action="ppaction://media"/>
+          </p:cNvPr>
           <p:cNvPicPr>
             <a:picLocks noChangeAspect="1"/>
           </p:cNvPicPr>
-          <p:nvPr/>
+          <p:nvPr>
+            <a:videoFile r:link="rId1"/>
+            <p:extLst>
+              <p:ext uri="{DAA4B4D4-6D71-4841-9C94-3DE7FCFB9230}">
+                <p14:media xmlns:p14="http://schemas.microsoft.com/office/powerpoint/2010/main" r:embed="rId2"/>
+              </p:ext>
+            </p:extLst>
+          </p:nvPr>
         </p:nvPicPr>
         <p:blipFill>
-          <a:blip r:embed="rId1"/>
+          <a:blip r:embed="rId3"/>
           <a:stretch>
             <a:fillRect/>
           </a:stretch>
         </p:blipFill>
         <p:spPr>
           <a:xfrm>
-            <a:off x="411480" y="1783080"/>
-            <a:ext cx="9856468" cy="4434840"/>
+            <a:off x="0" y="0"/>
+            <a:ext cx="12191695" cy="6858000"/>
           </a:xfrm>
           <a:prstGeom prst="rect">
             <a:avLst/>
@@ -17227,43 +16013,31 @@
       </p:pic>
       <p:sp>
         <p:nvSpPr>
-          <p:cNvPr id="11" name="Text 8"/>
-          <p:cNvSpPr txBox="1"/>
-          <p:nvPr/>
-        </p:nvSpPr>
-        <p:spPr>
-          <a:xfrm>
-            <a:off x="548640" y="6373368"/>
-            <a:ext cx="10241280" cy="274320"/>
-          </a:xfrm>
-          <a:prstGeom prst="rect">
-            <a:avLst/>
-          </a:prstGeom>
-          <a:noFill/>
-          <a:ln/>
-        </p:spPr>
-        <p:txBody>
-          <a:bodyPr wrap="square" lIns="0" tIns="0" rIns="0" bIns="0" rtlCol="0" anchor="t"/>
-          <a:lstStyle/>
-          <a:p>
-            <a:pPr indent="0" marL="0">
-              <a:lnSpc>
-                <a:spcPct val="100000"/>
-              </a:lnSpc>
-              <a:buNone/>
-            </a:pPr>
-            <a:r>
-              <a:rPr lang="en-US" sz="1000" dirty="0">
-                <a:solidFill>
-                  <a:srgbClr val="9AA1AE"/>
-                </a:solidFill>
-                <a:latin typeface="Arial" pitchFamily="34" charset="0"/>
-                <a:ea typeface="Arial" pitchFamily="34" charset="-122"/>
-                <a:cs typeface="Arial" pitchFamily="34" charset="-120"/>
-              </a:rPr>
-              <a:t>Media de 20 permutaciones (semillas) del SMS Spam Collection. Ataque desde la mitad del stream. Es la figura 1 del paper.</a:t>
-            </a:r>
-            <a:endParaRPr lang="en-US" sz="1000" dirty="0"/>
+          <p:cNvPr id="4" name="Text 0"/>
+          <p:cNvSpPr/>
+          <p:nvPr>
+            <p:ph idx="100" type="title" hasCustomPrompt="1"/>
+          </p:nvPr>
+        </p:nvSpPr>
+        <p:spPr>
+          <a:xfrm>
+            <a:off x="548640" y="731520"/>
+            <a:ext cx="10424160" cy="566928"/>
+          </a:xfrm>
+          <a:prstGeom prst="rect">
+            <a:avLst/>
+          </a:prstGeom>
+          <a:noFill/>
+          <a:ln/>
+        </p:spPr>
+        <p:txBody>
+          <a:bodyPr wrap="square" lIns="0" tIns="0" rIns="0" bIns="0" rtlCol="0" anchor="t"/>
+          <a:lstStyle/>
+          <a:p>
+            <a:pPr indent="0" marL="0">
+              <a:buNone/>
+            </a:pPr>
+            <a:endParaRPr lang="en-US" sz="3000" dirty="0"/>
           </a:p>
         </p:txBody>
       </p:sp>

--- a/presentacion/combinar_o_reentrenar.pptx
+++ b/presentacion/combinar_o_reentrenar.pptx
@@ -23,9 +23,10 @@
     <p:sldId id="271" r:id="rId17"/>
     <p:sldId id="272" r:id="rId18"/>
     <p:sldId id="273" r:id="rId19"/>
+    <p:sldId id="274" r:id="rId20"/>
   </p:sldIdLst>
   <p:notesMasterIdLst>
-    <p:notesMasterId r:id="rId20"/>
+    <p:notesMasterId r:id="rId21"/>
   </p:notesMasterIdLst>
   <p:sldSz cx="12192000" cy="6858000"/>
   <p:notesSz cx="6858000" cy="12192000"/>
@@ -124,7 +125,7 @@
   <p:extLst>
     <p:ext uri="{521415D9-36F7-43E2-AB2F-B90AF26B5E84}">
       <p14:sectionLst xmlns:p14="http://schemas.microsoft.com/office/powerpoint/2010/main">
-        <p14:section name="1 · El problema" id="{8139ed1f-08fa-bfb5-f98d-1211f62203bb}">
+        <p14:section name="1 · El problema" id="{daac4f15-06f5-61c1-5402-9b88663ab18e}">
           <p14:sldIdLst>
             <p14:sldId id="256"/>
             <p14:sldId id="257"/>
@@ -134,7 +135,7 @@
             <p14:sldId id="261"/>
           </p14:sldIdLst>
         </p14:section>
-        <p14:section name="2 · Hallazgos" id="{04480572-d2b3-427f-b8de-a3afa1248b09}">
+        <p14:section name="2 · Hallazgos" id="{ddfd3b73-6dd5-2ac8-3712-ac3662eaa872}">
           <p14:sldIdLst>
             <p14:sldId id="262"/>
             <p14:sldId id="263"/>
@@ -145,13 +146,14 @@
             <p14:sldId id="268"/>
             <p14:sldId id="269"/>
             <p14:sldId id="270"/>
+            <p14:sldId id="271"/>
           </p14:sldIdLst>
         </p14:section>
-        <p14:section name="3 · Cierre" id="{ad898e01-fc13-6e51-ccc1-961aced05e43}">
+        <p14:section name="3 · Cierre" id="{d76b0d4a-a4dd-83ab-961d-62ed03f5555f}">
           <p14:sldIdLst>
-            <p14:sldId id="271"/>
             <p14:sldId id="272"/>
             <p14:sldId id="273"/>
+            <p14:sldId id="274"/>
           </p14:sldIdLst>
         </p14:section>
       </p14:sectionLst>
@@ -734,7 +736,7 @@
           <a:p>
             <a:r>
               <a:rPr lang="en-US" dirty="0"/>
-              <a:t>B · 1:30. Respuesta a la pregunta 2. Con todas las etiquetas, reentrenar gana claro: 73 contra 133. A medida que el usuario reporta menos, SGD se degrada mucho más rápido. Las curvas se cruzan entre 1 de cada 5 y 1 de cada 20: ahí Hedge gana en 15 de 20 semillas, y SGD termina peor que no adaptarse.</a:t>
+              <a:t>B · 0:50. Cómo armamos la prueba. Cada fila son 20 mensajes seguidos; en negro, los que el usuario reporta. Probamos cuatro niveles: todos, 1 de cada 2, 1 de cada 5 y 1 de cada 20. Hedge y SGD ven exactamente los mismos reportes. Los errores se cuentan siempre: si un spam se escapa, el usuario lo sufre aunque no lo reporte. Solo cambia de qué aprende cada uno: SGD, de cada reporte tal cual; Hedge multiplica por 1/ρ cada error que ve y achica η para no sobrerreaccionar. El dato clave: con 1 de cada 20 hay unos 15 spams atacados con etiqueta.</a:t>
             </a:r>
             <a:endParaRPr lang="en-US" dirty="0"/>
           </a:p>
@@ -822,7 +824,7 @@
           <a:p>
             <a:r>
               <a:rPr lang="en-US" dirty="0"/>
-              <a:t>B · 1:15. Un revisor nos objetó que SGD perdía por no reponderar como Hedge. Lo probamos: reponderar lo empeora, de 210 a 240 o 323 errores. La razón es de conteo: Hedge aprende 5 pesos; reentrenar necesita un peso por cada palabra nueva. Lo que sí sufre Hedge es la varianza del estimador.</a:t>
+              <a:t>B · 1:10. Respuesta a la pregunta 2. Con todas las etiquetas, reentrenar gana claro: 73 contra 133. A medida que el usuario reporta menos, SGD se degrada mucho más rápido. Las curvas se cruzan entre 1 de cada 5 y 1 de cada 20: ahí Hedge gana en 15 de 20 semillas, y SGD termina peor que no adaptarse. Matiz: con 1 de cada 20, Hedge apenas empata con el estático (189 contra 190); no recupera, pero no empeora.</a:t>
             </a:r>
             <a:endParaRPr lang="en-US" dirty="0"/>
           </a:p>
@@ -910,7 +912,7 @@
           <a:p>
             <a:r>
               <a:rPr lang="en-US" dirty="0"/>
-              <a:t>B · 1:30. Primera precisión sobre la teoría. Las slides 71 y 73 presentan juntos el voto pesado y la cota, pero la cota es del Hedge randomizado. Construimos un adversario que simula al determinístico y le etiqueta lo contrario: su regret crece lineal, T/2. El randomizado queda en 14, bajo su cota de 37. En el stream real el determinístico anda mejor: la diferencia es de peor caso.</a:t>
+              <a:t>B · 1:05. Un revisor nos objetó que SGD perdía por no reponderar como Hedge. Lo probamos: reponderar lo empeora, de 210 a 240 o 323 errores. La razón es de conteo: Hedge aprende 5 pesos; reentrenar necesita un peso por cada palabra nueva. Lo que sí sufre Hedge es la varianza del estimador.</a:t>
             </a:r>
             <a:endParaRPr lang="en-US" dirty="0"/>
           </a:p>
@@ -998,7 +1000,7 @@
           <a:p>
             <a:r>
               <a:rPr lang="en-US" dirty="0"/>
-              <a:t>B · 1:15. Segunda precisión. Hay dos cotas y cada una vale para su propia tasa de aprendizaje. Las dos se cumplen en las 20 semillas. La small-loss da la mitad de regret, pero requiere saber cuántos errores comete el mejor experto, algo que bajo ataque no sabemos. Notar cómo esa cota cambia de pendiente con el ataque.</a:t>
+              <a:t>B · 1:30. Primera precisión sobre la teoría. Las slides 71 y 73 presentan juntos el voto pesado y la cota, pero la cota es del Hedge randomizado. Construimos un adversario que simula al determinístico y le etiqueta lo contrario: su regret crece lineal, T/2. El randomizado queda en 14, bajo su cota de 37. En el stream real el determinístico anda mejor: la diferencia es de peor caso.</a:t>
             </a:r>
             <a:endParaRPr lang="en-US" dirty="0"/>
           </a:p>
@@ -1086,7 +1088,7 @@
           <a:p>
             <a:r>
               <a:rPr lang="en-US" dirty="0"/>
-              <a:t>B · 1:30. Tres cosas que sirven fuera de este trabajo. Accuracy engaña con datos desbalanceados. La validación cruzada sobre datos sin cambio no sirve para elegir hiperparámetros de adaptación: tuvimos que fijar el alfa de SGD. Y combinar solo funciona si algún experto sobrevive: con la primera versión del estructural, Hedge no recuperaba nada.</a:t>
+              <a:t>B · 1:15. Segunda precisión. Hay dos cotas y cada una vale para su propia tasa de aprendizaje. Las dos se cumplen en las 20 semillas. La small-loss da la mitad de regret, pero requiere saber cuántos errores comete el mejor experto, algo que bajo ataque no sabemos. Notar cómo esa cota cambia de pendiente con el ataque.</a:t>
             </a:r>
             <a:endParaRPr lang="en-US" dirty="0"/>
           </a:p>
@@ -1174,7 +1176,7 @@
           <a:p>
             <a:r>
               <a:rPr lang="en-US" dirty="0"/>
-              <a:t>B · 1:00. La conclusión práctica. Lowd y Meek tenían razón a medias: reentrenar seguido funciona si hay etiquetas seguido. Cuando escasean, combinar es más robusto porque tiene muchos menos parámetros. Cerrar con la pregunta abierta, aclarando que no la probamos.</a:t>
+              <a:t>B · 1:30. Tres cosas que sirven fuera de este trabajo. Accuracy engaña con datos desbalanceados. La validación cruzada sobre datos sin cambio no sirve para elegir hiperparámetros de adaptación: tuvimos que fijar el alfa de SGD. Y combinar solo funciona si algún experto sobrevive: con la primera versión del estructural, Hedge no recuperaba nada.</a:t>
             </a:r>
             <a:endParaRPr lang="en-US" dirty="0"/>
           </a:p>
@@ -1262,7 +1264,7 @@
           <a:p>
             <a:r>
               <a:rPr lang="en-US" dirty="0"/>
-              <a:t>B · 0:45. Mencionar rápido, sin leer todas. Las dos más importantes: el drift es sintético y el experto robusto lo es para este ataque en particular.</a:t>
+              <a:t>B · 1:00. La conclusión práctica. Lowd y Meek tenían razón a medias: reentrenar seguido funciona si hay etiquetas seguido. Cuando escasean, combinar es más robusto porque tiene muchos menos parámetros. Cerrar con la pregunta abierta, aclarando que no la probamos.</a:t>
             </a:r>
             <a:endParaRPr lang="en-US" dirty="0"/>
           </a:p>
@@ -1350,7 +1352,7 @@
           <a:p>
             <a:r>
               <a:rPr lang="en-US" dirty="0"/>
-              <a:t>B · 0:15 + preguntas. Agradecer y abrir preguntas. Verificar antes que el repositorio sea público si se muestra el enlace.</a:t>
+              <a:t>B · 0:35. Mencionar rápido, sin leer todas. Las dos más importantes: el drift es sintético y el experto robusto lo es para este ataque en particular.</a:t>
             </a:r>
             <a:endParaRPr lang="en-US" dirty="0"/>
           </a:p>
@@ -1374,6 +1376,94 @@
             <a:fld id="{F7021451-1387-4CA6-816F-3879F97B5CBC}" type="slidenum">
               <a:rPr lang="en-US"/>
               <a:t>18</a:t>
+            </a:fld>
+            <a:endParaRPr lang="en-US"/>
+          </a:p>
+        </p:txBody>
+      </p:sp>
+    </p:spTree>
+    <p:extLst>
+      <p:ext uri="{BB962C8B-B14F-4D97-AF65-F5344CB8AC3E}">
+        <p14:creationId xmlns:p14="http://schemas.microsoft.com/office/powerpoint/2010/main" val="1024086991"/>
+      </p:ext>
+    </p:extLst>
+  </p:cSld>
+  <p:clrMapOvr>
+    <a:masterClrMapping/>
+  </p:clrMapOvr>
+</p:notes>
+</file>
+
+<file path=ppt/notesSlides/notesSlide19.xml><?xml version="1.0" encoding="utf-8"?>
+<p:notes xmlns:a="http://schemas.openxmlformats.org/drawingml/2006/main" xmlns:r="http://schemas.openxmlformats.org/officeDocument/2006/relationships" xmlns:p="http://schemas.openxmlformats.org/presentationml/2006/main">
+  <p:cSld>
+    <p:spTree>
+      <p:nvGrpSpPr>
+        <p:cNvPr id="1" name=""/>
+        <p:cNvGrpSpPr/>
+        <p:nvPr/>
+      </p:nvGrpSpPr>
+      <p:grpSpPr>
+        <a:xfrm>
+          <a:off x="0" y="0"/>
+          <a:ext cx="0" cy="0"/>
+          <a:chOff x="0" y="0"/>
+          <a:chExt cx="0" cy="0"/>
+        </a:xfrm>
+      </p:grpSpPr>
+      <p:sp>
+        <p:nvSpPr>
+          <p:cNvPr id="2" name="Slide Image Placeholder 1"/>
+          <p:cNvSpPr>
+            <a:spLocks noGrp="1" noRot="1" noChangeAspect="1"/>
+          </p:cNvSpPr>
+          <p:nvPr>
+            <p:ph type="sldImg"/>
+          </p:nvPr>
+        </p:nvSpPr>
+        <p:spPr/>
+      </p:sp>
+      <p:sp>
+        <p:nvSpPr>
+          <p:cNvPr id="3" name="Notes Placeholder 2"/>
+          <p:cNvSpPr>
+            <a:spLocks noGrp="1"/>
+          </p:cNvSpPr>
+          <p:nvPr>
+            <p:ph type="body" idx="1"/>
+          </p:nvPr>
+        </p:nvSpPr>
+        <p:spPr/>
+        <p:txBody>
+          <a:bodyPr/>
+          <a:lstStyle/>
+          <a:p>
+            <a:r>
+              <a:rPr lang="en-US" dirty="0"/>
+              <a:t>B · 0:15 + preguntas. Agradecer y abrir preguntas. Verificar antes que el repositorio sea público si se muestra el enlace.</a:t>
+            </a:r>
+            <a:endParaRPr lang="en-US" dirty="0"/>
+          </a:p>
+        </p:txBody>
+      </p:sp>
+      <p:sp>
+        <p:nvSpPr>
+          <p:cNvPr id="4" name="Slide Number Placeholder 3"/>
+          <p:cNvSpPr>
+            <a:spLocks noGrp="1"/>
+          </p:cNvSpPr>
+          <p:nvPr>
+            <p:ph type="sldNum" sz="quarter" idx="10"/>
+          </p:nvPr>
+        </p:nvSpPr>
+        <p:spPr/>
+        <p:txBody>
+          <a:bodyPr/>
+          <a:lstStyle/>
+          <a:p>
+            <a:fld id="{F7021451-1387-4CA6-816F-3879F97B5CBC}" type="slidenum">
+              <a:rPr lang="en-US"/>
+              <a:t>19</a:t>
             </a:fld>
             <a:endParaRPr lang="en-US"/>
           </a:p>
@@ -3902,7 +3992,7 @@
                 <a:ea typeface="Georgia" pitchFamily="34" charset="-122"/>
                 <a:cs typeface="Georgia" pitchFamily="34" charset="-120"/>
               </a:rPr>
-              <a:t>Con pocas etiquetas, combinar le gana a reentrenar</a:t>
+              <a:t>Cómo medimos la escasez de etiquetas</a:t>
             </a:r>
             <a:endParaRPr lang="en-US" sz="3000" dirty="0"/>
           </a:p>
@@ -3944,7 +4034,7 @@
                 <a:ea typeface="Arial" pitchFamily="34" charset="-122"/>
                 <a:cs typeface="Arial" pitchFamily="34" charset="-120"/>
               </a:rPr>
-              <a:t>Errores en la mitad atacada, según cuántos mensajes reporta el usuario.</a:t>
+              <a:t>El usuario reporta solo algunos mensajes. Probamos cuatro niveles, de todos a 1 de cada 20.</a:t>
             </a:r>
             <a:endParaRPr lang="en-US" sz="1500" dirty="0"/>
           </a:p>
@@ -4078,185 +4168,561 @@
           </a:ln>
         </p:spPr>
       </p:sp>
-      <p:pic>
-        <p:nvPicPr>
-          <p:cNvPr id="10" name="Image 0" descr="Errores según la fracción de mensajes etiquetados. Con todas las etiquetas SGD comete 73 y Hedge 133; con 1 de cada 20, SGD 210 y Hedge 189, frente a 190 del estático.">    </p:cNvPr>
-          <p:cNvPicPr>
-            <a:picLocks noChangeAspect="1"/>
-          </p:cNvPicPr>
-          <p:nvPr/>
-        </p:nvPicPr>
-        <p:blipFill>
-          <a:blip r:embed="rId1"/>
-          <a:stretch>
-            <a:fillRect/>
-          </a:stretch>
-        </p:blipFill>
-        <p:spPr>
-          <a:xfrm>
-            <a:off x="411480" y="1783080"/>
-            <a:ext cx="6495445" cy="4434840"/>
-          </a:xfrm>
-          <a:prstGeom prst="rect">
-            <a:avLst/>
-          </a:prstGeom>
-        </p:spPr>
-      </p:pic>
-      <p:sp>
-        <p:nvSpPr>
-          <p:cNvPr id="11" name="Text 8"/>
-          <p:cNvSpPr txBox="1"/>
-          <p:nvPr/>
-        </p:nvSpPr>
-        <p:spPr>
-          <a:xfrm>
-            <a:off x="7726680" y="1920240"/>
-            <a:ext cx="3931920" cy="822960"/>
-          </a:xfrm>
-          <a:prstGeom prst="rect">
-            <a:avLst/>
-          </a:prstGeom>
-          <a:noFill/>
-          <a:ln/>
-        </p:spPr>
-        <p:txBody>
-          <a:bodyPr wrap="square" lIns="0" tIns="0" rIns="0" bIns="0" rtlCol="0" anchor="t"/>
-          <a:lstStyle/>
-          <a:p>
-            <a:pPr indent="0" marL="0">
-              <a:lnSpc>
-                <a:spcPct val="100000"/>
-              </a:lnSpc>
-              <a:buNone/>
-            </a:pPr>
-            <a:r>
-              <a:rPr lang="en-US" sz="5400" b="1" dirty="0">
-                <a:solidFill>
-                  <a:srgbClr val="2A78D6"/>
+      <p:sp>
+        <p:nvSpPr>
+          <p:cNvPr id="10" name="Text 8"/>
+          <p:cNvSpPr txBox="1"/>
+          <p:nvPr/>
+        </p:nvSpPr>
+        <p:spPr>
+          <a:xfrm>
+            <a:off x="2057400" y="1920240"/>
+            <a:ext cx="4389120" cy="228600"/>
+          </a:xfrm>
+          <a:prstGeom prst="rect">
+            <a:avLst/>
+          </a:prstGeom>
+          <a:noFill/>
+          <a:ln/>
+        </p:spPr>
+        <p:txBody>
+          <a:bodyPr wrap="square" lIns="0" tIns="0" rIns="0" bIns="0" rtlCol="0" anchor="t"/>
+          <a:lstStyle/>
+          <a:p>
+            <a:pPr indent="0" marL="0">
+              <a:lnSpc>
+                <a:spcPct val="100000"/>
+              </a:lnSpc>
+              <a:buNone/>
+            </a:pPr>
+            <a:r>
+              <a:rPr lang="en-US" sz="1000" b="1" spc="100" kern="0" dirty="0">
+                <a:solidFill>
+                  <a:srgbClr val="5A6274"/>
                 </a:solidFill>
                 <a:latin typeface="Arial" pitchFamily="34" charset="0"/>
                 <a:ea typeface="Arial" pitchFamily="34" charset="-122"/>
                 <a:cs typeface="Arial" pitchFamily="34" charset="-120"/>
               </a:rPr>
-              <a:t>15 de 20</a:t>
-            </a:r>
-            <a:endParaRPr lang="en-US" sz="5400" dirty="0"/>
-          </a:p>
-        </p:txBody>
-      </p:sp>
-      <p:sp>
-        <p:nvSpPr>
-          <p:cNvPr id="12" name="Text 9"/>
-          <p:cNvSpPr txBox="1"/>
-          <p:nvPr/>
-        </p:nvSpPr>
-        <p:spPr>
-          <a:xfrm>
-            <a:off x="7726680" y="2816352"/>
-            <a:ext cx="3931920" cy="685800"/>
-          </a:xfrm>
-          <a:prstGeom prst="rect">
-            <a:avLst/>
-          </a:prstGeom>
-          <a:noFill/>
-          <a:ln/>
-        </p:spPr>
-        <p:txBody>
-          <a:bodyPr wrap="square" lIns="0" tIns="0" rIns="0" bIns="0" rtlCol="0" anchor="t"/>
-          <a:lstStyle/>
-          <a:p>
-            <a:pPr indent="0" marL="0">
-              <a:lnSpc>
-                <a:spcPct val="100000"/>
-              </a:lnSpc>
-              <a:buNone/>
-            </a:pPr>
-            <a:r>
-              <a:rPr lang="en-US" sz="1500" dirty="0">
-                <a:solidFill>
-                  <a:srgbClr val="1F2430"/>
+              <a:t>20 MENSAJES SEGUIDOS DEL STREAM</a:t>
+            </a:r>
+            <a:endParaRPr lang="en-US" sz="1000" dirty="0"/>
+          </a:p>
+        </p:txBody>
+      </p:sp>
+      <p:sp>
+        <p:nvSpPr>
+          <p:cNvPr id="11" name="Text 9"/>
+          <p:cNvSpPr txBox="1"/>
+          <p:nvPr/>
+        </p:nvSpPr>
+        <p:spPr>
+          <a:xfrm>
+            <a:off x="6583680" y="1810512"/>
+            <a:ext cx="1463040" cy="365760"/>
+          </a:xfrm>
+          <a:prstGeom prst="rect">
+            <a:avLst/>
+          </a:prstGeom>
+          <a:noFill/>
+          <a:ln/>
+        </p:spPr>
+        <p:txBody>
+          <a:bodyPr wrap="square" lIns="0" tIns="0" rIns="0" bIns="0" rtlCol="0" anchor="t"/>
+          <a:lstStyle/>
+          <a:p>
+            <a:pPr indent="0" marL="0">
+              <a:lnSpc>
+                <a:spcPct val="100000"/>
+              </a:lnSpc>
+              <a:buNone/>
+            </a:pPr>
+            <a:r>
+              <a:rPr lang="en-US" sz="900" b="1" spc="100" kern="0" dirty="0">
+                <a:solidFill>
+                  <a:srgbClr val="5A6274"/>
                 </a:solidFill>
                 <a:latin typeface="Arial" pitchFamily="34" charset="0"/>
                 <a:ea typeface="Arial" pitchFamily="34" charset="-122"/>
                 <a:cs typeface="Arial" pitchFamily="34" charset="-120"/>
               </a:rPr>
-              <a:t>semillas en las que gana Hedge cuando el usuario reporta 1 de cada 20 mensajes</a:t>
-            </a:r>
-            <a:endParaRPr lang="en-US" sz="1500" dirty="0"/>
-          </a:p>
-        </p:txBody>
-      </p:sp>
-      <p:sp>
-        <p:nvSpPr>
-          <p:cNvPr id="13" name="Text 10"/>
-          <p:cNvSpPr txBox="1"/>
-          <p:nvPr/>
-        </p:nvSpPr>
-        <p:spPr>
-          <a:xfrm>
-            <a:off x="7726680" y="3657600"/>
-            <a:ext cx="3931920" cy="670560"/>
-          </a:xfrm>
-          <a:prstGeom prst="rect">
-            <a:avLst/>
-          </a:prstGeom>
-          <a:noFill/>
-          <a:ln/>
-        </p:spPr>
-        <p:txBody>
-          <a:bodyPr wrap="square" lIns="0" tIns="0" rIns="0" bIns="0" rtlCol="0" anchor="t"/>
-          <a:lstStyle/>
-          <a:p>
-            <a:pPr indent="0" marL="0">
-              <a:lnSpc>
-                <a:spcPct val="100000"/>
-              </a:lnSpc>
-              <a:buNone/>
-            </a:pPr>
-            <a:r>
-              <a:rPr lang="en-US" sz="4400" b="1" dirty="0">
-                <a:solidFill>
-                  <a:srgbClr val="1BAF7A"/>
+              <a:t>SPAMS ATACADOS CON ETIQUETA</a:t>
+            </a:r>
+            <a:endParaRPr lang="en-US" sz="900" dirty="0"/>
+          </a:p>
+        </p:txBody>
+      </p:sp>
+      <p:sp>
+        <p:nvSpPr>
+          <p:cNvPr id="12" name="Text 10"/>
+          <p:cNvSpPr txBox="1"/>
+          <p:nvPr/>
+        </p:nvSpPr>
+        <p:spPr>
+          <a:xfrm>
+            <a:off x="548640" y="2322576"/>
+            <a:ext cx="1417320" cy="274320"/>
+          </a:xfrm>
+          <a:prstGeom prst="rect">
+            <a:avLst/>
+          </a:prstGeom>
+          <a:noFill/>
+          <a:ln/>
+        </p:spPr>
+        <p:txBody>
+          <a:bodyPr wrap="square" lIns="0" tIns="0" rIns="0" bIns="0" rtlCol="0" anchor="t"/>
+          <a:lstStyle/>
+          <a:p>
+            <a:pPr indent="0" marL="0">
+              <a:lnSpc>
+                <a:spcPct val="100000"/>
+              </a:lnSpc>
+              <a:buNone/>
+            </a:pPr>
+            <a:r>
+              <a:rPr lang="en-US" sz="1500" b="1" dirty="0">
+                <a:solidFill>
+                  <a:srgbClr val="1F2430"/>
                 </a:solidFill>
                 <a:latin typeface="Arial" pitchFamily="34" charset="0"/>
                 <a:ea typeface="Arial" pitchFamily="34" charset="-122"/>
                 <a:cs typeface="Arial" pitchFamily="34" charset="-120"/>
               </a:rPr>
-              <a:t>210 &gt; 190</a:t>
-            </a:r>
-            <a:endParaRPr lang="en-US" sz="4400" dirty="0"/>
-          </a:p>
-        </p:txBody>
-      </p:sp>
-      <p:sp>
-        <p:nvSpPr>
-          <p:cNvPr id="14" name="Text 11"/>
-          <p:cNvSpPr txBox="1"/>
-          <p:nvPr/>
-        </p:nvSpPr>
-        <p:spPr>
-          <a:xfrm>
-            <a:off x="7726680" y="4401312"/>
-            <a:ext cx="3931920" cy="685800"/>
-          </a:xfrm>
-          <a:prstGeom prst="rect">
-            <a:avLst/>
-          </a:prstGeom>
-          <a:noFill/>
-          <a:ln/>
-        </p:spPr>
-        <p:txBody>
-          <a:bodyPr wrap="square" lIns="0" tIns="0" rIns="0" bIns="0" rtlCol="0" anchor="t"/>
-          <a:lstStyle/>
-          <a:p>
-            <a:pPr indent="0" marL="0">
-              <a:lnSpc>
-                <a:spcPct val="100000"/>
-              </a:lnSpc>
-              <a:buNone/>
-            </a:pPr>
-            <a:r>
-              <a:rPr lang="en-US" sz="1500" dirty="0">
+              <a:t>todos</a:t>
+            </a:r>
+            <a:endParaRPr lang="en-US" sz="1500" dirty="0"/>
+          </a:p>
+        </p:txBody>
+      </p:sp>
+      <p:sp>
+        <p:nvSpPr>
+          <p:cNvPr id="13" name="reportado todos 1"/>
+          <p:cNvSpPr/>
+          <p:nvPr/>
+        </p:nvSpPr>
+        <p:spPr>
+          <a:xfrm>
+            <a:off x="2057400" y="2377440"/>
+            <a:ext cx="146304" cy="146304"/>
+          </a:xfrm>
+          <a:prstGeom prst="ellipse">
+            <a:avLst/>
+          </a:prstGeom>
+          <a:solidFill>
+            <a:srgbClr val="1F2430"/>
+          </a:solidFill>
+          <a:ln/>
+        </p:spPr>
+      </p:sp>
+      <p:sp>
+        <p:nvSpPr>
+          <p:cNvPr id="14" name="reportado todos 2"/>
+          <p:cNvSpPr/>
+          <p:nvPr/>
+        </p:nvSpPr>
+        <p:spPr>
+          <a:xfrm>
+            <a:off x="2276856" y="2377440"/>
+            <a:ext cx="146304" cy="146304"/>
+          </a:xfrm>
+          <a:prstGeom prst="ellipse">
+            <a:avLst/>
+          </a:prstGeom>
+          <a:solidFill>
+            <a:srgbClr val="1F2430"/>
+          </a:solidFill>
+          <a:ln/>
+        </p:spPr>
+      </p:sp>
+      <p:sp>
+        <p:nvSpPr>
+          <p:cNvPr id="15" name="reportado todos 3"/>
+          <p:cNvSpPr/>
+          <p:nvPr/>
+        </p:nvSpPr>
+        <p:spPr>
+          <a:xfrm>
+            <a:off x="2496312" y="2377440"/>
+            <a:ext cx="146304" cy="146304"/>
+          </a:xfrm>
+          <a:prstGeom prst="ellipse">
+            <a:avLst/>
+          </a:prstGeom>
+          <a:solidFill>
+            <a:srgbClr val="1F2430"/>
+          </a:solidFill>
+          <a:ln/>
+        </p:spPr>
+      </p:sp>
+      <p:sp>
+        <p:nvSpPr>
+          <p:cNvPr id="16" name="reportado todos 4"/>
+          <p:cNvSpPr/>
+          <p:nvPr/>
+        </p:nvSpPr>
+        <p:spPr>
+          <a:xfrm>
+            <a:off x="2715768" y="2377440"/>
+            <a:ext cx="146304" cy="146304"/>
+          </a:xfrm>
+          <a:prstGeom prst="ellipse">
+            <a:avLst/>
+          </a:prstGeom>
+          <a:solidFill>
+            <a:srgbClr val="1F2430"/>
+          </a:solidFill>
+          <a:ln/>
+        </p:spPr>
+      </p:sp>
+      <p:sp>
+        <p:nvSpPr>
+          <p:cNvPr id="17" name="reportado todos 5"/>
+          <p:cNvSpPr/>
+          <p:nvPr/>
+        </p:nvSpPr>
+        <p:spPr>
+          <a:xfrm>
+            <a:off x="2935224" y="2377440"/>
+            <a:ext cx="146304" cy="146304"/>
+          </a:xfrm>
+          <a:prstGeom prst="ellipse">
+            <a:avLst/>
+          </a:prstGeom>
+          <a:solidFill>
+            <a:srgbClr val="1F2430"/>
+          </a:solidFill>
+          <a:ln/>
+        </p:spPr>
+      </p:sp>
+      <p:sp>
+        <p:nvSpPr>
+          <p:cNvPr id="18" name="reportado todos 6"/>
+          <p:cNvSpPr/>
+          <p:nvPr/>
+        </p:nvSpPr>
+        <p:spPr>
+          <a:xfrm>
+            <a:off x="3154680" y="2377440"/>
+            <a:ext cx="146304" cy="146304"/>
+          </a:xfrm>
+          <a:prstGeom prst="ellipse">
+            <a:avLst/>
+          </a:prstGeom>
+          <a:solidFill>
+            <a:srgbClr val="1F2430"/>
+          </a:solidFill>
+          <a:ln/>
+        </p:spPr>
+      </p:sp>
+      <p:sp>
+        <p:nvSpPr>
+          <p:cNvPr id="19" name="reportado todos 7"/>
+          <p:cNvSpPr/>
+          <p:nvPr/>
+        </p:nvSpPr>
+        <p:spPr>
+          <a:xfrm>
+            <a:off x="3374136" y="2377440"/>
+            <a:ext cx="146304" cy="146304"/>
+          </a:xfrm>
+          <a:prstGeom prst="ellipse">
+            <a:avLst/>
+          </a:prstGeom>
+          <a:solidFill>
+            <a:srgbClr val="1F2430"/>
+          </a:solidFill>
+          <a:ln/>
+        </p:spPr>
+      </p:sp>
+      <p:sp>
+        <p:nvSpPr>
+          <p:cNvPr id="20" name="reportado todos 8"/>
+          <p:cNvSpPr/>
+          <p:nvPr/>
+        </p:nvSpPr>
+        <p:spPr>
+          <a:xfrm>
+            <a:off x="3593592" y="2377440"/>
+            <a:ext cx="146304" cy="146304"/>
+          </a:xfrm>
+          <a:prstGeom prst="ellipse">
+            <a:avLst/>
+          </a:prstGeom>
+          <a:solidFill>
+            <a:srgbClr val="1F2430"/>
+          </a:solidFill>
+          <a:ln/>
+        </p:spPr>
+      </p:sp>
+      <p:sp>
+        <p:nvSpPr>
+          <p:cNvPr id="21" name="reportado todos 9"/>
+          <p:cNvSpPr/>
+          <p:nvPr/>
+        </p:nvSpPr>
+        <p:spPr>
+          <a:xfrm>
+            <a:off x="3813048" y="2377440"/>
+            <a:ext cx="146304" cy="146304"/>
+          </a:xfrm>
+          <a:prstGeom prst="ellipse">
+            <a:avLst/>
+          </a:prstGeom>
+          <a:solidFill>
+            <a:srgbClr val="1F2430"/>
+          </a:solidFill>
+          <a:ln/>
+        </p:spPr>
+      </p:sp>
+      <p:sp>
+        <p:nvSpPr>
+          <p:cNvPr id="22" name="reportado todos 10"/>
+          <p:cNvSpPr/>
+          <p:nvPr/>
+        </p:nvSpPr>
+        <p:spPr>
+          <a:xfrm>
+            <a:off x="4032504" y="2377440"/>
+            <a:ext cx="146304" cy="146304"/>
+          </a:xfrm>
+          <a:prstGeom prst="ellipse">
+            <a:avLst/>
+          </a:prstGeom>
+          <a:solidFill>
+            <a:srgbClr val="1F2430"/>
+          </a:solidFill>
+          <a:ln/>
+        </p:spPr>
+      </p:sp>
+      <p:sp>
+        <p:nvSpPr>
+          <p:cNvPr id="23" name="reportado todos 11"/>
+          <p:cNvSpPr/>
+          <p:nvPr/>
+        </p:nvSpPr>
+        <p:spPr>
+          <a:xfrm>
+            <a:off x="4251960" y="2377440"/>
+            <a:ext cx="146304" cy="146304"/>
+          </a:xfrm>
+          <a:prstGeom prst="ellipse">
+            <a:avLst/>
+          </a:prstGeom>
+          <a:solidFill>
+            <a:srgbClr val="1F2430"/>
+          </a:solidFill>
+          <a:ln/>
+        </p:spPr>
+      </p:sp>
+      <p:sp>
+        <p:nvSpPr>
+          <p:cNvPr id="24" name="reportado todos 12"/>
+          <p:cNvSpPr/>
+          <p:nvPr/>
+        </p:nvSpPr>
+        <p:spPr>
+          <a:xfrm>
+            <a:off x="4471416" y="2377440"/>
+            <a:ext cx="146304" cy="146304"/>
+          </a:xfrm>
+          <a:prstGeom prst="ellipse">
+            <a:avLst/>
+          </a:prstGeom>
+          <a:solidFill>
+            <a:srgbClr val="1F2430"/>
+          </a:solidFill>
+          <a:ln/>
+        </p:spPr>
+      </p:sp>
+      <p:sp>
+        <p:nvSpPr>
+          <p:cNvPr id="25" name="reportado todos 13"/>
+          <p:cNvSpPr/>
+          <p:nvPr/>
+        </p:nvSpPr>
+        <p:spPr>
+          <a:xfrm>
+            <a:off x="4690872" y="2377440"/>
+            <a:ext cx="146304" cy="146304"/>
+          </a:xfrm>
+          <a:prstGeom prst="ellipse">
+            <a:avLst/>
+          </a:prstGeom>
+          <a:solidFill>
+            <a:srgbClr val="1F2430"/>
+          </a:solidFill>
+          <a:ln/>
+        </p:spPr>
+      </p:sp>
+      <p:sp>
+        <p:nvSpPr>
+          <p:cNvPr id="26" name="reportado todos 14"/>
+          <p:cNvSpPr/>
+          <p:nvPr/>
+        </p:nvSpPr>
+        <p:spPr>
+          <a:xfrm>
+            <a:off x="4910328" y="2377440"/>
+            <a:ext cx="146304" cy="146304"/>
+          </a:xfrm>
+          <a:prstGeom prst="ellipse">
+            <a:avLst/>
+          </a:prstGeom>
+          <a:solidFill>
+            <a:srgbClr val="1F2430"/>
+          </a:solidFill>
+          <a:ln/>
+        </p:spPr>
+      </p:sp>
+      <p:sp>
+        <p:nvSpPr>
+          <p:cNvPr id="27" name="reportado todos 15"/>
+          <p:cNvSpPr/>
+          <p:nvPr/>
+        </p:nvSpPr>
+        <p:spPr>
+          <a:xfrm>
+            <a:off x="5129784" y="2377440"/>
+            <a:ext cx="146304" cy="146304"/>
+          </a:xfrm>
+          <a:prstGeom prst="ellipse">
+            <a:avLst/>
+          </a:prstGeom>
+          <a:solidFill>
+            <a:srgbClr val="1F2430"/>
+          </a:solidFill>
+          <a:ln/>
+        </p:spPr>
+      </p:sp>
+      <p:sp>
+        <p:nvSpPr>
+          <p:cNvPr id="28" name="reportado todos 16"/>
+          <p:cNvSpPr/>
+          <p:nvPr/>
+        </p:nvSpPr>
+        <p:spPr>
+          <a:xfrm>
+            <a:off x="5349240" y="2377440"/>
+            <a:ext cx="146304" cy="146304"/>
+          </a:xfrm>
+          <a:prstGeom prst="ellipse">
+            <a:avLst/>
+          </a:prstGeom>
+          <a:solidFill>
+            <a:srgbClr val="1F2430"/>
+          </a:solidFill>
+          <a:ln/>
+        </p:spPr>
+      </p:sp>
+      <p:sp>
+        <p:nvSpPr>
+          <p:cNvPr id="29" name="reportado todos 17"/>
+          <p:cNvSpPr/>
+          <p:nvPr/>
+        </p:nvSpPr>
+        <p:spPr>
+          <a:xfrm>
+            <a:off x="5568696" y="2377440"/>
+            <a:ext cx="146304" cy="146304"/>
+          </a:xfrm>
+          <a:prstGeom prst="ellipse">
+            <a:avLst/>
+          </a:prstGeom>
+          <a:solidFill>
+            <a:srgbClr val="1F2430"/>
+          </a:solidFill>
+          <a:ln/>
+        </p:spPr>
+      </p:sp>
+      <p:sp>
+        <p:nvSpPr>
+          <p:cNvPr id="30" name="reportado todos 18"/>
+          <p:cNvSpPr/>
+          <p:nvPr/>
+        </p:nvSpPr>
+        <p:spPr>
+          <a:xfrm>
+            <a:off x="5788152" y="2377440"/>
+            <a:ext cx="146304" cy="146304"/>
+          </a:xfrm>
+          <a:prstGeom prst="ellipse">
+            <a:avLst/>
+          </a:prstGeom>
+          <a:solidFill>
+            <a:srgbClr val="1F2430"/>
+          </a:solidFill>
+          <a:ln/>
+        </p:spPr>
+      </p:sp>
+      <p:sp>
+        <p:nvSpPr>
+          <p:cNvPr id="31" name="reportado todos 19"/>
+          <p:cNvSpPr/>
+          <p:nvPr/>
+        </p:nvSpPr>
+        <p:spPr>
+          <a:xfrm>
+            <a:off x="6007608" y="2377440"/>
+            <a:ext cx="146304" cy="146304"/>
+          </a:xfrm>
+          <a:prstGeom prst="ellipse">
+            <a:avLst/>
+          </a:prstGeom>
+          <a:solidFill>
+            <a:srgbClr val="1F2430"/>
+          </a:solidFill>
+          <a:ln/>
+        </p:spPr>
+      </p:sp>
+      <p:sp>
+        <p:nvSpPr>
+          <p:cNvPr id="32" name="reportado todos 20"/>
+          <p:cNvSpPr/>
+          <p:nvPr/>
+        </p:nvSpPr>
+        <p:spPr>
+          <a:xfrm>
+            <a:off x="6227064" y="2377440"/>
+            <a:ext cx="146304" cy="146304"/>
+          </a:xfrm>
+          <a:prstGeom prst="ellipse">
+            <a:avLst/>
+          </a:prstGeom>
+          <a:solidFill>
+            <a:srgbClr val="1F2430"/>
+          </a:solidFill>
+          <a:ln/>
+        </p:spPr>
+      </p:sp>
+      <p:sp>
+        <p:nvSpPr>
+          <p:cNvPr id="33" name="Text 31"/>
+          <p:cNvSpPr txBox="1"/>
+          <p:nvPr/>
+        </p:nvSpPr>
+        <p:spPr>
+          <a:xfrm>
+            <a:off x="6583680" y="2286000"/>
+            <a:ext cx="1371600" cy="329184"/>
+          </a:xfrm>
+          <a:prstGeom prst="rect">
+            <a:avLst/>
+          </a:prstGeom>
+          <a:noFill/>
+          <a:ln/>
+        </p:spPr>
+        <p:txBody>
+          <a:bodyPr wrap="square" lIns="0" tIns="0" rIns="0" bIns="0" rtlCol="0" anchor="t"/>
+          <a:lstStyle/>
+          <a:p>
+            <a:pPr indent="0" marL="0">
+              <a:lnSpc>
+                <a:spcPct val="100000"/>
+              </a:lnSpc>
+              <a:buNone/>
+            </a:pPr>
+            <a:r>
+              <a:rPr lang="en-US" sz="2000" b="1" dirty="0">
                 <a:solidFill>
                   <a:srgbClr val="1F2430"/>
                 </a:solidFill>
@@ -4264,91 +4730,1931 @@
                 <a:ea typeface="Arial" pitchFamily="34" charset="-122"/>
                 <a:cs typeface="Arial" pitchFamily="34" charset="-120"/>
               </a:rPr>
-              <a:t>errores: con tan pocas etiquetas, SGD termina peor que no adaptarse</a:t>
-            </a:r>
-            <a:endParaRPr lang="en-US" sz="1500" dirty="0"/>
-          </a:p>
-        </p:txBody>
-      </p:sp>
-      <p:sp>
-        <p:nvSpPr>
-          <p:cNvPr id="15" name="Text 12"/>
-          <p:cNvSpPr txBox="1"/>
-          <p:nvPr/>
-        </p:nvSpPr>
-        <p:spPr>
-          <a:xfrm>
-            <a:off x="7726680" y="5440680"/>
-            <a:ext cx="3931920" cy="548640"/>
-          </a:xfrm>
-          <a:prstGeom prst="rect">
-            <a:avLst/>
-          </a:prstGeom>
-          <a:noFill/>
-          <a:ln/>
-        </p:spPr>
-        <p:txBody>
-          <a:bodyPr wrap="square" lIns="0" tIns="0" rIns="0" bIns="0" rtlCol="0" anchor="t"/>
-          <a:lstStyle/>
-          <a:p>
-            <a:pPr indent="0" marL="0">
-              <a:lnSpc>
-                <a:spcPct val="100000"/>
-              </a:lnSpc>
-              <a:buNone/>
-            </a:pPr>
-            <a:r>
-              <a:rPr lang="en-US" sz="1300" dirty="0">
-                <a:solidFill>
-                  <a:srgbClr val="5A6274"/>
+              <a:t>305</a:t>
+            </a:r>
+            <a:endParaRPr lang="en-US" sz="2000" dirty="0"/>
+          </a:p>
+        </p:txBody>
+      </p:sp>
+      <p:sp>
+        <p:nvSpPr>
+          <p:cNvPr id="34" name="Text 32"/>
+          <p:cNvSpPr txBox="1"/>
+          <p:nvPr/>
+        </p:nvSpPr>
+        <p:spPr>
+          <a:xfrm>
+            <a:off x="548640" y="2980944"/>
+            <a:ext cx="1417320" cy="274320"/>
+          </a:xfrm>
+          <a:prstGeom prst="rect">
+            <a:avLst/>
+          </a:prstGeom>
+          <a:noFill/>
+          <a:ln/>
+        </p:spPr>
+        <p:txBody>
+          <a:bodyPr wrap="square" lIns="0" tIns="0" rIns="0" bIns="0" rtlCol="0" anchor="t"/>
+          <a:lstStyle/>
+          <a:p>
+            <a:pPr indent="0" marL="0">
+              <a:lnSpc>
+                <a:spcPct val="100000"/>
+              </a:lnSpc>
+              <a:buNone/>
+            </a:pPr>
+            <a:r>
+              <a:rPr lang="en-US" sz="1500" b="1" dirty="0">
+                <a:solidFill>
+                  <a:srgbClr val="1F2430"/>
                 </a:solidFill>
                 <a:latin typeface="Arial" pitchFamily="34" charset="0"/>
                 <a:ea typeface="Arial" pitchFamily="34" charset="-122"/>
                 <a:cs typeface="Arial" pitchFamily="34" charset="-120"/>
               </a:rPr>
-              <a:t>Con 1 de cada 5 o más, reentrenar gana en al menos 18 de 20 semillas.</a:t>
-            </a:r>
-            <a:endParaRPr lang="en-US" sz="1300" dirty="0"/>
-          </a:p>
-        </p:txBody>
-      </p:sp>
-      <p:sp>
-        <p:nvSpPr>
-          <p:cNvPr id="16" name="Text 13"/>
-          <p:cNvSpPr txBox="1"/>
-          <p:nvPr/>
-        </p:nvSpPr>
-        <p:spPr>
-          <a:xfrm>
-            <a:off x="548640" y="6373368"/>
-            <a:ext cx="10241280" cy="274320"/>
-          </a:xfrm>
-          <a:prstGeom prst="rect">
-            <a:avLst/>
-          </a:prstGeom>
-          <a:noFill/>
-          <a:ln/>
-        </p:spPr>
-        <p:txBody>
-          <a:bodyPr wrap="square" lIns="0" tIns="0" rIns="0" bIns="0" rtlCol="0" anchor="t"/>
-          <a:lstStyle/>
-          <a:p>
-            <a:pPr indent="0" marL="0">
-              <a:lnSpc>
-                <a:spcPct val="100000"/>
-              </a:lnSpc>
-              <a:buNone/>
-            </a:pPr>
-            <a:r>
-              <a:rPr lang="en-US" sz="1000" dirty="0">
-                <a:solidFill>
-                  <a:srgbClr val="9AA1AE"/>
+              <a:t>1 de cada 2</a:t>
+            </a:r>
+            <a:endParaRPr lang="en-US" sz="1500" dirty="0"/>
+          </a:p>
+        </p:txBody>
+      </p:sp>
+      <p:sp>
+        <p:nvSpPr>
+          <p:cNvPr id="35" name="reportado 1 de cada 2 1"/>
+          <p:cNvSpPr/>
+          <p:nvPr/>
+        </p:nvSpPr>
+        <p:spPr>
+          <a:xfrm>
+            <a:off x="2057400" y="3035808"/>
+            <a:ext cx="146304" cy="146304"/>
+          </a:xfrm>
+          <a:prstGeom prst="ellipse">
+            <a:avLst/>
+          </a:prstGeom>
+          <a:solidFill>
+            <a:srgbClr val="1F2430"/>
+          </a:solidFill>
+          <a:ln/>
+        </p:spPr>
+      </p:sp>
+      <p:sp>
+        <p:nvSpPr>
+          <p:cNvPr id="36" name="sin reportar 1 de cada 2 2"/>
+          <p:cNvSpPr/>
+          <p:nvPr/>
+        </p:nvSpPr>
+        <p:spPr>
+          <a:xfrm>
+            <a:off x="2276856" y="3035808"/>
+            <a:ext cx="146304" cy="146304"/>
+          </a:xfrm>
+          <a:prstGeom prst="ellipse">
+            <a:avLst/>
+          </a:prstGeom>
+          <a:ln w="15875">
+            <a:solidFill>
+              <a:srgbClr val="9AA1AE"/>
+            </a:solidFill>
+            <a:prstDash val="solid"/>
+          </a:ln>
+        </p:spPr>
+      </p:sp>
+      <p:sp>
+        <p:nvSpPr>
+          <p:cNvPr id="37" name="reportado 1 de cada 2 3"/>
+          <p:cNvSpPr/>
+          <p:nvPr/>
+        </p:nvSpPr>
+        <p:spPr>
+          <a:xfrm>
+            <a:off x="2496312" y="3035808"/>
+            <a:ext cx="146304" cy="146304"/>
+          </a:xfrm>
+          <a:prstGeom prst="ellipse">
+            <a:avLst/>
+          </a:prstGeom>
+          <a:solidFill>
+            <a:srgbClr val="1F2430"/>
+          </a:solidFill>
+          <a:ln/>
+        </p:spPr>
+      </p:sp>
+      <p:sp>
+        <p:nvSpPr>
+          <p:cNvPr id="38" name="sin reportar 1 de cada 2 4"/>
+          <p:cNvSpPr/>
+          <p:nvPr/>
+        </p:nvSpPr>
+        <p:spPr>
+          <a:xfrm>
+            <a:off x="2715768" y="3035808"/>
+            <a:ext cx="146304" cy="146304"/>
+          </a:xfrm>
+          <a:prstGeom prst="ellipse">
+            <a:avLst/>
+          </a:prstGeom>
+          <a:ln w="15875">
+            <a:solidFill>
+              <a:srgbClr val="9AA1AE"/>
+            </a:solidFill>
+            <a:prstDash val="solid"/>
+          </a:ln>
+        </p:spPr>
+      </p:sp>
+      <p:sp>
+        <p:nvSpPr>
+          <p:cNvPr id="39" name="reportado 1 de cada 2 5"/>
+          <p:cNvSpPr/>
+          <p:nvPr/>
+        </p:nvSpPr>
+        <p:spPr>
+          <a:xfrm>
+            <a:off x="2935224" y="3035808"/>
+            <a:ext cx="146304" cy="146304"/>
+          </a:xfrm>
+          <a:prstGeom prst="ellipse">
+            <a:avLst/>
+          </a:prstGeom>
+          <a:solidFill>
+            <a:srgbClr val="1F2430"/>
+          </a:solidFill>
+          <a:ln/>
+        </p:spPr>
+      </p:sp>
+      <p:sp>
+        <p:nvSpPr>
+          <p:cNvPr id="40" name="sin reportar 1 de cada 2 6"/>
+          <p:cNvSpPr/>
+          <p:nvPr/>
+        </p:nvSpPr>
+        <p:spPr>
+          <a:xfrm>
+            <a:off x="3154680" y="3035808"/>
+            <a:ext cx="146304" cy="146304"/>
+          </a:xfrm>
+          <a:prstGeom prst="ellipse">
+            <a:avLst/>
+          </a:prstGeom>
+          <a:ln w="15875">
+            <a:solidFill>
+              <a:srgbClr val="9AA1AE"/>
+            </a:solidFill>
+            <a:prstDash val="solid"/>
+          </a:ln>
+        </p:spPr>
+      </p:sp>
+      <p:sp>
+        <p:nvSpPr>
+          <p:cNvPr id="41" name="reportado 1 de cada 2 7"/>
+          <p:cNvSpPr/>
+          <p:nvPr/>
+        </p:nvSpPr>
+        <p:spPr>
+          <a:xfrm>
+            <a:off x="3374136" y="3035808"/>
+            <a:ext cx="146304" cy="146304"/>
+          </a:xfrm>
+          <a:prstGeom prst="ellipse">
+            <a:avLst/>
+          </a:prstGeom>
+          <a:solidFill>
+            <a:srgbClr val="1F2430"/>
+          </a:solidFill>
+          <a:ln/>
+        </p:spPr>
+      </p:sp>
+      <p:sp>
+        <p:nvSpPr>
+          <p:cNvPr id="42" name="sin reportar 1 de cada 2 8"/>
+          <p:cNvSpPr/>
+          <p:nvPr/>
+        </p:nvSpPr>
+        <p:spPr>
+          <a:xfrm>
+            <a:off x="3593592" y="3035808"/>
+            <a:ext cx="146304" cy="146304"/>
+          </a:xfrm>
+          <a:prstGeom prst="ellipse">
+            <a:avLst/>
+          </a:prstGeom>
+          <a:ln w="15875">
+            <a:solidFill>
+              <a:srgbClr val="9AA1AE"/>
+            </a:solidFill>
+            <a:prstDash val="solid"/>
+          </a:ln>
+        </p:spPr>
+      </p:sp>
+      <p:sp>
+        <p:nvSpPr>
+          <p:cNvPr id="43" name="reportado 1 de cada 2 9"/>
+          <p:cNvSpPr/>
+          <p:nvPr/>
+        </p:nvSpPr>
+        <p:spPr>
+          <a:xfrm>
+            <a:off x="3813048" y="3035808"/>
+            <a:ext cx="146304" cy="146304"/>
+          </a:xfrm>
+          <a:prstGeom prst="ellipse">
+            <a:avLst/>
+          </a:prstGeom>
+          <a:solidFill>
+            <a:srgbClr val="1F2430"/>
+          </a:solidFill>
+          <a:ln/>
+        </p:spPr>
+      </p:sp>
+      <p:sp>
+        <p:nvSpPr>
+          <p:cNvPr id="44" name="sin reportar 1 de cada 2 10"/>
+          <p:cNvSpPr/>
+          <p:nvPr/>
+        </p:nvSpPr>
+        <p:spPr>
+          <a:xfrm>
+            <a:off x="4032504" y="3035808"/>
+            <a:ext cx="146304" cy="146304"/>
+          </a:xfrm>
+          <a:prstGeom prst="ellipse">
+            <a:avLst/>
+          </a:prstGeom>
+          <a:ln w="15875">
+            <a:solidFill>
+              <a:srgbClr val="9AA1AE"/>
+            </a:solidFill>
+            <a:prstDash val="solid"/>
+          </a:ln>
+        </p:spPr>
+      </p:sp>
+      <p:sp>
+        <p:nvSpPr>
+          <p:cNvPr id="45" name="reportado 1 de cada 2 11"/>
+          <p:cNvSpPr/>
+          <p:nvPr/>
+        </p:nvSpPr>
+        <p:spPr>
+          <a:xfrm>
+            <a:off x="4251960" y="3035808"/>
+            <a:ext cx="146304" cy="146304"/>
+          </a:xfrm>
+          <a:prstGeom prst="ellipse">
+            <a:avLst/>
+          </a:prstGeom>
+          <a:solidFill>
+            <a:srgbClr val="1F2430"/>
+          </a:solidFill>
+          <a:ln/>
+        </p:spPr>
+      </p:sp>
+      <p:sp>
+        <p:nvSpPr>
+          <p:cNvPr id="46" name="sin reportar 1 de cada 2 12"/>
+          <p:cNvSpPr/>
+          <p:nvPr/>
+        </p:nvSpPr>
+        <p:spPr>
+          <a:xfrm>
+            <a:off x="4471416" y="3035808"/>
+            <a:ext cx="146304" cy="146304"/>
+          </a:xfrm>
+          <a:prstGeom prst="ellipse">
+            <a:avLst/>
+          </a:prstGeom>
+          <a:ln w="15875">
+            <a:solidFill>
+              <a:srgbClr val="9AA1AE"/>
+            </a:solidFill>
+            <a:prstDash val="solid"/>
+          </a:ln>
+        </p:spPr>
+      </p:sp>
+      <p:sp>
+        <p:nvSpPr>
+          <p:cNvPr id="47" name="reportado 1 de cada 2 13"/>
+          <p:cNvSpPr/>
+          <p:nvPr/>
+        </p:nvSpPr>
+        <p:spPr>
+          <a:xfrm>
+            <a:off x="4690872" y="3035808"/>
+            <a:ext cx="146304" cy="146304"/>
+          </a:xfrm>
+          <a:prstGeom prst="ellipse">
+            <a:avLst/>
+          </a:prstGeom>
+          <a:solidFill>
+            <a:srgbClr val="1F2430"/>
+          </a:solidFill>
+          <a:ln/>
+        </p:spPr>
+      </p:sp>
+      <p:sp>
+        <p:nvSpPr>
+          <p:cNvPr id="48" name="sin reportar 1 de cada 2 14"/>
+          <p:cNvSpPr/>
+          <p:nvPr/>
+        </p:nvSpPr>
+        <p:spPr>
+          <a:xfrm>
+            <a:off x="4910328" y="3035808"/>
+            <a:ext cx="146304" cy="146304"/>
+          </a:xfrm>
+          <a:prstGeom prst="ellipse">
+            <a:avLst/>
+          </a:prstGeom>
+          <a:ln w="15875">
+            <a:solidFill>
+              <a:srgbClr val="9AA1AE"/>
+            </a:solidFill>
+            <a:prstDash val="solid"/>
+          </a:ln>
+        </p:spPr>
+      </p:sp>
+      <p:sp>
+        <p:nvSpPr>
+          <p:cNvPr id="49" name="reportado 1 de cada 2 15"/>
+          <p:cNvSpPr/>
+          <p:nvPr/>
+        </p:nvSpPr>
+        <p:spPr>
+          <a:xfrm>
+            <a:off x="5129784" y="3035808"/>
+            <a:ext cx="146304" cy="146304"/>
+          </a:xfrm>
+          <a:prstGeom prst="ellipse">
+            <a:avLst/>
+          </a:prstGeom>
+          <a:solidFill>
+            <a:srgbClr val="1F2430"/>
+          </a:solidFill>
+          <a:ln/>
+        </p:spPr>
+      </p:sp>
+      <p:sp>
+        <p:nvSpPr>
+          <p:cNvPr id="50" name="sin reportar 1 de cada 2 16"/>
+          <p:cNvSpPr/>
+          <p:nvPr/>
+        </p:nvSpPr>
+        <p:spPr>
+          <a:xfrm>
+            <a:off x="5349240" y="3035808"/>
+            <a:ext cx="146304" cy="146304"/>
+          </a:xfrm>
+          <a:prstGeom prst="ellipse">
+            <a:avLst/>
+          </a:prstGeom>
+          <a:ln w="15875">
+            <a:solidFill>
+              <a:srgbClr val="9AA1AE"/>
+            </a:solidFill>
+            <a:prstDash val="solid"/>
+          </a:ln>
+        </p:spPr>
+      </p:sp>
+      <p:sp>
+        <p:nvSpPr>
+          <p:cNvPr id="51" name="reportado 1 de cada 2 17"/>
+          <p:cNvSpPr/>
+          <p:nvPr/>
+        </p:nvSpPr>
+        <p:spPr>
+          <a:xfrm>
+            <a:off x="5568696" y="3035808"/>
+            <a:ext cx="146304" cy="146304"/>
+          </a:xfrm>
+          <a:prstGeom prst="ellipse">
+            <a:avLst/>
+          </a:prstGeom>
+          <a:solidFill>
+            <a:srgbClr val="1F2430"/>
+          </a:solidFill>
+          <a:ln/>
+        </p:spPr>
+      </p:sp>
+      <p:sp>
+        <p:nvSpPr>
+          <p:cNvPr id="52" name="sin reportar 1 de cada 2 18"/>
+          <p:cNvSpPr/>
+          <p:nvPr/>
+        </p:nvSpPr>
+        <p:spPr>
+          <a:xfrm>
+            <a:off x="5788152" y="3035808"/>
+            <a:ext cx="146304" cy="146304"/>
+          </a:xfrm>
+          <a:prstGeom prst="ellipse">
+            <a:avLst/>
+          </a:prstGeom>
+          <a:ln w="15875">
+            <a:solidFill>
+              <a:srgbClr val="9AA1AE"/>
+            </a:solidFill>
+            <a:prstDash val="solid"/>
+          </a:ln>
+        </p:spPr>
+      </p:sp>
+      <p:sp>
+        <p:nvSpPr>
+          <p:cNvPr id="53" name="reportado 1 de cada 2 19"/>
+          <p:cNvSpPr/>
+          <p:nvPr/>
+        </p:nvSpPr>
+        <p:spPr>
+          <a:xfrm>
+            <a:off x="6007608" y="3035808"/>
+            <a:ext cx="146304" cy="146304"/>
+          </a:xfrm>
+          <a:prstGeom prst="ellipse">
+            <a:avLst/>
+          </a:prstGeom>
+          <a:solidFill>
+            <a:srgbClr val="1F2430"/>
+          </a:solidFill>
+          <a:ln/>
+        </p:spPr>
+      </p:sp>
+      <p:sp>
+        <p:nvSpPr>
+          <p:cNvPr id="54" name="sin reportar 1 de cada 2 20"/>
+          <p:cNvSpPr/>
+          <p:nvPr/>
+        </p:nvSpPr>
+        <p:spPr>
+          <a:xfrm>
+            <a:off x="6227064" y="3035808"/>
+            <a:ext cx="146304" cy="146304"/>
+          </a:xfrm>
+          <a:prstGeom prst="ellipse">
+            <a:avLst/>
+          </a:prstGeom>
+          <a:ln w="15875">
+            <a:solidFill>
+              <a:srgbClr val="9AA1AE"/>
+            </a:solidFill>
+            <a:prstDash val="solid"/>
+          </a:ln>
+        </p:spPr>
+      </p:sp>
+      <p:sp>
+        <p:nvSpPr>
+          <p:cNvPr id="55" name="Text 53"/>
+          <p:cNvSpPr txBox="1"/>
+          <p:nvPr/>
+        </p:nvSpPr>
+        <p:spPr>
+          <a:xfrm>
+            <a:off x="6583680" y="2944368"/>
+            <a:ext cx="1371600" cy="329184"/>
+          </a:xfrm>
+          <a:prstGeom prst="rect">
+            <a:avLst/>
+          </a:prstGeom>
+          <a:noFill/>
+          <a:ln/>
+        </p:spPr>
+        <p:txBody>
+          <a:bodyPr wrap="square" lIns="0" tIns="0" rIns="0" bIns="0" rtlCol="0" anchor="t"/>
+          <a:lstStyle/>
+          <a:p>
+            <a:pPr indent="0" marL="0">
+              <a:lnSpc>
+                <a:spcPct val="100000"/>
+              </a:lnSpc>
+              <a:buNone/>
+            </a:pPr>
+            <a:r>
+              <a:rPr lang="en-US" sz="2000" b="1" dirty="0">
+                <a:solidFill>
+                  <a:srgbClr val="1F2430"/>
                 </a:solidFill>
                 <a:latin typeface="Arial" pitchFamily="34" charset="0"/>
                 <a:ea typeface="Arial" pitchFamily="34" charset="-122"/>
                 <a:cs typeface="Arial" pitchFamily="34" charset="-120"/>
               </a:rPr>
-              <a:t>Barrido de ρ, la probabilidad de ver la etiqueta. Hedge usa el estimador ℓ/ρ con η_ρ = √ρ · η_T. Media de 20 permutaciones (semillas) del SMS Spam Collection.</a:t>
+              <a:t>≈ 152</a:t>
+            </a:r>
+            <a:endParaRPr lang="en-US" sz="2000" dirty="0"/>
+          </a:p>
+        </p:txBody>
+      </p:sp>
+      <p:sp>
+        <p:nvSpPr>
+          <p:cNvPr id="56" name="Text 54"/>
+          <p:cNvSpPr txBox="1"/>
+          <p:nvPr/>
+        </p:nvSpPr>
+        <p:spPr>
+          <a:xfrm>
+            <a:off x="548640" y="3639312"/>
+            <a:ext cx="1417320" cy="274320"/>
+          </a:xfrm>
+          <a:prstGeom prst="rect">
+            <a:avLst/>
+          </a:prstGeom>
+          <a:noFill/>
+          <a:ln/>
+        </p:spPr>
+        <p:txBody>
+          <a:bodyPr wrap="square" lIns="0" tIns="0" rIns="0" bIns="0" rtlCol="0" anchor="t"/>
+          <a:lstStyle/>
+          <a:p>
+            <a:pPr indent="0" marL="0">
+              <a:lnSpc>
+                <a:spcPct val="100000"/>
+              </a:lnSpc>
+              <a:buNone/>
+            </a:pPr>
+            <a:r>
+              <a:rPr lang="en-US" sz="1500" b="1" dirty="0">
+                <a:solidFill>
+                  <a:srgbClr val="1F2430"/>
+                </a:solidFill>
+                <a:latin typeface="Arial" pitchFamily="34" charset="0"/>
+                <a:ea typeface="Arial" pitchFamily="34" charset="-122"/>
+                <a:cs typeface="Arial" pitchFamily="34" charset="-120"/>
+              </a:rPr>
+              <a:t>1 de cada 5</a:t>
+            </a:r>
+            <a:endParaRPr lang="en-US" sz="1500" dirty="0"/>
+          </a:p>
+        </p:txBody>
+      </p:sp>
+      <p:sp>
+        <p:nvSpPr>
+          <p:cNvPr id="57" name="reportado 1 de cada 5 1"/>
+          <p:cNvSpPr/>
+          <p:nvPr/>
+        </p:nvSpPr>
+        <p:spPr>
+          <a:xfrm>
+            <a:off x="2057400" y="3694176"/>
+            <a:ext cx="146304" cy="146304"/>
+          </a:xfrm>
+          <a:prstGeom prst="ellipse">
+            <a:avLst/>
+          </a:prstGeom>
+          <a:solidFill>
+            <a:srgbClr val="1F2430"/>
+          </a:solidFill>
+          <a:ln/>
+        </p:spPr>
+      </p:sp>
+      <p:sp>
+        <p:nvSpPr>
+          <p:cNvPr id="58" name="sin reportar 1 de cada 5 2"/>
+          <p:cNvSpPr/>
+          <p:nvPr/>
+        </p:nvSpPr>
+        <p:spPr>
+          <a:xfrm>
+            <a:off x="2276856" y="3694176"/>
+            <a:ext cx="146304" cy="146304"/>
+          </a:xfrm>
+          <a:prstGeom prst="ellipse">
+            <a:avLst/>
+          </a:prstGeom>
+          <a:ln w="15875">
+            <a:solidFill>
+              <a:srgbClr val="9AA1AE"/>
+            </a:solidFill>
+            <a:prstDash val="solid"/>
+          </a:ln>
+        </p:spPr>
+      </p:sp>
+      <p:sp>
+        <p:nvSpPr>
+          <p:cNvPr id="59" name="sin reportar 1 de cada 5 3"/>
+          <p:cNvSpPr/>
+          <p:nvPr/>
+        </p:nvSpPr>
+        <p:spPr>
+          <a:xfrm>
+            <a:off x="2496312" y="3694176"/>
+            <a:ext cx="146304" cy="146304"/>
+          </a:xfrm>
+          <a:prstGeom prst="ellipse">
+            <a:avLst/>
+          </a:prstGeom>
+          <a:ln w="15875">
+            <a:solidFill>
+              <a:srgbClr val="9AA1AE"/>
+            </a:solidFill>
+            <a:prstDash val="solid"/>
+          </a:ln>
+        </p:spPr>
+      </p:sp>
+      <p:sp>
+        <p:nvSpPr>
+          <p:cNvPr id="60" name="sin reportar 1 de cada 5 4"/>
+          <p:cNvSpPr/>
+          <p:nvPr/>
+        </p:nvSpPr>
+        <p:spPr>
+          <a:xfrm>
+            <a:off x="2715768" y="3694176"/>
+            <a:ext cx="146304" cy="146304"/>
+          </a:xfrm>
+          <a:prstGeom prst="ellipse">
+            <a:avLst/>
+          </a:prstGeom>
+          <a:ln w="15875">
+            <a:solidFill>
+              <a:srgbClr val="9AA1AE"/>
+            </a:solidFill>
+            <a:prstDash val="solid"/>
+          </a:ln>
+        </p:spPr>
+      </p:sp>
+      <p:sp>
+        <p:nvSpPr>
+          <p:cNvPr id="61" name="sin reportar 1 de cada 5 5"/>
+          <p:cNvSpPr/>
+          <p:nvPr/>
+        </p:nvSpPr>
+        <p:spPr>
+          <a:xfrm>
+            <a:off x="2935224" y="3694176"/>
+            <a:ext cx="146304" cy="146304"/>
+          </a:xfrm>
+          <a:prstGeom prst="ellipse">
+            <a:avLst/>
+          </a:prstGeom>
+          <a:ln w="15875">
+            <a:solidFill>
+              <a:srgbClr val="9AA1AE"/>
+            </a:solidFill>
+            <a:prstDash val="solid"/>
+          </a:ln>
+        </p:spPr>
+      </p:sp>
+      <p:sp>
+        <p:nvSpPr>
+          <p:cNvPr id="62" name="reportado 1 de cada 5 6"/>
+          <p:cNvSpPr/>
+          <p:nvPr/>
+        </p:nvSpPr>
+        <p:spPr>
+          <a:xfrm>
+            <a:off x="3154680" y="3694176"/>
+            <a:ext cx="146304" cy="146304"/>
+          </a:xfrm>
+          <a:prstGeom prst="ellipse">
+            <a:avLst/>
+          </a:prstGeom>
+          <a:solidFill>
+            <a:srgbClr val="1F2430"/>
+          </a:solidFill>
+          <a:ln/>
+        </p:spPr>
+      </p:sp>
+      <p:sp>
+        <p:nvSpPr>
+          <p:cNvPr id="63" name="sin reportar 1 de cada 5 7"/>
+          <p:cNvSpPr/>
+          <p:nvPr/>
+        </p:nvSpPr>
+        <p:spPr>
+          <a:xfrm>
+            <a:off x="3374136" y="3694176"/>
+            <a:ext cx="146304" cy="146304"/>
+          </a:xfrm>
+          <a:prstGeom prst="ellipse">
+            <a:avLst/>
+          </a:prstGeom>
+          <a:ln w="15875">
+            <a:solidFill>
+              <a:srgbClr val="9AA1AE"/>
+            </a:solidFill>
+            <a:prstDash val="solid"/>
+          </a:ln>
+        </p:spPr>
+      </p:sp>
+      <p:sp>
+        <p:nvSpPr>
+          <p:cNvPr id="64" name="sin reportar 1 de cada 5 8"/>
+          <p:cNvSpPr/>
+          <p:nvPr/>
+        </p:nvSpPr>
+        <p:spPr>
+          <a:xfrm>
+            <a:off x="3593592" y="3694176"/>
+            <a:ext cx="146304" cy="146304"/>
+          </a:xfrm>
+          <a:prstGeom prst="ellipse">
+            <a:avLst/>
+          </a:prstGeom>
+          <a:ln w="15875">
+            <a:solidFill>
+              <a:srgbClr val="9AA1AE"/>
+            </a:solidFill>
+            <a:prstDash val="solid"/>
+          </a:ln>
+        </p:spPr>
+      </p:sp>
+      <p:sp>
+        <p:nvSpPr>
+          <p:cNvPr id="65" name="sin reportar 1 de cada 5 9"/>
+          <p:cNvSpPr/>
+          <p:nvPr/>
+        </p:nvSpPr>
+        <p:spPr>
+          <a:xfrm>
+            <a:off x="3813048" y="3694176"/>
+            <a:ext cx="146304" cy="146304"/>
+          </a:xfrm>
+          <a:prstGeom prst="ellipse">
+            <a:avLst/>
+          </a:prstGeom>
+          <a:ln w="15875">
+            <a:solidFill>
+              <a:srgbClr val="9AA1AE"/>
+            </a:solidFill>
+            <a:prstDash val="solid"/>
+          </a:ln>
+        </p:spPr>
+      </p:sp>
+      <p:sp>
+        <p:nvSpPr>
+          <p:cNvPr id="66" name="sin reportar 1 de cada 5 10"/>
+          <p:cNvSpPr/>
+          <p:nvPr/>
+        </p:nvSpPr>
+        <p:spPr>
+          <a:xfrm>
+            <a:off x="4032504" y="3694176"/>
+            <a:ext cx="146304" cy="146304"/>
+          </a:xfrm>
+          <a:prstGeom prst="ellipse">
+            <a:avLst/>
+          </a:prstGeom>
+          <a:ln w="15875">
+            <a:solidFill>
+              <a:srgbClr val="9AA1AE"/>
+            </a:solidFill>
+            <a:prstDash val="solid"/>
+          </a:ln>
+        </p:spPr>
+      </p:sp>
+      <p:sp>
+        <p:nvSpPr>
+          <p:cNvPr id="67" name="reportado 1 de cada 5 11"/>
+          <p:cNvSpPr/>
+          <p:nvPr/>
+        </p:nvSpPr>
+        <p:spPr>
+          <a:xfrm>
+            <a:off x="4251960" y="3694176"/>
+            <a:ext cx="146304" cy="146304"/>
+          </a:xfrm>
+          <a:prstGeom prst="ellipse">
+            <a:avLst/>
+          </a:prstGeom>
+          <a:solidFill>
+            <a:srgbClr val="1F2430"/>
+          </a:solidFill>
+          <a:ln/>
+        </p:spPr>
+      </p:sp>
+      <p:sp>
+        <p:nvSpPr>
+          <p:cNvPr id="68" name="sin reportar 1 de cada 5 12"/>
+          <p:cNvSpPr/>
+          <p:nvPr/>
+        </p:nvSpPr>
+        <p:spPr>
+          <a:xfrm>
+            <a:off x="4471416" y="3694176"/>
+            <a:ext cx="146304" cy="146304"/>
+          </a:xfrm>
+          <a:prstGeom prst="ellipse">
+            <a:avLst/>
+          </a:prstGeom>
+          <a:ln w="15875">
+            <a:solidFill>
+              <a:srgbClr val="9AA1AE"/>
+            </a:solidFill>
+            <a:prstDash val="solid"/>
+          </a:ln>
+        </p:spPr>
+      </p:sp>
+      <p:sp>
+        <p:nvSpPr>
+          <p:cNvPr id="69" name="sin reportar 1 de cada 5 13"/>
+          <p:cNvSpPr/>
+          <p:nvPr/>
+        </p:nvSpPr>
+        <p:spPr>
+          <a:xfrm>
+            <a:off x="4690872" y="3694176"/>
+            <a:ext cx="146304" cy="146304"/>
+          </a:xfrm>
+          <a:prstGeom prst="ellipse">
+            <a:avLst/>
+          </a:prstGeom>
+          <a:ln w="15875">
+            <a:solidFill>
+              <a:srgbClr val="9AA1AE"/>
+            </a:solidFill>
+            <a:prstDash val="solid"/>
+          </a:ln>
+        </p:spPr>
+      </p:sp>
+      <p:sp>
+        <p:nvSpPr>
+          <p:cNvPr id="70" name="sin reportar 1 de cada 5 14"/>
+          <p:cNvSpPr/>
+          <p:nvPr/>
+        </p:nvSpPr>
+        <p:spPr>
+          <a:xfrm>
+            <a:off x="4910328" y="3694176"/>
+            <a:ext cx="146304" cy="146304"/>
+          </a:xfrm>
+          <a:prstGeom prst="ellipse">
+            <a:avLst/>
+          </a:prstGeom>
+          <a:ln w="15875">
+            <a:solidFill>
+              <a:srgbClr val="9AA1AE"/>
+            </a:solidFill>
+            <a:prstDash val="solid"/>
+          </a:ln>
+        </p:spPr>
+      </p:sp>
+      <p:sp>
+        <p:nvSpPr>
+          <p:cNvPr id="71" name="sin reportar 1 de cada 5 15"/>
+          <p:cNvSpPr/>
+          <p:nvPr/>
+        </p:nvSpPr>
+        <p:spPr>
+          <a:xfrm>
+            <a:off x="5129784" y="3694176"/>
+            <a:ext cx="146304" cy="146304"/>
+          </a:xfrm>
+          <a:prstGeom prst="ellipse">
+            <a:avLst/>
+          </a:prstGeom>
+          <a:ln w="15875">
+            <a:solidFill>
+              <a:srgbClr val="9AA1AE"/>
+            </a:solidFill>
+            <a:prstDash val="solid"/>
+          </a:ln>
+        </p:spPr>
+      </p:sp>
+      <p:sp>
+        <p:nvSpPr>
+          <p:cNvPr id="72" name="reportado 1 de cada 5 16"/>
+          <p:cNvSpPr/>
+          <p:nvPr/>
+        </p:nvSpPr>
+        <p:spPr>
+          <a:xfrm>
+            <a:off x="5349240" y="3694176"/>
+            <a:ext cx="146304" cy="146304"/>
+          </a:xfrm>
+          <a:prstGeom prst="ellipse">
+            <a:avLst/>
+          </a:prstGeom>
+          <a:solidFill>
+            <a:srgbClr val="1F2430"/>
+          </a:solidFill>
+          <a:ln/>
+        </p:spPr>
+      </p:sp>
+      <p:sp>
+        <p:nvSpPr>
+          <p:cNvPr id="73" name="sin reportar 1 de cada 5 17"/>
+          <p:cNvSpPr/>
+          <p:nvPr/>
+        </p:nvSpPr>
+        <p:spPr>
+          <a:xfrm>
+            <a:off x="5568696" y="3694176"/>
+            <a:ext cx="146304" cy="146304"/>
+          </a:xfrm>
+          <a:prstGeom prst="ellipse">
+            <a:avLst/>
+          </a:prstGeom>
+          <a:ln w="15875">
+            <a:solidFill>
+              <a:srgbClr val="9AA1AE"/>
+            </a:solidFill>
+            <a:prstDash val="solid"/>
+          </a:ln>
+        </p:spPr>
+      </p:sp>
+      <p:sp>
+        <p:nvSpPr>
+          <p:cNvPr id="74" name="sin reportar 1 de cada 5 18"/>
+          <p:cNvSpPr/>
+          <p:nvPr/>
+        </p:nvSpPr>
+        <p:spPr>
+          <a:xfrm>
+            <a:off x="5788152" y="3694176"/>
+            <a:ext cx="146304" cy="146304"/>
+          </a:xfrm>
+          <a:prstGeom prst="ellipse">
+            <a:avLst/>
+          </a:prstGeom>
+          <a:ln w="15875">
+            <a:solidFill>
+              <a:srgbClr val="9AA1AE"/>
+            </a:solidFill>
+            <a:prstDash val="solid"/>
+          </a:ln>
+        </p:spPr>
+      </p:sp>
+      <p:sp>
+        <p:nvSpPr>
+          <p:cNvPr id="75" name="sin reportar 1 de cada 5 19"/>
+          <p:cNvSpPr/>
+          <p:nvPr/>
+        </p:nvSpPr>
+        <p:spPr>
+          <a:xfrm>
+            <a:off x="6007608" y="3694176"/>
+            <a:ext cx="146304" cy="146304"/>
+          </a:xfrm>
+          <a:prstGeom prst="ellipse">
+            <a:avLst/>
+          </a:prstGeom>
+          <a:ln w="15875">
+            <a:solidFill>
+              <a:srgbClr val="9AA1AE"/>
+            </a:solidFill>
+            <a:prstDash val="solid"/>
+          </a:ln>
+        </p:spPr>
+      </p:sp>
+      <p:sp>
+        <p:nvSpPr>
+          <p:cNvPr id="76" name="sin reportar 1 de cada 5 20"/>
+          <p:cNvSpPr/>
+          <p:nvPr/>
+        </p:nvSpPr>
+        <p:spPr>
+          <a:xfrm>
+            <a:off x="6227064" y="3694176"/>
+            <a:ext cx="146304" cy="146304"/>
+          </a:xfrm>
+          <a:prstGeom prst="ellipse">
+            <a:avLst/>
+          </a:prstGeom>
+          <a:ln w="15875">
+            <a:solidFill>
+              <a:srgbClr val="9AA1AE"/>
+            </a:solidFill>
+            <a:prstDash val="solid"/>
+          </a:ln>
+        </p:spPr>
+      </p:sp>
+      <p:sp>
+        <p:nvSpPr>
+          <p:cNvPr id="77" name="Text 75"/>
+          <p:cNvSpPr txBox="1"/>
+          <p:nvPr/>
+        </p:nvSpPr>
+        <p:spPr>
+          <a:xfrm>
+            <a:off x="6583680" y="3602736"/>
+            <a:ext cx="1371600" cy="329184"/>
+          </a:xfrm>
+          <a:prstGeom prst="rect">
+            <a:avLst/>
+          </a:prstGeom>
+          <a:noFill/>
+          <a:ln/>
+        </p:spPr>
+        <p:txBody>
+          <a:bodyPr wrap="square" lIns="0" tIns="0" rIns="0" bIns="0" rtlCol="0" anchor="t"/>
+          <a:lstStyle/>
+          <a:p>
+            <a:pPr indent="0" marL="0">
+              <a:lnSpc>
+                <a:spcPct val="100000"/>
+              </a:lnSpc>
+              <a:buNone/>
+            </a:pPr>
+            <a:r>
+              <a:rPr lang="en-US" sz="2000" b="1" dirty="0">
+                <a:solidFill>
+                  <a:srgbClr val="1F2430"/>
+                </a:solidFill>
+                <a:latin typeface="Arial" pitchFamily="34" charset="0"/>
+                <a:ea typeface="Arial" pitchFamily="34" charset="-122"/>
+                <a:cs typeface="Arial" pitchFamily="34" charset="-120"/>
+              </a:rPr>
+              <a:t>≈ 61</a:t>
+            </a:r>
+            <a:endParaRPr lang="en-US" sz="2000" dirty="0"/>
+          </a:p>
+        </p:txBody>
+      </p:sp>
+      <p:sp>
+        <p:nvSpPr>
+          <p:cNvPr id="78" name="Text 76"/>
+          <p:cNvSpPr txBox="1"/>
+          <p:nvPr/>
+        </p:nvSpPr>
+        <p:spPr>
+          <a:xfrm>
+            <a:off x="548640" y="4297680"/>
+            <a:ext cx="1417320" cy="274320"/>
+          </a:xfrm>
+          <a:prstGeom prst="rect">
+            <a:avLst/>
+          </a:prstGeom>
+          <a:noFill/>
+          <a:ln/>
+        </p:spPr>
+        <p:txBody>
+          <a:bodyPr wrap="square" lIns="0" tIns="0" rIns="0" bIns="0" rtlCol="0" anchor="t"/>
+          <a:lstStyle/>
+          <a:p>
+            <a:pPr indent="0" marL="0">
+              <a:lnSpc>
+                <a:spcPct val="100000"/>
+              </a:lnSpc>
+              <a:buNone/>
+            </a:pPr>
+            <a:r>
+              <a:rPr lang="en-US" sz="1500" b="1" dirty="0">
+                <a:solidFill>
+                  <a:srgbClr val="1F2430"/>
+                </a:solidFill>
+                <a:latin typeface="Arial" pitchFamily="34" charset="0"/>
+                <a:ea typeface="Arial" pitchFamily="34" charset="-122"/>
+                <a:cs typeface="Arial" pitchFamily="34" charset="-120"/>
+              </a:rPr>
+              <a:t>1 de cada 20</a:t>
+            </a:r>
+            <a:endParaRPr lang="en-US" sz="1500" dirty="0"/>
+          </a:p>
+        </p:txBody>
+      </p:sp>
+      <p:sp>
+        <p:nvSpPr>
+          <p:cNvPr id="79" name="reportado 1 de cada 20 1"/>
+          <p:cNvSpPr/>
+          <p:nvPr/>
+        </p:nvSpPr>
+        <p:spPr>
+          <a:xfrm>
+            <a:off x="2057400" y="4352544"/>
+            <a:ext cx="146304" cy="146304"/>
+          </a:xfrm>
+          <a:prstGeom prst="ellipse">
+            <a:avLst/>
+          </a:prstGeom>
+          <a:solidFill>
+            <a:srgbClr val="1F2430"/>
+          </a:solidFill>
+          <a:ln/>
+        </p:spPr>
+      </p:sp>
+      <p:sp>
+        <p:nvSpPr>
+          <p:cNvPr id="80" name="sin reportar 1 de cada 20 2"/>
+          <p:cNvSpPr/>
+          <p:nvPr/>
+        </p:nvSpPr>
+        <p:spPr>
+          <a:xfrm>
+            <a:off x="2276856" y="4352544"/>
+            <a:ext cx="146304" cy="146304"/>
+          </a:xfrm>
+          <a:prstGeom prst="ellipse">
+            <a:avLst/>
+          </a:prstGeom>
+          <a:ln w="15875">
+            <a:solidFill>
+              <a:srgbClr val="9AA1AE"/>
+            </a:solidFill>
+            <a:prstDash val="solid"/>
+          </a:ln>
+        </p:spPr>
+      </p:sp>
+      <p:sp>
+        <p:nvSpPr>
+          <p:cNvPr id="81" name="sin reportar 1 de cada 20 3"/>
+          <p:cNvSpPr/>
+          <p:nvPr/>
+        </p:nvSpPr>
+        <p:spPr>
+          <a:xfrm>
+            <a:off x="2496312" y="4352544"/>
+            <a:ext cx="146304" cy="146304"/>
+          </a:xfrm>
+          <a:prstGeom prst="ellipse">
+            <a:avLst/>
+          </a:prstGeom>
+          <a:ln w="15875">
+            <a:solidFill>
+              <a:srgbClr val="9AA1AE"/>
+            </a:solidFill>
+            <a:prstDash val="solid"/>
+          </a:ln>
+        </p:spPr>
+      </p:sp>
+      <p:sp>
+        <p:nvSpPr>
+          <p:cNvPr id="82" name="sin reportar 1 de cada 20 4"/>
+          <p:cNvSpPr/>
+          <p:nvPr/>
+        </p:nvSpPr>
+        <p:spPr>
+          <a:xfrm>
+            <a:off x="2715768" y="4352544"/>
+            <a:ext cx="146304" cy="146304"/>
+          </a:xfrm>
+          <a:prstGeom prst="ellipse">
+            <a:avLst/>
+          </a:prstGeom>
+          <a:ln w="15875">
+            <a:solidFill>
+              <a:srgbClr val="9AA1AE"/>
+            </a:solidFill>
+            <a:prstDash val="solid"/>
+          </a:ln>
+        </p:spPr>
+      </p:sp>
+      <p:sp>
+        <p:nvSpPr>
+          <p:cNvPr id="83" name="sin reportar 1 de cada 20 5"/>
+          <p:cNvSpPr/>
+          <p:nvPr/>
+        </p:nvSpPr>
+        <p:spPr>
+          <a:xfrm>
+            <a:off x="2935224" y="4352544"/>
+            <a:ext cx="146304" cy="146304"/>
+          </a:xfrm>
+          <a:prstGeom prst="ellipse">
+            <a:avLst/>
+          </a:prstGeom>
+          <a:ln w="15875">
+            <a:solidFill>
+              <a:srgbClr val="9AA1AE"/>
+            </a:solidFill>
+            <a:prstDash val="solid"/>
+          </a:ln>
+        </p:spPr>
+      </p:sp>
+      <p:sp>
+        <p:nvSpPr>
+          <p:cNvPr id="84" name="sin reportar 1 de cada 20 6"/>
+          <p:cNvSpPr/>
+          <p:nvPr/>
+        </p:nvSpPr>
+        <p:spPr>
+          <a:xfrm>
+            <a:off x="3154680" y="4352544"/>
+            <a:ext cx="146304" cy="146304"/>
+          </a:xfrm>
+          <a:prstGeom prst="ellipse">
+            <a:avLst/>
+          </a:prstGeom>
+          <a:ln w="15875">
+            <a:solidFill>
+              <a:srgbClr val="9AA1AE"/>
+            </a:solidFill>
+            <a:prstDash val="solid"/>
+          </a:ln>
+        </p:spPr>
+      </p:sp>
+      <p:sp>
+        <p:nvSpPr>
+          <p:cNvPr id="85" name="sin reportar 1 de cada 20 7"/>
+          <p:cNvSpPr/>
+          <p:nvPr/>
+        </p:nvSpPr>
+        <p:spPr>
+          <a:xfrm>
+            <a:off x="3374136" y="4352544"/>
+            <a:ext cx="146304" cy="146304"/>
+          </a:xfrm>
+          <a:prstGeom prst="ellipse">
+            <a:avLst/>
+          </a:prstGeom>
+          <a:ln w="15875">
+            <a:solidFill>
+              <a:srgbClr val="9AA1AE"/>
+            </a:solidFill>
+            <a:prstDash val="solid"/>
+          </a:ln>
+        </p:spPr>
+      </p:sp>
+      <p:sp>
+        <p:nvSpPr>
+          <p:cNvPr id="86" name="sin reportar 1 de cada 20 8"/>
+          <p:cNvSpPr/>
+          <p:nvPr/>
+        </p:nvSpPr>
+        <p:spPr>
+          <a:xfrm>
+            <a:off x="3593592" y="4352544"/>
+            <a:ext cx="146304" cy="146304"/>
+          </a:xfrm>
+          <a:prstGeom prst="ellipse">
+            <a:avLst/>
+          </a:prstGeom>
+          <a:ln w="15875">
+            <a:solidFill>
+              <a:srgbClr val="9AA1AE"/>
+            </a:solidFill>
+            <a:prstDash val="solid"/>
+          </a:ln>
+        </p:spPr>
+      </p:sp>
+      <p:sp>
+        <p:nvSpPr>
+          <p:cNvPr id="87" name="sin reportar 1 de cada 20 9"/>
+          <p:cNvSpPr/>
+          <p:nvPr/>
+        </p:nvSpPr>
+        <p:spPr>
+          <a:xfrm>
+            <a:off x="3813048" y="4352544"/>
+            <a:ext cx="146304" cy="146304"/>
+          </a:xfrm>
+          <a:prstGeom prst="ellipse">
+            <a:avLst/>
+          </a:prstGeom>
+          <a:ln w="15875">
+            <a:solidFill>
+              <a:srgbClr val="9AA1AE"/>
+            </a:solidFill>
+            <a:prstDash val="solid"/>
+          </a:ln>
+        </p:spPr>
+      </p:sp>
+      <p:sp>
+        <p:nvSpPr>
+          <p:cNvPr id="88" name="sin reportar 1 de cada 20 10"/>
+          <p:cNvSpPr/>
+          <p:nvPr/>
+        </p:nvSpPr>
+        <p:spPr>
+          <a:xfrm>
+            <a:off x="4032504" y="4352544"/>
+            <a:ext cx="146304" cy="146304"/>
+          </a:xfrm>
+          <a:prstGeom prst="ellipse">
+            <a:avLst/>
+          </a:prstGeom>
+          <a:ln w="15875">
+            <a:solidFill>
+              <a:srgbClr val="9AA1AE"/>
+            </a:solidFill>
+            <a:prstDash val="solid"/>
+          </a:ln>
+        </p:spPr>
+      </p:sp>
+      <p:sp>
+        <p:nvSpPr>
+          <p:cNvPr id="89" name="sin reportar 1 de cada 20 11"/>
+          <p:cNvSpPr/>
+          <p:nvPr/>
+        </p:nvSpPr>
+        <p:spPr>
+          <a:xfrm>
+            <a:off x="4251960" y="4352544"/>
+            <a:ext cx="146304" cy="146304"/>
+          </a:xfrm>
+          <a:prstGeom prst="ellipse">
+            <a:avLst/>
+          </a:prstGeom>
+          <a:ln w="15875">
+            <a:solidFill>
+              <a:srgbClr val="9AA1AE"/>
+            </a:solidFill>
+            <a:prstDash val="solid"/>
+          </a:ln>
+        </p:spPr>
+      </p:sp>
+      <p:sp>
+        <p:nvSpPr>
+          <p:cNvPr id="90" name="sin reportar 1 de cada 20 12"/>
+          <p:cNvSpPr/>
+          <p:nvPr/>
+        </p:nvSpPr>
+        <p:spPr>
+          <a:xfrm>
+            <a:off x="4471416" y="4352544"/>
+            <a:ext cx="146304" cy="146304"/>
+          </a:xfrm>
+          <a:prstGeom prst="ellipse">
+            <a:avLst/>
+          </a:prstGeom>
+          <a:ln w="15875">
+            <a:solidFill>
+              <a:srgbClr val="9AA1AE"/>
+            </a:solidFill>
+            <a:prstDash val="solid"/>
+          </a:ln>
+        </p:spPr>
+      </p:sp>
+      <p:sp>
+        <p:nvSpPr>
+          <p:cNvPr id="91" name="sin reportar 1 de cada 20 13"/>
+          <p:cNvSpPr/>
+          <p:nvPr/>
+        </p:nvSpPr>
+        <p:spPr>
+          <a:xfrm>
+            <a:off x="4690872" y="4352544"/>
+            <a:ext cx="146304" cy="146304"/>
+          </a:xfrm>
+          <a:prstGeom prst="ellipse">
+            <a:avLst/>
+          </a:prstGeom>
+          <a:ln w="15875">
+            <a:solidFill>
+              <a:srgbClr val="9AA1AE"/>
+            </a:solidFill>
+            <a:prstDash val="solid"/>
+          </a:ln>
+        </p:spPr>
+      </p:sp>
+      <p:sp>
+        <p:nvSpPr>
+          <p:cNvPr id="92" name="sin reportar 1 de cada 20 14"/>
+          <p:cNvSpPr/>
+          <p:nvPr/>
+        </p:nvSpPr>
+        <p:spPr>
+          <a:xfrm>
+            <a:off x="4910328" y="4352544"/>
+            <a:ext cx="146304" cy="146304"/>
+          </a:xfrm>
+          <a:prstGeom prst="ellipse">
+            <a:avLst/>
+          </a:prstGeom>
+          <a:ln w="15875">
+            <a:solidFill>
+              <a:srgbClr val="9AA1AE"/>
+            </a:solidFill>
+            <a:prstDash val="solid"/>
+          </a:ln>
+        </p:spPr>
+      </p:sp>
+      <p:sp>
+        <p:nvSpPr>
+          <p:cNvPr id="93" name="sin reportar 1 de cada 20 15"/>
+          <p:cNvSpPr/>
+          <p:nvPr/>
+        </p:nvSpPr>
+        <p:spPr>
+          <a:xfrm>
+            <a:off x="5129784" y="4352544"/>
+            <a:ext cx="146304" cy="146304"/>
+          </a:xfrm>
+          <a:prstGeom prst="ellipse">
+            <a:avLst/>
+          </a:prstGeom>
+          <a:ln w="15875">
+            <a:solidFill>
+              <a:srgbClr val="9AA1AE"/>
+            </a:solidFill>
+            <a:prstDash val="solid"/>
+          </a:ln>
+        </p:spPr>
+      </p:sp>
+      <p:sp>
+        <p:nvSpPr>
+          <p:cNvPr id="94" name="sin reportar 1 de cada 20 16"/>
+          <p:cNvSpPr/>
+          <p:nvPr/>
+        </p:nvSpPr>
+        <p:spPr>
+          <a:xfrm>
+            <a:off x="5349240" y="4352544"/>
+            <a:ext cx="146304" cy="146304"/>
+          </a:xfrm>
+          <a:prstGeom prst="ellipse">
+            <a:avLst/>
+          </a:prstGeom>
+          <a:ln w="15875">
+            <a:solidFill>
+              <a:srgbClr val="9AA1AE"/>
+            </a:solidFill>
+            <a:prstDash val="solid"/>
+          </a:ln>
+        </p:spPr>
+      </p:sp>
+      <p:sp>
+        <p:nvSpPr>
+          <p:cNvPr id="95" name="sin reportar 1 de cada 20 17"/>
+          <p:cNvSpPr/>
+          <p:nvPr/>
+        </p:nvSpPr>
+        <p:spPr>
+          <a:xfrm>
+            <a:off x="5568696" y="4352544"/>
+            <a:ext cx="146304" cy="146304"/>
+          </a:xfrm>
+          <a:prstGeom prst="ellipse">
+            <a:avLst/>
+          </a:prstGeom>
+          <a:ln w="15875">
+            <a:solidFill>
+              <a:srgbClr val="9AA1AE"/>
+            </a:solidFill>
+            <a:prstDash val="solid"/>
+          </a:ln>
+        </p:spPr>
+      </p:sp>
+      <p:sp>
+        <p:nvSpPr>
+          <p:cNvPr id="96" name="sin reportar 1 de cada 20 18"/>
+          <p:cNvSpPr/>
+          <p:nvPr/>
+        </p:nvSpPr>
+        <p:spPr>
+          <a:xfrm>
+            <a:off x="5788152" y="4352544"/>
+            <a:ext cx="146304" cy="146304"/>
+          </a:xfrm>
+          <a:prstGeom prst="ellipse">
+            <a:avLst/>
+          </a:prstGeom>
+          <a:ln w="15875">
+            <a:solidFill>
+              <a:srgbClr val="9AA1AE"/>
+            </a:solidFill>
+            <a:prstDash val="solid"/>
+          </a:ln>
+        </p:spPr>
+      </p:sp>
+      <p:sp>
+        <p:nvSpPr>
+          <p:cNvPr id="97" name="sin reportar 1 de cada 20 19"/>
+          <p:cNvSpPr/>
+          <p:nvPr/>
+        </p:nvSpPr>
+        <p:spPr>
+          <a:xfrm>
+            <a:off x="6007608" y="4352544"/>
+            <a:ext cx="146304" cy="146304"/>
+          </a:xfrm>
+          <a:prstGeom prst="ellipse">
+            <a:avLst/>
+          </a:prstGeom>
+          <a:ln w="15875">
+            <a:solidFill>
+              <a:srgbClr val="9AA1AE"/>
+            </a:solidFill>
+            <a:prstDash val="solid"/>
+          </a:ln>
+        </p:spPr>
+      </p:sp>
+      <p:sp>
+        <p:nvSpPr>
+          <p:cNvPr id="98" name="sin reportar 1 de cada 20 20"/>
+          <p:cNvSpPr/>
+          <p:nvPr/>
+        </p:nvSpPr>
+        <p:spPr>
+          <a:xfrm>
+            <a:off x="6227064" y="4352544"/>
+            <a:ext cx="146304" cy="146304"/>
+          </a:xfrm>
+          <a:prstGeom prst="ellipse">
+            <a:avLst/>
+          </a:prstGeom>
+          <a:ln w="15875">
+            <a:solidFill>
+              <a:srgbClr val="9AA1AE"/>
+            </a:solidFill>
+            <a:prstDash val="solid"/>
+          </a:ln>
+        </p:spPr>
+      </p:sp>
+      <p:sp>
+        <p:nvSpPr>
+          <p:cNvPr id="99" name="Text 97"/>
+          <p:cNvSpPr txBox="1"/>
+          <p:nvPr/>
+        </p:nvSpPr>
+        <p:spPr>
+          <a:xfrm>
+            <a:off x="6583680" y="4261104"/>
+            <a:ext cx="1371600" cy="329184"/>
+          </a:xfrm>
+          <a:prstGeom prst="rect">
+            <a:avLst/>
+          </a:prstGeom>
+          <a:noFill/>
+          <a:ln/>
+        </p:spPr>
+        <p:txBody>
+          <a:bodyPr wrap="square" lIns="0" tIns="0" rIns="0" bIns="0" rtlCol="0" anchor="t"/>
+          <a:lstStyle/>
+          <a:p>
+            <a:pPr indent="0" marL="0">
+              <a:lnSpc>
+                <a:spcPct val="100000"/>
+              </a:lnSpc>
+              <a:buNone/>
+            </a:pPr>
+            <a:r>
+              <a:rPr lang="en-US" sz="2000" b="1" dirty="0">
+                <a:solidFill>
+                  <a:srgbClr val="1F2430"/>
+                </a:solidFill>
+                <a:latin typeface="Arial" pitchFamily="34" charset="0"/>
+                <a:ea typeface="Arial" pitchFamily="34" charset="-122"/>
+                <a:cs typeface="Arial" pitchFamily="34" charset="-120"/>
+              </a:rPr>
+              <a:t>≈ 15</a:t>
+            </a:r>
+            <a:endParaRPr lang="en-US" sz="2000" dirty="0"/>
+          </a:p>
+        </p:txBody>
+      </p:sp>
+      <p:sp>
+        <p:nvSpPr>
+          <p:cNvPr id="100" name="Shape 98"/>
+          <p:cNvSpPr/>
+          <p:nvPr/>
+        </p:nvSpPr>
+        <p:spPr>
+          <a:xfrm>
+            <a:off x="548640" y="5029200"/>
+            <a:ext cx="7406640" cy="0"/>
+          </a:xfrm>
+          <a:prstGeom prst="line">
+            <a:avLst/>
+          </a:prstGeom>
+          <a:noFill/>
+          <a:ln w="9525">
+            <a:solidFill>
+              <a:srgbClr val="D9D6CE"/>
+            </a:solidFill>
+            <a:prstDash val="solid"/>
+          </a:ln>
+        </p:spPr>
+      </p:sp>
+      <p:sp>
+        <p:nvSpPr>
+          <p:cNvPr id="101" name="Text 99"/>
+          <p:cNvSpPr txBox="1"/>
+          <p:nvPr/>
+        </p:nvSpPr>
+        <p:spPr>
+          <a:xfrm>
+            <a:off x="548640" y="5193792"/>
+            <a:ext cx="7406640" cy="731520"/>
+          </a:xfrm>
+          <a:prstGeom prst="rect">
+            <a:avLst/>
+          </a:prstGeom>
+          <a:noFill/>
+          <a:ln/>
+        </p:spPr>
+        <p:txBody>
+          <a:bodyPr wrap="square" lIns="0" tIns="0" rIns="0" bIns="0" rtlCol="0" anchor="t"/>
+          <a:lstStyle/>
+          <a:p>
+            <a:pPr indent="0" marL="0">
+              <a:lnSpc>
+                <a:spcPct val="100000"/>
+              </a:lnSpc>
+              <a:buNone/>
+            </a:pPr>
+            <a:r>
+              <a:rPr lang="en-US" sz="2000" dirty="0">
+                <a:solidFill>
+                  <a:srgbClr val="1F2430"/>
+                </a:solidFill>
+                <a:latin typeface="Georgia" pitchFamily="34" charset="0"/>
+                <a:ea typeface="Georgia" pitchFamily="34" charset="-122"/>
+                <a:cs typeface="Georgia" pitchFamily="34" charset="-120"/>
+              </a:rPr>
+              <a:t>Con 1 de cada 20, reentrenar tiene unos 15 ejemplos para aprender 800 palabras alteradas.</a:t>
+            </a:r>
+            <a:endParaRPr lang="en-US" sz="2000" dirty="0"/>
+          </a:p>
+        </p:txBody>
+      </p:sp>
+      <p:sp>
+        <p:nvSpPr>
+          <p:cNvPr id="102" name="Shape 100"/>
+          <p:cNvSpPr/>
+          <p:nvPr/>
+        </p:nvSpPr>
+        <p:spPr>
+          <a:xfrm>
+            <a:off x="8229600" y="1874520"/>
+            <a:ext cx="0" cy="4023360"/>
+          </a:xfrm>
+          <a:prstGeom prst="line">
+            <a:avLst/>
+          </a:prstGeom>
+          <a:noFill/>
+          <a:ln w="9525">
+            <a:solidFill>
+              <a:srgbClr val="D9D6CE"/>
+            </a:solidFill>
+            <a:prstDash val="solid"/>
+          </a:ln>
+        </p:spPr>
+      </p:sp>
+      <p:sp>
+        <p:nvSpPr>
+          <p:cNvPr id="103" name="Text 101"/>
+          <p:cNvSpPr txBox="1"/>
+          <p:nvPr/>
+        </p:nvSpPr>
+        <p:spPr>
+          <a:xfrm>
+            <a:off x="8549640" y="1837944"/>
+            <a:ext cx="320040" cy="411480"/>
+          </a:xfrm>
+          <a:prstGeom prst="rect">
+            <a:avLst/>
+          </a:prstGeom>
+          <a:noFill/>
+          <a:ln/>
+        </p:spPr>
+        <p:txBody>
+          <a:bodyPr wrap="square" lIns="0" tIns="0" rIns="0" bIns="0" rtlCol="0" anchor="t"/>
+          <a:lstStyle/>
+          <a:p>
+            <a:pPr indent="0" marL="0">
+              <a:lnSpc>
+                <a:spcPct val="100000"/>
+              </a:lnSpc>
+              <a:buNone/>
+            </a:pPr>
+            <a:r>
+              <a:rPr lang="en-US" sz="2200" dirty="0">
+                <a:solidFill>
+                  <a:srgbClr val="2A78D6"/>
+                </a:solidFill>
+                <a:latin typeface="Georgia" pitchFamily="34" charset="0"/>
+                <a:ea typeface="Georgia" pitchFamily="34" charset="-122"/>
+                <a:cs typeface="Georgia" pitchFamily="34" charset="-120"/>
+              </a:rPr>
+              <a:t>1</a:t>
+            </a:r>
+            <a:endParaRPr lang="en-US" sz="2200" dirty="0"/>
+          </a:p>
+        </p:txBody>
+      </p:sp>
+      <p:sp>
+        <p:nvSpPr>
+          <p:cNvPr id="104" name="Text 102"/>
+          <p:cNvSpPr txBox="1"/>
+          <p:nvPr/>
+        </p:nvSpPr>
+        <p:spPr>
+          <a:xfrm>
+            <a:off x="8915400" y="1874520"/>
+            <a:ext cx="2743200" cy="868680"/>
+          </a:xfrm>
+          <a:prstGeom prst="rect">
+            <a:avLst/>
+          </a:prstGeom>
+          <a:noFill/>
+          <a:ln/>
+        </p:spPr>
+        <p:txBody>
+          <a:bodyPr wrap="square" lIns="0" tIns="0" rIns="0" bIns="0" rtlCol="0" anchor="t"/>
+          <a:lstStyle/>
+          <a:p>
+            <a:pPr indent="0" marL="0">
+              <a:lnSpc>
+                <a:spcPct val="100000"/>
+              </a:lnSpc>
+              <a:buNone/>
+            </a:pPr>
+            <a:r>
+              <a:rPr lang="en-US" sz="1400" dirty="0">
+                <a:solidFill>
+                  <a:srgbClr val="1F2430"/>
+                </a:solidFill>
+                <a:latin typeface="Arial" pitchFamily="34" charset="0"/>
+                <a:ea typeface="Arial" pitchFamily="34" charset="-122"/>
+                <a:cs typeface="Arial" pitchFamily="34" charset="-120"/>
+              </a:rPr>
+              <a:t>Cada mensaje se reporta con probabilidad ρ. Hedge y SGD ven exactamente los mismos reportes.</a:t>
+            </a:r>
+            <a:endParaRPr lang="en-US" sz="1400" dirty="0"/>
+          </a:p>
+        </p:txBody>
+      </p:sp>
+      <p:sp>
+        <p:nvSpPr>
+          <p:cNvPr id="105" name="Text 103"/>
+          <p:cNvSpPr txBox="1"/>
+          <p:nvPr/>
+        </p:nvSpPr>
+        <p:spPr>
+          <a:xfrm>
+            <a:off x="8549640" y="2980944"/>
+            <a:ext cx="320040" cy="411480"/>
+          </a:xfrm>
+          <a:prstGeom prst="rect">
+            <a:avLst/>
+          </a:prstGeom>
+          <a:noFill/>
+          <a:ln/>
+        </p:spPr>
+        <p:txBody>
+          <a:bodyPr wrap="square" lIns="0" tIns="0" rIns="0" bIns="0" rtlCol="0" anchor="t"/>
+          <a:lstStyle/>
+          <a:p>
+            <a:pPr indent="0" marL="0">
+              <a:lnSpc>
+                <a:spcPct val="100000"/>
+              </a:lnSpc>
+              <a:buNone/>
+            </a:pPr>
+            <a:r>
+              <a:rPr lang="en-US" sz="2200" dirty="0">
+                <a:solidFill>
+                  <a:srgbClr val="2A78D6"/>
+                </a:solidFill>
+                <a:latin typeface="Georgia" pitchFamily="34" charset="0"/>
+                <a:ea typeface="Georgia" pitchFamily="34" charset="-122"/>
+                <a:cs typeface="Georgia" pitchFamily="34" charset="-120"/>
+              </a:rPr>
+              <a:t>2</a:t>
+            </a:r>
+            <a:endParaRPr lang="en-US" sz="2200" dirty="0"/>
+          </a:p>
+        </p:txBody>
+      </p:sp>
+      <p:sp>
+        <p:nvSpPr>
+          <p:cNvPr id="106" name="Text 104"/>
+          <p:cNvSpPr txBox="1"/>
+          <p:nvPr/>
+        </p:nvSpPr>
+        <p:spPr>
+          <a:xfrm>
+            <a:off x="8915400" y="3017520"/>
+            <a:ext cx="2743200" cy="1097280"/>
+          </a:xfrm>
+          <a:prstGeom prst="rect">
+            <a:avLst/>
+          </a:prstGeom>
+          <a:noFill/>
+          <a:ln/>
+        </p:spPr>
+        <p:txBody>
+          <a:bodyPr wrap="square" lIns="0" tIns="0" rIns="0" bIns="0" rtlCol="0" anchor="t"/>
+          <a:lstStyle/>
+          <a:p>
+            <a:pPr indent="0" marL="0">
+              <a:lnSpc>
+                <a:spcPct val="100000"/>
+              </a:lnSpc>
+              <a:buNone/>
+            </a:pPr>
+            <a:r>
+              <a:rPr lang="en-US" sz="1400" dirty="0">
+                <a:solidFill>
+                  <a:srgbClr val="1F2430"/>
+                </a:solidFill>
+                <a:latin typeface="Arial" pitchFamily="34" charset="0"/>
+                <a:ea typeface="Arial" pitchFamily="34" charset="-122"/>
+                <a:cs typeface="Arial" pitchFamily="34" charset="-120"/>
+              </a:rPr>
+              <a:t>Todos predicen siempre y todo error cuenta, aunque no se reporte. Solo aprenden de los mensajes reportados.</a:t>
+            </a:r>
+            <a:endParaRPr lang="en-US" sz="1400" dirty="0"/>
+          </a:p>
+        </p:txBody>
+      </p:sp>
+      <p:sp>
+        <p:nvSpPr>
+          <p:cNvPr id="107" name="Text 105"/>
+          <p:cNvSpPr txBox="1"/>
+          <p:nvPr/>
+        </p:nvSpPr>
+        <p:spPr>
+          <a:xfrm>
+            <a:off x="8549640" y="4352544"/>
+            <a:ext cx="320040" cy="411480"/>
+          </a:xfrm>
+          <a:prstGeom prst="rect">
+            <a:avLst/>
+          </a:prstGeom>
+          <a:noFill/>
+          <a:ln/>
+        </p:spPr>
+        <p:txBody>
+          <a:bodyPr wrap="square" lIns="0" tIns="0" rIns="0" bIns="0" rtlCol="0" anchor="t"/>
+          <a:lstStyle/>
+          <a:p>
+            <a:pPr indent="0" marL="0">
+              <a:lnSpc>
+                <a:spcPct val="100000"/>
+              </a:lnSpc>
+              <a:buNone/>
+            </a:pPr>
+            <a:r>
+              <a:rPr lang="en-US" sz="2200" dirty="0">
+                <a:solidFill>
+                  <a:srgbClr val="2A78D6"/>
+                </a:solidFill>
+                <a:latin typeface="Georgia" pitchFamily="34" charset="0"/>
+                <a:ea typeface="Georgia" pitchFamily="34" charset="-122"/>
+                <a:cs typeface="Georgia" pitchFamily="34" charset="-120"/>
+              </a:rPr>
+              <a:t>3</a:t>
+            </a:r>
+            <a:endParaRPr lang="en-US" sz="2200" dirty="0"/>
+          </a:p>
+        </p:txBody>
+      </p:sp>
+      <p:sp>
+        <p:nvSpPr>
+          <p:cNvPr id="108" name="Text 106"/>
+          <p:cNvSpPr txBox="1"/>
+          <p:nvPr/>
+        </p:nvSpPr>
+        <p:spPr>
+          <a:xfrm>
+            <a:off x="8915400" y="4389120"/>
+            <a:ext cx="2743200" cy="1097280"/>
+          </a:xfrm>
+          <a:prstGeom prst="rect">
+            <a:avLst/>
+          </a:prstGeom>
+          <a:noFill/>
+          <a:ln/>
+        </p:spPr>
+        <p:txBody>
+          <a:bodyPr wrap="square" lIns="0" tIns="0" rIns="0" bIns="0" rtlCol="0" anchor="t"/>
+          <a:lstStyle/>
+          <a:p>
+            <a:pPr indent="0" marL="0">
+              <a:lnSpc>
+                <a:spcPct val="100000"/>
+              </a:lnSpc>
+              <a:buNone/>
+            </a:pPr>
+            <a:r>
+              <a:rPr lang="en-US" sz="1400" dirty="0">
+                <a:solidFill>
+                  <a:srgbClr val="1F2430"/>
+                </a:solidFill>
+                <a:latin typeface="Arial" pitchFamily="34" charset="0"/>
+                <a:ea typeface="Arial" pitchFamily="34" charset="-122"/>
+                <a:cs typeface="Arial" pitchFamily="34" charset="-120"/>
+              </a:rPr>
+              <a:t>SGD aprende de cada reporte tal cual. Hedge multiplica por 1/ρ cada error que ve y achica η para no sobrerreaccionar.</a:t>
+            </a:r>
+            <a:endParaRPr lang="en-US" sz="1400" dirty="0"/>
+          </a:p>
+        </p:txBody>
+      </p:sp>
+      <p:sp>
+        <p:nvSpPr>
+          <p:cNvPr id="109" name="Text 107"/>
+          <p:cNvSpPr txBox="1"/>
+          <p:nvPr/>
+        </p:nvSpPr>
+        <p:spPr>
+          <a:xfrm>
+            <a:off x="548640" y="6373368"/>
+            <a:ext cx="10241280" cy="274320"/>
+          </a:xfrm>
+          <a:prstGeom prst="rect">
+            <a:avLst/>
+          </a:prstGeom>
+          <a:noFill/>
+          <a:ln/>
+        </p:spPr>
+        <p:txBody>
+          <a:bodyPr wrap="square" lIns="0" tIns="0" rIns="0" bIns="0" rtlCol="0" anchor="t"/>
+          <a:lstStyle/>
+          <a:p>
+            <a:pPr indent="0" marL="0">
+              <a:lnSpc>
+                <a:spcPct val="100000"/>
+              </a:lnSpc>
+              <a:buNone/>
+            </a:pPr>
+            <a:r>
+              <a:rPr lang="en-US" sz="1000" dirty="0">
+                <a:solidFill>
+                  <a:srgbClr val="9AA1AE"/>
+                </a:solidFill>
+                <a:latin typeface="Arial" pitchFamily="34" charset="0"/>
+                <a:ea typeface="Arial" pitchFamily="34" charset="-122"/>
+                <a:cs typeface="Arial" pitchFamily="34" charset="-120"/>
+              </a:rPr>
+              <a:t>Ilustrativo: en el experimento, qué mensajes se reportan se sortea. Para cada nivel, 20 órdenes del corpus × 5 sorteos de etiquetas.</a:t>
             </a:r>
             <a:endParaRPr lang="en-US" sz="1000" dirty="0"/>
           </a:p>
@@ -4507,7 +6813,7 @@
                 <a:ea typeface="Georgia" pitchFamily="34" charset="-122"/>
                 <a:cs typeface="Georgia" pitchFamily="34" charset="-120"/>
               </a:rPr>
-              <a:t>No es un artefacto de cómo se pondera</a:t>
+              <a:t>Con pocas etiquetas, combinar le gana a reentrenar</a:t>
             </a:r>
             <a:endParaRPr lang="en-US" sz="3000" dirty="0"/>
           </a:p>
@@ -4549,7 +6855,7 @@
                 <a:ea typeface="Arial" pitchFamily="34" charset="-122"/>
                 <a:cs typeface="Arial" pitchFamily="34" charset="-120"/>
               </a:rPr>
-              <a:t>Errores en la mitad atacada con 1 de cada 20 mensajes etiquetado.</a:t>
+              <a:t>Errores en la mitad atacada, según cuántos mensajes reporta el usuario.</a:t>
             </a:r>
             <a:endParaRPr lang="en-US" sz="1500" dirty="0"/>
           </a:p>
@@ -4685,7 +6991,7 @@
       </p:sp>
       <p:pic>
         <p:nvPicPr>
-          <p:cNvPr id="10" name="Image 0" descr="SGD online sin reponderar comete 210 errores; reponderado por 1 sobre raíz de rho, 240; por 1 sobre rho, 323. Hedge comete 189.">    </p:cNvPr>
+          <p:cNvPr id="10" name="Image 0" descr="Errores según la fracción de mensajes etiquetados. Con todas las etiquetas SGD comete 73 y Hedge 133; con 1 de cada 20, SGD 210 y Hedge 189, frente a 190 del estático.">    </p:cNvPr>
           <p:cNvPicPr>
             <a:picLocks noChangeAspect="1"/>
           </p:cNvPicPr>
@@ -4699,8 +7005,8 @@
         </p:blipFill>
         <p:spPr>
           <a:xfrm>
-            <a:off x="411480" y="1828800"/>
-            <a:ext cx="6949440" cy="3897102"/>
+            <a:off x="411480" y="1783080"/>
+            <a:ext cx="6495445" cy="4434840"/>
           </a:xfrm>
           <a:prstGeom prst="rect">
             <a:avLst/>
@@ -4716,225 +7022,244 @@
         <p:spPr>
           <a:xfrm>
             <a:off x="7726680" y="1920240"/>
-            <a:ext cx="3931920" cy="1097280"/>
-          </a:xfrm>
-          <a:prstGeom prst="rect">
-            <a:avLst/>
-          </a:prstGeom>
-          <a:noFill/>
-          <a:ln/>
-        </p:spPr>
-        <p:txBody>
-          <a:bodyPr wrap="square" lIns="0" tIns="0" rIns="0" bIns="0" rtlCol="0" anchor="t"/>
-          <a:lstStyle/>
-          <a:p>
-            <a:pPr indent="0" marL="0">
-              <a:lnSpc>
-                <a:spcPct val="100000"/>
-              </a:lnSpc>
-              <a:buNone/>
-            </a:pPr>
-            <a:r>
-              <a:rPr lang="en-US" sz="2000" dirty="0">
-                <a:solidFill>
-                  <a:srgbClr val="1F2430"/>
-                </a:solidFill>
-                <a:latin typeface="Georgia" pitchFamily="34" charset="0"/>
-                <a:ea typeface="Georgia" pitchFamily="34" charset="-122"/>
-                <a:cs typeface="Georgia" pitchFamily="34" charset="-120"/>
-              </a:rPr>
-              <a:t>¿Y si SGD compensa las etiquetas que faltan pesando más cada ejemplo, como hace Hedge?</a:t>
-            </a:r>
-            <a:endParaRPr lang="en-US" sz="2000" dirty="0"/>
-          </a:p>
-        </p:txBody>
-      </p:sp>
-      <p:sp>
-        <p:nvSpPr>
-          <p:cNvPr id="12" name="Text 9"/>
-          <p:cNvSpPr txBox="1"/>
-          <p:nvPr/>
-        </p:nvSpPr>
-        <p:spPr>
-          <a:xfrm>
-            <a:off x="7726680" y="3108960"/>
-            <a:ext cx="3931920" cy="548640"/>
-          </a:xfrm>
-          <a:prstGeom prst="rect">
-            <a:avLst/>
-          </a:prstGeom>
-          <a:noFill/>
-          <a:ln/>
-        </p:spPr>
-        <p:txBody>
-          <a:bodyPr wrap="square" lIns="0" tIns="0" rIns="0" bIns="0" rtlCol="0" anchor="t"/>
-          <a:lstStyle/>
-          <a:p>
-            <a:pPr indent="0" marL="0">
-              <a:lnSpc>
-                <a:spcPct val="100000"/>
-              </a:lnSpc>
-              <a:buNone/>
-            </a:pPr>
-            <a:r>
-              <a:rPr lang="en-US" sz="1500" dirty="0">
-                <a:solidFill>
-                  <a:srgbClr val="5A6274"/>
+            <a:ext cx="3931920" cy="822960"/>
+          </a:xfrm>
+          <a:prstGeom prst="rect">
+            <a:avLst/>
+          </a:prstGeom>
+          <a:noFill/>
+          <a:ln/>
+        </p:spPr>
+        <p:txBody>
+          <a:bodyPr wrap="square" lIns="0" tIns="0" rIns="0" bIns="0" rtlCol="0" anchor="t"/>
+          <a:lstStyle/>
+          <a:p>
+            <a:pPr indent="0" marL="0">
+              <a:lnSpc>
+                <a:spcPct val="100000"/>
+              </a:lnSpc>
+              <a:buNone/>
+            </a:pPr>
+            <a:r>
+              <a:rPr lang="en-US" sz="5400" b="1" dirty="0">
+                <a:solidFill>
+                  <a:srgbClr val="2A78D6"/>
                 </a:solidFill>
                 <a:latin typeface="Arial" pitchFamily="34" charset="0"/>
                 <a:ea typeface="Arial" pitchFamily="34" charset="-122"/>
                 <a:cs typeface="Arial" pitchFamily="34" charset="-120"/>
               </a:rPr>
-              <a:t>Empeora: con pocos ejemplos, pasos más grandes sobreajustan a cada uno.</a:t>
-            </a:r>
-            <a:endParaRPr lang="en-US" sz="1500" dirty="0"/>
-          </a:p>
-        </p:txBody>
-      </p:sp>
-      <p:sp>
-        <p:nvSpPr>
-          <p:cNvPr id="13" name="Shape 10"/>
-          <p:cNvSpPr/>
-          <p:nvPr/>
-        </p:nvSpPr>
-        <p:spPr>
-          <a:xfrm>
-            <a:off x="7726680" y="3931920"/>
-            <a:ext cx="3913632" cy="0"/>
-          </a:xfrm>
-          <a:prstGeom prst="line">
-            <a:avLst/>
-          </a:prstGeom>
-          <a:noFill/>
-          <a:ln w="9525">
-            <a:solidFill>
-              <a:srgbClr val="D9D6CE"/>
-            </a:solidFill>
-            <a:prstDash val="solid"/>
-          </a:ln>
-        </p:spPr>
-      </p:sp>
-      <p:sp>
-        <p:nvSpPr>
-          <p:cNvPr id="14" name="Text 11"/>
-          <p:cNvSpPr txBox="1"/>
-          <p:nvPr/>
-        </p:nvSpPr>
-        <p:spPr>
-          <a:xfrm>
-            <a:off x="7726680" y="4114800"/>
-            <a:ext cx="3931920" cy="1051560"/>
-          </a:xfrm>
-          <a:prstGeom prst="rect">
-            <a:avLst/>
-          </a:prstGeom>
-          <a:noFill/>
-          <a:ln/>
-        </p:spPr>
-        <p:txBody>
-          <a:bodyPr wrap="square" lIns="0" tIns="0" rIns="0" bIns="0" rtlCol="0" anchor="t"/>
-          <a:lstStyle/>
-          <a:p>
-            <a:pPr indent="0" marL="0">
-              <a:lnSpc>
-                <a:spcPct val="100000"/>
-              </a:lnSpc>
-              <a:buNone/>
-            </a:pPr>
-            <a:r>
-              <a:rPr lang="en-US" sz="2200" dirty="0">
-                <a:solidFill>
-                  <a:srgbClr val="2A78D6"/>
-                </a:solidFill>
-                <a:latin typeface="Georgia" pitchFamily="34" charset="0"/>
-                <a:ea typeface="Georgia" pitchFamily="34" charset="-122"/>
-                <a:cs typeface="Georgia" pitchFamily="34" charset="-120"/>
-              </a:rPr>
-              <a:t>Hedge aprende 5 pesos. Reentrenar, uno por cada palabra nueva.</a:t>
-            </a:r>
-            <a:endParaRPr lang="en-US" sz="2200" dirty="0"/>
-          </a:p>
-        </p:txBody>
-      </p:sp>
-      <p:sp>
-        <p:nvSpPr>
-          <p:cNvPr id="15" name="Text 12"/>
-          <p:cNvSpPr txBox="1"/>
-          <p:nvPr/>
-        </p:nvSpPr>
-        <p:spPr>
-          <a:xfrm>
-            <a:off x="7726680" y="5303520"/>
-            <a:ext cx="3931920" cy="548640"/>
-          </a:xfrm>
-          <a:prstGeom prst="rect">
-            <a:avLst/>
-          </a:prstGeom>
-          <a:noFill/>
-          <a:ln/>
-        </p:spPr>
-        <p:txBody>
-          <a:bodyPr wrap="square" lIns="0" tIns="0" rIns="0" bIns="0" rtlCol="0" anchor="t"/>
-          <a:lstStyle/>
-          <a:p>
-            <a:pPr indent="0" marL="0">
-              <a:lnSpc>
-                <a:spcPct val="100000"/>
-              </a:lnSpc>
-              <a:buNone/>
-            </a:pPr>
-            <a:r>
-              <a:rPr lang="en-US" sz="1300" dirty="0">
-                <a:solidFill>
-                  <a:srgbClr val="5A6274"/>
+              <a:t>15 de 20</a:t>
+            </a:r>
+            <a:endParaRPr lang="en-US" sz="5400" dirty="0"/>
+          </a:p>
+        </p:txBody>
+      </p:sp>
+      <p:sp>
+        <p:nvSpPr>
+          <p:cNvPr id="12" name="Text 9"/>
+          <p:cNvSpPr txBox="1"/>
+          <p:nvPr/>
+        </p:nvSpPr>
+        <p:spPr>
+          <a:xfrm>
+            <a:off x="7726680" y="2816352"/>
+            <a:ext cx="3931920" cy="685800"/>
+          </a:xfrm>
+          <a:prstGeom prst="rect">
+            <a:avLst/>
+          </a:prstGeom>
+          <a:noFill/>
+          <a:ln/>
+        </p:spPr>
+        <p:txBody>
+          <a:bodyPr wrap="square" lIns="0" tIns="0" rIns="0" bIns="0" rtlCol="0" anchor="t"/>
+          <a:lstStyle/>
+          <a:p>
+            <a:pPr indent="0" marL="0">
+              <a:lnSpc>
+                <a:spcPct val="100000"/>
+              </a:lnSpc>
+              <a:buNone/>
+            </a:pPr>
+            <a:r>
+              <a:rPr lang="en-US" sz="1500" dirty="0">
+                <a:solidFill>
+                  <a:srgbClr val="1F2430"/>
                 </a:solidFill>
                 <a:latin typeface="Arial" pitchFamily="34" charset="0"/>
                 <a:ea typeface="Arial" pitchFamily="34" charset="-122"/>
                 <a:cs typeface="Arial" pitchFamily="34" charset="-120"/>
               </a:rPr>
-              <a:t>Lo que sí paga Hedge es varianza: con ρ = 0,05 cada observación pesa ≈ 4,5 veces más.</a:t>
-            </a:r>
-            <a:endParaRPr lang="en-US" sz="1300" dirty="0"/>
-          </a:p>
-        </p:txBody>
-      </p:sp>
-      <p:sp>
-        <p:nvSpPr>
-          <p:cNvPr id="16" name="Text 13"/>
-          <p:cNvSpPr txBox="1"/>
-          <p:nvPr/>
-        </p:nvSpPr>
-        <p:spPr>
-          <a:xfrm>
-            <a:off x="548640" y="6373368"/>
-            <a:ext cx="10241280" cy="274320"/>
-          </a:xfrm>
-          <a:prstGeom prst="rect">
-            <a:avLst/>
-          </a:prstGeom>
-          <a:noFill/>
-          <a:ln/>
-        </p:spPr>
-        <p:txBody>
-          <a:bodyPr wrap="square" lIns="0" tIns="0" rIns="0" bIns="0" rtlCol="0" anchor="t"/>
-          <a:lstStyle/>
-          <a:p>
-            <a:pPr indent="0" marL="0">
-              <a:lnSpc>
-                <a:spcPct val="100000"/>
-              </a:lnSpc>
-              <a:buNone/>
-            </a:pPr>
-            <a:r>
-              <a:rPr lang="en-US" sz="1000" dirty="0">
-                <a:solidFill>
-                  <a:srgbClr val="9AA1AE"/>
+              <a:t>semillas en las que gana Hedge cuando el usuario reporta 1 de cada 20 mensajes</a:t>
+            </a:r>
+            <a:endParaRPr lang="en-US" sz="1500" dirty="0"/>
+          </a:p>
+        </p:txBody>
+      </p:sp>
+      <p:sp>
+        <p:nvSpPr>
+          <p:cNvPr id="13" name="Text 10"/>
+          <p:cNvSpPr txBox="1"/>
+          <p:nvPr/>
+        </p:nvSpPr>
+        <p:spPr>
+          <a:xfrm>
+            <a:off x="7726680" y="3657600"/>
+            <a:ext cx="3931920" cy="670560"/>
+          </a:xfrm>
+          <a:prstGeom prst="rect">
+            <a:avLst/>
+          </a:prstGeom>
+          <a:noFill/>
+          <a:ln/>
+        </p:spPr>
+        <p:txBody>
+          <a:bodyPr wrap="square" lIns="0" tIns="0" rIns="0" bIns="0" rtlCol="0" anchor="t"/>
+          <a:lstStyle/>
+          <a:p>
+            <a:pPr indent="0" marL="0">
+              <a:lnSpc>
+                <a:spcPct val="100000"/>
+              </a:lnSpc>
+              <a:buNone/>
+            </a:pPr>
+            <a:r>
+              <a:rPr lang="en-US" sz="4400" b="1" dirty="0">
+                <a:solidFill>
+                  <a:srgbClr val="1BAF7A"/>
                 </a:solidFill>
                 <a:latin typeface="Arial" pitchFamily="34" charset="0"/>
                 <a:ea typeface="Arial" pitchFamily="34" charset="-122"/>
                 <a:cs typeface="Arial" pitchFamily="34" charset="-120"/>
               </a:rPr>
-              <a:t>Media de 20 permutaciones (semillas) del SMS Spam Collection. Ataque desde la mitad del stream.</a:t>
+              <a:t>210 &gt; 190</a:t>
+            </a:r>
+            <a:endParaRPr lang="en-US" sz="4400" dirty="0"/>
+          </a:p>
+        </p:txBody>
+      </p:sp>
+      <p:sp>
+        <p:nvSpPr>
+          <p:cNvPr id="14" name="Text 11"/>
+          <p:cNvSpPr txBox="1"/>
+          <p:nvPr/>
+        </p:nvSpPr>
+        <p:spPr>
+          <a:xfrm>
+            <a:off x="7726680" y="4401312"/>
+            <a:ext cx="3931920" cy="685800"/>
+          </a:xfrm>
+          <a:prstGeom prst="rect">
+            <a:avLst/>
+          </a:prstGeom>
+          <a:noFill/>
+          <a:ln/>
+        </p:spPr>
+        <p:txBody>
+          <a:bodyPr wrap="square" lIns="0" tIns="0" rIns="0" bIns="0" rtlCol="0" anchor="t"/>
+          <a:lstStyle/>
+          <a:p>
+            <a:pPr indent="0" marL="0">
+              <a:lnSpc>
+                <a:spcPct val="100000"/>
+              </a:lnSpc>
+              <a:buNone/>
+            </a:pPr>
+            <a:r>
+              <a:rPr lang="en-US" sz="1500" dirty="0">
+                <a:solidFill>
+                  <a:srgbClr val="1F2430"/>
+                </a:solidFill>
+                <a:latin typeface="Arial" pitchFamily="34" charset="0"/>
+                <a:ea typeface="Arial" pitchFamily="34" charset="-122"/>
+                <a:cs typeface="Arial" pitchFamily="34" charset="-120"/>
+              </a:rPr>
+              <a:t>errores: con tan pocas etiquetas, SGD termina peor que no adaptarse</a:t>
+            </a:r>
+            <a:endParaRPr lang="en-US" sz="1500" dirty="0"/>
+          </a:p>
+        </p:txBody>
+      </p:sp>
+      <p:sp>
+        <p:nvSpPr>
+          <p:cNvPr id="15" name="Text 12"/>
+          <p:cNvSpPr txBox="1"/>
+          <p:nvPr/>
+        </p:nvSpPr>
+        <p:spPr>
+          <a:xfrm>
+            <a:off x="7726680" y="5440680"/>
+            <a:ext cx="3931920" cy="548640"/>
+          </a:xfrm>
+          <a:prstGeom prst="rect">
+            <a:avLst/>
+          </a:prstGeom>
+          <a:noFill/>
+          <a:ln/>
+        </p:spPr>
+        <p:txBody>
+          <a:bodyPr wrap="square" lIns="0" tIns="0" rIns="0" bIns="0" rtlCol="0" anchor="t"/>
+          <a:lstStyle/>
+          <a:p>
+            <a:pPr indent="0" marL="0">
+              <a:lnSpc>
+                <a:spcPct val="100000"/>
+              </a:lnSpc>
+              <a:buNone/>
+            </a:pPr>
+            <a:r>
+              <a:rPr lang="en-US" sz="1300" dirty="0">
+                <a:solidFill>
+                  <a:srgbClr val="5A6274"/>
+                </a:solidFill>
+                <a:latin typeface="Arial" pitchFamily="34" charset="0"/>
+                <a:ea typeface="Arial" pitchFamily="34" charset="-122"/>
+                <a:cs typeface="Arial" pitchFamily="34" charset="-120"/>
+              </a:rPr>
+              <a:t>Con 1 de cada 5 o más, reentrenar gana en al menos 18 de 20 semillas.</a:t>
+            </a:r>
+            <a:endParaRPr lang="en-US" sz="1300" dirty="0"/>
+          </a:p>
+        </p:txBody>
+      </p:sp>
+      <p:sp>
+        <p:nvSpPr>
+          <p:cNvPr id="16" name="Text 13"/>
+          <p:cNvSpPr txBox="1"/>
+          <p:nvPr/>
+        </p:nvSpPr>
+        <p:spPr>
+          <a:xfrm>
+            <a:off x="548640" y="6373368"/>
+            <a:ext cx="10241280" cy="274320"/>
+          </a:xfrm>
+          <a:prstGeom prst="rect">
+            <a:avLst/>
+          </a:prstGeom>
+          <a:noFill/>
+          <a:ln/>
+        </p:spPr>
+        <p:txBody>
+          <a:bodyPr wrap="square" lIns="0" tIns="0" rIns="0" bIns="0" rtlCol="0" anchor="t"/>
+          <a:lstStyle/>
+          <a:p>
+            <a:pPr indent="0" marL="0">
+              <a:lnSpc>
+                <a:spcPct val="100000"/>
+              </a:lnSpc>
+              <a:buNone/>
+            </a:pPr>
+            <a:r>
+              <a:rPr lang="en-US" sz="1000" dirty="0">
+                <a:solidFill>
+                  <a:srgbClr val="9AA1AE"/>
+                </a:solidFill>
+                <a:latin typeface="Arial" pitchFamily="34" charset="0"/>
+                <a:ea typeface="Arial" pitchFamily="34" charset="-122"/>
+                <a:cs typeface="Arial" pitchFamily="34" charset="-120"/>
+              </a:rPr>
+              <a:t>Para cada nivel, 20 órdenes del corpus × 5 sorteos de etiquetas. Hedge usa η_ρ = √ρ · η_T.</a:t>
             </a:r>
             <a:endParaRPr lang="en-US" sz="1000" dirty="0"/>
           </a:p>
@@ -5052,7 +7377,7 @@
                 <a:ea typeface="Arial" pitchFamily="34" charset="-122"/>
                 <a:cs typeface="Arial" pitchFamily="34" charset="-120"/>
               </a:rPr>
-              <a:t>HALLAZGO 3 · LA TEORÍA, CON PRECISIÓN</a:t>
+              <a:t>HALLAZGO 2</a:t>
             </a:r>
             <a:endParaRPr lang="en-US" sz="1100" dirty="0"/>
           </a:p>
@@ -5093,7 +7418,7 @@
                 <a:ea typeface="Georgia" pitchFamily="34" charset="-122"/>
                 <a:cs typeface="Georgia" pitchFamily="34" charset="-120"/>
               </a:rPr>
-              <a:t>La cota de la teoría no es la del voto pesado</a:t>
+              <a:t>No es un artefacto de cómo se pondera</a:t>
             </a:r>
             <a:endParaRPr lang="en-US" sz="3000" dirty="0"/>
           </a:p>
@@ -5107,34 +7432,76 @@
         </p:nvSpPr>
         <p:spPr>
           <a:xfrm>
-            <a:off x="9235440" y="429768"/>
-            <a:ext cx="1554480" cy="201168"/>
-          </a:xfrm>
-          <a:prstGeom prst="rect">
-            <a:avLst/>
-          </a:prstGeom>
-          <a:noFill/>
-          <a:ln/>
-        </p:spPr>
-        <p:txBody>
-          <a:bodyPr wrap="square" lIns="0" tIns="0" rIns="0" bIns="0" rtlCol="0" anchor="t"/>
-          <a:lstStyle/>
-          <a:p>
-            <a:pPr algn="r" indent="0" marL="0">
-              <a:lnSpc>
-                <a:spcPct val="100000"/>
-              </a:lnSpc>
-              <a:buNone/>
-            </a:pPr>
-            <a:r>
-              <a:rPr lang="en-US" sz="900" b="1" spc="200" kern="0" dirty="0">
-                <a:solidFill>
-                  <a:srgbClr val="9AA1AE"/>
+            <a:off x="548640" y="1307592"/>
+            <a:ext cx="10424160" cy="320040"/>
+          </a:xfrm>
+          <a:prstGeom prst="rect">
+            <a:avLst/>
+          </a:prstGeom>
+          <a:noFill/>
+          <a:ln/>
+        </p:spPr>
+        <p:txBody>
+          <a:bodyPr wrap="square" lIns="0" tIns="0" rIns="0" bIns="0" rtlCol="0" anchor="t"/>
+          <a:lstStyle/>
+          <a:p>
+            <a:pPr indent="0" marL="0">
+              <a:lnSpc>
+                <a:spcPct val="100000"/>
+              </a:lnSpc>
+              <a:buNone/>
+            </a:pPr>
+            <a:r>
+              <a:rPr lang="en-US" sz="1500" dirty="0">
+                <a:solidFill>
+                  <a:srgbClr val="5A6274"/>
                 </a:solidFill>
                 <a:latin typeface="Arial" pitchFamily="34" charset="0"/>
                 <a:ea typeface="Arial" pitchFamily="34" charset="-122"/>
                 <a:cs typeface="Arial" pitchFamily="34" charset="-120"/>
               </a:rPr>
+              <a:t>Errores en la mitad atacada con 1 de cada 20 mensajes etiquetado.</a:t>
+            </a:r>
+            <a:endParaRPr lang="en-US" sz="1500" dirty="0"/>
+          </a:p>
+        </p:txBody>
+      </p:sp>
+      <p:sp>
+        <p:nvSpPr>
+          <p:cNvPr id="5" name="Text 3"/>
+          <p:cNvSpPr txBox="1"/>
+          <p:nvPr/>
+        </p:nvSpPr>
+        <p:spPr>
+          <a:xfrm>
+            <a:off x="9235440" y="429768"/>
+            <a:ext cx="1554480" cy="201168"/>
+          </a:xfrm>
+          <a:prstGeom prst="rect">
+            <a:avLst/>
+          </a:prstGeom>
+          <a:noFill/>
+          <a:ln/>
+        </p:spPr>
+        <p:txBody>
+          <a:bodyPr wrap="square" lIns="0" tIns="0" rIns="0" bIns="0" rtlCol="0" anchor="t"/>
+          <a:lstStyle/>
+          <a:p>
+            <a:pPr algn="r" indent="0" marL="0">
+              <a:lnSpc>
+                <a:spcPct val="100000"/>
+              </a:lnSpc>
+              <a:buNone/>
+            </a:pPr>
+            <a:r>
+              <a:rPr lang="en-US" sz="900" b="1" spc="200" kern="0" dirty="0">
+                <a:solidFill>
+                  <a:srgbClr val="9AA1AE"/>
+                </a:solidFill>
+                <a:latin typeface="Arial" pitchFamily="34" charset="0"/>
+                <a:ea typeface="Arial" pitchFamily="34" charset="-122"/>
+                <a:cs typeface="Arial" pitchFamily="34" charset="-120"/>
+              </a:rPr>
               <a:t>HALLAZGOS</a:t>
             </a:r>
             <a:endParaRPr lang="en-US" sz="900" dirty="0"/>
@@ -5143,7 +7510,7 @@
       </p:sp>
       <p:sp>
         <p:nvSpPr>
-          <p:cNvPr id="5" name="hallazgo 1"/>
+          <p:cNvPr id="6" name="hallazgo 1"/>
           <p:cNvSpPr/>
           <p:nvPr/>
         </p:nvSpPr>
@@ -5165,13 +7532,33 @@
       </p:sp>
       <p:sp>
         <p:nvSpPr>
-          <p:cNvPr id="6" name="hallazgo 2"/>
+          <p:cNvPr id="7" name="hallazgo 2 (actual)"/>
           <p:cNvSpPr/>
           <p:nvPr/>
         </p:nvSpPr>
         <p:spPr>
           <a:xfrm>
             <a:off x="11100816" y="457200"/>
+            <a:ext cx="137160" cy="137160"/>
+          </a:xfrm>
+          <a:prstGeom prst="ellipse">
+            <a:avLst/>
+          </a:prstGeom>
+          <a:solidFill>
+            <a:srgbClr val="1F2430"/>
+          </a:solidFill>
+          <a:ln/>
+        </p:spPr>
+      </p:sp>
+      <p:sp>
+        <p:nvSpPr>
+          <p:cNvPr id="8" name="hallazgo 3"/>
+          <p:cNvSpPr/>
+          <p:nvPr/>
+        </p:nvSpPr>
+        <p:spPr>
+          <a:xfrm>
+            <a:off x="11301984" y="457200"/>
             <a:ext cx="137160" cy="137160"/>
           </a:xfrm>
           <a:prstGeom prst="ellipse">
@@ -5187,27 +7574,7 @@
       </p:sp>
       <p:sp>
         <p:nvSpPr>
-          <p:cNvPr id="7" name="hallazgo 3 (actual)"/>
-          <p:cNvSpPr/>
-          <p:nvPr/>
-        </p:nvSpPr>
-        <p:spPr>
-          <a:xfrm>
-            <a:off x="11301984" y="457200"/>
-            <a:ext cx="137160" cy="137160"/>
-          </a:xfrm>
-          <a:prstGeom prst="ellipse">
-            <a:avLst/>
-          </a:prstGeom>
-          <a:solidFill>
-            <a:srgbClr val="1F2430"/>
-          </a:solidFill>
-          <a:ln/>
-        </p:spPr>
-      </p:sp>
-      <p:sp>
-        <p:nvSpPr>
-          <p:cNvPr id="8" name="hallazgo 4"/>
+          <p:cNvPr id="9" name="hallazgo 4"/>
           <p:cNvSpPr/>
           <p:nvPr/>
         </p:nvSpPr>
@@ -5227,366 +7594,9 @@
           </a:ln>
         </p:spPr>
       </p:sp>
-      <p:sp>
-        <p:nvSpPr>
-          <p:cNvPr id="9" name="Text 7"/>
-          <p:cNvSpPr txBox="1"/>
-          <p:nvPr/>
-        </p:nvSpPr>
-        <p:spPr>
-          <a:xfrm>
-            <a:off x="548640" y="1783080"/>
-            <a:ext cx="4572000" cy="274320"/>
-          </a:xfrm>
-          <a:prstGeom prst="rect">
-            <a:avLst/>
-          </a:prstGeom>
-          <a:noFill/>
-          <a:ln/>
-        </p:spPr>
-        <p:txBody>
-          <a:bodyPr wrap="square" lIns="0" tIns="0" rIns="0" bIns="0" rtlCol="0" anchor="t"/>
-          <a:lstStyle/>
-          <a:p>
-            <a:pPr indent="0" marL="0">
-              <a:lnSpc>
-                <a:spcPct val="100000"/>
-              </a:lnSpc>
-              <a:buNone/>
-            </a:pPr>
-            <a:r>
-              <a:rPr lang="en-US" sz="1500" dirty="0">
-                <a:solidFill>
-                  <a:srgbClr val="5A6274"/>
-                </a:solidFill>
-                <a:latin typeface="Arial" pitchFamily="34" charset="0"/>
-                <a:ea typeface="Arial" pitchFamily="34" charset="-122"/>
-                <a:cs typeface="Arial" pitchFamily="34" charset="-120"/>
-              </a:rPr>
-              <a:t>En clase se presentan juntos:</a:t>
-            </a:r>
-            <a:endParaRPr lang="en-US" sz="1500" dirty="0"/>
-          </a:p>
-        </p:txBody>
-      </p:sp>
-      <p:sp>
-        <p:nvSpPr>
-          <p:cNvPr id="10" name="punto Voto pesado determinístico"/>
-          <p:cNvSpPr/>
-          <p:nvPr/>
-        </p:nvSpPr>
-        <p:spPr>
-          <a:xfrm>
-            <a:off x="548640" y="2295144"/>
-            <a:ext cx="219456" cy="219456"/>
-          </a:xfrm>
-          <a:prstGeom prst="ellipse">
-            <a:avLst/>
-          </a:prstGeom>
-          <a:solidFill>
-            <a:srgbClr val="E34948"/>
-          </a:solidFill>
-          <a:ln/>
-        </p:spPr>
-      </p:sp>
-      <p:sp>
-        <p:nvSpPr>
-          <p:cNvPr id="11" name="Text 9"/>
-          <p:cNvSpPr txBox="1"/>
-          <p:nvPr/>
-        </p:nvSpPr>
-        <p:spPr>
-          <a:xfrm>
-            <a:off x="932688" y="2240280"/>
-            <a:ext cx="4187952" cy="292608"/>
-          </a:xfrm>
-          <a:prstGeom prst="rect">
-            <a:avLst/>
-          </a:prstGeom>
-          <a:noFill/>
-          <a:ln/>
-        </p:spPr>
-        <p:txBody>
-          <a:bodyPr wrap="square" lIns="0" tIns="0" rIns="0" bIns="0" rtlCol="0" anchor="t"/>
-          <a:lstStyle/>
-          <a:p>
-            <a:pPr indent="0" marL="0">
-              <a:lnSpc>
-                <a:spcPct val="100000"/>
-              </a:lnSpc>
-              <a:buNone/>
-            </a:pPr>
-            <a:r>
-              <a:rPr lang="en-US" sz="1600" b="1" dirty="0">
-                <a:solidFill>
-                  <a:srgbClr val="1F2430"/>
-                </a:solidFill>
-                <a:latin typeface="Arial" pitchFamily="34" charset="0"/>
-                <a:ea typeface="Arial" pitchFamily="34" charset="-122"/>
-                <a:cs typeface="Arial" pitchFamily="34" charset="-120"/>
-              </a:rPr>
-              <a:t>Voto pesado determinístico</a:t>
-            </a:r>
-            <a:endParaRPr lang="en-US" sz="1600" dirty="0"/>
-          </a:p>
-        </p:txBody>
-      </p:sp>
-      <p:sp>
-        <p:nvSpPr>
-          <p:cNvPr id="12" name="Text 10"/>
-          <p:cNvSpPr txBox="1"/>
-          <p:nvPr/>
-        </p:nvSpPr>
-        <p:spPr>
-          <a:xfrm>
-            <a:off x="932688" y="2569464"/>
-            <a:ext cx="4187952" cy="457200"/>
-          </a:xfrm>
-          <a:prstGeom prst="rect">
-            <a:avLst/>
-          </a:prstGeom>
-          <a:noFill/>
-          <a:ln/>
-        </p:spPr>
-        <p:txBody>
-          <a:bodyPr wrap="square" lIns="0" tIns="0" rIns="0" bIns="0" rtlCol="0" anchor="t"/>
-          <a:lstStyle/>
-          <a:p>
-            <a:pPr indent="0" marL="0">
-              <a:lnSpc>
-                <a:spcPct val="100000"/>
-              </a:lnSpc>
-              <a:buNone/>
-            </a:pPr>
-            <a:r>
-              <a:rPr lang="en-US" sz="1300" dirty="0">
-                <a:solidFill>
-                  <a:srgbClr val="5A6274"/>
-                </a:solidFill>
-                <a:latin typeface="Arial" pitchFamily="34" charset="0"/>
-                <a:ea typeface="Arial" pitchFamily="34" charset="-122"/>
-                <a:cs typeface="Arial" pitchFamily="34" charset="-120"/>
-              </a:rPr>
-              <a:t>predice lo que dice la mayoría ponderada</a:t>
-            </a:r>
-            <a:endParaRPr lang="en-US" sz="1300" dirty="0"/>
-          </a:p>
-        </p:txBody>
-      </p:sp>
-      <p:sp>
-        <p:nvSpPr>
-          <p:cNvPr id="13" name="punto Hedge randomizado"/>
-          <p:cNvSpPr/>
-          <p:nvPr/>
-        </p:nvSpPr>
-        <p:spPr>
-          <a:xfrm>
-            <a:off x="548640" y="3118104"/>
-            <a:ext cx="219456" cy="219456"/>
-          </a:xfrm>
-          <a:prstGeom prst="ellipse">
-            <a:avLst/>
-          </a:prstGeom>
-          <a:solidFill>
-            <a:srgbClr val="2A78D6"/>
-          </a:solidFill>
-          <a:ln/>
-        </p:spPr>
-      </p:sp>
-      <p:sp>
-        <p:nvSpPr>
-          <p:cNvPr id="14" name="Text 12"/>
-          <p:cNvSpPr txBox="1"/>
-          <p:nvPr/>
-        </p:nvSpPr>
-        <p:spPr>
-          <a:xfrm>
-            <a:off x="932688" y="3063240"/>
-            <a:ext cx="4187952" cy="292608"/>
-          </a:xfrm>
-          <a:prstGeom prst="rect">
-            <a:avLst/>
-          </a:prstGeom>
-          <a:noFill/>
-          <a:ln/>
-        </p:spPr>
-        <p:txBody>
-          <a:bodyPr wrap="square" lIns="0" tIns="0" rIns="0" bIns="0" rtlCol="0" anchor="t"/>
-          <a:lstStyle/>
-          <a:p>
-            <a:pPr indent="0" marL="0">
-              <a:lnSpc>
-                <a:spcPct val="100000"/>
-              </a:lnSpc>
-              <a:buNone/>
-            </a:pPr>
-            <a:r>
-              <a:rPr lang="en-US" sz="1600" b="1" dirty="0">
-                <a:solidFill>
-                  <a:srgbClr val="1F2430"/>
-                </a:solidFill>
-                <a:latin typeface="Arial" pitchFamily="34" charset="0"/>
-                <a:ea typeface="Arial" pitchFamily="34" charset="-122"/>
-                <a:cs typeface="Arial" pitchFamily="34" charset="-120"/>
-              </a:rPr>
-              <a:t>Hedge randomizado</a:t>
-            </a:r>
-            <a:endParaRPr lang="en-US" sz="1600" dirty="0"/>
-          </a:p>
-        </p:txBody>
-      </p:sp>
-      <p:sp>
-        <p:nvSpPr>
-          <p:cNvPr id="15" name="Text 13"/>
-          <p:cNvSpPr txBox="1"/>
-          <p:nvPr/>
-        </p:nvSpPr>
-        <p:spPr>
-          <a:xfrm>
-            <a:off x="932688" y="3392424"/>
-            <a:ext cx="4187952" cy="457200"/>
-          </a:xfrm>
-          <a:prstGeom prst="rect">
-            <a:avLst/>
-          </a:prstGeom>
-          <a:noFill/>
-          <a:ln/>
-        </p:spPr>
-        <p:txBody>
-          <a:bodyPr wrap="square" lIns="0" tIns="0" rIns="0" bIns="0" rtlCol="0" anchor="t"/>
-          <a:lstStyle/>
-          <a:p>
-            <a:pPr indent="0" marL="0">
-              <a:lnSpc>
-                <a:spcPct val="100000"/>
-              </a:lnSpc>
-              <a:buNone/>
-            </a:pPr>
-            <a:r>
-              <a:rPr lang="en-US" sz="1300" dirty="0">
-                <a:solidFill>
-                  <a:srgbClr val="5A6274"/>
-                </a:solidFill>
-                <a:latin typeface="Arial" pitchFamily="34" charset="0"/>
-                <a:ea typeface="Arial" pitchFamily="34" charset="-122"/>
-                <a:cs typeface="Arial" pitchFamily="34" charset="-120"/>
-              </a:rPr>
-              <a:t>sortea un experto según los pesos: para este vale la cota</a:t>
-            </a:r>
-            <a:endParaRPr lang="en-US" sz="1300" dirty="0"/>
-          </a:p>
-        </p:txBody>
-      </p:sp>
-      <p:sp>
-        <p:nvSpPr>
-          <p:cNvPr id="16" name="Shape 14"/>
-          <p:cNvSpPr/>
-          <p:nvPr/>
-        </p:nvSpPr>
-        <p:spPr>
-          <a:xfrm>
-            <a:off x="548640" y="3977640"/>
-            <a:ext cx="4572000" cy="0"/>
-          </a:xfrm>
-          <a:prstGeom prst="line">
-            <a:avLst/>
-          </a:prstGeom>
-          <a:noFill/>
-          <a:ln w="9525">
-            <a:solidFill>
-              <a:srgbClr val="D9D6CE"/>
-            </a:solidFill>
-            <a:prstDash val="solid"/>
-          </a:ln>
-        </p:spPr>
-      </p:sp>
-      <p:sp>
-        <p:nvSpPr>
-          <p:cNvPr id="17" name="Text 15"/>
-          <p:cNvSpPr txBox="1"/>
-          <p:nvPr/>
-        </p:nvSpPr>
-        <p:spPr>
-          <a:xfrm>
-            <a:off x="548640" y="4160520"/>
-            <a:ext cx="4572000" cy="1005840"/>
-          </a:xfrm>
-          <a:prstGeom prst="rect">
-            <a:avLst/>
-          </a:prstGeom>
-          <a:noFill/>
-          <a:ln/>
-        </p:spPr>
-        <p:txBody>
-          <a:bodyPr wrap="square" lIns="0" tIns="0" rIns="0" bIns="0" rtlCol="0" anchor="t"/>
-          <a:lstStyle/>
-          <a:p>
-            <a:pPr indent="0" marL="0">
-              <a:lnSpc>
-                <a:spcPct val="100000"/>
-              </a:lnSpc>
-              <a:buNone/>
-            </a:pPr>
-            <a:r>
-              <a:rPr lang="en-US" sz="2000" dirty="0">
-                <a:solidFill>
-                  <a:srgbClr val="1F2430"/>
-                </a:solidFill>
-                <a:latin typeface="Georgia" pitchFamily="34" charset="0"/>
-                <a:ea typeface="Georgia" pitchFamily="34" charset="-122"/>
-                <a:cs typeface="Georgia" pitchFamily="34" charset="-120"/>
-              </a:rPr>
-              <a:t>Si el jugador es predecible, un adversario lo simula y etiqueta lo contrario: lo hace errar siempre.</a:t>
-            </a:r>
-            <a:endParaRPr lang="en-US" sz="2000" dirty="0"/>
-          </a:p>
-        </p:txBody>
-      </p:sp>
-      <p:sp>
-        <p:nvSpPr>
-          <p:cNvPr id="18" name="Text 16"/>
-          <p:cNvSpPr txBox="1"/>
-          <p:nvPr/>
-        </p:nvSpPr>
-        <p:spPr>
-          <a:xfrm>
-            <a:off x="548640" y="5349240"/>
-            <a:ext cx="4572000" cy="548640"/>
-          </a:xfrm>
-          <a:prstGeom prst="rect">
-            <a:avLst/>
-          </a:prstGeom>
-          <a:noFill/>
-          <a:ln/>
-        </p:spPr>
-        <p:txBody>
-          <a:bodyPr wrap="square" lIns="0" tIns="0" rIns="0" bIns="0" rtlCol="0" anchor="t"/>
-          <a:lstStyle/>
-          <a:p>
-            <a:pPr indent="0" marL="0">
-              <a:lnSpc>
-                <a:spcPct val="100000"/>
-              </a:lnSpc>
-              <a:buNone/>
-            </a:pPr>
-            <a:r>
-              <a:rPr lang="en-US" sz="1300" dirty="0">
-                <a:solidFill>
-                  <a:srgbClr val="5A6274"/>
-                </a:solidFill>
-                <a:latin typeface="Arial" pitchFamily="34" charset="0"/>
-                <a:ea typeface="Arial" pitchFamily="34" charset="-122"/>
-                <a:cs typeface="Arial" pitchFamily="34" charset="-120"/>
-              </a:rPr>
-              <a:t>En nuestro stream de spam, que es benigno, el determinístico incluso anda mejor (regret −2,6).</a:t>
-            </a:r>
-            <a:endParaRPr lang="en-US" sz="1300" dirty="0"/>
-          </a:p>
-        </p:txBody>
-      </p:sp>
       <p:pic>
         <p:nvPicPr>
-          <p:cNvPr id="19" name="Image 0" descr="Regret frente a un adversario que simula al jugador. El voto pesado determinístico llega a 2.000, T sobre 2; Hedge randomizado queda en 14, bajo su cota de 37.">    </p:cNvPr>
+          <p:cNvPr id="10" name="Image 0" descr="SGD online sin reponderar comete 210 errores; reponderado por 1 sobre raíz de rho, 240; por 1 sobre rho, 323. Hedge comete 189.">    </p:cNvPr>
           <p:cNvPicPr>
             <a:picLocks noChangeAspect="1"/>
           </p:cNvPicPr>
@@ -5600,8 +7610,8 @@
         </p:blipFill>
         <p:spPr>
           <a:xfrm>
-            <a:off x="5440680" y="1737360"/>
-            <a:ext cx="6263640" cy="4276573"/>
+            <a:off x="411480" y="1828800"/>
+            <a:ext cx="6949440" cy="3897102"/>
           </a:xfrm>
           <a:prstGeom prst="rect">
             <a:avLst/>
@@ -5610,41 +7620,232 @@
       </p:pic>
       <p:sp>
         <p:nvSpPr>
-          <p:cNvPr id="20" name="Text 17"/>
-          <p:cNvSpPr txBox="1"/>
-          <p:nvPr/>
-        </p:nvSpPr>
-        <p:spPr>
-          <a:xfrm>
-            <a:off x="548640" y="6373368"/>
-            <a:ext cx="10241280" cy="274320"/>
-          </a:xfrm>
-          <a:prstGeom prst="rect">
-            <a:avLst/>
-          </a:prstGeom>
-          <a:noFill/>
-          <a:ln/>
-        </p:spPr>
-        <p:txBody>
-          <a:bodyPr wrap="square" lIns="0" tIns="0" rIns="0" bIns="0" rtlCol="0" anchor="t"/>
-          <a:lstStyle/>
-          <a:p>
-            <a:pPr indent="0" marL="0">
-              <a:lnSpc>
-                <a:spcPct val="100000"/>
-              </a:lnSpc>
-              <a:buNone/>
-            </a:pPr>
-            <a:r>
-              <a:rPr lang="en-US" sz="1000" dirty="0">
-                <a:solidFill>
-                  <a:srgbClr val="9AA1AE"/>
+          <p:cNvPr id="11" name="Text 8"/>
+          <p:cNvSpPr txBox="1"/>
+          <p:nvPr/>
+        </p:nvSpPr>
+        <p:spPr>
+          <a:xfrm>
+            <a:off x="7726680" y="1920240"/>
+            <a:ext cx="3931920" cy="1097280"/>
+          </a:xfrm>
+          <a:prstGeom prst="rect">
+            <a:avLst/>
+          </a:prstGeom>
+          <a:noFill/>
+          <a:ln/>
+        </p:spPr>
+        <p:txBody>
+          <a:bodyPr wrap="square" lIns="0" tIns="0" rIns="0" bIns="0" rtlCol="0" anchor="t"/>
+          <a:lstStyle/>
+          <a:p>
+            <a:pPr indent="0" marL="0">
+              <a:lnSpc>
+                <a:spcPct val="100000"/>
+              </a:lnSpc>
+              <a:buNone/>
+            </a:pPr>
+            <a:r>
+              <a:rPr lang="en-US" sz="2000" dirty="0">
+                <a:solidFill>
+                  <a:srgbClr val="1F2430"/>
+                </a:solidFill>
+                <a:latin typeface="Georgia" pitchFamily="34" charset="0"/>
+                <a:ea typeface="Georgia" pitchFamily="34" charset="-122"/>
+                <a:cs typeface="Georgia" pitchFamily="34" charset="-120"/>
+              </a:rPr>
+              <a:t>¿Y si SGD compensa las etiquetas que faltan pesando más cada ejemplo, como hace Hedge?</a:t>
+            </a:r>
+            <a:endParaRPr lang="en-US" sz="2000" dirty="0"/>
+          </a:p>
+        </p:txBody>
+      </p:sp>
+      <p:sp>
+        <p:nvSpPr>
+          <p:cNvPr id="12" name="Text 9"/>
+          <p:cNvSpPr txBox="1"/>
+          <p:nvPr/>
+        </p:nvSpPr>
+        <p:spPr>
+          <a:xfrm>
+            <a:off x="7726680" y="3108960"/>
+            <a:ext cx="3931920" cy="548640"/>
+          </a:xfrm>
+          <a:prstGeom prst="rect">
+            <a:avLst/>
+          </a:prstGeom>
+          <a:noFill/>
+          <a:ln/>
+        </p:spPr>
+        <p:txBody>
+          <a:bodyPr wrap="square" lIns="0" tIns="0" rIns="0" bIns="0" rtlCol="0" anchor="t"/>
+          <a:lstStyle/>
+          <a:p>
+            <a:pPr indent="0" marL="0">
+              <a:lnSpc>
+                <a:spcPct val="100000"/>
+              </a:lnSpc>
+              <a:buNone/>
+            </a:pPr>
+            <a:r>
+              <a:rPr lang="en-US" sz="1500" dirty="0">
+                <a:solidFill>
+                  <a:srgbClr val="5A6274"/>
                 </a:solidFill>
                 <a:latin typeface="Arial" pitchFamily="34" charset="0"/>
                 <a:ea typeface="Arial" pitchFamily="34" charset="-122"/>
                 <a:cs typeface="Arial" pitchFamily="34" charset="-120"/>
               </a:rPr>
-              <a:t>Secuencia sintética de 4.000 rondas con 2 expertos. Slides 71 y 73 de la clase 2.</a:t>
+              <a:t>Empeora: con pocos ejemplos, pasos más grandes sobreajustan a cada uno.</a:t>
+            </a:r>
+            <a:endParaRPr lang="en-US" sz="1500" dirty="0"/>
+          </a:p>
+        </p:txBody>
+      </p:sp>
+      <p:sp>
+        <p:nvSpPr>
+          <p:cNvPr id="13" name="Shape 10"/>
+          <p:cNvSpPr/>
+          <p:nvPr/>
+        </p:nvSpPr>
+        <p:spPr>
+          <a:xfrm>
+            <a:off x="7726680" y="3931920"/>
+            <a:ext cx="3913632" cy="0"/>
+          </a:xfrm>
+          <a:prstGeom prst="line">
+            <a:avLst/>
+          </a:prstGeom>
+          <a:noFill/>
+          <a:ln w="9525">
+            <a:solidFill>
+              <a:srgbClr val="D9D6CE"/>
+            </a:solidFill>
+            <a:prstDash val="solid"/>
+          </a:ln>
+        </p:spPr>
+      </p:sp>
+      <p:sp>
+        <p:nvSpPr>
+          <p:cNvPr id="14" name="Text 11"/>
+          <p:cNvSpPr txBox="1"/>
+          <p:nvPr/>
+        </p:nvSpPr>
+        <p:spPr>
+          <a:xfrm>
+            <a:off x="7726680" y="4114800"/>
+            <a:ext cx="3931920" cy="1051560"/>
+          </a:xfrm>
+          <a:prstGeom prst="rect">
+            <a:avLst/>
+          </a:prstGeom>
+          <a:noFill/>
+          <a:ln/>
+        </p:spPr>
+        <p:txBody>
+          <a:bodyPr wrap="square" lIns="0" tIns="0" rIns="0" bIns="0" rtlCol="0" anchor="t"/>
+          <a:lstStyle/>
+          <a:p>
+            <a:pPr indent="0" marL="0">
+              <a:lnSpc>
+                <a:spcPct val="100000"/>
+              </a:lnSpc>
+              <a:buNone/>
+            </a:pPr>
+            <a:r>
+              <a:rPr lang="en-US" sz="2200" dirty="0">
+                <a:solidFill>
+                  <a:srgbClr val="2A78D6"/>
+                </a:solidFill>
+                <a:latin typeface="Georgia" pitchFamily="34" charset="0"/>
+                <a:ea typeface="Georgia" pitchFamily="34" charset="-122"/>
+                <a:cs typeface="Georgia" pitchFamily="34" charset="-120"/>
+              </a:rPr>
+              <a:t>Hedge aprende 5 pesos. Reentrenar, uno por cada palabra nueva.</a:t>
+            </a:r>
+            <a:endParaRPr lang="en-US" sz="2200" dirty="0"/>
+          </a:p>
+        </p:txBody>
+      </p:sp>
+      <p:sp>
+        <p:nvSpPr>
+          <p:cNvPr id="15" name="Text 12"/>
+          <p:cNvSpPr txBox="1"/>
+          <p:nvPr/>
+        </p:nvSpPr>
+        <p:spPr>
+          <a:xfrm>
+            <a:off x="7726680" y="5303520"/>
+            <a:ext cx="3931920" cy="548640"/>
+          </a:xfrm>
+          <a:prstGeom prst="rect">
+            <a:avLst/>
+          </a:prstGeom>
+          <a:noFill/>
+          <a:ln/>
+        </p:spPr>
+        <p:txBody>
+          <a:bodyPr wrap="square" lIns="0" tIns="0" rIns="0" bIns="0" rtlCol="0" anchor="t"/>
+          <a:lstStyle/>
+          <a:p>
+            <a:pPr indent="0" marL="0">
+              <a:lnSpc>
+                <a:spcPct val="100000"/>
+              </a:lnSpc>
+              <a:buNone/>
+            </a:pPr>
+            <a:r>
+              <a:rPr lang="en-US" sz="1300" dirty="0">
+                <a:solidFill>
+                  <a:srgbClr val="5A6274"/>
+                </a:solidFill>
+                <a:latin typeface="Arial" pitchFamily="34" charset="0"/>
+                <a:ea typeface="Arial" pitchFamily="34" charset="-122"/>
+                <a:cs typeface="Arial" pitchFamily="34" charset="-120"/>
+              </a:rPr>
+              <a:t>Lo que sí paga Hedge es varianza: con ρ = 0,05 cada observación pesa ≈ 4,5 veces más.</a:t>
+            </a:r>
+            <a:endParaRPr lang="en-US" sz="1300" dirty="0"/>
+          </a:p>
+        </p:txBody>
+      </p:sp>
+      <p:sp>
+        <p:nvSpPr>
+          <p:cNvPr id="16" name="Text 13"/>
+          <p:cNvSpPr txBox="1"/>
+          <p:nvPr/>
+        </p:nvSpPr>
+        <p:spPr>
+          <a:xfrm>
+            <a:off x="548640" y="6373368"/>
+            <a:ext cx="10241280" cy="274320"/>
+          </a:xfrm>
+          <a:prstGeom prst="rect">
+            <a:avLst/>
+          </a:prstGeom>
+          <a:noFill/>
+          <a:ln/>
+        </p:spPr>
+        <p:txBody>
+          <a:bodyPr wrap="square" lIns="0" tIns="0" rIns="0" bIns="0" rtlCol="0" anchor="t"/>
+          <a:lstStyle/>
+          <a:p>
+            <a:pPr indent="0" marL="0">
+              <a:lnSpc>
+                <a:spcPct val="100000"/>
+              </a:lnSpc>
+              <a:buNone/>
+            </a:pPr>
+            <a:r>
+              <a:rPr lang="en-US" sz="1000" dirty="0">
+                <a:solidFill>
+                  <a:srgbClr val="9AA1AE"/>
+                </a:solidFill>
+                <a:latin typeface="Arial" pitchFamily="34" charset="0"/>
+                <a:ea typeface="Arial" pitchFamily="34" charset="-122"/>
+                <a:cs typeface="Arial" pitchFamily="34" charset="-120"/>
+              </a:rPr>
+              <a:t>Media de 20 permutaciones (semillas) del SMS Spam Collection. Ataque desde la mitad del stream.</a:t>
             </a:r>
             <a:endParaRPr lang="en-US" sz="1000" dirty="0"/>
           </a:p>
@@ -5762,7 +7963,7 @@
                 <a:ea typeface="Arial" pitchFamily="34" charset="-122"/>
                 <a:cs typeface="Arial" pitchFamily="34" charset="-120"/>
               </a:rPr>
-              <a:t>HALLAZGO 3</a:t>
+              <a:t>HALLAZGO 3 · LA TEORÍA, CON PRECISIÓN</a:t>
             </a:r>
             <a:endParaRPr lang="en-US" sz="1100" dirty="0"/>
           </a:p>
@@ -5803,7 +8004,7 @@
                 <a:ea typeface="Georgia" pitchFamily="34" charset="-122"/>
                 <a:cs typeface="Georgia" pitchFamily="34" charset="-120"/>
               </a:rPr>
-              <a:t>Cada cota vale para su tasa de aprendizaje</a:t>
+              <a:t>La cota de la teoría no es la del voto pesado</a:t>
             </a:r>
             <a:endParaRPr lang="en-US" sz="3000" dirty="0"/>
           </a:p>
@@ -5817,76 +8018,34 @@
         </p:nvSpPr>
         <p:spPr>
           <a:xfrm>
-            <a:off x="548640" y="1307592"/>
-            <a:ext cx="10424160" cy="320040"/>
-          </a:xfrm>
-          <a:prstGeom prst="rect">
-            <a:avLst/>
-          </a:prstGeom>
-          <a:noFill/>
-          <a:ln/>
-        </p:spPr>
-        <p:txBody>
-          <a:bodyPr wrap="square" lIns="0" tIns="0" rIns="0" bIns="0" rtlCol="0" anchor="t"/>
-          <a:lstStyle/>
-          <a:p>
-            <a:pPr indent="0" marL="0">
-              <a:lnSpc>
-                <a:spcPct val="100000"/>
-              </a:lnSpc>
-              <a:buNone/>
-            </a:pPr>
-            <a:r>
-              <a:rPr lang="en-US" sz="1500" dirty="0">
-                <a:solidFill>
-                  <a:srgbClr val="5A6274"/>
+            <a:off x="9235440" y="429768"/>
+            <a:ext cx="1554480" cy="201168"/>
+          </a:xfrm>
+          <a:prstGeom prst="rect">
+            <a:avLst/>
+          </a:prstGeom>
+          <a:noFill/>
+          <a:ln/>
+        </p:spPr>
+        <p:txBody>
+          <a:bodyPr wrap="square" lIns="0" tIns="0" rIns="0" bIns="0" rtlCol="0" anchor="t"/>
+          <a:lstStyle/>
+          <a:p>
+            <a:pPr algn="r" indent="0" marL="0">
+              <a:lnSpc>
+                <a:spcPct val="100000"/>
+              </a:lnSpc>
+              <a:buNone/>
+            </a:pPr>
+            <a:r>
+              <a:rPr lang="en-US" sz="900" b="1" spc="200" kern="0" dirty="0">
+                <a:solidFill>
+                  <a:srgbClr val="9AA1AE"/>
                 </a:solidFill>
                 <a:latin typeface="Arial" pitchFamily="34" charset="0"/>
                 <a:ea typeface="Arial" pitchFamily="34" charset="-122"/>
                 <a:cs typeface="Arial" pitchFamily="34" charset="-120"/>
               </a:rPr>
-              <a:t>Regret de Hedge en el stream atacado, con dos formas de elegir η.</a:t>
-            </a:r>
-            <a:endParaRPr lang="en-US" sz="1500" dirty="0"/>
-          </a:p>
-        </p:txBody>
-      </p:sp>
-      <p:sp>
-        <p:nvSpPr>
-          <p:cNvPr id="5" name="Text 3"/>
-          <p:cNvSpPr txBox="1"/>
-          <p:nvPr/>
-        </p:nvSpPr>
-        <p:spPr>
-          <a:xfrm>
-            <a:off x="9235440" y="429768"/>
-            <a:ext cx="1554480" cy="201168"/>
-          </a:xfrm>
-          <a:prstGeom prst="rect">
-            <a:avLst/>
-          </a:prstGeom>
-          <a:noFill/>
-          <a:ln/>
-        </p:spPr>
-        <p:txBody>
-          <a:bodyPr wrap="square" lIns="0" tIns="0" rIns="0" bIns="0" rtlCol="0" anchor="t"/>
-          <a:lstStyle/>
-          <a:p>
-            <a:pPr algn="r" indent="0" marL="0">
-              <a:lnSpc>
-                <a:spcPct val="100000"/>
-              </a:lnSpc>
-              <a:buNone/>
-            </a:pPr>
-            <a:r>
-              <a:rPr lang="en-US" sz="900" b="1" spc="200" kern="0" dirty="0">
-                <a:solidFill>
-                  <a:srgbClr val="9AA1AE"/>
-                </a:solidFill>
-                <a:latin typeface="Arial" pitchFamily="34" charset="0"/>
-                <a:ea typeface="Arial" pitchFamily="34" charset="-122"/>
-                <a:cs typeface="Arial" pitchFamily="34" charset="-120"/>
-              </a:rPr>
               <a:t>HALLAZGOS</a:t>
             </a:r>
             <a:endParaRPr lang="en-US" sz="900" dirty="0"/>
@@ -5895,7 +8054,7 @@
       </p:sp>
       <p:sp>
         <p:nvSpPr>
-          <p:cNvPr id="6" name="hallazgo 1"/>
+          <p:cNvPr id="5" name="hallazgo 1"/>
           <p:cNvSpPr/>
           <p:nvPr/>
         </p:nvSpPr>
@@ -5917,7 +8076,7 @@
       </p:sp>
       <p:sp>
         <p:nvSpPr>
-          <p:cNvPr id="7" name="hallazgo 2"/>
+          <p:cNvPr id="6" name="hallazgo 2"/>
           <p:cNvSpPr/>
           <p:nvPr/>
         </p:nvSpPr>
@@ -5939,7 +8098,7 @@
       </p:sp>
       <p:sp>
         <p:nvSpPr>
-          <p:cNvPr id="8" name="hallazgo 3 (actual)"/>
+          <p:cNvPr id="7" name="hallazgo 3 (actual)"/>
           <p:cNvSpPr/>
           <p:nvPr/>
         </p:nvSpPr>
@@ -5959,7 +8118,7 @@
       </p:sp>
       <p:sp>
         <p:nvSpPr>
-          <p:cNvPr id="9" name="hallazgo 4"/>
+          <p:cNvPr id="8" name="hallazgo 4"/>
           <p:cNvSpPr/>
           <p:nvPr/>
         </p:nvSpPr>
@@ -5979,9 +8138,366 @@
           </a:ln>
         </p:spPr>
       </p:sp>
+      <p:sp>
+        <p:nvSpPr>
+          <p:cNvPr id="9" name="Text 7"/>
+          <p:cNvSpPr txBox="1"/>
+          <p:nvPr/>
+        </p:nvSpPr>
+        <p:spPr>
+          <a:xfrm>
+            <a:off x="548640" y="1783080"/>
+            <a:ext cx="4572000" cy="274320"/>
+          </a:xfrm>
+          <a:prstGeom prst="rect">
+            <a:avLst/>
+          </a:prstGeom>
+          <a:noFill/>
+          <a:ln/>
+        </p:spPr>
+        <p:txBody>
+          <a:bodyPr wrap="square" lIns="0" tIns="0" rIns="0" bIns="0" rtlCol="0" anchor="t"/>
+          <a:lstStyle/>
+          <a:p>
+            <a:pPr indent="0" marL="0">
+              <a:lnSpc>
+                <a:spcPct val="100000"/>
+              </a:lnSpc>
+              <a:buNone/>
+            </a:pPr>
+            <a:r>
+              <a:rPr lang="en-US" sz="1500" dirty="0">
+                <a:solidFill>
+                  <a:srgbClr val="5A6274"/>
+                </a:solidFill>
+                <a:latin typeface="Arial" pitchFamily="34" charset="0"/>
+                <a:ea typeface="Arial" pitchFamily="34" charset="-122"/>
+                <a:cs typeface="Arial" pitchFamily="34" charset="-120"/>
+              </a:rPr>
+              <a:t>En clase se presentan juntos:</a:t>
+            </a:r>
+            <a:endParaRPr lang="en-US" sz="1500" dirty="0"/>
+          </a:p>
+        </p:txBody>
+      </p:sp>
+      <p:sp>
+        <p:nvSpPr>
+          <p:cNvPr id="10" name="punto Voto pesado determinístico"/>
+          <p:cNvSpPr/>
+          <p:nvPr/>
+        </p:nvSpPr>
+        <p:spPr>
+          <a:xfrm>
+            <a:off x="548640" y="2295144"/>
+            <a:ext cx="219456" cy="219456"/>
+          </a:xfrm>
+          <a:prstGeom prst="ellipse">
+            <a:avLst/>
+          </a:prstGeom>
+          <a:solidFill>
+            <a:srgbClr val="E34948"/>
+          </a:solidFill>
+          <a:ln/>
+        </p:spPr>
+      </p:sp>
+      <p:sp>
+        <p:nvSpPr>
+          <p:cNvPr id="11" name="Text 9"/>
+          <p:cNvSpPr txBox="1"/>
+          <p:nvPr/>
+        </p:nvSpPr>
+        <p:spPr>
+          <a:xfrm>
+            <a:off x="932688" y="2240280"/>
+            <a:ext cx="4187952" cy="292608"/>
+          </a:xfrm>
+          <a:prstGeom prst="rect">
+            <a:avLst/>
+          </a:prstGeom>
+          <a:noFill/>
+          <a:ln/>
+        </p:spPr>
+        <p:txBody>
+          <a:bodyPr wrap="square" lIns="0" tIns="0" rIns="0" bIns="0" rtlCol="0" anchor="t"/>
+          <a:lstStyle/>
+          <a:p>
+            <a:pPr indent="0" marL="0">
+              <a:lnSpc>
+                <a:spcPct val="100000"/>
+              </a:lnSpc>
+              <a:buNone/>
+            </a:pPr>
+            <a:r>
+              <a:rPr lang="en-US" sz="1600" b="1" dirty="0">
+                <a:solidFill>
+                  <a:srgbClr val="1F2430"/>
+                </a:solidFill>
+                <a:latin typeface="Arial" pitchFamily="34" charset="0"/>
+                <a:ea typeface="Arial" pitchFamily="34" charset="-122"/>
+                <a:cs typeface="Arial" pitchFamily="34" charset="-120"/>
+              </a:rPr>
+              <a:t>Voto pesado determinístico</a:t>
+            </a:r>
+            <a:endParaRPr lang="en-US" sz="1600" dirty="0"/>
+          </a:p>
+        </p:txBody>
+      </p:sp>
+      <p:sp>
+        <p:nvSpPr>
+          <p:cNvPr id="12" name="Text 10"/>
+          <p:cNvSpPr txBox="1"/>
+          <p:nvPr/>
+        </p:nvSpPr>
+        <p:spPr>
+          <a:xfrm>
+            <a:off x="932688" y="2569464"/>
+            <a:ext cx="4187952" cy="457200"/>
+          </a:xfrm>
+          <a:prstGeom prst="rect">
+            <a:avLst/>
+          </a:prstGeom>
+          <a:noFill/>
+          <a:ln/>
+        </p:spPr>
+        <p:txBody>
+          <a:bodyPr wrap="square" lIns="0" tIns="0" rIns="0" bIns="0" rtlCol="0" anchor="t"/>
+          <a:lstStyle/>
+          <a:p>
+            <a:pPr indent="0" marL="0">
+              <a:lnSpc>
+                <a:spcPct val="100000"/>
+              </a:lnSpc>
+              <a:buNone/>
+            </a:pPr>
+            <a:r>
+              <a:rPr lang="en-US" sz="1300" dirty="0">
+                <a:solidFill>
+                  <a:srgbClr val="5A6274"/>
+                </a:solidFill>
+                <a:latin typeface="Arial" pitchFamily="34" charset="0"/>
+                <a:ea typeface="Arial" pitchFamily="34" charset="-122"/>
+                <a:cs typeface="Arial" pitchFamily="34" charset="-120"/>
+              </a:rPr>
+              <a:t>predice lo que dice la mayoría ponderada</a:t>
+            </a:r>
+            <a:endParaRPr lang="en-US" sz="1300" dirty="0"/>
+          </a:p>
+        </p:txBody>
+      </p:sp>
+      <p:sp>
+        <p:nvSpPr>
+          <p:cNvPr id="13" name="punto Hedge randomizado"/>
+          <p:cNvSpPr/>
+          <p:nvPr/>
+        </p:nvSpPr>
+        <p:spPr>
+          <a:xfrm>
+            <a:off x="548640" y="3118104"/>
+            <a:ext cx="219456" cy="219456"/>
+          </a:xfrm>
+          <a:prstGeom prst="ellipse">
+            <a:avLst/>
+          </a:prstGeom>
+          <a:solidFill>
+            <a:srgbClr val="2A78D6"/>
+          </a:solidFill>
+          <a:ln/>
+        </p:spPr>
+      </p:sp>
+      <p:sp>
+        <p:nvSpPr>
+          <p:cNvPr id="14" name="Text 12"/>
+          <p:cNvSpPr txBox="1"/>
+          <p:nvPr/>
+        </p:nvSpPr>
+        <p:spPr>
+          <a:xfrm>
+            <a:off x="932688" y="3063240"/>
+            <a:ext cx="4187952" cy="292608"/>
+          </a:xfrm>
+          <a:prstGeom prst="rect">
+            <a:avLst/>
+          </a:prstGeom>
+          <a:noFill/>
+          <a:ln/>
+        </p:spPr>
+        <p:txBody>
+          <a:bodyPr wrap="square" lIns="0" tIns="0" rIns="0" bIns="0" rtlCol="0" anchor="t"/>
+          <a:lstStyle/>
+          <a:p>
+            <a:pPr indent="0" marL="0">
+              <a:lnSpc>
+                <a:spcPct val="100000"/>
+              </a:lnSpc>
+              <a:buNone/>
+            </a:pPr>
+            <a:r>
+              <a:rPr lang="en-US" sz="1600" b="1" dirty="0">
+                <a:solidFill>
+                  <a:srgbClr val="1F2430"/>
+                </a:solidFill>
+                <a:latin typeface="Arial" pitchFamily="34" charset="0"/>
+                <a:ea typeface="Arial" pitchFamily="34" charset="-122"/>
+                <a:cs typeface="Arial" pitchFamily="34" charset="-120"/>
+              </a:rPr>
+              <a:t>Hedge randomizado</a:t>
+            </a:r>
+            <a:endParaRPr lang="en-US" sz="1600" dirty="0"/>
+          </a:p>
+        </p:txBody>
+      </p:sp>
+      <p:sp>
+        <p:nvSpPr>
+          <p:cNvPr id="15" name="Text 13"/>
+          <p:cNvSpPr txBox="1"/>
+          <p:nvPr/>
+        </p:nvSpPr>
+        <p:spPr>
+          <a:xfrm>
+            <a:off x="932688" y="3392424"/>
+            <a:ext cx="4187952" cy="457200"/>
+          </a:xfrm>
+          <a:prstGeom prst="rect">
+            <a:avLst/>
+          </a:prstGeom>
+          <a:noFill/>
+          <a:ln/>
+        </p:spPr>
+        <p:txBody>
+          <a:bodyPr wrap="square" lIns="0" tIns="0" rIns="0" bIns="0" rtlCol="0" anchor="t"/>
+          <a:lstStyle/>
+          <a:p>
+            <a:pPr indent="0" marL="0">
+              <a:lnSpc>
+                <a:spcPct val="100000"/>
+              </a:lnSpc>
+              <a:buNone/>
+            </a:pPr>
+            <a:r>
+              <a:rPr lang="en-US" sz="1300" dirty="0">
+                <a:solidFill>
+                  <a:srgbClr val="5A6274"/>
+                </a:solidFill>
+                <a:latin typeface="Arial" pitchFamily="34" charset="0"/>
+                <a:ea typeface="Arial" pitchFamily="34" charset="-122"/>
+                <a:cs typeface="Arial" pitchFamily="34" charset="-120"/>
+              </a:rPr>
+              <a:t>sortea un experto según los pesos: para este vale la cota</a:t>
+            </a:r>
+            <a:endParaRPr lang="en-US" sz="1300" dirty="0"/>
+          </a:p>
+        </p:txBody>
+      </p:sp>
+      <p:sp>
+        <p:nvSpPr>
+          <p:cNvPr id="16" name="Shape 14"/>
+          <p:cNvSpPr/>
+          <p:nvPr/>
+        </p:nvSpPr>
+        <p:spPr>
+          <a:xfrm>
+            <a:off x="548640" y="3977640"/>
+            <a:ext cx="4572000" cy="0"/>
+          </a:xfrm>
+          <a:prstGeom prst="line">
+            <a:avLst/>
+          </a:prstGeom>
+          <a:noFill/>
+          <a:ln w="9525">
+            <a:solidFill>
+              <a:srgbClr val="D9D6CE"/>
+            </a:solidFill>
+            <a:prstDash val="solid"/>
+          </a:ln>
+        </p:spPr>
+      </p:sp>
+      <p:sp>
+        <p:nvSpPr>
+          <p:cNvPr id="17" name="Text 15"/>
+          <p:cNvSpPr txBox="1"/>
+          <p:nvPr/>
+        </p:nvSpPr>
+        <p:spPr>
+          <a:xfrm>
+            <a:off x="548640" y="4160520"/>
+            <a:ext cx="4572000" cy="1005840"/>
+          </a:xfrm>
+          <a:prstGeom prst="rect">
+            <a:avLst/>
+          </a:prstGeom>
+          <a:noFill/>
+          <a:ln/>
+        </p:spPr>
+        <p:txBody>
+          <a:bodyPr wrap="square" lIns="0" tIns="0" rIns="0" bIns="0" rtlCol="0" anchor="t"/>
+          <a:lstStyle/>
+          <a:p>
+            <a:pPr indent="0" marL="0">
+              <a:lnSpc>
+                <a:spcPct val="100000"/>
+              </a:lnSpc>
+              <a:buNone/>
+            </a:pPr>
+            <a:r>
+              <a:rPr lang="en-US" sz="2000" dirty="0">
+                <a:solidFill>
+                  <a:srgbClr val="1F2430"/>
+                </a:solidFill>
+                <a:latin typeface="Georgia" pitchFamily="34" charset="0"/>
+                <a:ea typeface="Georgia" pitchFamily="34" charset="-122"/>
+                <a:cs typeface="Georgia" pitchFamily="34" charset="-120"/>
+              </a:rPr>
+              <a:t>Si el jugador es predecible, un adversario lo simula y etiqueta lo contrario: lo hace errar siempre.</a:t>
+            </a:r>
+            <a:endParaRPr lang="en-US" sz="2000" dirty="0"/>
+          </a:p>
+        </p:txBody>
+      </p:sp>
+      <p:sp>
+        <p:nvSpPr>
+          <p:cNvPr id="18" name="Text 16"/>
+          <p:cNvSpPr txBox="1"/>
+          <p:nvPr/>
+        </p:nvSpPr>
+        <p:spPr>
+          <a:xfrm>
+            <a:off x="548640" y="5349240"/>
+            <a:ext cx="4572000" cy="548640"/>
+          </a:xfrm>
+          <a:prstGeom prst="rect">
+            <a:avLst/>
+          </a:prstGeom>
+          <a:noFill/>
+          <a:ln/>
+        </p:spPr>
+        <p:txBody>
+          <a:bodyPr wrap="square" lIns="0" tIns="0" rIns="0" bIns="0" rtlCol="0" anchor="t"/>
+          <a:lstStyle/>
+          <a:p>
+            <a:pPr indent="0" marL="0">
+              <a:lnSpc>
+                <a:spcPct val="100000"/>
+              </a:lnSpc>
+              <a:buNone/>
+            </a:pPr>
+            <a:r>
+              <a:rPr lang="en-US" sz="1300" dirty="0">
+                <a:solidFill>
+                  <a:srgbClr val="5A6274"/>
+                </a:solidFill>
+                <a:latin typeface="Arial" pitchFamily="34" charset="0"/>
+                <a:ea typeface="Arial" pitchFamily="34" charset="-122"/>
+                <a:cs typeface="Arial" pitchFamily="34" charset="-120"/>
+              </a:rPr>
+              <a:t>En nuestro stream de spam, que es benigno, el determinístico incluso anda mejor (regret −2,6).</a:t>
+            </a:r>
+            <a:endParaRPr lang="en-US" sz="1300" dirty="0"/>
+          </a:p>
+        </p:txBody>
+      </p:sp>
       <p:pic>
         <p:nvPicPr>
-          <p:cNvPr id="10" name="Image 0" descr="Regret de Hedge con eta de peor caso: 31, bajo su cota de 60. Con eta small-loss: 15, bajo su cota de 25.">    </p:cNvPr>
+          <p:cNvPr id="19" name="Image 0" descr="Regret frente a un adversario que simula al jugador. El voto pesado determinístico llega a 2.000, T sobre 2; Hedge randomizado queda en 14, bajo su cota de 37.">    </p:cNvPr>
           <p:cNvPicPr>
             <a:picLocks noChangeAspect="1"/>
           </p:cNvPicPr>
@@ -5995,8 +8511,8 @@
         </p:blipFill>
         <p:spPr>
           <a:xfrm>
-            <a:off x="411480" y="1783080"/>
-            <a:ext cx="6495445" cy="4434840"/>
+            <a:off x="5440680" y="1737360"/>
+            <a:ext cx="6263640" cy="4276573"/>
           </a:xfrm>
           <a:prstGeom prst="rect">
             <a:avLst/>
@@ -6005,356 +8521,41 @@
       </p:pic>
       <p:sp>
         <p:nvSpPr>
-          <p:cNvPr id="11" name="Text 8"/>
-          <p:cNvSpPr txBox="1"/>
-          <p:nvPr/>
-        </p:nvSpPr>
-        <p:spPr>
-          <a:xfrm>
-            <a:off x="7726680" y="1920240"/>
-            <a:ext cx="3931920" cy="868680"/>
-          </a:xfrm>
-          <a:prstGeom prst="rect">
-            <a:avLst/>
-          </a:prstGeom>
-          <a:noFill/>
-          <a:ln/>
-        </p:spPr>
-        <p:txBody>
-          <a:bodyPr wrap="square" lIns="0" tIns="0" rIns="0" bIns="0" rtlCol="0" anchor="t"/>
-          <a:lstStyle/>
-          <a:p>
-            <a:pPr indent="0" marL="0">
-              <a:lnSpc>
-                <a:spcPct val="100000"/>
-              </a:lnSpc>
-              <a:buNone/>
-            </a:pPr>
-            <a:r>
-              <a:rPr lang="en-US" sz="2000" dirty="0">
-                <a:solidFill>
-                  <a:srgbClr val="1F2430"/>
-                </a:solidFill>
-                <a:latin typeface="Georgia" pitchFamily="34" charset="0"/>
-                <a:ea typeface="Georgia" pitchFamily="34" charset="-122"/>
-                <a:cs typeface="Georgia" pitchFamily="34" charset="-120"/>
-              </a:rPr>
-              <a:t>Las dos cotas se cumplen en las 20 semillas, cada una con su propio η.</a:t>
-            </a:r>
-            <a:endParaRPr lang="en-US" sz="2000" dirty="0"/>
-          </a:p>
-        </p:txBody>
-      </p:sp>
-      <p:sp>
-        <p:nvSpPr>
-          <p:cNvPr id="12" name="punto η de peor caso"/>
-          <p:cNvSpPr/>
-          <p:nvPr/>
-        </p:nvSpPr>
-        <p:spPr>
-          <a:xfrm>
-            <a:off x="7726680" y="3072384"/>
-            <a:ext cx="219456" cy="219456"/>
-          </a:xfrm>
-          <a:prstGeom prst="ellipse">
-            <a:avLst/>
-          </a:prstGeom>
-          <a:solidFill>
-            <a:srgbClr val="2A78D6"/>
-          </a:solidFill>
-          <a:ln/>
-        </p:spPr>
-      </p:sp>
-      <p:sp>
-        <p:nvSpPr>
-          <p:cNvPr id="13" name="Text 10"/>
-          <p:cNvSpPr txBox="1"/>
-          <p:nvPr/>
-        </p:nvSpPr>
-        <p:spPr>
-          <a:xfrm>
-            <a:off x="8110728" y="3017520"/>
-            <a:ext cx="3547872" cy="292608"/>
-          </a:xfrm>
-          <a:prstGeom prst="rect">
-            <a:avLst/>
-          </a:prstGeom>
-          <a:noFill/>
-          <a:ln/>
-        </p:spPr>
-        <p:txBody>
-          <a:bodyPr wrap="square" lIns="0" tIns="0" rIns="0" bIns="0" rtlCol="0" anchor="t"/>
-          <a:lstStyle/>
-          <a:p>
-            <a:pPr indent="0" marL="0">
-              <a:lnSpc>
-                <a:spcPct val="100000"/>
-              </a:lnSpc>
-              <a:buNone/>
-            </a:pPr>
-            <a:r>
-              <a:rPr lang="en-US" sz="1600" b="1" dirty="0">
-                <a:solidFill>
-                  <a:srgbClr val="1F2430"/>
+          <p:cNvPr id="20" name="Text 17"/>
+          <p:cNvSpPr txBox="1"/>
+          <p:nvPr/>
+        </p:nvSpPr>
+        <p:spPr>
+          <a:xfrm>
+            <a:off x="548640" y="6373368"/>
+            <a:ext cx="10241280" cy="274320"/>
+          </a:xfrm>
+          <a:prstGeom prst="rect">
+            <a:avLst/>
+          </a:prstGeom>
+          <a:noFill/>
+          <a:ln/>
+        </p:spPr>
+        <p:txBody>
+          <a:bodyPr wrap="square" lIns="0" tIns="0" rIns="0" bIns="0" rtlCol="0" anchor="t"/>
+          <a:lstStyle/>
+          <a:p>
+            <a:pPr indent="0" marL="0">
+              <a:lnSpc>
+                <a:spcPct val="100000"/>
+              </a:lnSpc>
+              <a:buNone/>
+            </a:pPr>
+            <a:r>
+              <a:rPr lang="en-US" sz="1000" dirty="0">
+                <a:solidFill>
+                  <a:srgbClr val="9AA1AE"/>
                 </a:solidFill>
                 <a:latin typeface="Arial" pitchFamily="34" charset="0"/>
                 <a:ea typeface="Arial" pitchFamily="34" charset="-122"/>
                 <a:cs typeface="Arial" pitchFamily="34" charset="-120"/>
               </a:rPr>
-              <a:t>η de peor caso</a:t>
-            </a:r>
-            <a:endParaRPr lang="en-US" sz="1600" dirty="0"/>
-          </a:p>
-        </p:txBody>
-      </p:sp>
-      <p:sp>
-        <p:nvSpPr>
-          <p:cNvPr id="14" name="Text 11"/>
-          <p:cNvSpPr txBox="1"/>
-          <p:nvPr/>
-        </p:nvSpPr>
-        <p:spPr>
-          <a:xfrm>
-            <a:off x="8110728" y="3346704"/>
-            <a:ext cx="3547872" cy="457200"/>
-          </a:xfrm>
-          <a:prstGeom prst="rect">
-            <a:avLst/>
-          </a:prstGeom>
-          <a:noFill/>
-          <a:ln/>
-        </p:spPr>
-        <p:txBody>
-          <a:bodyPr wrap="square" lIns="0" tIns="0" rIns="0" bIns="0" rtlCol="0" anchor="t"/>
-          <a:lstStyle/>
-          <a:p>
-            <a:pPr indent="0" marL="0">
-              <a:lnSpc>
-                <a:spcPct val="100000"/>
-              </a:lnSpc>
-              <a:buNone/>
-            </a:pPr>
-            <a:r>
-              <a:rPr lang="en-US" sz="1300" dirty="0">
-                <a:solidFill>
-                  <a:srgbClr val="5A6274"/>
-                </a:solidFill>
-                <a:latin typeface="Arial" pitchFamily="34" charset="0"/>
-                <a:ea typeface="Arial" pitchFamily="34" charset="-122"/>
-                <a:cs typeface="Arial" pitchFamily="34" charset="-120"/>
-              </a:rPr>
-              <a:t>sintonizado por T: regret 31, cota 60</a:t>
-            </a:r>
-            <a:endParaRPr lang="en-US" sz="1300" dirty="0"/>
-          </a:p>
-        </p:txBody>
-      </p:sp>
-      <p:sp>
-        <p:nvSpPr>
-          <p:cNvPr id="15" name="punto η small-loss"/>
-          <p:cNvSpPr/>
-          <p:nvPr/>
-        </p:nvSpPr>
-        <p:spPr>
-          <a:xfrm>
-            <a:off x="7726680" y="3895344"/>
-            <a:ext cx="219456" cy="219456"/>
-          </a:xfrm>
-          <a:prstGeom prst="ellipse">
-            <a:avLst/>
-          </a:prstGeom>
-          <a:solidFill>
-            <a:srgbClr val="E87BA4"/>
-          </a:solidFill>
-          <a:ln/>
-        </p:spPr>
-      </p:sp>
-      <p:sp>
-        <p:nvSpPr>
-          <p:cNvPr id="16" name="Text 13"/>
-          <p:cNvSpPr txBox="1"/>
-          <p:nvPr/>
-        </p:nvSpPr>
-        <p:spPr>
-          <a:xfrm>
-            <a:off x="8110728" y="3840480"/>
-            <a:ext cx="3547872" cy="292608"/>
-          </a:xfrm>
-          <a:prstGeom prst="rect">
-            <a:avLst/>
-          </a:prstGeom>
-          <a:noFill/>
-          <a:ln/>
-        </p:spPr>
-        <p:txBody>
-          <a:bodyPr wrap="square" lIns="0" tIns="0" rIns="0" bIns="0" rtlCol="0" anchor="t"/>
-          <a:lstStyle/>
-          <a:p>
-            <a:pPr indent="0" marL="0">
-              <a:lnSpc>
-                <a:spcPct val="100000"/>
-              </a:lnSpc>
-              <a:buNone/>
-            </a:pPr>
-            <a:r>
-              <a:rPr lang="en-US" sz="1600" b="1" dirty="0">
-                <a:solidFill>
-                  <a:srgbClr val="1F2430"/>
-                </a:solidFill>
-                <a:latin typeface="Arial" pitchFamily="34" charset="0"/>
-                <a:ea typeface="Arial" pitchFamily="34" charset="-122"/>
-                <a:cs typeface="Arial" pitchFamily="34" charset="-120"/>
-              </a:rPr>
-              <a:t>η small-loss</a:t>
-            </a:r>
-            <a:endParaRPr lang="en-US" sz="1600" dirty="0"/>
-          </a:p>
-        </p:txBody>
-      </p:sp>
-      <p:sp>
-        <p:nvSpPr>
-          <p:cNvPr id="17" name="Text 14"/>
-          <p:cNvSpPr txBox="1"/>
-          <p:nvPr/>
-        </p:nvSpPr>
-        <p:spPr>
-          <a:xfrm>
-            <a:off x="8110728" y="4169664"/>
-            <a:ext cx="3547872" cy="457200"/>
-          </a:xfrm>
-          <a:prstGeom prst="rect">
-            <a:avLst/>
-          </a:prstGeom>
-          <a:noFill/>
-          <a:ln/>
-        </p:spPr>
-        <p:txBody>
-          <a:bodyPr wrap="square" lIns="0" tIns="0" rIns="0" bIns="0" rtlCol="0" anchor="t"/>
-          <a:lstStyle/>
-          <a:p>
-            <a:pPr indent="0" marL="0">
-              <a:lnSpc>
-                <a:spcPct val="100000"/>
-              </a:lnSpc>
-              <a:buNone/>
-            </a:pPr>
-            <a:r>
-              <a:rPr lang="en-US" sz="1300" dirty="0">
-                <a:solidFill>
-                  <a:srgbClr val="5A6274"/>
-                </a:solidFill>
-                <a:latin typeface="Arial" pitchFamily="34" charset="0"/>
-                <a:ea typeface="Arial" pitchFamily="34" charset="-122"/>
-                <a:cs typeface="Arial" pitchFamily="34" charset="-120"/>
-              </a:rPr>
-              <a:t>sintonizado por la pérdida del mejor: regret 15, cota 25</a:t>
-            </a:r>
-            <a:endParaRPr lang="en-US" sz="1300" dirty="0"/>
-          </a:p>
-        </p:txBody>
-      </p:sp>
-      <p:sp>
-        <p:nvSpPr>
-          <p:cNvPr id="18" name="Shape 15"/>
-          <p:cNvSpPr/>
-          <p:nvPr/>
-        </p:nvSpPr>
-        <p:spPr>
-          <a:xfrm>
-            <a:off x="7726680" y="4709160"/>
-            <a:ext cx="3913632" cy="0"/>
-          </a:xfrm>
-          <a:prstGeom prst="line">
-            <a:avLst/>
-          </a:prstGeom>
-          <a:noFill/>
-          <a:ln w="9525">
-            <a:solidFill>
-              <a:srgbClr val="D9D6CE"/>
-            </a:solidFill>
-            <a:prstDash val="solid"/>
-          </a:ln>
-        </p:spPr>
-      </p:sp>
-      <p:sp>
-        <p:nvSpPr>
-          <p:cNvPr id="19" name="Text 16"/>
-          <p:cNvSpPr txBox="1"/>
-          <p:nvPr/>
-        </p:nvSpPr>
-        <p:spPr>
-          <a:xfrm>
-            <a:off x="7726680" y="4846320"/>
-            <a:ext cx="3931920" cy="914400"/>
-          </a:xfrm>
-          <a:prstGeom prst="rect">
-            <a:avLst/>
-          </a:prstGeom>
-          <a:noFill/>
-          <a:ln/>
-        </p:spPr>
-        <p:txBody>
-          <a:bodyPr wrap="square" lIns="0" tIns="0" rIns="0" bIns="0" rtlCol="0" anchor="t"/>
-          <a:lstStyle/>
-          <a:p>
-            <a:pPr indent="0" marL="0">
-              <a:lnSpc>
-                <a:spcPct val="100000"/>
-              </a:lnSpc>
-              <a:buNone/>
-            </a:pPr>
-            <a:r>
-              <a:rPr lang="en-US" sz="1400" dirty="0">
-                <a:solidFill>
-                  <a:srgbClr val="5A6274"/>
-                </a:solidFill>
-                <a:latin typeface="Arial" pitchFamily="34" charset="0"/>
-                <a:ea typeface="Arial" pitchFamily="34" charset="-122"/>
-                <a:cs typeface="Arial" pitchFamily="34" charset="-120"/>
-              </a:rPr>
-              <a:t>La small-loss es mejor algoritmo, pero necesita saber de antemano cuántos errores comete el mejor experto: información de oráculo.</a:t>
-            </a:r>
-            <a:endParaRPr lang="en-US" sz="1400" dirty="0"/>
-          </a:p>
-        </p:txBody>
-      </p:sp>
-      <p:sp>
-        <p:nvSpPr>
-          <p:cNvPr id="20" name="Text 17"/>
-          <p:cNvSpPr txBox="1"/>
-          <p:nvPr/>
-        </p:nvSpPr>
-        <p:spPr>
-          <a:xfrm>
-            <a:off x="548640" y="6373368"/>
-            <a:ext cx="10241280" cy="274320"/>
-          </a:xfrm>
-          <a:prstGeom prst="rect">
-            <a:avLst/>
-          </a:prstGeom>
-          <a:noFill/>
-          <a:ln/>
-        </p:spPr>
-        <p:txBody>
-          <a:bodyPr wrap="square" lIns="0" tIns="0" rIns="0" bIns="0" rtlCol="0" anchor="t"/>
-          <a:lstStyle/>
-          <a:p>
-            <a:pPr indent="0" marL="0">
-              <a:lnSpc>
-                <a:spcPct val="100000"/>
-              </a:lnSpc>
-              <a:buNone/>
-            </a:pPr>
-            <a:r>
-              <a:rPr lang="en-US" sz="1000" dirty="0">
-                <a:solidFill>
-                  <a:srgbClr val="9AA1AE"/>
-                </a:solidFill>
-                <a:latin typeface="Arial" pitchFamily="34" charset="0"/>
-                <a:ea typeface="Arial" pitchFamily="34" charset="-122"/>
-                <a:cs typeface="Arial" pitchFamily="34" charset="-120"/>
-              </a:rPr>
-              <a:t>La √(2T ln K) de la clase vale 120: correcta, pero el doble de lo necesario. Media de 20 permutaciones (semillas) del SMS Spam Collection.</a:t>
+              <a:t>Secuencia sintética de 4.000 rondas con 2 expertos. Slides 71 y 73 de la clase 2.</a:t>
             </a:r>
             <a:endParaRPr lang="en-US" sz="1000" dirty="0"/>
           </a:p>
@@ -6472,7 +8673,7 @@
                 <a:ea typeface="Arial" pitchFamily="34" charset="-122"/>
                 <a:cs typeface="Arial" pitchFamily="34" charset="-120"/>
               </a:rPr>
-              <a:t>HALLAZGO 4 · LECCIONES DE MÉTODO</a:t>
+              <a:t>HALLAZGO 3</a:t>
             </a:r>
             <a:endParaRPr lang="en-US" sz="1100" dirty="0"/>
           </a:p>
@@ -6513,7 +8714,7 @@
                 <a:ea typeface="Georgia" pitchFamily="34" charset="-122"/>
                 <a:cs typeface="Georgia" pitchFamily="34" charset="-120"/>
               </a:rPr>
-              <a:t>Tres cosas que sirven fuera de este trabajo</a:t>
+              <a:t>Cada cota vale para su tasa de aprendizaje</a:t>
             </a:r>
             <a:endParaRPr lang="en-US" sz="3000" dirty="0"/>
           </a:p>
@@ -6527,34 +8728,76 @@
         </p:nvSpPr>
         <p:spPr>
           <a:xfrm>
-            <a:off x="9235440" y="429768"/>
-            <a:ext cx="1554480" cy="201168"/>
-          </a:xfrm>
-          <a:prstGeom prst="rect">
-            <a:avLst/>
-          </a:prstGeom>
-          <a:noFill/>
-          <a:ln/>
-        </p:spPr>
-        <p:txBody>
-          <a:bodyPr wrap="square" lIns="0" tIns="0" rIns="0" bIns="0" rtlCol="0" anchor="t"/>
-          <a:lstStyle/>
-          <a:p>
-            <a:pPr algn="r" indent="0" marL="0">
-              <a:lnSpc>
-                <a:spcPct val="100000"/>
-              </a:lnSpc>
-              <a:buNone/>
-            </a:pPr>
-            <a:r>
-              <a:rPr lang="en-US" sz="900" b="1" spc="200" kern="0" dirty="0">
-                <a:solidFill>
-                  <a:srgbClr val="9AA1AE"/>
+            <a:off x="548640" y="1307592"/>
+            <a:ext cx="10424160" cy="320040"/>
+          </a:xfrm>
+          <a:prstGeom prst="rect">
+            <a:avLst/>
+          </a:prstGeom>
+          <a:noFill/>
+          <a:ln/>
+        </p:spPr>
+        <p:txBody>
+          <a:bodyPr wrap="square" lIns="0" tIns="0" rIns="0" bIns="0" rtlCol="0" anchor="t"/>
+          <a:lstStyle/>
+          <a:p>
+            <a:pPr indent="0" marL="0">
+              <a:lnSpc>
+                <a:spcPct val="100000"/>
+              </a:lnSpc>
+              <a:buNone/>
+            </a:pPr>
+            <a:r>
+              <a:rPr lang="en-US" sz="1500" dirty="0">
+                <a:solidFill>
+                  <a:srgbClr val="5A6274"/>
                 </a:solidFill>
                 <a:latin typeface="Arial" pitchFamily="34" charset="0"/>
                 <a:ea typeface="Arial" pitchFamily="34" charset="-122"/>
                 <a:cs typeface="Arial" pitchFamily="34" charset="-120"/>
               </a:rPr>
+              <a:t>Regret de Hedge en el stream atacado, con dos formas de elegir η.</a:t>
+            </a:r>
+            <a:endParaRPr lang="en-US" sz="1500" dirty="0"/>
+          </a:p>
+        </p:txBody>
+      </p:sp>
+      <p:sp>
+        <p:nvSpPr>
+          <p:cNvPr id="5" name="Text 3"/>
+          <p:cNvSpPr txBox="1"/>
+          <p:nvPr/>
+        </p:nvSpPr>
+        <p:spPr>
+          <a:xfrm>
+            <a:off x="9235440" y="429768"/>
+            <a:ext cx="1554480" cy="201168"/>
+          </a:xfrm>
+          <a:prstGeom prst="rect">
+            <a:avLst/>
+          </a:prstGeom>
+          <a:noFill/>
+          <a:ln/>
+        </p:spPr>
+        <p:txBody>
+          <a:bodyPr wrap="square" lIns="0" tIns="0" rIns="0" bIns="0" rtlCol="0" anchor="t"/>
+          <a:lstStyle/>
+          <a:p>
+            <a:pPr algn="r" indent="0" marL="0">
+              <a:lnSpc>
+                <a:spcPct val="100000"/>
+              </a:lnSpc>
+              <a:buNone/>
+            </a:pPr>
+            <a:r>
+              <a:rPr lang="en-US" sz="900" b="1" spc="200" kern="0" dirty="0">
+                <a:solidFill>
+                  <a:srgbClr val="9AA1AE"/>
+                </a:solidFill>
+                <a:latin typeface="Arial" pitchFamily="34" charset="0"/>
+                <a:ea typeface="Arial" pitchFamily="34" charset="-122"/>
+                <a:cs typeface="Arial" pitchFamily="34" charset="-120"/>
+              </a:rPr>
               <a:t>HALLAZGOS</a:t>
             </a:r>
             <a:endParaRPr lang="en-US" sz="900" dirty="0"/>
@@ -6563,7 +8806,7 @@
       </p:sp>
       <p:sp>
         <p:nvSpPr>
-          <p:cNvPr id="5" name="hallazgo 1"/>
+          <p:cNvPr id="6" name="hallazgo 1"/>
           <p:cNvSpPr/>
           <p:nvPr/>
         </p:nvSpPr>
@@ -6585,7 +8828,7 @@
       </p:sp>
       <p:sp>
         <p:nvSpPr>
-          <p:cNvPr id="6" name="hallazgo 2"/>
+          <p:cNvPr id="7" name="hallazgo 2"/>
           <p:cNvSpPr/>
           <p:nvPr/>
         </p:nvSpPr>
@@ -6607,13 +8850,33 @@
       </p:sp>
       <p:sp>
         <p:nvSpPr>
-          <p:cNvPr id="7" name="hallazgo 3"/>
+          <p:cNvPr id="8" name="hallazgo 3 (actual)"/>
           <p:cNvSpPr/>
           <p:nvPr/>
         </p:nvSpPr>
         <p:spPr>
           <a:xfrm>
             <a:off x="11301984" y="457200"/>
+            <a:ext cx="137160" cy="137160"/>
+          </a:xfrm>
+          <a:prstGeom prst="ellipse">
+            <a:avLst/>
+          </a:prstGeom>
+          <a:solidFill>
+            <a:srgbClr val="1F2430"/>
+          </a:solidFill>
+          <a:ln/>
+        </p:spPr>
+      </p:sp>
+      <p:sp>
+        <p:nvSpPr>
+          <p:cNvPr id="9" name="hallazgo 4"/>
+          <p:cNvSpPr/>
+          <p:nvPr/>
+        </p:nvSpPr>
+        <p:spPr>
+          <a:xfrm>
+            <a:off x="11503152" y="457200"/>
             <a:ext cx="137160" cy="137160"/>
           </a:xfrm>
           <a:prstGeom prst="ellipse">
@@ -6627,55 +8890,121 @@
           </a:ln>
         </p:spPr>
       </p:sp>
-      <p:sp>
-        <p:nvSpPr>
-          <p:cNvPr id="8" name="hallazgo 4 (actual)"/>
-          <p:cNvSpPr/>
-          <p:nvPr/>
-        </p:nvSpPr>
-        <p:spPr>
-          <a:xfrm>
-            <a:off x="11503152" y="457200"/>
-            <a:ext cx="137160" cy="137160"/>
+      <p:pic>
+        <p:nvPicPr>
+          <p:cNvPr id="10" name="Image 0" descr="Regret de Hedge con eta de peor caso: 31, bajo su cota de 60. Con eta small-loss: 15, bajo su cota de 25.">    </p:cNvPr>
+          <p:cNvPicPr>
+            <a:picLocks noChangeAspect="1"/>
+          </p:cNvPicPr>
+          <p:nvPr/>
+        </p:nvPicPr>
+        <p:blipFill>
+          <a:blip r:embed="rId1"/>
+          <a:stretch>
+            <a:fillRect/>
+          </a:stretch>
+        </p:blipFill>
+        <p:spPr>
+          <a:xfrm>
+            <a:off x="411480" y="1783080"/>
+            <a:ext cx="6495445" cy="4434840"/>
+          </a:xfrm>
+          <a:prstGeom prst="rect">
+            <a:avLst/>
+          </a:prstGeom>
+        </p:spPr>
+      </p:pic>
+      <p:sp>
+        <p:nvSpPr>
+          <p:cNvPr id="11" name="Text 8"/>
+          <p:cNvSpPr txBox="1"/>
+          <p:nvPr/>
+        </p:nvSpPr>
+        <p:spPr>
+          <a:xfrm>
+            <a:off x="7726680" y="1920240"/>
+            <a:ext cx="3931920" cy="868680"/>
+          </a:xfrm>
+          <a:prstGeom prst="rect">
+            <a:avLst/>
+          </a:prstGeom>
+          <a:noFill/>
+          <a:ln/>
+        </p:spPr>
+        <p:txBody>
+          <a:bodyPr wrap="square" lIns="0" tIns="0" rIns="0" bIns="0" rtlCol="0" anchor="t"/>
+          <a:lstStyle/>
+          <a:p>
+            <a:pPr indent="0" marL="0">
+              <a:lnSpc>
+                <a:spcPct val="100000"/>
+              </a:lnSpc>
+              <a:buNone/>
+            </a:pPr>
+            <a:r>
+              <a:rPr lang="en-US" sz="2000" dirty="0">
+                <a:solidFill>
+                  <a:srgbClr val="1F2430"/>
+                </a:solidFill>
+                <a:latin typeface="Georgia" pitchFamily="34" charset="0"/>
+                <a:ea typeface="Georgia" pitchFamily="34" charset="-122"/>
+                <a:cs typeface="Georgia" pitchFamily="34" charset="-120"/>
+              </a:rPr>
+              <a:t>Las dos cotas se cumplen en las 20 semillas, cada una con su propio η.</a:t>
+            </a:r>
+            <a:endParaRPr lang="en-US" sz="2000" dirty="0"/>
+          </a:p>
+        </p:txBody>
+      </p:sp>
+      <p:sp>
+        <p:nvSpPr>
+          <p:cNvPr id="12" name="punto η de peor caso"/>
+          <p:cNvSpPr/>
+          <p:nvPr/>
+        </p:nvSpPr>
+        <p:spPr>
+          <a:xfrm>
+            <a:off x="7726680" y="3072384"/>
+            <a:ext cx="219456" cy="219456"/>
           </a:xfrm>
           <a:prstGeom prst="ellipse">
             <a:avLst/>
           </a:prstGeom>
           <a:solidFill>
-            <a:srgbClr val="1F2430"/>
+            <a:srgbClr val="2A78D6"/>
           </a:solidFill>
           <a:ln/>
         </p:spPr>
       </p:sp>
       <p:sp>
         <p:nvSpPr>
-          <p:cNvPr id="9" name="Text 7"/>
-          <p:cNvSpPr txBox="1"/>
-          <p:nvPr/>
-        </p:nvSpPr>
-        <p:spPr>
-          <a:xfrm>
-            <a:off x="548640" y="1783080"/>
-            <a:ext cx="3474720" cy="914400"/>
-          </a:xfrm>
-          <a:prstGeom prst="rect">
-            <a:avLst/>
-          </a:prstGeom>
-          <a:noFill/>
-          <a:ln/>
-        </p:spPr>
-        <p:txBody>
-          <a:bodyPr wrap="square" lIns="0" tIns="0" rIns="0" bIns="0" rtlCol="0" anchor="t"/>
-          <a:lstStyle/>
-          <a:p>
-            <a:pPr indent="0" marL="0">
-              <a:lnSpc>
-                <a:spcPct val="100000"/>
-              </a:lnSpc>
-              <a:buNone/>
-            </a:pPr>
-            <a:r>
-              <a:rPr lang="en-US" sz="5400" b="1" dirty="0">
+          <p:cNvPr id="13" name="Text 10"/>
+          <p:cNvSpPr txBox="1"/>
+          <p:nvPr/>
+        </p:nvSpPr>
+        <p:spPr>
+          <a:xfrm>
+            <a:off x="8110728" y="3017520"/>
+            <a:ext cx="3547872" cy="292608"/>
+          </a:xfrm>
+          <a:prstGeom prst="rect">
+            <a:avLst/>
+          </a:prstGeom>
+          <a:noFill/>
+          <a:ln/>
+        </p:spPr>
+        <p:txBody>
+          <a:bodyPr wrap="square" lIns="0" tIns="0" rIns="0" bIns="0" rtlCol="0" anchor="t"/>
+          <a:lstStyle/>
+          <a:p>
+            <a:pPr indent="0" marL="0">
+              <a:lnSpc>
+                <a:spcPct val="100000"/>
+              </a:lnSpc>
+              <a:buNone/>
+            </a:pPr>
+            <a:r>
+              <a:rPr lang="en-US" sz="1600" b="1" dirty="0">
                 <a:solidFill>
                   <a:srgbClr val="1F2430"/>
                 </a:solidFill>
@@ -6683,106 +9012,168 @@
                 <a:ea typeface="Arial" pitchFamily="34" charset="-122"/>
                 <a:cs typeface="Arial" pitchFamily="34" charset="-120"/>
               </a:rPr>
-              <a:t>87%</a:t>
-            </a:r>
-            <a:endParaRPr lang="en-US" sz="5400" dirty="0"/>
-          </a:p>
-        </p:txBody>
-      </p:sp>
-      <p:sp>
-        <p:nvSpPr>
-          <p:cNvPr id="10" name="Text 8"/>
-          <p:cNvSpPr txBox="1"/>
-          <p:nvPr/>
-        </p:nvSpPr>
-        <p:spPr>
-          <a:xfrm>
-            <a:off x="548640" y="2880360"/>
-            <a:ext cx="3429000" cy="868680"/>
-          </a:xfrm>
-          <a:prstGeom prst="rect">
-            <a:avLst/>
-          </a:prstGeom>
-          <a:noFill/>
-          <a:ln/>
-        </p:spPr>
-        <p:txBody>
-          <a:bodyPr wrap="square" lIns="0" tIns="0" rIns="0" bIns="0" rtlCol="0" anchor="t"/>
-          <a:lstStyle/>
-          <a:p>
-            <a:pPr indent="0" marL="0">
-              <a:lnSpc>
-                <a:spcPct val="100000"/>
-              </a:lnSpc>
-              <a:buNone/>
-            </a:pPr>
-            <a:r>
-              <a:rPr lang="en-US" sz="1900" b="1" dirty="0">
-                <a:solidFill>
-                  <a:srgbClr val="1F2430"/>
+              <a:t>η de peor caso</a:t>
+            </a:r>
+            <a:endParaRPr lang="en-US" sz="1600" dirty="0"/>
+          </a:p>
+        </p:txBody>
+      </p:sp>
+      <p:sp>
+        <p:nvSpPr>
+          <p:cNvPr id="14" name="Text 11"/>
+          <p:cNvSpPr txBox="1"/>
+          <p:nvPr/>
+        </p:nvSpPr>
+        <p:spPr>
+          <a:xfrm>
+            <a:off x="8110728" y="3346704"/>
+            <a:ext cx="3547872" cy="457200"/>
+          </a:xfrm>
+          <a:prstGeom prst="rect">
+            <a:avLst/>
+          </a:prstGeom>
+          <a:noFill/>
+          <a:ln/>
+        </p:spPr>
+        <p:txBody>
+          <a:bodyPr wrap="square" lIns="0" tIns="0" rIns="0" bIns="0" rtlCol="0" anchor="t"/>
+          <a:lstStyle/>
+          <a:p>
+            <a:pPr indent="0" marL="0">
+              <a:lnSpc>
+                <a:spcPct val="100000"/>
+              </a:lnSpc>
+              <a:buNone/>
+            </a:pPr>
+            <a:r>
+              <a:rPr lang="en-US" sz="1300" dirty="0">
+                <a:solidFill>
+                  <a:srgbClr val="5A6274"/>
                 </a:solidFill>
                 <a:latin typeface="Arial" pitchFamily="34" charset="0"/>
                 <a:ea typeface="Arial" pitchFamily="34" charset="-122"/>
                 <a:cs typeface="Arial" pitchFamily="34" charset="-120"/>
               </a:rPr>
-              <a:t>La accuracy engaña</a:t>
-            </a:r>
-            <a:endParaRPr lang="en-US" sz="1900" dirty="0"/>
-          </a:p>
-        </p:txBody>
-      </p:sp>
-      <p:sp>
-        <p:nvSpPr>
-          <p:cNvPr id="11" name="Text 9"/>
-          <p:cNvSpPr txBox="1"/>
-          <p:nvPr/>
-        </p:nvSpPr>
-        <p:spPr>
-          <a:xfrm>
-            <a:off x="548640" y="3840480"/>
-            <a:ext cx="3429000" cy="1828800"/>
-          </a:xfrm>
-          <a:prstGeom prst="rect">
-            <a:avLst/>
-          </a:prstGeom>
-          <a:noFill/>
-          <a:ln/>
-        </p:spPr>
-        <p:txBody>
-          <a:bodyPr wrap="square" lIns="0" tIns="0" rIns="0" bIns="0" rtlCol="0" anchor="t"/>
-          <a:lstStyle/>
-          <a:p>
-            <a:pPr indent="0" marL="0">
-              <a:lnSpc>
-                <a:spcPct val="100000"/>
-              </a:lnSpc>
-              <a:buNone/>
-            </a:pPr>
-            <a:r>
-              <a:rPr lang="en-US" sz="1500" dirty="0">
-                <a:solidFill>
-                  <a:srgbClr val="5A6274"/>
+              <a:t>sintonizado por T: regret 31, cota 60</a:t>
+            </a:r>
+            <a:endParaRPr lang="en-US" sz="1300" dirty="0"/>
+          </a:p>
+        </p:txBody>
+      </p:sp>
+      <p:sp>
+        <p:nvSpPr>
+          <p:cNvPr id="15" name="punto η small-loss"/>
+          <p:cNvSpPr/>
+          <p:nvPr/>
+        </p:nvSpPr>
+        <p:spPr>
+          <a:xfrm>
+            <a:off x="7726680" y="3895344"/>
+            <a:ext cx="219456" cy="219456"/>
+          </a:xfrm>
+          <a:prstGeom prst="ellipse">
+            <a:avLst/>
+          </a:prstGeom>
+          <a:solidFill>
+            <a:srgbClr val="E87BA4"/>
+          </a:solidFill>
+          <a:ln/>
+        </p:spPr>
+      </p:sp>
+      <p:sp>
+        <p:nvSpPr>
+          <p:cNvPr id="16" name="Text 13"/>
+          <p:cNvSpPr txBox="1"/>
+          <p:nvPr/>
+        </p:nvSpPr>
+        <p:spPr>
+          <a:xfrm>
+            <a:off x="8110728" y="3840480"/>
+            <a:ext cx="3547872" cy="292608"/>
+          </a:xfrm>
+          <a:prstGeom prst="rect">
+            <a:avLst/>
+          </a:prstGeom>
+          <a:noFill/>
+          <a:ln/>
+        </p:spPr>
+        <p:txBody>
+          <a:bodyPr wrap="square" lIns="0" tIns="0" rIns="0" bIns="0" rtlCol="0" anchor="t"/>
+          <a:lstStyle/>
+          <a:p>
+            <a:pPr indent="0" marL="0">
+              <a:lnSpc>
+                <a:spcPct val="100000"/>
+              </a:lnSpc>
+              <a:buNone/>
+            </a:pPr>
+            <a:r>
+              <a:rPr lang="en-US" sz="1600" b="1" dirty="0">
+                <a:solidFill>
+                  <a:srgbClr val="1F2430"/>
                 </a:solidFill>
                 <a:latin typeface="Arial" pitchFamily="34" charset="0"/>
                 <a:ea typeface="Arial" pitchFamily="34" charset="-122"/>
                 <a:cs typeface="Arial" pitchFamily="34" charset="-120"/>
               </a:rPr>
-              <a:t>Con 13% de spam, no marcar nada acierta el 87%. Medimos spam atrapado, legítimo bloqueado y MCC.</a:t>
-            </a:r>
-            <a:endParaRPr lang="en-US" sz="1500" dirty="0"/>
-          </a:p>
-        </p:txBody>
-      </p:sp>
-      <p:sp>
-        <p:nvSpPr>
-          <p:cNvPr id="12" name="Shape 10"/>
-          <p:cNvSpPr/>
-          <p:nvPr/>
-        </p:nvSpPr>
-        <p:spPr>
-          <a:xfrm>
-            <a:off x="4142232" y="1828800"/>
-            <a:ext cx="0" cy="4023360"/>
+              <a:t>η small-loss</a:t>
+            </a:r>
+            <a:endParaRPr lang="en-US" sz="1600" dirty="0"/>
+          </a:p>
+        </p:txBody>
+      </p:sp>
+      <p:sp>
+        <p:nvSpPr>
+          <p:cNvPr id="17" name="Text 14"/>
+          <p:cNvSpPr txBox="1"/>
+          <p:nvPr/>
+        </p:nvSpPr>
+        <p:spPr>
+          <a:xfrm>
+            <a:off x="8110728" y="4169664"/>
+            <a:ext cx="3547872" cy="457200"/>
+          </a:xfrm>
+          <a:prstGeom prst="rect">
+            <a:avLst/>
+          </a:prstGeom>
+          <a:noFill/>
+          <a:ln/>
+        </p:spPr>
+        <p:txBody>
+          <a:bodyPr wrap="square" lIns="0" tIns="0" rIns="0" bIns="0" rtlCol="0" anchor="t"/>
+          <a:lstStyle/>
+          <a:p>
+            <a:pPr indent="0" marL="0">
+              <a:lnSpc>
+                <a:spcPct val="100000"/>
+              </a:lnSpc>
+              <a:buNone/>
+            </a:pPr>
+            <a:r>
+              <a:rPr lang="en-US" sz="1300" dirty="0">
+                <a:solidFill>
+                  <a:srgbClr val="5A6274"/>
+                </a:solidFill>
+                <a:latin typeface="Arial" pitchFamily="34" charset="0"/>
+                <a:ea typeface="Arial" pitchFamily="34" charset="-122"/>
+                <a:cs typeface="Arial" pitchFamily="34" charset="-120"/>
+              </a:rPr>
+              <a:t>sintonizado por la pérdida del mejor: regret 15, cota 25</a:t>
+            </a:r>
+            <a:endParaRPr lang="en-US" sz="1300" dirty="0"/>
+          </a:p>
+        </p:txBody>
+      </p:sp>
+      <p:sp>
+        <p:nvSpPr>
+          <p:cNvPr id="18" name="Shape 15"/>
+          <p:cNvSpPr/>
+          <p:nvPr/>
+        </p:nvSpPr>
+        <p:spPr>
+          <a:xfrm>
+            <a:off x="7726680" y="4709160"/>
+            <a:ext cx="3913632" cy="0"/>
           </a:xfrm>
           <a:prstGeom prst="line">
             <a:avLst/>
@@ -6798,316 +9189,83 @@
       </p:sp>
       <p:sp>
         <p:nvSpPr>
-          <p:cNvPr id="13" name="Text 11"/>
-          <p:cNvSpPr txBox="1"/>
-          <p:nvPr/>
-        </p:nvSpPr>
-        <p:spPr>
-          <a:xfrm>
-            <a:off x="4370832" y="1783080"/>
-            <a:ext cx="3474720" cy="914400"/>
-          </a:xfrm>
-          <a:prstGeom prst="rect">
-            <a:avLst/>
-          </a:prstGeom>
-          <a:noFill/>
-          <a:ln/>
-        </p:spPr>
-        <p:txBody>
-          <a:bodyPr wrap="square" lIns="0" tIns="0" rIns="0" bIns="0" rtlCol="0" anchor="t"/>
-          <a:lstStyle/>
-          <a:p>
-            <a:pPr indent="0" marL="0">
-              <a:lnSpc>
-                <a:spcPct val="100000"/>
-              </a:lnSpc>
-              <a:buNone/>
-            </a:pPr>
-            <a:r>
-              <a:rPr lang="en-US" sz="5400" b="1" dirty="0">
-                <a:solidFill>
-                  <a:srgbClr val="1BAF7A"/>
+          <p:cNvPr id="19" name="Text 16"/>
+          <p:cNvSpPr txBox="1"/>
+          <p:nvPr/>
+        </p:nvSpPr>
+        <p:spPr>
+          <a:xfrm>
+            <a:off x="7726680" y="4846320"/>
+            <a:ext cx="3931920" cy="914400"/>
+          </a:xfrm>
+          <a:prstGeom prst="rect">
+            <a:avLst/>
+          </a:prstGeom>
+          <a:noFill/>
+          <a:ln/>
+        </p:spPr>
+        <p:txBody>
+          <a:bodyPr wrap="square" lIns="0" tIns="0" rIns="0" bIns="0" rtlCol="0" anchor="t"/>
+          <a:lstStyle/>
+          <a:p>
+            <a:pPr indent="0" marL="0">
+              <a:lnSpc>
+                <a:spcPct val="100000"/>
+              </a:lnSpc>
+              <a:buNone/>
+            </a:pPr>
+            <a:r>
+              <a:rPr lang="en-US" sz="1400" dirty="0">
+                <a:solidFill>
+                  <a:srgbClr val="5A6274"/>
                 </a:solidFill>
                 <a:latin typeface="Arial" pitchFamily="34" charset="0"/>
                 <a:ea typeface="Arial" pitchFamily="34" charset="-122"/>
                 <a:cs typeface="Arial" pitchFamily="34" charset="-120"/>
               </a:rPr>
-              <a:t>8 de 20</a:t>
-            </a:r>
-            <a:endParaRPr lang="en-US" sz="5400" dirty="0"/>
-          </a:p>
-        </p:txBody>
-      </p:sp>
-      <p:sp>
-        <p:nvSpPr>
-          <p:cNvPr id="14" name="Text 12"/>
-          <p:cNvSpPr txBox="1"/>
-          <p:nvPr/>
-        </p:nvSpPr>
-        <p:spPr>
-          <a:xfrm>
-            <a:off x="4370832" y="2880360"/>
-            <a:ext cx="3429000" cy="868680"/>
-          </a:xfrm>
-          <a:prstGeom prst="rect">
-            <a:avLst/>
-          </a:prstGeom>
-          <a:noFill/>
-          <a:ln/>
-        </p:spPr>
-        <p:txBody>
-          <a:bodyPr wrap="square" lIns="0" tIns="0" rIns="0" bIns="0" rtlCol="0" anchor="t"/>
-          <a:lstStyle/>
-          <a:p>
-            <a:pPr indent="0" marL="0">
-              <a:lnSpc>
-                <a:spcPct val="100000"/>
-              </a:lnSpc>
-              <a:buNone/>
-            </a:pPr>
-            <a:r>
-              <a:rPr lang="en-US" sz="1900" b="1" dirty="0">
-                <a:solidFill>
-                  <a:srgbClr val="1F2430"/>
+              <a:t>La small-loss es mejor algoritmo, pero necesita saber de antemano cuántos errores comete el mejor experto: información de oráculo.</a:t>
+            </a:r>
+            <a:endParaRPr lang="en-US" sz="1400" dirty="0"/>
+          </a:p>
+        </p:txBody>
+      </p:sp>
+      <p:sp>
+        <p:nvSpPr>
+          <p:cNvPr id="20" name="Text 17"/>
+          <p:cNvSpPr txBox="1"/>
+          <p:nvPr/>
+        </p:nvSpPr>
+        <p:spPr>
+          <a:xfrm>
+            <a:off x="548640" y="6373368"/>
+            <a:ext cx="10241280" cy="274320"/>
+          </a:xfrm>
+          <a:prstGeom prst="rect">
+            <a:avLst/>
+          </a:prstGeom>
+          <a:noFill/>
+          <a:ln/>
+        </p:spPr>
+        <p:txBody>
+          <a:bodyPr wrap="square" lIns="0" tIns="0" rIns="0" bIns="0" rtlCol="0" anchor="t"/>
+          <a:lstStyle/>
+          <a:p>
+            <a:pPr indent="0" marL="0">
+              <a:lnSpc>
+                <a:spcPct val="100000"/>
+              </a:lnSpc>
+              <a:buNone/>
+            </a:pPr>
+            <a:r>
+              <a:rPr lang="en-US" sz="1000" dirty="0">
+                <a:solidFill>
+                  <a:srgbClr val="9AA1AE"/>
                 </a:solidFill>
                 <a:latin typeface="Arial" pitchFamily="34" charset="0"/>
                 <a:ea typeface="Arial" pitchFamily="34" charset="-122"/>
                 <a:cs typeface="Arial" pitchFamily="34" charset="-120"/>
               </a:rPr>
-              <a:t>La validación cruzada no mide adaptación</a:t>
-            </a:r>
-            <a:endParaRPr lang="en-US" sz="1900" dirty="0"/>
-          </a:p>
-        </p:txBody>
-      </p:sp>
-      <p:sp>
-        <p:nvSpPr>
-          <p:cNvPr id="15" name="Text 13"/>
-          <p:cNvSpPr txBox="1"/>
-          <p:nvPr/>
-        </p:nvSpPr>
-        <p:spPr>
-          <a:xfrm>
-            <a:off x="4370832" y="3840480"/>
-            <a:ext cx="3429000" cy="1828800"/>
-          </a:xfrm>
-          <a:prstGeom prst="rect">
-            <a:avLst/>
-          </a:prstGeom>
-          <a:noFill/>
-          <a:ln/>
-        </p:spPr>
-        <p:txBody>
-          <a:bodyPr wrap="square" lIns="0" tIns="0" rIns="0" bIns="0" rtlCol="0" anchor="t"/>
-          <a:lstStyle/>
-          <a:p>
-            <a:pPr indent="0" marL="0">
-              <a:lnSpc>
-                <a:spcPct val="100000"/>
-              </a:lnSpc>
-              <a:buNone/>
-            </a:pPr>
-            <a:r>
-              <a:rPr lang="en-US" sz="1500" dirty="0">
-                <a:solidFill>
-                  <a:srgbClr val="5A6274"/>
-                </a:solidFill>
-                <a:latin typeface="Arial" pitchFamily="34" charset="0"/>
-                <a:ea typeface="Arial" pitchFamily="34" charset="-122"/>
-                <a:cs typeface="Arial" pitchFamily="34" charset="-120"/>
-              </a:rPr>
-              <a:t>Sin ataque en el warm-up, eligió mal la regularización de SGD en 8 de 20 semillas: 125 a 153 errores, contra 65 a 83.</a:t>
-            </a:r>
-            <a:endParaRPr lang="en-US" sz="1500" dirty="0"/>
-          </a:p>
-        </p:txBody>
-      </p:sp>
-      <p:sp>
-        <p:nvSpPr>
-          <p:cNvPr id="16" name="Shape 14"/>
-          <p:cNvSpPr/>
-          <p:nvPr/>
-        </p:nvSpPr>
-        <p:spPr>
-          <a:xfrm>
-            <a:off x="7964424" y="1828800"/>
-            <a:ext cx="0" cy="4023360"/>
-          </a:xfrm>
-          <a:prstGeom prst="line">
-            <a:avLst/>
-          </a:prstGeom>
-          <a:noFill/>
-          <a:ln w="9525">
-            <a:solidFill>
-              <a:srgbClr val="D9D6CE"/>
-            </a:solidFill>
-            <a:prstDash val="solid"/>
-          </a:ln>
-        </p:spPr>
-      </p:sp>
-      <p:sp>
-        <p:nvSpPr>
-          <p:cNvPr id="17" name="Text 15"/>
-          <p:cNvSpPr txBox="1"/>
-          <p:nvPr/>
-        </p:nvSpPr>
-        <p:spPr>
-          <a:xfrm>
-            <a:off x="8193024" y="1783080"/>
-            <a:ext cx="3474720" cy="914400"/>
-          </a:xfrm>
-          <a:prstGeom prst="rect">
-            <a:avLst/>
-          </a:prstGeom>
-          <a:noFill/>
-          <a:ln/>
-        </p:spPr>
-        <p:txBody>
-          <a:bodyPr wrap="square" lIns="0" tIns="0" rIns="0" bIns="0" rtlCol="0" anchor="t"/>
-          <a:lstStyle/>
-          <a:p>
-            <a:pPr indent="0" marL="0">
-              <a:lnSpc>
-                <a:spcPct val="100000"/>
-              </a:lnSpc>
-              <a:buNone/>
-            </a:pPr>
-            <a:r>
-              <a:rPr lang="en-US" sz="5400" b="1" dirty="0">
-                <a:solidFill>
-                  <a:srgbClr val="EB6834"/>
-                </a:solidFill>
-                <a:latin typeface="Arial" pitchFamily="34" charset="0"/>
-                <a:ea typeface="Arial" pitchFamily="34" charset="-122"/>
-                <a:cs typeface="Arial" pitchFamily="34" charset="-120"/>
-              </a:rPr>
-              <a:t>0,995</a:t>
-            </a:r>
-            <a:endParaRPr lang="en-US" sz="5400" dirty="0"/>
-          </a:p>
-        </p:txBody>
-      </p:sp>
-      <p:sp>
-        <p:nvSpPr>
-          <p:cNvPr id="18" name="Text 16"/>
-          <p:cNvSpPr txBox="1"/>
-          <p:nvPr/>
-        </p:nvSpPr>
-        <p:spPr>
-          <a:xfrm>
-            <a:off x="8193024" y="2880360"/>
-            <a:ext cx="3429000" cy="868680"/>
-          </a:xfrm>
-          <a:prstGeom prst="rect">
-            <a:avLst/>
-          </a:prstGeom>
-          <a:noFill/>
-          <a:ln/>
-        </p:spPr>
-        <p:txBody>
-          <a:bodyPr wrap="square" lIns="0" tIns="0" rIns="0" bIns="0" rtlCol="0" anchor="t"/>
-          <a:lstStyle/>
-          <a:p>
-            <a:pPr indent="0" marL="0">
-              <a:lnSpc>
-                <a:spcPct val="100000"/>
-              </a:lnSpc>
-              <a:buNone/>
-            </a:pPr>
-            <a:r>
-              <a:rPr lang="en-US" sz="1900" b="1" dirty="0">
-                <a:solidFill>
-                  <a:srgbClr val="1F2430"/>
-                </a:solidFill>
-                <a:latin typeface="Arial" pitchFamily="34" charset="0"/>
-                <a:ea typeface="Arial" pitchFamily="34" charset="-122"/>
-                <a:cs typeface="Arial" pitchFamily="34" charset="-120"/>
-              </a:rPr>
-              <a:t>Combinar necesita un experto que sobreviva</a:t>
-            </a:r>
-            <a:endParaRPr lang="en-US" sz="1900" dirty="0"/>
-          </a:p>
-        </p:txBody>
-      </p:sp>
-      <p:sp>
-        <p:nvSpPr>
-          <p:cNvPr id="19" name="Text 17"/>
-          <p:cNvSpPr txBox="1"/>
-          <p:nvPr/>
-        </p:nvSpPr>
-        <p:spPr>
-          <a:xfrm>
-            <a:off x="8193024" y="3840480"/>
-            <a:ext cx="3429000" cy="1828800"/>
-          </a:xfrm>
-          <a:prstGeom prst="rect">
-            <a:avLst/>
-          </a:prstGeom>
-          <a:noFill/>
-          <a:ln/>
-        </p:spPr>
-        <p:txBody>
-          <a:bodyPr wrap="square" lIns="0" tIns="0" rIns="0" bIns="0" rtlCol="0" anchor="t"/>
-          <a:lstStyle/>
-          <a:p>
-            <a:pPr indent="0" marL="0">
-              <a:lnSpc>
-                <a:spcPct val="100000"/>
-              </a:lnSpc>
-              <a:buNone/>
-            </a:pPr>
-            <a:r>
-              <a:rPr lang="en-US" sz="1500" dirty="0">
-                <a:solidFill>
-                  <a:srgbClr val="5A6274"/>
-                </a:solidFill>
-                <a:latin typeface="Arial" pitchFamily="34" charset="0"/>
-                <a:ea typeface="Arial" pitchFamily="34" charset="-122"/>
-                <a:cs typeface="Arial" pitchFamily="34" charset="-120"/>
-              </a:rPr>
-              <a:t>Si ningún experto resiste el ataque, Hedge deja 0,995 del peso en el modelo dañado y no recupera nada.</a:t>
-            </a:r>
-            <a:endParaRPr lang="en-US" sz="1500" dirty="0"/>
-          </a:p>
-        </p:txBody>
-      </p:sp>
-      <p:sp>
-        <p:nvSpPr>
-          <p:cNvPr id="20" name="Text 18"/>
-          <p:cNvSpPr txBox="1"/>
-          <p:nvPr/>
-        </p:nvSpPr>
-        <p:spPr>
-          <a:xfrm>
-            <a:off x="548640" y="6373368"/>
-            <a:ext cx="10241280" cy="274320"/>
-          </a:xfrm>
-          <a:prstGeom prst="rect">
-            <a:avLst/>
-          </a:prstGeom>
-          <a:noFill/>
-          <a:ln/>
-        </p:spPr>
-        <p:txBody>
-          <a:bodyPr wrap="square" lIns="0" tIns="0" rIns="0" bIns="0" rtlCol="0" anchor="t"/>
-          <a:lstStyle/>
-          <a:p>
-            <a:pPr indent="0" marL="0">
-              <a:lnSpc>
-                <a:spcPct val="100000"/>
-              </a:lnSpc>
-              <a:buNone/>
-            </a:pPr>
-            <a:r>
-              <a:rPr lang="en-US" sz="1000" dirty="0">
-                <a:solidFill>
-                  <a:srgbClr val="9AA1AE"/>
-                </a:solidFill>
-                <a:latin typeface="Arial" pitchFamily="34" charset="0"/>
-                <a:ea typeface="Arial" pitchFamily="34" charset="-122"/>
-                <a:cs typeface="Arial" pitchFamily="34" charset="-120"/>
-              </a:rPr>
-              <a:t>El 0,995 es de la primera versión del experto estructural, con 5 rasgos, en la semilla de desarrollo.</a:t>
+              <a:t>La √(2T ln K) de la clase vale 120: correcta, pero el doble de lo necesario. Media de 20 permutaciones (semillas) del SMS Spam Collection.</a:t>
             </a:r>
             <a:endParaRPr lang="en-US" sz="1000" dirty="0"/>
           </a:p>
@@ -7219,13 +9377,13 @@
             <a:r>
               <a:rPr lang="en-US" sz="1100" b="1" spc="200" kern="0" dirty="0">
                 <a:solidFill>
-                  <a:srgbClr val="9AA1AE"/>
+                  <a:srgbClr val="5A6274"/>
                 </a:solidFill>
                 <a:latin typeface="Arial" pitchFamily="34" charset="0"/>
                 <a:ea typeface="Arial" pitchFamily="34" charset="-122"/>
                 <a:cs typeface="Arial" pitchFamily="34" charset="-120"/>
               </a:rPr>
-              <a:t>EN RESUMEN</a:t>
+              <a:t>HALLAZGO 4 · LECCIONES DE MÉTODO</a:t>
             </a:r>
             <a:endParaRPr lang="en-US" sz="1100" dirty="0"/>
           </a:p>
@@ -7233,64 +9391,104 @@
       </p:sp>
       <p:sp>
         <p:nvSpPr>
-          <p:cNvPr id="3" name="Text 1"/>
-          <p:cNvSpPr txBox="1"/>
-          <p:nvPr/>
+          <p:cNvPr id="3" name="Text 0"/>
+          <p:cNvSpPr/>
+          <p:nvPr>
+            <p:ph idx="100" type="title" hasCustomPrompt="1"/>
+          </p:nvPr>
         </p:nvSpPr>
         <p:spPr>
           <a:xfrm>
             <a:off x="548640" y="731520"/>
-            <a:ext cx="10972800" cy="640080"/>
-          </a:xfrm>
-          <a:prstGeom prst="rect">
-            <a:avLst/>
-          </a:prstGeom>
-          <a:noFill/>
-          <a:ln/>
-        </p:spPr>
-        <p:txBody>
-          <a:bodyPr wrap="square" lIns="0" tIns="0" rIns="0" bIns="0" rtlCol="0" anchor="t"/>
-          <a:lstStyle/>
-          <a:p>
-            <a:pPr indent="0" marL="0">
-              <a:lnSpc>
-                <a:spcPct val="100000"/>
-              </a:lnSpc>
-              <a:buNone/>
-            </a:pPr>
-            <a:r>
-              <a:rPr lang="en-US" sz="3400" dirty="0">
-                <a:solidFill>
-                  <a:srgbClr val="FFFFFF"/>
+            <a:ext cx="10424160" cy="566928"/>
+          </a:xfrm>
+          <a:prstGeom prst="rect">
+            <a:avLst/>
+          </a:prstGeom>
+          <a:noFill/>
+          <a:ln/>
+        </p:spPr>
+        <p:txBody>
+          <a:bodyPr wrap="square" lIns="0" tIns="0" rIns="0" bIns="0" rtlCol="0" anchor="t"/>
+          <a:lstStyle/>
+          <a:p>
+            <a:pPr indent="0" marL="0">
+              <a:buNone/>
+            </a:pPr>
+            <a:r>
+              <a:rPr lang="en-US" sz="3000" dirty="0">
+                <a:solidFill>
+                  <a:srgbClr val="1F2430"/>
                 </a:solidFill>
                 <a:latin typeface="Georgia" pitchFamily="34" charset="0"/>
                 <a:ea typeface="Georgia" pitchFamily="34" charset="-122"/>
                 <a:cs typeface="Georgia" pitchFamily="34" charset="-120"/>
               </a:rPr>
-              <a:t>Cuándo combinar y cuándo reentrenar</a:t>
-            </a:r>
-            <a:endParaRPr lang="en-US" sz="3400" dirty="0"/>
-          </a:p>
-        </p:txBody>
-      </p:sp>
-      <p:sp>
-        <p:nvSpPr>
-          <p:cNvPr id="4" name="Shape 2"/>
-          <p:cNvSpPr/>
-          <p:nvPr/>
-        </p:nvSpPr>
-        <p:spPr>
-          <a:xfrm>
-            <a:off x="548640" y="1645920"/>
-            <a:ext cx="11091672" cy="0"/>
-          </a:xfrm>
-          <a:prstGeom prst="line">
-            <a:avLst/>
-          </a:prstGeom>
-          <a:noFill/>
-          <a:ln w="9525">
+              <a:t>Tres cosas que sirven fuera de este trabajo</a:t>
+            </a:r>
+            <a:endParaRPr lang="en-US" sz="3000" dirty="0"/>
+          </a:p>
+        </p:txBody>
+      </p:sp>
+      <p:sp>
+        <p:nvSpPr>
+          <p:cNvPr id="4" name="Text 2"/>
+          <p:cNvSpPr txBox="1"/>
+          <p:nvPr/>
+        </p:nvSpPr>
+        <p:spPr>
+          <a:xfrm>
+            <a:off x="9235440" y="429768"/>
+            <a:ext cx="1554480" cy="201168"/>
+          </a:xfrm>
+          <a:prstGeom prst="rect">
+            <a:avLst/>
+          </a:prstGeom>
+          <a:noFill/>
+          <a:ln/>
+        </p:spPr>
+        <p:txBody>
+          <a:bodyPr wrap="square" lIns="0" tIns="0" rIns="0" bIns="0" rtlCol="0" anchor="t"/>
+          <a:lstStyle/>
+          <a:p>
+            <a:pPr algn="r" indent="0" marL="0">
+              <a:lnSpc>
+                <a:spcPct val="100000"/>
+              </a:lnSpc>
+              <a:buNone/>
+            </a:pPr>
+            <a:r>
+              <a:rPr lang="en-US" sz="900" b="1" spc="200" kern="0" dirty="0">
+                <a:solidFill>
+                  <a:srgbClr val="9AA1AE"/>
+                </a:solidFill>
+                <a:latin typeface="Arial" pitchFamily="34" charset="0"/>
+                <a:ea typeface="Arial" pitchFamily="34" charset="-122"/>
+                <a:cs typeface="Arial" pitchFamily="34" charset="-120"/>
+              </a:rPr>
+              <a:t>HALLAZGOS</a:t>
+            </a:r>
+            <a:endParaRPr lang="en-US" sz="900" dirty="0"/>
+          </a:p>
+        </p:txBody>
+      </p:sp>
+      <p:sp>
+        <p:nvSpPr>
+          <p:cNvPr id="5" name="hallazgo 1"/>
+          <p:cNvSpPr/>
+          <p:nvPr/>
+        </p:nvSpPr>
+        <p:spPr>
+          <a:xfrm>
+            <a:off x="10899648" y="457200"/>
+            <a:ext cx="137160" cy="137160"/>
+          </a:xfrm>
+          <a:prstGeom prst="ellipse">
+            <a:avLst/>
+          </a:prstGeom>
+          <a:ln w="15875">
             <a:solidFill>
-              <a:srgbClr val="3A4152"/>
+              <a:srgbClr val="9AA1AE"/>
             </a:solidFill>
             <a:prstDash val="solid"/>
           </a:ln>
@@ -7298,118 +9496,204 @@
       </p:sp>
       <p:sp>
         <p:nvSpPr>
-          <p:cNvPr id="5" name="fila 1"/>
-          <p:cNvSpPr/>
-          <p:nvPr/>
-        </p:nvSpPr>
-        <p:spPr>
-          <a:xfrm>
-            <a:off x="548640" y="1901952"/>
-            <a:ext cx="274320" cy="274320"/>
+          <p:cNvPr id="6" name="hallazgo 2"/>
+          <p:cNvSpPr/>
+          <p:nvPr/>
+        </p:nvSpPr>
+        <p:spPr>
+          <a:xfrm>
+            <a:off x="11100816" y="457200"/>
+            <a:ext cx="137160" cy="137160"/>
+          </a:xfrm>
+          <a:prstGeom prst="ellipse">
+            <a:avLst/>
+          </a:prstGeom>
+          <a:ln w="15875">
+            <a:solidFill>
+              <a:srgbClr val="9AA1AE"/>
+            </a:solidFill>
+            <a:prstDash val="solid"/>
+          </a:ln>
+        </p:spPr>
+      </p:sp>
+      <p:sp>
+        <p:nvSpPr>
+          <p:cNvPr id="7" name="hallazgo 3"/>
+          <p:cNvSpPr/>
+          <p:nvPr/>
+        </p:nvSpPr>
+        <p:spPr>
+          <a:xfrm>
+            <a:off x="11301984" y="457200"/>
+            <a:ext cx="137160" cy="137160"/>
+          </a:xfrm>
+          <a:prstGeom prst="ellipse">
+            <a:avLst/>
+          </a:prstGeom>
+          <a:ln w="15875">
+            <a:solidFill>
+              <a:srgbClr val="9AA1AE"/>
+            </a:solidFill>
+            <a:prstDash val="solid"/>
+          </a:ln>
+        </p:spPr>
+      </p:sp>
+      <p:sp>
+        <p:nvSpPr>
+          <p:cNvPr id="8" name="hallazgo 4 (actual)"/>
+          <p:cNvSpPr/>
+          <p:nvPr/>
+        </p:nvSpPr>
+        <p:spPr>
+          <a:xfrm>
+            <a:off x="11503152" y="457200"/>
+            <a:ext cx="137160" cy="137160"/>
           </a:xfrm>
           <a:prstGeom prst="ellipse">
             <a:avLst/>
           </a:prstGeom>
           <a:solidFill>
-            <a:srgbClr val="1BAF7A"/>
+            <a:srgbClr val="1F2430"/>
           </a:solidFill>
           <a:ln/>
         </p:spPr>
       </p:sp>
       <p:sp>
         <p:nvSpPr>
-          <p:cNvPr id="6" name="Text 4"/>
-          <p:cNvSpPr txBox="1"/>
-          <p:nvPr/>
-        </p:nvSpPr>
-        <p:spPr>
-          <a:xfrm>
-            <a:off x="1051560" y="1828800"/>
-            <a:ext cx="3840480" cy="457200"/>
-          </a:xfrm>
-          <a:prstGeom prst="rect">
-            <a:avLst/>
-          </a:prstGeom>
-          <a:noFill/>
-          <a:ln/>
-        </p:spPr>
-        <p:txBody>
-          <a:bodyPr wrap="square" lIns="0" tIns="0" rIns="0" bIns="0" rtlCol="0" anchor="t"/>
-          <a:lstStyle/>
-          <a:p>
-            <a:pPr indent="0" marL="0">
-              <a:lnSpc>
-                <a:spcPct val="100000"/>
-              </a:lnSpc>
-              <a:buNone/>
-            </a:pPr>
-            <a:r>
-              <a:rPr lang="en-US" sz="2400" dirty="0">
-                <a:solidFill>
-                  <a:srgbClr val="FFFFFF"/>
-                </a:solidFill>
-                <a:latin typeface="Georgia" pitchFamily="34" charset="0"/>
-                <a:ea typeface="Georgia" pitchFamily="34" charset="-122"/>
-                <a:cs typeface="Georgia" pitchFamily="34" charset="-120"/>
-              </a:rPr>
-              <a:t>Etiquetas abundantes</a:t>
-            </a:r>
-            <a:endParaRPr lang="en-US" sz="2400" dirty="0"/>
-          </a:p>
-        </p:txBody>
-      </p:sp>
-      <p:sp>
-        <p:nvSpPr>
-          <p:cNvPr id="7" name="Text 5"/>
-          <p:cNvSpPr txBox="1"/>
-          <p:nvPr/>
-        </p:nvSpPr>
-        <p:spPr>
-          <a:xfrm>
-            <a:off x="5029200" y="1874520"/>
-            <a:ext cx="6583680" cy="731520"/>
-          </a:xfrm>
-          <a:prstGeom prst="rect">
-            <a:avLst/>
-          </a:prstGeom>
-          <a:noFill/>
-          <a:ln/>
-        </p:spPr>
-        <p:txBody>
-          <a:bodyPr wrap="square" lIns="0" tIns="0" rIns="0" bIns="0" rtlCol="0" anchor="t"/>
-          <a:lstStyle/>
-          <a:p>
-            <a:pPr indent="0" marL="0">
-              <a:lnSpc>
-                <a:spcPct val="100000"/>
-              </a:lnSpc>
-              <a:buNone/>
-            </a:pPr>
-            <a:r>
-              <a:rPr lang="en-US" sz="1800" dirty="0">
-                <a:solidFill>
-                  <a:srgbClr val="C8CEDA"/>
+          <p:cNvPr id="9" name="Text 7"/>
+          <p:cNvSpPr txBox="1"/>
+          <p:nvPr/>
+        </p:nvSpPr>
+        <p:spPr>
+          <a:xfrm>
+            <a:off x="548640" y="1783080"/>
+            <a:ext cx="3474720" cy="914400"/>
+          </a:xfrm>
+          <a:prstGeom prst="rect">
+            <a:avLst/>
+          </a:prstGeom>
+          <a:noFill/>
+          <a:ln/>
+        </p:spPr>
+        <p:txBody>
+          <a:bodyPr wrap="square" lIns="0" tIns="0" rIns="0" bIns="0" rtlCol="0" anchor="t"/>
+          <a:lstStyle/>
+          <a:p>
+            <a:pPr indent="0" marL="0">
+              <a:lnSpc>
+                <a:spcPct val="100000"/>
+              </a:lnSpc>
+              <a:buNone/>
+            </a:pPr>
+            <a:r>
+              <a:rPr lang="en-US" sz="5400" b="1" dirty="0">
+                <a:solidFill>
+                  <a:srgbClr val="1F2430"/>
                 </a:solidFill>
                 <a:latin typeface="Arial" pitchFamily="34" charset="0"/>
                 <a:ea typeface="Arial" pitchFamily="34" charset="-122"/>
                 <a:cs typeface="Arial" pitchFamily="34" charset="-120"/>
               </a:rPr>
-              <a:t>Reentrenar: SGD online comete 73 errores, contra 133 de Hedge.</a:t>
-            </a:r>
-            <a:endParaRPr lang="en-US" sz="1800" dirty="0"/>
-          </a:p>
-        </p:txBody>
-      </p:sp>
-      <p:sp>
-        <p:nvSpPr>
-          <p:cNvPr id="8" name="Shape 6"/>
-          <p:cNvSpPr/>
-          <p:nvPr/>
-        </p:nvSpPr>
-        <p:spPr>
-          <a:xfrm>
-            <a:off x="548640" y="2697480"/>
-            <a:ext cx="11091672" cy="0"/>
+              <a:t>87%</a:t>
+            </a:r>
+            <a:endParaRPr lang="en-US" sz="5400" dirty="0"/>
+          </a:p>
+        </p:txBody>
+      </p:sp>
+      <p:sp>
+        <p:nvSpPr>
+          <p:cNvPr id="10" name="Text 8"/>
+          <p:cNvSpPr txBox="1"/>
+          <p:nvPr/>
+        </p:nvSpPr>
+        <p:spPr>
+          <a:xfrm>
+            <a:off x="548640" y="2880360"/>
+            <a:ext cx="3429000" cy="868680"/>
+          </a:xfrm>
+          <a:prstGeom prst="rect">
+            <a:avLst/>
+          </a:prstGeom>
+          <a:noFill/>
+          <a:ln/>
+        </p:spPr>
+        <p:txBody>
+          <a:bodyPr wrap="square" lIns="0" tIns="0" rIns="0" bIns="0" rtlCol="0" anchor="t"/>
+          <a:lstStyle/>
+          <a:p>
+            <a:pPr indent="0" marL="0">
+              <a:lnSpc>
+                <a:spcPct val="100000"/>
+              </a:lnSpc>
+              <a:buNone/>
+            </a:pPr>
+            <a:r>
+              <a:rPr lang="en-US" sz="1900" b="1" dirty="0">
+                <a:solidFill>
+                  <a:srgbClr val="1F2430"/>
+                </a:solidFill>
+                <a:latin typeface="Arial" pitchFamily="34" charset="0"/>
+                <a:ea typeface="Arial" pitchFamily="34" charset="-122"/>
+                <a:cs typeface="Arial" pitchFamily="34" charset="-120"/>
+              </a:rPr>
+              <a:t>La accuracy engaña</a:t>
+            </a:r>
+            <a:endParaRPr lang="en-US" sz="1900" dirty="0"/>
+          </a:p>
+        </p:txBody>
+      </p:sp>
+      <p:sp>
+        <p:nvSpPr>
+          <p:cNvPr id="11" name="Text 9"/>
+          <p:cNvSpPr txBox="1"/>
+          <p:nvPr/>
+        </p:nvSpPr>
+        <p:spPr>
+          <a:xfrm>
+            <a:off x="548640" y="3840480"/>
+            <a:ext cx="3429000" cy="1828800"/>
+          </a:xfrm>
+          <a:prstGeom prst="rect">
+            <a:avLst/>
+          </a:prstGeom>
+          <a:noFill/>
+          <a:ln/>
+        </p:spPr>
+        <p:txBody>
+          <a:bodyPr wrap="square" lIns="0" tIns="0" rIns="0" bIns="0" rtlCol="0" anchor="t"/>
+          <a:lstStyle/>
+          <a:p>
+            <a:pPr indent="0" marL="0">
+              <a:lnSpc>
+                <a:spcPct val="100000"/>
+              </a:lnSpc>
+              <a:buNone/>
+            </a:pPr>
+            <a:r>
+              <a:rPr lang="en-US" sz="1500" dirty="0">
+                <a:solidFill>
+                  <a:srgbClr val="5A6274"/>
+                </a:solidFill>
+                <a:latin typeface="Arial" pitchFamily="34" charset="0"/>
+                <a:ea typeface="Arial" pitchFamily="34" charset="-122"/>
+                <a:cs typeface="Arial" pitchFamily="34" charset="-120"/>
+              </a:rPr>
+              <a:t>Con 13% de spam, no marcar nada acierta el 87%. Medimos spam atrapado, legítimo bloqueado y MCC.</a:t>
+            </a:r>
+            <a:endParaRPr lang="en-US" sz="1500" dirty="0"/>
+          </a:p>
+        </p:txBody>
+      </p:sp>
+      <p:sp>
+        <p:nvSpPr>
+          <p:cNvPr id="12" name="Shape 10"/>
+          <p:cNvSpPr/>
+          <p:nvPr/>
+        </p:nvSpPr>
+        <p:spPr>
+          <a:xfrm>
+            <a:off x="4142232" y="1828800"/>
+            <a:ext cx="0" cy="4023360"/>
           </a:xfrm>
           <a:prstGeom prst="line">
             <a:avLst/>
@@ -7417,7 +9701,7 @@
           <a:noFill/>
           <a:ln w="9525">
             <a:solidFill>
-              <a:srgbClr val="3A4152"/>
+              <a:srgbClr val="D9D6CE"/>
             </a:solidFill>
             <a:prstDash val="solid"/>
           </a:ln>
@@ -7425,118 +9709,140 @@
       </p:sp>
       <p:sp>
         <p:nvSpPr>
-          <p:cNvPr id="9" name="fila 2"/>
-          <p:cNvSpPr/>
-          <p:nvPr/>
-        </p:nvSpPr>
-        <p:spPr>
-          <a:xfrm>
-            <a:off x="548640" y="2953512"/>
-            <a:ext cx="274320" cy="274320"/>
-          </a:xfrm>
-          <a:prstGeom prst="ellipse">
-            <a:avLst/>
-          </a:prstGeom>
-          <a:solidFill>
-            <a:srgbClr val="2A78D6"/>
-          </a:solidFill>
-          <a:ln/>
-        </p:spPr>
-      </p:sp>
-      <p:sp>
-        <p:nvSpPr>
-          <p:cNvPr id="10" name="Text 8"/>
-          <p:cNvSpPr txBox="1"/>
-          <p:nvPr/>
-        </p:nvSpPr>
-        <p:spPr>
-          <a:xfrm>
-            <a:off x="1051560" y="2880360"/>
-            <a:ext cx="3840480" cy="457200"/>
-          </a:xfrm>
-          <a:prstGeom prst="rect">
-            <a:avLst/>
-          </a:prstGeom>
-          <a:noFill/>
-          <a:ln/>
-        </p:spPr>
-        <p:txBody>
-          <a:bodyPr wrap="square" lIns="0" tIns="0" rIns="0" bIns="0" rtlCol="0" anchor="t"/>
-          <a:lstStyle/>
-          <a:p>
-            <a:pPr indent="0" marL="0">
-              <a:lnSpc>
-                <a:spcPct val="100000"/>
-              </a:lnSpc>
-              <a:buNone/>
-            </a:pPr>
-            <a:r>
-              <a:rPr lang="en-US" sz="2400" dirty="0">
-                <a:solidFill>
-                  <a:srgbClr val="FFFFFF"/>
-                </a:solidFill>
-                <a:latin typeface="Georgia" pitchFamily="34" charset="0"/>
-                <a:ea typeface="Georgia" pitchFamily="34" charset="-122"/>
-                <a:cs typeface="Georgia" pitchFamily="34" charset="-120"/>
-              </a:rPr>
-              <a:t>Etiquetas escasas</a:t>
-            </a:r>
-            <a:endParaRPr lang="en-US" sz="2400" dirty="0"/>
-          </a:p>
-        </p:txBody>
-      </p:sp>
-      <p:sp>
-        <p:nvSpPr>
-          <p:cNvPr id="11" name="Text 9"/>
-          <p:cNvSpPr txBox="1"/>
-          <p:nvPr/>
-        </p:nvSpPr>
-        <p:spPr>
-          <a:xfrm>
-            <a:off x="5029200" y="2926080"/>
-            <a:ext cx="6583680" cy="731520"/>
-          </a:xfrm>
-          <a:prstGeom prst="rect">
-            <a:avLst/>
-          </a:prstGeom>
-          <a:noFill/>
-          <a:ln/>
-        </p:spPr>
-        <p:txBody>
-          <a:bodyPr wrap="square" lIns="0" tIns="0" rIns="0" bIns="0" rtlCol="0" anchor="t"/>
-          <a:lstStyle/>
-          <a:p>
-            <a:pPr indent="0" marL="0">
-              <a:lnSpc>
-                <a:spcPct val="100000"/>
-              </a:lnSpc>
-              <a:buNone/>
-            </a:pPr>
-            <a:r>
-              <a:rPr lang="en-US" sz="1800" dirty="0">
-                <a:solidFill>
-                  <a:srgbClr val="C8CEDA"/>
+          <p:cNvPr id="13" name="Text 11"/>
+          <p:cNvSpPr txBox="1"/>
+          <p:nvPr/>
+        </p:nvSpPr>
+        <p:spPr>
+          <a:xfrm>
+            <a:off x="4370832" y="1783080"/>
+            <a:ext cx="3474720" cy="914400"/>
+          </a:xfrm>
+          <a:prstGeom prst="rect">
+            <a:avLst/>
+          </a:prstGeom>
+          <a:noFill/>
+          <a:ln/>
+        </p:spPr>
+        <p:txBody>
+          <a:bodyPr wrap="square" lIns="0" tIns="0" rIns="0" bIns="0" rtlCol="0" anchor="t"/>
+          <a:lstStyle/>
+          <a:p>
+            <a:pPr indent="0" marL="0">
+              <a:lnSpc>
+                <a:spcPct val="100000"/>
+              </a:lnSpc>
+              <a:buNone/>
+            </a:pPr>
+            <a:r>
+              <a:rPr lang="en-US" sz="5400" b="1" dirty="0">
+                <a:solidFill>
+                  <a:srgbClr val="1BAF7A"/>
                 </a:solidFill>
                 <a:latin typeface="Arial" pitchFamily="34" charset="0"/>
                 <a:ea typeface="Arial" pitchFamily="34" charset="-122"/>
                 <a:cs typeface="Arial" pitchFamily="34" charset="-120"/>
               </a:rPr>
-              <a:t>Combinar expertos diversos, con al menos uno robusto al ataque.</a:t>
-            </a:r>
-            <a:endParaRPr lang="en-US" sz="1800" dirty="0"/>
-          </a:p>
-        </p:txBody>
-      </p:sp>
-      <p:sp>
-        <p:nvSpPr>
-          <p:cNvPr id="12" name="Shape 10"/>
-          <p:cNvSpPr/>
-          <p:nvPr/>
-        </p:nvSpPr>
-        <p:spPr>
-          <a:xfrm>
-            <a:off x="548640" y="3749040"/>
-            <a:ext cx="11091672" cy="0"/>
+              <a:t>8 de 20</a:t>
+            </a:r>
+            <a:endParaRPr lang="en-US" sz="5400" dirty="0"/>
+          </a:p>
+        </p:txBody>
+      </p:sp>
+      <p:sp>
+        <p:nvSpPr>
+          <p:cNvPr id="14" name="Text 12"/>
+          <p:cNvSpPr txBox="1"/>
+          <p:nvPr/>
+        </p:nvSpPr>
+        <p:spPr>
+          <a:xfrm>
+            <a:off x="4370832" y="2880360"/>
+            <a:ext cx="3429000" cy="868680"/>
+          </a:xfrm>
+          <a:prstGeom prst="rect">
+            <a:avLst/>
+          </a:prstGeom>
+          <a:noFill/>
+          <a:ln/>
+        </p:spPr>
+        <p:txBody>
+          <a:bodyPr wrap="square" lIns="0" tIns="0" rIns="0" bIns="0" rtlCol="0" anchor="t"/>
+          <a:lstStyle/>
+          <a:p>
+            <a:pPr indent="0" marL="0">
+              <a:lnSpc>
+                <a:spcPct val="100000"/>
+              </a:lnSpc>
+              <a:buNone/>
+            </a:pPr>
+            <a:r>
+              <a:rPr lang="en-US" sz="1900" b="1" dirty="0">
+                <a:solidFill>
+                  <a:srgbClr val="1F2430"/>
+                </a:solidFill>
+                <a:latin typeface="Arial" pitchFamily="34" charset="0"/>
+                <a:ea typeface="Arial" pitchFamily="34" charset="-122"/>
+                <a:cs typeface="Arial" pitchFamily="34" charset="-120"/>
+              </a:rPr>
+              <a:t>La validación cruzada no mide adaptación</a:t>
+            </a:r>
+            <a:endParaRPr lang="en-US" sz="1900" dirty="0"/>
+          </a:p>
+        </p:txBody>
+      </p:sp>
+      <p:sp>
+        <p:nvSpPr>
+          <p:cNvPr id="15" name="Text 13"/>
+          <p:cNvSpPr txBox="1"/>
+          <p:nvPr/>
+        </p:nvSpPr>
+        <p:spPr>
+          <a:xfrm>
+            <a:off x="4370832" y="3840480"/>
+            <a:ext cx="3429000" cy="1828800"/>
+          </a:xfrm>
+          <a:prstGeom prst="rect">
+            <a:avLst/>
+          </a:prstGeom>
+          <a:noFill/>
+          <a:ln/>
+        </p:spPr>
+        <p:txBody>
+          <a:bodyPr wrap="square" lIns="0" tIns="0" rIns="0" bIns="0" rtlCol="0" anchor="t"/>
+          <a:lstStyle/>
+          <a:p>
+            <a:pPr indent="0" marL="0">
+              <a:lnSpc>
+                <a:spcPct val="100000"/>
+              </a:lnSpc>
+              <a:buNone/>
+            </a:pPr>
+            <a:r>
+              <a:rPr lang="en-US" sz="1500" dirty="0">
+                <a:solidFill>
+                  <a:srgbClr val="5A6274"/>
+                </a:solidFill>
+                <a:latin typeface="Arial" pitchFamily="34" charset="0"/>
+                <a:ea typeface="Arial" pitchFamily="34" charset="-122"/>
+                <a:cs typeface="Arial" pitchFamily="34" charset="-120"/>
+              </a:rPr>
+              <a:t>Sin ataque en el warm-up, eligió mal la regularización de SGD en 8 de 20 semillas: 125 a 153 errores, contra 65 a 83.</a:t>
+            </a:r>
+            <a:endParaRPr lang="en-US" sz="1500" dirty="0"/>
+          </a:p>
+        </p:txBody>
+      </p:sp>
+      <p:sp>
+        <p:nvSpPr>
+          <p:cNvPr id="16" name="Shape 14"/>
+          <p:cNvSpPr/>
+          <p:nvPr/>
+        </p:nvSpPr>
+        <p:spPr>
+          <a:xfrm>
+            <a:off x="7964424" y="1828800"/>
+            <a:ext cx="0" cy="4023360"/>
           </a:xfrm>
           <a:prstGeom prst="line">
             <a:avLst/>
@@ -7544,7 +9850,7 @@
           <a:noFill/>
           <a:ln w="9525">
             <a:solidFill>
-              <a:srgbClr val="3A4152"/>
+              <a:srgbClr val="D9D6CE"/>
             </a:solidFill>
             <a:prstDash val="solid"/>
           </a:ln>
@@ -7552,170 +9858,217 @@
       </p:sp>
       <p:sp>
         <p:nvSpPr>
-          <p:cNvPr id="13" name="fila 3"/>
-          <p:cNvSpPr/>
-          <p:nvPr/>
-        </p:nvSpPr>
-        <p:spPr>
-          <a:xfrm>
-            <a:off x="548640" y="4005072"/>
-            <a:ext cx="274320" cy="274320"/>
-          </a:xfrm>
-          <a:prstGeom prst="ellipse">
-            <a:avLst/>
-          </a:prstGeom>
-          <a:solidFill>
-            <a:srgbClr val="C8CEDA"/>
-          </a:solidFill>
-          <a:ln/>
-        </p:spPr>
-      </p:sp>
-      <p:sp>
-        <p:nvSpPr>
-          <p:cNvPr id="14" name="Text 12"/>
-          <p:cNvSpPr txBox="1"/>
-          <p:nvPr/>
-        </p:nvSpPr>
-        <p:spPr>
-          <a:xfrm>
-            <a:off x="1051560" y="3931920"/>
-            <a:ext cx="3840480" cy="457200"/>
-          </a:xfrm>
-          <a:prstGeom prst="rect">
-            <a:avLst/>
-          </a:prstGeom>
-          <a:noFill/>
-          <a:ln/>
-        </p:spPr>
-        <p:txBody>
-          <a:bodyPr wrap="square" lIns="0" tIns="0" rIns="0" bIns="0" rtlCol="0" anchor="t"/>
-          <a:lstStyle/>
-          <a:p>
-            <a:pPr indent="0" marL="0">
-              <a:lnSpc>
-                <a:spcPct val="100000"/>
-              </a:lnSpc>
-              <a:buNone/>
-            </a:pPr>
-            <a:r>
-              <a:rPr lang="en-US" sz="2400" dirty="0">
-                <a:solidFill>
-                  <a:srgbClr val="FFFFFF"/>
-                </a:solidFill>
-                <a:latin typeface="Georgia" pitchFamily="34" charset="0"/>
-                <a:ea typeface="Georgia" pitchFamily="34" charset="-122"/>
-                <a:cs typeface="Georgia" pitchFamily="34" charset="-120"/>
-              </a:rPr>
-              <a:t>Siempre</a:t>
-            </a:r>
-            <a:endParaRPr lang="en-US" sz="2400" dirty="0"/>
-          </a:p>
-        </p:txBody>
-      </p:sp>
-      <p:sp>
-        <p:nvSpPr>
-          <p:cNvPr id="15" name="Text 13"/>
-          <p:cNvSpPr txBox="1"/>
-          <p:nvPr/>
-        </p:nvSpPr>
-        <p:spPr>
-          <a:xfrm>
-            <a:off x="5029200" y="3977640"/>
-            <a:ext cx="6583680" cy="731520"/>
-          </a:xfrm>
-          <a:prstGeom prst="rect">
-            <a:avLst/>
-          </a:prstGeom>
-          <a:noFill/>
-          <a:ln/>
-        </p:spPr>
-        <p:txBody>
-          <a:bodyPr wrap="square" lIns="0" tIns="0" rIns="0" bIns="0" rtlCol="0" anchor="t"/>
-          <a:lstStyle/>
-          <a:p>
-            <a:pPr indent="0" marL="0">
-              <a:lnSpc>
-                <a:spcPct val="100000"/>
-              </a:lnSpc>
-              <a:buNone/>
-            </a:pPr>
-            <a:r>
-              <a:rPr lang="en-US" sz="1800" dirty="0">
-                <a:solidFill>
-                  <a:srgbClr val="C8CEDA"/>
+          <p:cNvPr id="17" name="Text 15"/>
+          <p:cNvSpPr txBox="1"/>
+          <p:nvPr/>
+        </p:nvSpPr>
+        <p:spPr>
+          <a:xfrm>
+            <a:off x="8193024" y="1783080"/>
+            <a:ext cx="3474720" cy="914400"/>
+          </a:xfrm>
+          <a:prstGeom prst="rect">
+            <a:avLst/>
+          </a:prstGeom>
+          <a:noFill/>
+          <a:ln/>
+        </p:spPr>
+        <p:txBody>
+          <a:bodyPr wrap="square" lIns="0" tIns="0" rIns="0" bIns="0" rtlCol="0" anchor="t"/>
+          <a:lstStyle/>
+          <a:p>
+            <a:pPr indent="0" marL="0">
+              <a:lnSpc>
+                <a:spcPct val="100000"/>
+              </a:lnSpc>
+              <a:buNone/>
+            </a:pPr>
+            <a:r>
+              <a:rPr lang="en-US" sz="5400" b="1" dirty="0">
+                <a:solidFill>
+                  <a:srgbClr val="EB6834"/>
                 </a:solidFill>
                 <a:latin typeface="Arial" pitchFamily="34" charset="0"/>
                 <a:ea typeface="Arial" pitchFamily="34" charset="-122"/>
                 <a:cs typeface="Arial" pitchFamily="34" charset="-120"/>
               </a:rPr>
-              <a:t>Medir spam atrapado y legítimo bloqueado por separado, no accuracy.</a:t>
-            </a:r>
-            <a:endParaRPr lang="en-US" sz="1800" dirty="0"/>
-          </a:p>
-        </p:txBody>
-      </p:sp>
-      <p:sp>
-        <p:nvSpPr>
-          <p:cNvPr id="16" name="Shape 14"/>
-          <p:cNvSpPr/>
-          <p:nvPr/>
-        </p:nvSpPr>
-        <p:spPr>
-          <a:xfrm>
-            <a:off x="548640" y="4800600"/>
-            <a:ext cx="11091672" cy="0"/>
-          </a:xfrm>
-          <a:prstGeom prst="line">
-            <a:avLst/>
-          </a:prstGeom>
-          <a:noFill/>
-          <a:ln w="9525">
-            <a:solidFill>
-              <a:srgbClr val="3A4152"/>
-            </a:solidFill>
-            <a:prstDash val="solid"/>
-          </a:ln>
-        </p:spPr>
-      </p:sp>
-      <p:sp>
-        <p:nvSpPr>
-          <p:cNvPr id="17" name="Text 15"/>
-          <p:cNvSpPr txBox="1"/>
-          <p:nvPr/>
-        </p:nvSpPr>
-        <p:spPr>
-          <a:xfrm>
-            <a:off x="548640" y="5257800"/>
-            <a:ext cx="11064240" cy="640080"/>
-          </a:xfrm>
-          <a:prstGeom prst="rect">
-            <a:avLst/>
-          </a:prstGeom>
-          <a:noFill/>
-          <a:ln/>
-        </p:spPr>
-        <p:txBody>
-          <a:bodyPr wrap="square" lIns="0" tIns="0" rIns="0" bIns="0" rtlCol="0" anchor="t"/>
-          <a:lstStyle/>
-          <a:p>
-            <a:pPr indent="0" marL="0">
-              <a:lnSpc>
-                <a:spcPct val="100000"/>
-              </a:lnSpc>
-              <a:buNone/>
-            </a:pPr>
-            <a:r>
-              <a:rPr lang="en-US" sz="2000" i="1" dirty="0">
-                <a:solidFill>
-                  <a:srgbClr val="AFCBEE"/>
-                </a:solidFill>
-                <a:latin typeface="Georgia" pitchFamily="34" charset="0"/>
-                <a:ea typeface="Georgia" pitchFamily="34" charset="-122"/>
-                <a:cs typeface="Georgia" pitchFamily="34" charset="-120"/>
-              </a:rPr>
-              <a:t>Pregunta abierta: ¿y si el modelo que reentrena fuera uno más de los expertos de Hedge? No lo probamos.</a:t>
-            </a:r>
-            <a:endParaRPr lang="en-US" sz="2000" dirty="0"/>
+              <a:t>0,995</a:t>
+            </a:r>
+            <a:endParaRPr lang="en-US" sz="5400" dirty="0"/>
+          </a:p>
+        </p:txBody>
+      </p:sp>
+      <p:sp>
+        <p:nvSpPr>
+          <p:cNvPr id="18" name="Text 16"/>
+          <p:cNvSpPr txBox="1"/>
+          <p:nvPr/>
+        </p:nvSpPr>
+        <p:spPr>
+          <a:xfrm>
+            <a:off x="8193024" y="2880360"/>
+            <a:ext cx="3429000" cy="868680"/>
+          </a:xfrm>
+          <a:prstGeom prst="rect">
+            <a:avLst/>
+          </a:prstGeom>
+          <a:noFill/>
+          <a:ln/>
+        </p:spPr>
+        <p:txBody>
+          <a:bodyPr wrap="square" lIns="0" tIns="0" rIns="0" bIns="0" rtlCol="0" anchor="t"/>
+          <a:lstStyle/>
+          <a:p>
+            <a:pPr indent="0" marL="0">
+              <a:lnSpc>
+                <a:spcPct val="100000"/>
+              </a:lnSpc>
+              <a:buNone/>
+            </a:pPr>
+            <a:r>
+              <a:rPr lang="en-US" sz="1900" b="1" dirty="0">
+                <a:solidFill>
+                  <a:srgbClr val="1F2430"/>
+                </a:solidFill>
+                <a:latin typeface="Arial" pitchFamily="34" charset="0"/>
+                <a:ea typeface="Arial" pitchFamily="34" charset="-122"/>
+                <a:cs typeface="Arial" pitchFamily="34" charset="-120"/>
+              </a:rPr>
+              <a:t>Combinar necesita un experto que sobreviva</a:t>
+            </a:r>
+            <a:endParaRPr lang="en-US" sz="1900" dirty="0"/>
+          </a:p>
+        </p:txBody>
+      </p:sp>
+      <p:sp>
+        <p:nvSpPr>
+          <p:cNvPr id="19" name="Text 17"/>
+          <p:cNvSpPr txBox="1"/>
+          <p:nvPr/>
+        </p:nvSpPr>
+        <p:spPr>
+          <a:xfrm>
+            <a:off x="8193024" y="3840480"/>
+            <a:ext cx="3429000" cy="1828800"/>
+          </a:xfrm>
+          <a:prstGeom prst="rect">
+            <a:avLst/>
+          </a:prstGeom>
+          <a:noFill/>
+          <a:ln/>
+        </p:spPr>
+        <p:txBody>
+          <a:bodyPr wrap="square" lIns="0" tIns="0" rIns="0" bIns="0" rtlCol="0" anchor="t"/>
+          <a:lstStyle/>
+          <a:p>
+            <a:pPr indent="0" marL="0">
+              <a:lnSpc>
+                <a:spcPct val="100000"/>
+              </a:lnSpc>
+              <a:buNone/>
+            </a:pPr>
+            <a:r>
+              <a:rPr lang="en-US" sz="1500" dirty="0">
+                <a:solidFill>
+                  <a:srgbClr val="5A6274"/>
+                </a:solidFill>
+                <a:latin typeface="Arial" pitchFamily="34" charset="0"/>
+                <a:ea typeface="Arial" pitchFamily="34" charset="-122"/>
+                <a:cs typeface="Arial" pitchFamily="34" charset="-120"/>
+              </a:rPr>
+              <a:t>Si ningún experto resiste el ataque, Hedge deja 0,995 del peso en el modelo dañado y no recupera nada.</a:t>
+            </a:r>
+            <a:endParaRPr lang="en-US" sz="1500" dirty="0"/>
+          </a:p>
+        </p:txBody>
+      </p:sp>
+      <p:sp>
+        <p:nvSpPr>
+          <p:cNvPr id="20" name="Text 18"/>
+          <p:cNvSpPr txBox="1"/>
+          <p:nvPr/>
+        </p:nvSpPr>
+        <p:spPr>
+          <a:xfrm>
+            <a:off x="548640" y="6373368"/>
+            <a:ext cx="10241280" cy="274320"/>
+          </a:xfrm>
+          <a:prstGeom prst="rect">
+            <a:avLst/>
+          </a:prstGeom>
+          <a:noFill/>
+          <a:ln/>
+        </p:spPr>
+        <p:txBody>
+          <a:bodyPr wrap="square" lIns="0" tIns="0" rIns="0" bIns="0" rtlCol="0" anchor="t"/>
+          <a:lstStyle/>
+          <a:p>
+            <a:pPr indent="0" marL="0">
+              <a:lnSpc>
+                <a:spcPct val="100000"/>
+              </a:lnSpc>
+              <a:buNone/>
+            </a:pPr>
+            <a:r>
+              <a:rPr lang="en-US" sz="1000" dirty="0">
+                <a:solidFill>
+                  <a:srgbClr val="9AA1AE"/>
+                </a:solidFill>
+                <a:latin typeface="Arial" pitchFamily="34" charset="0"/>
+                <a:ea typeface="Arial" pitchFamily="34" charset="-122"/>
+                <a:cs typeface="Arial" pitchFamily="34" charset="-120"/>
+              </a:rPr>
+              <a:t>El 0,995 es de la primera versión del experto estructural, con 5 rasgos, en la semilla de desarrollo.</a:t>
+            </a:r>
+            <a:endParaRPr lang="en-US" sz="1000" dirty="0"/>
+          </a:p>
+        </p:txBody>
+      </p:sp>
+      <p:sp>
+        <p:nvSpPr>
+          <p:cNvPr id="25" name="Slide Number Placeholder 0"/>
+          <p:cNvSpPr>
+            <a:spLocks noGrp="1"/>
+          </p:cNvSpPr>
+          <p:nvPr>
+            <p:ph type="sldNum" sz="quarter" idx="4294967295"/>
+          </p:nvPr>
+        </p:nvSpPr>
+        <p:spPr>
+          <a:xfrm>
+            <a:off x="11091672" y="6373368"/>
+            <a:ext cx="548640" cy="274320"/>
+          </a:xfrm>
+          <a:prstGeom prst="rect">
+            <a:avLst/>
+          </a:prstGeom>
+          <a:extLst>
+            <a:ext uri="{C572A759-6A51-4108-AA02-DFA0A04FC94B}">
+              <ma14:wrappingTextBoxFlag xmlns:ma14="http://schemas.microsoft.com/office/mac/drawingml/2011/main" val="0"/>
+            </a:ext>
+          </a:extLst>
+        </p:spPr>
+        <p:txBody>
+          <a:bodyPr/>
+          <a:lstStyle>
+            <a:lvl1pPr>
+              <a:defRPr sz="1000">
+                <a:solidFill>
+                  <a:srgbClr val="9AA1AE"/>
+                </a:solidFill>
+                <a:latin typeface="Arial"/>
+                <a:ea typeface="Arial"/>
+                <a:cs typeface="Arial"/>
+              </a:defRPr>
+            </a:lvl1pPr>
+          </a:lstStyle>
+          <a:p>
+            <a:pPr algn="r"/>
+            <a:fld id="{F7021451-1387-4CA6-816F-3879F97B5CBC}" type="slidenum">
+              <a:rPr b="0" lang="en-US"/>
+              <a:t>16</a:t>
+            </a:fld>
+            <a:endParaRPr lang="en-US"/>
           </a:p>
         </p:txBody>
       </p:sp>
@@ -7777,13 +10130,13 @@
             <a:r>
               <a:rPr lang="en-US" sz="1100" b="1" spc="200" kern="0" dirty="0">
                 <a:solidFill>
-                  <a:srgbClr val="5A6274"/>
+                  <a:srgbClr val="9AA1AE"/>
                 </a:solidFill>
                 <a:latin typeface="Arial" pitchFamily="34" charset="0"/>
                 <a:ea typeface="Arial" pitchFamily="34" charset="-122"/>
                 <a:cs typeface="Arial" pitchFamily="34" charset="-120"/>
               </a:rPr>
-              <a:t>LIMITACIONES</a:t>
+              <a:t>EN RESUMEN</a:t>
             </a:r>
             <a:endParaRPr lang="en-US" sz="1100" dirty="0"/>
           </a:p>
@@ -7791,104 +10144,191 @@
       </p:sp>
       <p:sp>
         <p:nvSpPr>
-          <p:cNvPr id="3" name="Text 0"/>
-          <p:cNvSpPr/>
-          <p:nvPr>
-            <p:ph idx="100" type="title" hasCustomPrompt="1"/>
-          </p:nvPr>
+          <p:cNvPr id="3" name="Text 1"/>
+          <p:cNvSpPr txBox="1"/>
+          <p:nvPr/>
         </p:nvSpPr>
         <p:spPr>
           <a:xfrm>
             <a:off x="548640" y="731520"/>
-            <a:ext cx="10424160" cy="566928"/>
-          </a:xfrm>
-          <a:prstGeom prst="rect">
-            <a:avLst/>
-          </a:prstGeom>
-          <a:noFill/>
-          <a:ln/>
-        </p:spPr>
-        <p:txBody>
-          <a:bodyPr wrap="square" lIns="0" tIns="0" rIns="0" bIns="0" rtlCol="0" anchor="t"/>
-          <a:lstStyle/>
-          <a:p>
-            <a:pPr indent="0" marL="0">
-              <a:buNone/>
-            </a:pPr>
-            <a:r>
-              <a:rPr lang="en-US" sz="3000" dirty="0">
-                <a:solidFill>
-                  <a:srgbClr val="1F2430"/>
+            <a:ext cx="10972800" cy="640080"/>
+          </a:xfrm>
+          <a:prstGeom prst="rect">
+            <a:avLst/>
+          </a:prstGeom>
+          <a:noFill/>
+          <a:ln/>
+        </p:spPr>
+        <p:txBody>
+          <a:bodyPr wrap="square" lIns="0" tIns="0" rIns="0" bIns="0" rtlCol="0" anchor="t"/>
+          <a:lstStyle/>
+          <a:p>
+            <a:pPr indent="0" marL="0">
+              <a:lnSpc>
+                <a:spcPct val="100000"/>
+              </a:lnSpc>
+              <a:buNone/>
+            </a:pPr>
+            <a:r>
+              <a:rPr lang="en-US" sz="3400" dirty="0">
+                <a:solidFill>
+                  <a:srgbClr val="FFFFFF"/>
                 </a:solidFill>
                 <a:latin typeface="Georgia" pitchFamily="34" charset="0"/>
                 <a:ea typeface="Georgia" pitchFamily="34" charset="-122"/>
                 <a:cs typeface="Georgia" pitchFamily="34" charset="-120"/>
               </a:rPr>
-              <a:t>Lo que este trabajo no muestra</a:t>
-            </a:r>
-            <a:endParaRPr lang="en-US" sz="3000" dirty="0"/>
-          </a:p>
-        </p:txBody>
-      </p:sp>
-      <p:sp>
-        <p:nvSpPr>
-          <p:cNvPr id="4" name="Text 2"/>
-          <p:cNvSpPr txBox="1"/>
-          <p:nvPr/>
-        </p:nvSpPr>
-        <p:spPr>
-          <a:xfrm>
-            <a:off x="9235440" y="429768"/>
-            <a:ext cx="1554480" cy="201168"/>
-          </a:xfrm>
-          <a:prstGeom prst="rect">
-            <a:avLst/>
-          </a:prstGeom>
-          <a:noFill/>
-          <a:ln/>
-        </p:spPr>
-        <p:txBody>
-          <a:bodyPr wrap="square" lIns="0" tIns="0" rIns="0" bIns="0" rtlCol="0" anchor="t"/>
-          <a:lstStyle/>
-          <a:p>
-            <a:pPr algn="r" indent="0" marL="0">
-              <a:lnSpc>
-                <a:spcPct val="100000"/>
-              </a:lnSpc>
-              <a:buNone/>
-            </a:pPr>
-            <a:r>
-              <a:rPr lang="en-US" sz="900" b="1" spc="200" kern="0" dirty="0">
-                <a:solidFill>
-                  <a:srgbClr val="9AA1AE"/>
+              <a:t>Cuándo combinar y cuándo reentrenar</a:t>
+            </a:r>
+            <a:endParaRPr lang="en-US" sz="3400" dirty="0"/>
+          </a:p>
+        </p:txBody>
+      </p:sp>
+      <p:sp>
+        <p:nvSpPr>
+          <p:cNvPr id="4" name="Shape 2"/>
+          <p:cNvSpPr/>
+          <p:nvPr/>
+        </p:nvSpPr>
+        <p:spPr>
+          <a:xfrm>
+            <a:off x="548640" y="1645920"/>
+            <a:ext cx="11091672" cy="0"/>
+          </a:xfrm>
+          <a:prstGeom prst="line">
+            <a:avLst/>
+          </a:prstGeom>
+          <a:noFill/>
+          <a:ln w="9525">
+            <a:solidFill>
+              <a:srgbClr val="3A4152"/>
+            </a:solidFill>
+            <a:prstDash val="solid"/>
+          </a:ln>
+        </p:spPr>
+      </p:sp>
+      <p:sp>
+        <p:nvSpPr>
+          <p:cNvPr id="5" name="fila 1"/>
+          <p:cNvSpPr/>
+          <p:nvPr/>
+        </p:nvSpPr>
+        <p:spPr>
+          <a:xfrm>
+            <a:off x="548640" y="1901952"/>
+            <a:ext cx="274320" cy="274320"/>
+          </a:xfrm>
+          <a:prstGeom prst="ellipse">
+            <a:avLst/>
+          </a:prstGeom>
+          <a:solidFill>
+            <a:srgbClr val="1BAF7A"/>
+          </a:solidFill>
+          <a:ln/>
+        </p:spPr>
+      </p:sp>
+      <p:sp>
+        <p:nvSpPr>
+          <p:cNvPr id="6" name="Text 4"/>
+          <p:cNvSpPr txBox="1"/>
+          <p:nvPr/>
+        </p:nvSpPr>
+        <p:spPr>
+          <a:xfrm>
+            <a:off x="1051560" y="1828800"/>
+            <a:ext cx="3840480" cy="457200"/>
+          </a:xfrm>
+          <a:prstGeom prst="rect">
+            <a:avLst/>
+          </a:prstGeom>
+          <a:noFill/>
+          <a:ln/>
+        </p:spPr>
+        <p:txBody>
+          <a:bodyPr wrap="square" lIns="0" tIns="0" rIns="0" bIns="0" rtlCol="0" anchor="t"/>
+          <a:lstStyle/>
+          <a:p>
+            <a:pPr indent="0" marL="0">
+              <a:lnSpc>
+                <a:spcPct val="100000"/>
+              </a:lnSpc>
+              <a:buNone/>
+            </a:pPr>
+            <a:r>
+              <a:rPr lang="en-US" sz="2400" dirty="0">
+                <a:solidFill>
+                  <a:srgbClr val="FFFFFF"/>
+                </a:solidFill>
+                <a:latin typeface="Georgia" pitchFamily="34" charset="0"/>
+                <a:ea typeface="Georgia" pitchFamily="34" charset="-122"/>
+                <a:cs typeface="Georgia" pitchFamily="34" charset="-120"/>
+              </a:rPr>
+              <a:t>Etiquetas abundantes</a:t>
+            </a:r>
+            <a:endParaRPr lang="en-US" sz="2400" dirty="0"/>
+          </a:p>
+        </p:txBody>
+      </p:sp>
+      <p:sp>
+        <p:nvSpPr>
+          <p:cNvPr id="7" name="Text 5"/>
+          <p:cNvSpPr txBox="1"/>
+          <p:nvPr/>
+        </p:nvSpPr>
+        <p:spPr>
+          <a:xfrm>
+            <a:off x="5029200" y="1874520"/>
+            <a:ext cx="6583680" cy="731520"/>
+          </a:xfrm>
+          <a:prstGeom prst="rect">
+            <a:avLst/>
+          </a:prstGeom>
+          <a:noFill/>
+          <a:ln/>
+        </p:spPr>
+        <p:txBody>
+          <a:bodyPr wrap="square" lIns="0" tIns="0" rIns="0" bIns="0" rtlCol="0" anchor="t"/>
+          <a:lstStyle/>
+          <a:p>
+            <a:pPr indent="0" marL="0">
+              <a:lnSpc>
+                <a:spcPct val="100000"/>
+              </a:lnSpc>
+              <a:buNone/>
+            </a:pPr>
+            <a:r>
+              <a:rPr lang="en-US" sz="1800" dirty="0">
+                <a:solidFill>
+                  <a:srgbClr val="C8CEDA"/>
                 </a:solidFill>
                 <a:latin typeface="Arial" pitchFamily="34" charset="0"/>
                 <a:ea typeface="Arial" pitchFamily="34" charset="-122"/>
                 <a:cs typeface="Arial" pitchFamily="34" charset="-120"/>
               </a:rPr>
-              <a:t>HALLAZGOS</a:t>
-            </a:r>
-            <a:endParaRPr lang="en-US" sz="900" dirty="0"/>
-          </a:p>
-        </p:txBody>
-      </p:sp>
-      <p:sp>
-        <p:nvSpPr>
-          <p:cNvPr id="5" name="hallazgo 1"/>
-          <p:cNvSpPr/>
-          <p:nvPr/>
-        </p:nvSpPr>
-        <p:spPr>
-          <a:xfrm>
-            <a:off x="10899648" y="457200"/>
-            <a:ext cx="137160" cy="137160"/>
-          </a:xfrm>
-          <a:prstGeom prst="ellipse">
-            <a:avLst/>
-          </a:prstGeom>
-          <a:ln w="15875">
+              <a:t>Reentrenar: SGD online comete 73 errores, contra 133 de Hedge.</a:t>
+            </a:r>
+            <a:endParaRPr lang="en-US" sz="1800" dirty="0"/>
+          </a:p>
+        </p:txBody>
+      </p:sp>
+      <p:sp>
+        <p:nvSpPr>
+          <p:cNvPr id="8" name="Shape 6"/>
+          <p:cNvSpPr/>
+          <p:nvPr/>
+        </p:nvSpPr>
+        <p:spPr>
+          <a:xfrm>
+            <a:off x="548640" y="2697480"/>
+            <a:ext cx="11091672" cy="0"/>
+          </a:xfrm>
+          <a:prstGeom prst="line">
+            <a:avLst/>
+          </a:prstGeom>
+          <a:noFill/>
+          <a:ln w="9525">
             <a:solidFill>
-              <a:srgbClr val="9AA1AE"/>
+              <a:srgbClr val="3A4152"/>
             </a:solidFill>
             <a:prstDash val="solid"/>
           </a:ln>
@@ -7896,21 +10336,126 @@
       </p:sp>
       <p:sp>
         <p:nvSpPr>
-          <p:cNvPr id="6" name="hallazgo 2"/>
-          <p:cNvSpPr/>
-          <p:nvPr/>
-        </p:nvSpPr>
-        <p:spPr>
-          <a:xfrm>
-            <a:off x="11100816" y="457200"/>
-            <a:ext cx="137160" cy="137160"/>
-          </a:xfrm>
-          <a:prstGeom prst="ellipse">
-            <a:avLst/>
-          </a:prstGeom>
-          <a:ln w="15875">
+          <p:cNvPr id="9" name="fila 2"/>
+          <p:cNvSpPr/>
+          <p:nvPr/>
+        </p:nvSpPr>
+        <p:spPr>
+          <a:xfrm>
+            <a:off x="548640" y="2953512"/>
+            <a:ext cx="274320" cy="274320"/>
+          </a:xfrm>
+          <a:prstGeom prst="ellipse">
+            <a:avLst/>
+          </a:prstGeom>
+          <a:solidFill>
+            <a:srgbClr val="2A78D6"/>
+          </a:solidFill>
+          <a:ln/>
+        </p:spPr>
+      </p:sp>
+      <p:sp>
+        <p:nvSpPr>
+          <p:cNvPr id="10" name="Text 8"/>
+          <p:cNvSpPr txBox="1"/>
+          <p:nvPr/>
+        </p:nvSpPr>
+        <p:spPr>
+          <a:xfrm>
+            <a:off x="1051560" y="2880360"/>
+            <a:ext cx="3840480" cy="457200"/>
+          </a:xfrm>
+          <a:prstGeom prst="rect">
+            <a:avLst/>
+          </a:prstGeom>
+          <a:noFill/>
+          <a:ln/>
+        </p:spPr>
+        <p:txBody>
+          <a:bodyPr wrap="square" lIns="0" tIns="0" rIns="0" bIns="0" rtlCol="0" anchor="t"/>
+          <a:lstStyle/>
+          <a:p>
+            <a:pPr indent="0" marL="0">
+              <a:lnSpc>
+                <a:spcPct val="100000"/>
+              </a:lnSpc>
+              <a:buNone/>
+            </a:pPr>
+            <a:r>
+              <a:rPr lang="en-US" sz="2400" dirty="0">
+                <a:solidFill>
+                  <a:srgbClr val="FFFFFF"/>
+                </a:solidFill>
+                <a:latin typeface="Georgia" pitchFamily="34" charset="0"/>
+                <a:ea typeface="Georgia" pitchFamily="34" charset="-122"/>
+                <a:cs typeface="Georgia" pitchFamily="34" charset="-120"/>
+              </a:rPr>
+              <a:t>Etiquetas escasas</a:t>
+            </a:r>
+            <a:endParaRPr lang="en-US" sz="2400" dirty="0"/>
+          </a:p>
+        </p:txBody>
+      </p:sp>
+      <p:sp>
+        <p:nvSpPr>
+          <p:cNvPr id="11" name="Text 9"/>
+          <p:cNvSpPr txBox="1"/>
+          <p:nvPr/>
+        </p:nvSpPr>
+        <p:spPr>
+          <a:xfrm>
+            <a:off x="5029200" y="2926080"/>
+            <a:ext cx="6583680" cy="731520"/>
+          </a:xfrm>
+          <a:prstGeom prst="rect">
+            <a:avLst/>
+          </a:prstGeom>
+          <a:noFill/>
+          <a:ln/>
+        </p:spPr>
+        <p:txBody>
+          <a:bodyPr wrap="square" lIns="0" tIns="0" rIns="0" bIns="0" rtlCol="0" anchor="t"/>
+          <a:lstStyle/>
+          <a:p>
+            <a:pPr indent="0" marL="0">
+              <a:lnSpc>
+                <a:spcPct val="100000"/>
+              </a:lnSpc>
+              <a:buNone/>
+            </a:pPr>
+            <a:r>
+              <a:rPr lang="en-US" sz="1800" dirty="0">
+                <a:solidFill>
+                  <a:srgbClr val="C8CEDA"/>
+                </a:solidFill>
+                <a:latin typeface="Arial" pitchFamily="34" charset="0"/>
+                <a:ea typeface="Arial" pitchFamily="34" charset="-122"/>
+                <a:cs typeface="Arial" pitchFamily="34" charset="-120"/>
+              </a:rPr>
+              <a:t>Combinar expertos diversos, con al menos uno robusto al ataque.</a:t>
+            </a:r>
+            <a:endParaRPr lang="en-US" sz="1800" dirty="0"/>
+          </a:p>
+        </p:txBody>
+      </p:sp>
+      <p:sp>
+        <p:nvSpPr>
+          <p:cNvPr id="12" name="Shape 10"/>
+          <p:cNvSpPr/>
+          <p:nvPr/>
+        </p:nvSpPr>
+        <p:spPr>
+          <a:xfrm>
+            <a:off x="548640" y="3749040"/>
+            <a:ext cx="11091672" cy="0"/>
+          </a:xfrm>
+          <a:prstGeom prst="line">
+            <a:avLst/>
+          </a:prstGeom>
+          <a:noFill/>
+          <a:ln w="9525">
             <a:solidFill>
-              <a:srgbClr val="9AA1AE"/>
+              <a:srgbClr val="3A4152"/>
             </a:solidFill>
             <a:prstDash val="solid"/>
           </a:ln>
@@ -7918,21 +10463,126 @@
       </p:sp>
       <p:sp>
         <p:nvSpPr>
-          <p:cNvPr id="7" name="hallazgo 3"/>
-          <p:cNvSpPr/>
-          <p:nvPr/>
-        </p:nvSpPr>
-        <p:spPr>
-          <a:xfrm>
-            <a:off x="11301984" y="457200"/>
-            <a:ext cx="137160" cy="137160"/>
-          </a:xfrm>
-          <a:prstGeom prst="ellipse">
-            <a:avLst/>
-          </a:prstGeom>
-          <a:ln w="15875">
+          <p:cNvPr id="13" name="fila 3"/>
+          <p:cNvSpPr/>
+          <p:nvPr/>
+        </p:nvSpPr>
+        <p:spPr>
+          <a:xfrm>
+            <a:off x="548640" y="4005072"/>
+            <a:ext cx="274320" cy="274320"/>
+          </a:xfrm>
+          <a:prstGeom prst="ellipse">
+            <a:avLst/>
+          </a:prstGeom>
+          <a:solidFill>
+            <a:srgbClr val="C8CEDA"/>
+          </a:solidFill>
+          <a:ln/>
+        </p:spPr>
+      </p:sp>
+      <p:sp>
+        <p:nvSpPr>
+          <p:cNvPr id="14" name="Text 12"/>
+          <p:cNvSpPr txBox="1"/>
+          <p:nvPr/>
+        </p:nvSpPr>
+        <p:spPr>
+          <a:xfrm>
+            <a:off x="1051560" y="3931920"/>
+            <a:ext cx="3840480" cy="457200"/>
+          </a:xfrm>
+          <a:prstGeom prst="rect">
+            <a:avLst/>
+          </a:prstGeom>
+          <a:noFill/>
+          <a:ln/>
+        </p:spPr>
+        <p:txBody>
+          <a:bodyPr wrap="square" lIns="0" tIns="0" rIns="0" bIns="0" rtlCol="0" anchor="t"/>
+          <a:lstStyle/>
+          <a:p>
+            <a:pPr indent="0" marL="0">
+              <a:lnSpc>
+                <a:spcPct val="100000"/>
+              </a:lnSpc>
+              <a:buNone/>
+            </a:pPr>
+            <a:r>
+              <a:rPr lang="en-US" sz="2400" dirty="0">
+                <a:solidFill>
+                  <a:srgbClr val="FFFFFF"/>
+                </a:solidFill>
+                <a:latin typeface="Georgia" pitchFamily="34" charset="0"/>
+                <a:ea typeface="Georgia" pitchFamily="34" charset="-122"/>
+                <a:cs typeface="Georgia" pitchFamily="34" charset="-120"/>
+              </a:rPr>
+              <a:t>Siempre</a:t>
+            </a:r>
+            <a:endParaRPr lang="en-US" sz="2400" dirty="0"/>
+          </a:p>
+        </p:txBody>
+      </p:sp>
+      <p:sp>
+        <p:nvSpPr>
+          <p:cNvPr id="15" name="Text 13"/>
+          <p:cNvSpPr txBox="1"/>
+          <p:nvPr/>
+        </p:nvSpPr>
+        <p:spPr>
+          <a:xfrm>
+            <a:off x="5029200" y="3977640"/>
+            <a:ext cx="6583680" cy="731520"/>
+          </a:xfrm>
+          <a:prstGeom prst="rect">
+            <a:avLst/>
+          </a:prstGeom>
+          <a:noFill/>
+          <a:ln/>
+        </p:spPr>
+        <p:txBody>
+          <a:bodyPr wrap="square" lIns="0" tIns="0" rIns="0" bIns="0" rtlCol="0" anchor="t"/>
+          <a:lstStyle/>
+          <a:p>
+            <a:pPr indent="0" marL="0">
+              <a:lnSpc>
+                <a:spcPct val="100000"/>
+              </a:lnSpc>
+              <a:buNone/>
+            </a:pPr>
+            <a:r>
+              <a:rPr lang="en-US" sz="1800" dirty="0">
+                <a:solidFill>
+                  <a:srgbClr val="C8CEDA"/>
+                </a:solidFill>
+                <a:latin typeface="Arial" pitchFamily="34" charset="0"/>
+                <a:ea typeface="Arial" pitchFamily="34" charset="-122"/>
+                <a:cs typeface="Arial" pitchFamily="34" charset="-120"/>
+              </a:rPr>
+              <a:t>Medir spam atrapado y legítimo bloqueado por separado, no accuracy.</a:t>
+            </a:r>
+            <a:endParaRPr lang="en-US" sz="1800" dirty="0"/>
+          </a:p>
+        </p:txBody>
+      </p:sp>
+      <p:sp>
+        <p:nvSpPr>
+          <p:cNvPr id="16" name="Shape 14"/>
+          <p:cNvSpPr/>
+          <p:nvPr/>
+        </p:nvSpPr>
+        <p:spPr>
+          <a:xfrm>
+            <a:off x="548640" y="4800600"/>
+            <a:ext cx="11091672" cy="0"/>
+          </a:xfrm>
+          <a:prstGeom prst="line">
+            <a:avLst/>
+          </a:prstGeom>
+          <a:noFill/>
+          <a:ln w="9525">
             <a:solidFill>
-              <a:srgbClr val="9AA1AE"/>
+              <a:srgbClr val="3A4152"/>
             </a:solidFill>
             <a:prstDash val="solid"/>
           </a:ln>
@@ -7940,755 +10590,43 @@
       </p:sp>
       <p:sp>
         <p:nvSpPr>
-          <p:cNvPr id="8" name="hallazgo 4"/>
-          <p:cNvSpPr/>
-          <p:nvPr/>
-        </p:nvSpPr>
-        <p:spPr>
-          <a:xfrm>
-            <a:off x="11503152" y="457200"/>
-            <a:ext cx="137160" cy="137160"/>
-          </a:xfrm>
-          <a:prstGeom prst="ellipse">
-            <a:avLst/>
-          </a:prstGeom>
-          <a:ln w="15875">
-            <a:solidFill>
-              <a:srgbClr val="9AA1AE"/>
-            </a:solidFill>
-            <a:prstDash val="solid"/>
-          </a:ln>
-        </p:spPr>
-      </p:sp>
-      <p:sp>
-        <p:nvSpPr>
-          <p:cNvPr id="9" name="Shape 7"/>
-          <p:cNvSpPr/>
-          <p:nvPr/>
-        </p:nvSpPr>
-        <p:spPr>
-          <a:xfrm>
-            <a:off x="548640" y="1828800"/>
-            <a:ext cx="3520440" cy="0"/>
-          </a:xfrm>
-          <a:prstGeom prst="line">
-            <a:avLst/>
-          </a:prstGeom>
-          <a:noFill/>
-          <a:ln w="9525">
-            <a:solidFill>
-              <a:srgbClr val="1F2430"/>
-            </a:solidFill>
-            <a:prstDash val="solid"/>
-          </a:ln>
-        </p:spPr>
-      </p:sp>
-      <p:sp>
-        <p:nvSpPr>
-          <p:cNvPr id="10" name="Text 8"/>
-          <p:cNvSpPr txBox="1"/>
-          <p:nvPr/>
-        </p:nvSpPr>
-        <p:spPr>
-          <a:xfrm>
-            <a:off x="548640" y="2011680"/>
-            <a:ext cx="3474720" cy="640080"/>
-          </a:xfrm>
-          <a:prstGeom prst="rect">
-            <a:avLst/>
-          </a:prstGeom>
-          <a:noFill/>
-          <a:ln/>
-        </p:spPr>
-        <p:txBody>
-          <a:bodyPr wrap="square" lIns="0" tIns="0" rIns="0" bIns="0" rtlCol="0" anchor="t"/>
-          <a:lstStyle/>
-          <a:p>
-            <a:pPr indent="0" marL="0">
-              <a:lnSpc>
-                <a:spcPct val="100000"/>
-              </a:lnSpc>
-              <a:buNone/>
-            </a:pPr>
-            <a:r>
-              <a:rPr lang="en-US" sz="1900" dirty="0">
-                <a:solidFill>
-                  <a:srgbClr val="1F2430"/>
+          <p:cNvPr id="17" name="Text 15"/>
+          <p:cNvSpPr txBox="1"/>
+          <p:nvPr/>
+        </p:nvSpPr>
+        <p:spPr>
+          <a:xfrm>
+            <a:off x="548640" y="5257800"/>
+            <a:ext cx="11064240" cy="640080"/>
+          </a:xfrm>
+          <a:prstGeom prst="rect">
+            <a:avLst/>
+          </a:prstGeom>
+          <a:noFill/>
+          <a:ln/>
+        </p:spPr>
+        <p:txBody>
+          <a:bodyPr wrap="square" lIns="0" tIns="0" rIns="0" bIns="0" rtlCol="0" anchor="t"/>
+          <a:lstStyle/>
+          <a:p>
+            <a:pPr indent="0" marL="0">
+              <a:lnSpc>
+                <a:spcPct val="100000"/>
+              </a:lnSpc>
+              <a:buNone/>
+            </a:pPr>
+            <a:r>
+              <a:rPr lang="en-US" sz="2000" i="1" dirty="0">
+                <a:solidFill>
+                  <a:srgbClr val="AFCBEE"/>
                 </a:solidFill>
                 <a:latin typeface="Georgia" pitchFamily="34" charset="0"/>
                 <a:ea typeface="Georgia" pitchFamily="34" charset="-122"/>
                 <a:cs typeface="Georgia" pitchFamily="34" charset="-120"/>
               </a:rPr>
-              <a:t>Drift sintético</a:t>
-            </a:r>
-            <a:endParaRPr lang="en-US" sz="1900" dirty="0"/>
-          </a:p>
-        </p:txBody>
-      </p:sp>
-      <p:sp>
-        <p:nvSpPr>
-          <p:cNvPr id="11" name="Text 9"/>
-          <p:cNvSpPr txBox="1"/>
-          <p:nvPr/>
-        </p:nvSpPr>
-        <p:spPr>
-          <a:xfrm>
-            <a:off x="548640" y="2697480"/>
-            <a:ext cx="3474720" cy="868680"/>
-          </a:xfrm>
-          <a:prstGeom prst="rect">
-            <a:avLst/>
-          </a:prstGeom>
-          <a:noFill/>
-          <a:ln/>
-        </p:spPr>
-        <p:txBody>
-          <a:bodyPr wrap="square" lIns="0" tIns="0" rIns="0" bIns="0" rtlCol="0" anchor="t"/>
-          <a:lstStyle/>
-          <a:p>
-            <a:pPr indent="0" marL="0">
-              <a:lnSpc>
-                <a:spcPct val="100000"/>
-              </a:lnSpc>
-              <a:buNone/>
-            </a:pPr>
-            <a:r>
-              <a:rPr lang="en-US" sz="1500" dirty="0">
-                <a:solidFill>
-                  <a:srgbClr val="5A6274"/>
-                </a:solidFill>
-                <a:latin typeface="Arial" pitchFamily="34" charset="0"/>
-                <a:ea typeface="Arial" pitchFamily="34" charset="-122"/>
-                <a:cs typeface="Arial" pitchFamily="34" charset="-120"/>
-              </a:rPr>
-              <a:t>El corpus no tiene fechas: el orden y el ataque son nuestros.</a:t>
-            </a:r>
-            <a:endParaRPr lang="en-US" sz="1500" dirty="0"/>
-          </a:p>
-        </p:txBody>
-      </p:sp>
-      <p:sp>
-        <p:nvSpPr>
-          <p:cNvPr id="12" name="Shape 10"/>
-          <p:cNvSpPr/>
-          <p:nvPr/>
-        </p:nvSpPr>
-        <p:spPr>
-          <a:xfrm>
-            <a:off x="4370832" y="1828800"/>
-            <a:ext cx="3520440" cy="0"/>
-          </a:xfrm>
-          <a:prstGeom prst="line">
-            <a:avLst/>
-          </a:prstGeom>
-          <a:noFill/>
-          <a:ln w="9525">
-            <a:solidFill>
-              <a:srgbClr val="1F2430"/>
-            </a:solidFill>
-            <a:prstDash val="solid"/>
-          </a:ln>
-        </p:spPr>
-      </p:sp>
-      <p:sp>
-        <p:nvSpPr>
-          <p:cNvPr id="13" name="Text 11"/>
-          <p:cNvSpPr txBox="1"/>
-          <p:nvPr/>
-        </p:nvSpPr>
-        <p:spPr>
-          <a:xfrm>
-            <a:off x="4370832" y="2011680"/>
-            <a:ext cx="3474720" cy="640080"/>
-          </a:xfrm>
-          <a:prstGeom prst="rect">
-            <a:avLst/>
-          </a:prstGeom>
-          <a:noFill/>
-          <a:ln/>
-        </p:spPr>
-        <p:txBody>
-          <a:bodyPr wrap="square" lIns="0" tIns="0" rIns="0" bIns="0" rtlCol="0" anchor="t"/>
-          <a:lstStyle/>
-          <a:p>
-            <a:pPr indent="0" marL="0">
-              <a:lnSpc>
-                <a:spcPct val="100000"/>
-              </a:lnSpc>
-              <a:buNone/>
-            </a:pPr>
-            <a:r>
-              <a:rPr lang="en-US" sz="1900" dirty="0">
-                <a:solidFill>
-                  <a:srgbClr val="1F2430"/>
-                </a:solidFill>
-                <a:latin typeface="Georgia" pitchFamily="34" charset="0"/>
-                <a:ea typeface="Georgia" pitchFamily="34" charset="-122"/>
-                <a:cs typeface="Georgia" pitchFamily="34" charset="-120"/>
-              </a:rPr>
-              <a:t>Adversario que no reacciona</a:t>
-            </a:r>
-            <a:endParaRPr lang="en-US" sz="1900" dirty="0"/>
-          </a:p>
-        </p:txBody>
-      </p:sp>
-      <p:sp>
-        <p:nvSpPr>
-          <p:cNvPr id="14" name="Text 12"/>
-          <p:cNvSpPr txBox="1"/>
-          <p:nvPr/>
-        </p:nvSpPr>
-        <p:spPr>
-          <a:xfrm>
-            <a:off x="4370832" y="2697480"/>
-            <a:ext cx="3474720" cy="868680"/>
-          </a:xfrm>
-          <a:prstGeom prst="rect">
-            <a:avLst/>
-          </a:prstGeom>
-          <a:noFill/>
-          <a:ln/>
-        </p:spPr>
-        <p:txBody>
-          <a:bodyPr wrap="square" lIns="0" tIns="0" rIns="0" bIns="0" rtlCol="0" anchor="t"/>
-          <a:lstStyle/>
-          <a:p>
-            <a:pPr indent="0" marL="0">
-              <a:lnSpc>
-                <a:spcPct val="100000"/>
-              </a:lnSpc>
-              <a:buNone/>
-            </a:pPr>
-            <a:r>
-              <a:rPr lang="en-US" sz="1500" dirty="0">
-                <a:solidFill>
-                  <a:srgbClr val="5A6274"/>
-                </a:solidFill>
-                <a:latin typeface="Arial" pitchFamily="34" charset="0"/>
-                <a:ea typeface="Arial" pitchFamily="34" charset="-122"/>
-                <a:cs typeface="Arial" pitchFamily="34" charset="-120"/>
-              </a:rPr>
-              <a:t>Uno adaptativo degradaría las tasas de √T a T^(2/3).</a:t>
-            </a:r>
-            <a:endParaRPr lang="en-US" sz="1500" dirty="0"/>
-          </a:p>
-        </p:txBody>
-      </p:sp>
-      <p:sp>
-        <p:nvSpPr>
-          <p:cNvPr id="15" name="Shape 13"/>
-          <p:cNvSpPr/>
-          <p:nvPr/>
-        </p:nvSpPr>
-        <p:spPr>
-          <a:xfrm>
-            <a:off x="8193024" y="1828800"/>
-            <a:ext cx="3520440" cy="0"/>
-          </a:xfrm>
-          <a:prstGeom prst="line">
-            <a:avLst/>
-          </a:prstGeom>
-          <a:noFill/>
-          <a:ln w="9525">
-            <a:solidFill>
-              <a:srgbClr val="1F2430"/>
-            </a:solidFill>
-            <a:prstDash val="solid"/>
-          </a:ln>
-        </p:spPr>
-      </p:sp>
-      <p:sp>
-        <p:nvSpPr>
-          <p:cNvPr id="16" name="Text 14"/>
-          <p:cNvSpPr txBox="1"/>
-          <p:nvPr/>
-        </p:nvSpPr>
-        <p:spPr>
-          <a:xfrm>
-            <a:off x="8193024" y="2011680"/>
-            <a:ext cx="3474720" cy="640080"/>
-          </a:xfrm>
-          <a:prstGeom prst="rect">
-            <a:avLst/>
-          </a:prstGeom>
-          <a:noFill/>
-          <a:ln/>
-        </p:spPr>
-        <p:txBody>
-          <a:bodyPr wrap="square" lIns="0" tIns="0" rIns="0" bIns="0" rtlCol="0" anchor="t"/>
-          <a:lstStyle/>
-          <a:p>
-            <a:pPr indent="0" marL="0">
-              <a:lnSpc>
-                <a:spcPct val="100000"/>
-              </a:lnSpc>
-              <a:buNone/>
-            </a:pPr>
-            <a:r>
-              <a:rPr lang="en-US" sz="1900" dirty="0">
-                <a:solidFill>
-                  <a:srgbClr val="1F2430"/>
-                </a:solidFill>
-                <a:latin typeface="Georgia" pitchFamily="34" charset="0"/>
-                <a:ea typeface="Georgia" pitchFamily="34" charset="-122"/>
-                <a:cs typeface="Georgia" pitchFamily="34" charset="-120"/>
-              </a:rPr>
-              <a:t>Experto robusto por construcción</a:t>
-            </a:r>
-            <a:endParaRPr lang="en-US" sz="1900" dirty="0"/>
-          </a:p>
-        </p:txBody>
-      </p:sp>
-      <p:sp>
-        <p:nvSpPr>
-          <p:cNvPr id="17" name="Text 15"/>
-          <p:cNvSpPr txBox="1"/>
-          <p:nvPr/>
-        </p:nvSpPr>
-        <p:spPr>
-          <a:xfrm>
-            <a:off x="8193024" y="2697480"/>
-            <a:ext cx="3474720" cy="868680"/>
-          </a:xfrm>
-          <a:prstGeom prst="rect">
-            <a:avLst/>
-          </a:prstGeom>
-          <a:noFill/>
-          <a:ln/>
-        </p:spPr>
-        <p:txBody>
-          <a:bodyPr wrap="square" lIns="0" tIns="0" rIns="0" bIns="0" rtlCol="0" anchor="t"/>
-          <a:lstStyle/>
-          <a:p>
-            <a:pPr indent="0" marL="0">
-              <a:lnSpc>
-                <a:spcPct val="100000"/>
-              </a:lnSpc>
-              <a:buNone/>
-            </a:pPr>
-            <a:r>
-              <a:rPr lang="en-US" sz="1500" dirty="0">
-                <a:solidFill>
-                  <a:srgbClr val="5A6274"/>
-                </a:solidFill>
-                <a:latin typeface="Arial" pitchFamily="34" charset="0"/>
-                <a:ea typeface="Arial" pitchFamily="34" charset="-122"/>
-                <a:cs typeface="Arial" pitchFamily="34" charset="-120"/>
-              </a:rPr>
-              <a:t>El ataque no toca dígitos ni símbolos; uno que lo hiciera lo rompería.</a:t>
-            </a:r>
-            <a:endParaRPr lang="en-US" sz="1500" dirty="0"/>
-          </a:p>
-        </p:txBody>
-      </p:sp>
-      <p:sp>
-        <p:nvSpPr>
-          <p:cNvPr id="18" name="Shape 16"/>
-          <p:cNvSpPr/>
-          <p:nvPr/>
-        </p:nvSpPr>
-        <p:spPr>
-          <a:xfrm>
-            <a:off x="548640" y="3931920"/>
-            <a:ext cx="3520440" cy="0"/>
-          </a:xfrm>
-          <a:prstGeom prst="line">
-            <a:avLst/>
-          </a:prstGeom>
-          <a:noFill/>
-          <a:ln w="9525">
-            <a:solidFill>
-              <a:srgbClr val="1F2430"/>
-            </a:solidFill>
-            <a:prstDash val="solid"/>
-          </a:ln>
-        </p:spPr>
-      </p:sp>
-      <p:sp>
-        <p:nvSpPr>
-          <p:cNvPr id="19" name="Text 17"/>
-          <p:cNvSpPr txBox="1"/>
-          <p:nvPr/>
-        </p:nvSpPr>
-        <p:spPr>
-          <a:xfrm>
-            <a:off x="548640" y="4114800"/>
-            <a:ext cx="3474720" cy="640080"/>
-          </a:xfrm>
-          <a:prstGeom prst="rect">
-            <a:avLst/>
-          </a:prstGeom>
-          <a:noFill/>
-          <a:ln/>
-        </p:spPr>
-        <p:txBody>
-          <a:bodyPr wrap="square" lIns="0" tIns="0" rIns="0" bIns="0" rtlCol="0" anchor="t"/>
-          <a:lstStyle/>
-          <a:p>
-            <a:pPr indent="0" marL="0">
-              <a:lnSpc>
-                <a:spcPct val="100000"/>
-              </a:lnSpc>
-              <a:buNone/>
-            </a:pPr>
-            <a:r>
-              <a:rPr lang="en-US" sz="1900" dirty="0">
-                <a:solidFill>
-                  <a:srgbClr val="1F2430"/>
-                </a:solidFill>
-                <a:latin typeface="Georgia" pitchFamily="34" charset="0"/>
-                <a:ea typeface="Georgia" pitchFamily="34" charset="-122"/>
-                <a:cs typeface="Georgia" pitchFamily="34" charset="-120"/>
-              </a:rPr>
-              <a:t>Pérdida 0-1 simétrica</a:t>
-            </a:r>
-            <a:endParaRPr lang="en-US" sz="1900" dirty="0"/>
-          </a:p>
-        </p:txBody>
-      </p:sp>
-      <p:sp>
-        <p:nvSpPr>
-          <p:cNvPr id="20" name="Text 18"/>
-          <p:cNvSpPr txBox="1"/>
-          <p:nvPr/>
-        </p:nvSpPr>
-        <p:spPr>
-          <a:xfrm>
-            <a:off x="548640" y="4800600"/>
-            <a:ext cx="3474720" cy="868680"/>
-          </a:xfrm>
-          <a:prstGeom prst="rect">
-            <a:avLst/>
-          </a:prstGeom>
-          <a:noFill/>
-          <a:ln/>
-        </p:spPr>
-        <p:txBody>
-          <a:bodyPr wrap="square" lIns="0" tIns="0" rIns="0" bIns="0" rtlCol="0" anchor="t"/>
-          <a:lstStyle/>
-          <a:p>
-            <a:pPr indent="0" marL="0">
-              <a:lnSpc>
-                <a:spcPct val="100000"/>
-              </a:lnSpc>
-              <a:buNone/>
-            </a:pPr>
-            <a:r>
-              <a:rPr lang="en-US" sz="1500" dirty="0">
-                <a:solidFill>
-                  <a:srgbClr val="5A6274"/>
-                </a:solidFill>
-                <a:latin typeface="Arial" pitchFamily="34" charset="0"/>
-                <a:ea typeface="Arial" pitchFamily="34" charset="-122"/>
-                <a:cs typeface="Arial" pitchFamily="34" charset="-120"/>
-              </a:rPr>
-              <a:t>Bloquear un mensaje legítimo cuesta más que dejar pasar spam.</a:t>
-            </a:r>
-            <a:endParaRPr lang="en-US" sz="1500" dirty="0"/>
-          </a:p>
-        </p:txBody>
-      </p:sp>
-      <p:sp>
-        <p:nvSpPr>
-          <p:cNvPr id="21" name="Shape 19"/>
-          <p:cNvSpPr/>
-          <p:nvPr/>
-        </p:nvSpPr>
-        <p:spPr>
-          <a:xfrm>
-            <a:off x="4370832" y="3931920"/>
-            <a:ext cx="3520440" cy="0"/>
-          </a:xfrm>
-          <a:prstGeom prst="line">
-            <a:avLst/>
-          </a:prstGeom>
-          <a:noFill/>
-          <a:ln w="9525">
-            <a:solidFill>
-              <a:srgbClr val="1F2430"/>
-            </a:solidFill>
-            <a:prstDash val="solid"/>
-          </a:ln>
-        </p:spPr>
-      </p:sp>
-      <p:sp>
-        <p:nvSpPr>
-          <p:cNvPr id="22" name="Text 20"/>
-          <p:cNvSpPr txBox="1"/>
-          <p:nvPr/>
-        </p:nvSpPr>
-        <p:spPr>
-          <a:xfrm>
-            <a:off x="4370832" y="4114800"/>
-            <a:ext cx="3474720" cy="640080"/>
-          </a:xfrm>
-          <a:prstGeom prst="rect">
-            <a:avLst/>
-          </a:prstGeom>
-          <a:noFill/>
-          <a:ln/>
-        </p:spPr>
-        <p:txBody>
-          <a:bodyPr wrap="square" lIns="0" tIns="0" rIns="0" bIns="0" rtlCol="0" anchor="t"/>
-          <a:lstStyle/>
-          <a:p>
-            <a:pPr indent="0" marL="0">
-              <a:lnSpc>
-                <a:spcPct val="100000"/>
-              </a:lnSpc>
-              <a:buNone/>
-            </a:pPr>
-            <a:r>
-              <a:rPr lang="en-US" sz="1900" dirty="0">
-                <a:solidFill>
-                  <a:srgbClr val="1F2430"/>
-                </a:solidFill>
-                <a:latin typeface="Georgia" pitchFamily="34" charset="0"/>
-                <a:ea typeface="Georgia" pitchFamily="34" charset="-122"/>
-                <a:cs typeface="Georgia" pitchFamily="34" charset="-120"/>
-              </a:rPr>
-              <a:t>Etiqueta de dos lados</a:t>
-            </a:r>
-            <a:endParaRPr lang="en-US" sz="1900" dirty="0"/>
-          </a:p>
-        </p:txBody>
-      </p:sp>
-      <p:sp>
-        <p:nvSpPr>
-          <p:cNvPr id="23" name="Text 21"/>
-          <p:cNvSpPr txBox="1"/>
-          <p:nvPr/>
-        </p:nvSpPr>
-        <p:spPr>
-          <a:xfrm>
-            <a:off x="4370832" y="4800600"/>
-            <a:ext cx="3474720" cy="868680"/>
-          </a:xfrm>
-          <a:prstGeom prst="rect">
-            <a:avLst/>
-          </a:prstGeom>
-          <a:noFill/>
-          <a:ln/>
-        </p:spPr>
-        <p:txBody>
-          <a:bodyPr wrap="square" lIns="0" tIns="0" rIns="0" bIns="0" rtlCol="0" anchor="t"/>
-          <a:lstStyle/>
-          <a:p>
-            <a:pPr indent="0" marL="0">
-              <a:lnSpc>
-                <a:spcPct val="100000"/>
-              </a:lnSpc>
-              <a:buNone/>
-            </a:pPr>
-            <a:r>
-              <a:rPr lang="en-US" sz="1500" dirty="0">
-                <a:solidFill>
-                  <a:srgbClr val="5A6274"/>
-                </a:solidFill>
-                <a:latin typeface="Arial" pitchFamily="34" charset="0"/>
-                <a:ea typeface="Arial" pitchFamily="34" charset="-122"/>
-                <a:cs typeface="Arial" pitchFamily="34" charset="-120"/>
-              </a:rPr>
-              <a:t>En la práctica solo se ven los errores de lo que se entrega.</a:t>
-            </a:r>
-            <a:endParaRPr lang="en-US" sz="1500" dirty="0"/>
-          </a:p>
-        </p:txBody>
-      </p:sp>
-      <p:sp>
-        <p:nvSpPr>
-          <p:cNvPr id="24" name="Shape 22"/>
-          <p:cNvSpPr/>
-          <p:nvPr/>
-        </p:nvSpPr>
-        <p:spPr>
-          <a:xfrm>
-            <a:off x="8193024" y="3931920"/>
-            <a:ext cx="3520440" cy="0"/>
-          </a:xfrm>
-          <a:prstGeom prst="line">
-            <a:avLst/>
-          </a:prstGeom>
-          <a:noFill/>
-          <a:ln w="9525">
-            <a:solidFill>
-              <a:srgbClr val="1F2430"/>
-            </a:solidFill>
-            <a:prstDash val="solid"/>
-          </a:ln>
-        </p:spPr>
-      </p:sp>
-      <p:sp>
-        <p:nvSpPr>
-          <p:cNvPr id="25" name="Text 23"/>
-          <p:cNvSpPr txBox="1"/>
-          <p:nvPr/>
-        </p:nvSpPr>
-        <p:spPr>
-          <a:xfrm>
-            <a:off x="8193024" y="4114800"/>
-            <a:ext cx="3474720" cy="640080"/>
-          </a:xfrm>
-          <a:prstGeom prst="rect">
-            <a:avLst/>
-          </a:prstGeom>
-          <a:noFill/>
-          <a:ln/>
-        </p:spPr>
-        <p:txBody>
-          <a:bodyPr wrap="square" lIns="0" tIns="0" rIns="0" bIns="0" rtlCol="0" anchor="t"/>
-          <a:lstStyle/>
-          <a:p>
-            <a:pPr indent="0" marL="0">
-              <a:lnSpc>
-                <a:spcPct val="100000"/>
-              </a:lnSpc>
-              <a:buNone/>
-            </a:pPr>
-            <a:r>
-              <a:rPr lang="en-US" sz="1900" dirty="0">
-                <a:solidFill>
-                  <a:srgbClr val="1F2430"/>
-                </a:solidFill>
-                <a:latin typeface="Georgia" pitchFamily="34" charset="0"/>
-                <a:ea typeface="Georgia" pitchFamily="34" charset="-122"/>
-                <a:cs typeface="Georgia" pitchFamily="34" charset="-120"/>
-              </a:rPr>
-              <a:t>Un solo corpus</a:t>
-            </a:r>
-            <a:endParaRPr lang="en-US" sz="1900" dirty="0"/>
-          </a:p>
-        </p:txBody>
-      </p:sp>
-      <p:sp>
-        <p:nvSpPr>
-          <p:cNvPr id="26" name="Text 24"/>
-          <p:cNvSpPr txBox="1"/>
-          <p:nvPr/>
-        </p:nvSpPr>
-        <p:spPr>
-          <a:xfrm>
-            <a:off x="8193024" y="4800600"/>
-            <a:ext cx="3474720" cy="868680"/>
-          </a:xfrm>
-          <a:prstGeom prst="rect">
-            <a:avLst/>
-          </a:prstGeom>
-          <a:noFill/>
-          <a:ln/>
-        </p:spPr>
-        <p:txBody>
-          <a:bodyPr wrap="square" lIns="0" tIns="0" rIns="0" bIns="0" rtlCol="0" anchor="t"/>
-          <a:lstStyle/>
-          <a:p>
-            <a:pPr indent="0" marL="0">
-              <a:lnSpc>
-                <a:spcPct val="100000"/>
-              </a:lnSpc>
-              <a:buNone/>
-            </a:pPr>
-            <a:r>
-              <a:rPr lang="en-US" sz="1500" dirty="0">
-                <a:solidFill>
-                  <a:srgbClr val="5A6274"/>
-                </a:solidFill>
-                <a:latin typeface="Arial" pitchFamily="34" charset="0"/>
-                <a:ea typeface="Arial" pitchFamily="34" charset="-122"/>
-                <a:cs typeface="Arial" pitchFamily="34" charset="-120"/>
-              </a:rPr>
-              <a:t>5.574 SMS en inglés, ~305 spams atacados por semilla.</a:t>
-            </a:r>
-            <a:endParaRPr lang="en-US" sz="1500" dirty="0"/>
-          </a:p>
-        </p:txBody>
-      </p:sp>
-      <p:sp>
-        <p:nvSpPr>
-          <p:cNvPr id="27" name="Text 25"/>
-          <p:cNvSpPr txBox="1"/>
-          <p:nvPr/>
-        </p:nvSpPr>
-        <p:spPr>
-          <a:xfrm>
-            <a:off x="548640" y="6373368"/>
-            <a:ext cx="10241280" cy="274320"/>
-          </a:xfrm>
-          <a:prstGeom prst="rect">
-            <a:avLst/>
-          </a:prstGeom>
-          <a:noFill/>
-          <a:ln/>
-        </p:spPr>
-        <p:txBody>
-          <a:bodyPr wrap="square" lIns="0" tIns="0" rIns="0" bIns="0" rtlCol="0" anchor="t"/>
-          <a:lstStyle/>
-          <a:p>
-            <a:pPr indent="0" marL="0">
-              <a:lnSpc>
-                <a:spcPct val="100000"/>
-              </a:lnSpc>
-              <a:buNone/>
-            </a:pPr>
-            <a:r>
-              <a:rPr lang="en-US" sz="1000" dirty="0">
-                <a:solidFill>
-                  <a:srgbClr val="9AA1AE"/>
-                </a:solidFill>
-                <a:latin typeface="Arial" pitchFamily="34" charset="0"/>
-                <a:ea typeface="Arial" pitchFamily="34" charset="-122"/>
-                <a:cs typeface="Arial" pitchFamily="34" charset="-120"/>
-              </a:rPr>
-              <a:t>Detalle en la sección de limitaciones del paper.</a:t>
-            </a:r>
-            <a:endParaRPr lang="en-US" sz="1000" dirty="0"/>
-          </a:p>
-        </p:txBody>
-      </p:sp>
-      <p:sp>
-        <p:nvSpPr>
-          <p:cNvPr id="25" name="Slide Number Placeholder 0"/>
-          <p:cNvSpPr>
-            <a:spLocks noGrp="1"/>
-          </p:cNvSpPr>
-          <p:nvPr>
-            <p:ph type="sldNum" sz="quarter" idx="4294967295"/>
-          </p:nvPr>
-        </p:nvSpPr>
-        <p:spPr>
-          <a:xfrm>
-            <a:off x="11091672" y="6373368"/>
-            <a:ext cx="548640" cy="274320"/>
-          </a:xfrm>
-          <a:prstGeom prst="rect">
-            <a:avLst/>
-          </a:prstGeom>
-          <a:extLst>
-            <a:ext uri="{C572A759-6A51-4108-AA02-DFA0A04FC94B}">
-              <ma14:wrappingTextBoxFlag xmlns:ma14="http://schemas.microsoft.com/office/mac/drawingml/2011/main" val="0"/>
-            </a:ext>
-          </a:extLst>
-        </p:spPr>
-        <p:txBody>
-          <a:bodyPr/>
-          <a:lstStyle>
-            <a:lvl1pPr>
-              <a:defRPr sz="1000">
-                <a:solidFill>
-                  <a:srgbClr val="9AA1AE"/>
-                </a:solidFill>
-                <a:latin typeface="Arial"/>
-                <a:ea typeface="Arial"/>
-                <a:cs typeface="Arial"/>
-              </a:defRPr>
-            </a:lvl1pPr>
-          </a:lstStyle>
-          <a:p>
-            <a:pPr algn="r"/>
-            <a:fld id="{F7021451-1387-4CA6-816F-3879F97B5CBC}" type="slidenum">
-              <a:rPr b="0" lang="en-US"/>
-              <a:t>17</a:t>
-            </a:fld>
-            <a:endParaRPr lang="en-US"/>
+              <a:t>Pregunta abierta: ¿y si el modelo que reentrena fuera uno más de los expertos de Hedge? No lo probamos.</a:t>
+            </a:r>
+            <a:endParaRPr lang="en-US" sz="2000" dirty="0"/>
           </a:p>
         </p:txBody>
       </p:sp>
@@ -8706,6 +10644,979 @@
 <file path=ppt/slides/slide18.xml><?xml version="1.0" encoding="utf-8"?>
 <p:sld xmlns:a="http://schemas.openxmlformats.org/drawingml/2006/main" xmlns:r="http://schemas.openxmlformats.org/officeDocument/2006/relationships" xmlns:p="http://schemas.openxmlformats.org/presentationml/2006/main">
   <p:cSld name="Slide 18">
+    <p:spTree>
+      <p:nvGrpSpPr>
+        <p:cNvPr id="1" name=""/>
+        <p:cNvGrpSpPr/>
+        <p:nvPr/>
+      </p:nvGrpSpPr>
+      <p:grpSpPr>
+        <a:xfrm>
+          <a:off x="0" y="0"/>
+          <a:ext cx="0" cy="0"/>
+          <a:chOff x="0" y="0"/>
+          <a:chExt cx="0" cy="0"/>
+        </a:xfrm>
+      </p:grpSpPr>
+      <p:sp>
+        <p:nvSpPr>
+          <p:cNvPr id="2" name="Text 0"/>
+          <p:cNvSpPr txBox="1"/>
+          <p:nvPr/>
+        </p:nvSpPr>
+        <p:spPr>
+          <a:xfrm>
+            <a:off x="548640" y="411480"/>
+            <a:ext cx="7315200" cy="228600"/>
+          </a:xfrm>
+          <a:prstGeom prst="rect">
+            <a:avLst/>
+          </a:prstGeom>
+          <a:noFill/>
+          <a:ln/>
+        </p:spPr>
+        <p:txBody>
+          <a:bodyPr wrap="square" lIns="0" tIns="0" rIns="0" bIns="0" rtlCol="0" anchor="t"/>
+          <a:lstStyle/>
+          <a:p>
+            <a:pPr indent="0" marL="0">
+              <a:lnSpc>
+                <a:spcPct val="100000"/>
+              </a:lnSpc>
+              <a:buNone/>
+            </a:pPr>
+            <a:r>
+              <a:rPr lang="en-US" sz="1100" b="1" spc="200" kern="0" dirty="0">
+                <a:solidFill>
+                  <a:srgbClr val="5A6274"/>
+                </a:solidFill>
+                <a:latin typeface="Arial" pitchFamily="34" charset="0"/>
+                <a:ea typeface="Arial" pitchFamily="34" charset="-122"/>
+                <a:cs typeface="Arial" pitchFamily="34" charset="-120"/>
+              </a:rPr>
+              <a:t>LIMITACIONES</a:t>
+            </a:r>
+            <a:endParaRPr lang="en-US" sz="1100" dirty="0"/>
+          </a:p>
+        </p:txBody>
+      </p:sp>
+      <p:sp>
+        <p:nvSpPr>
+          <p:cNvPr id="3" name="Text 0"/>
+          <p:cNvSpPr/>
+          <p:nvPr>
+            <p:ph idx="100" type="title" hasCustomPrompt="1"/>
+          </p:nvPr>
+        </p:nvSpPr>
+        <p:spPr>
+          <a:xfrm>
+            <a:off x="548640" y="731520"/>
+            <a:ext cx="10424160" cy="566928"/>
+          </a:xfrm>
+          <a:prstGeom prst="rect">
+            <a:avLst/>
+          </a:prstGeom>
+          <a:noFill/>
+          <a:ln/>
+        </p:spPr>
+        <p:txBody>
+          <a:bodyPr wrap="square" lIns="0" tIns="0" rIns="0" bIns="0" rtlCol="0" anchor="t"/>
+          <a:lstStyle/>
+          <a:p>
+            <a:pPr indent="0" marL="0">
+              <a:buNone/>
+            </a:pPr>
+            <a:r>
+              <a:rPr lang="en-US" sz="3000" dirty="0">
+                <a:solidFill>
+                  <a:srgbClr val="1F2430"/>
+                </a:solidFill>
+                <a:latin typeface="Georgia" pitchFamily="34" charset="0"/>
+                <a:ea typeface="Georgia" pitchFamily="34" charset="-122"/>
+                <a:cs typeface="Georgia" pitchFamily="34" charset="-120"/>
+              </a:rPr>
+              <a:t>Lo que este trabajo no muestra</a:t>
+            </a:r>
+            <a:endParaRPr lang="en-US" sz="3000" dirty="0"/>
+          </a:p>
+        </p:txBody>
+      </p:sp>
+      <p:sp>
+        <p:nvSpPr>
+          <p:cNvPr id="4" name="Text 2"/>
+          <p:cNvSpPr txBox="1"/>
+          <p:nvPr/>
+        </p:nvSpPr>
+        <p:spPr>
+          <a:xfrm>
+            <a:off x="9235440" y="429768"/>
+            <a:ext cx="1554480" cy="201168"/>
+          </a:xfrm>
+          <a:prstGeom prst="rect">
+            <a:avLst/>
+          </a:prstGeom>
+          <a:noFill/>
+          <a:ln/>
+        </p:spPr>
+        <p:txBody>
+          <a:bodyPr wrap="square" lIns="0" tIns="0" rIns="0" bIns="0" rtlCol="0" anchor="t"/>
+          <a:lstStyle/>
+          <a:p>
+            <a:pPr algn="r" indent="0" marL="0">
+              <a:lnSpc>
+                <a:spcPct val="100000"/>
+              </a:lnSpc>
+              <a:buNone/>
+            </a:pPr>
+            <a:r>
+              <a:rPr lang="en-US" sz="900" b="1" spc="200" kern="0" dirty="0">
+                <a:solidFill>
+                  <a:srgbClr val="9AA1AE"/>
+                </a:solidFill>
+                <a:latin typeface="Arial" pitchFamily="34" charset="0"/>
+                <a:ea typeface="Arial" pitchFamily="34" charset="-122"/>
+                <a:cs typeface="Arial" pitchFamily="34" charset="-120"/>
+              </a:rPr>
+              <a:t>HALLAZGOS</a:t>
+            </a:r>
+            <a:endParaRPr lang="en-US" sz="900" dirty="0"/>
+          </a:p>
+        </p:txBody>
+      </p:sp>
+      <p:sp>
+        <p:nvSpPr>
+          <p:cNvPr id="5" name="hallazgo 1"/>
+          <p:cNvSpPr/>
+          <p:nvPr/>
+        </p:nvSpPr>
+        <p:spPr>
+          <a:xfrm>
+            <a:off x="10899648" y="457200"/>
+            <a:ext cx="137160" cy="137160"/>
+          </a:xfrm>
+          <a:prstGeom prst="ellipse">
+            <a:avLst/>
+          </a:prstGeom>
+          <a:ln w="15875">
+            <a:solidFill>
+              <a:srgbClr val="9AA1AE"/>
+            </a:solidFill>
+            <a:prstDash val="solid"/>
+          </a:ln>
+        </p:spPr>
+      </p:sp>
+      <p:sp>
+        <p:nvSpPr>
+          <p:cNvPr id="6" name="hallazgo 2"/>
+          <p:cNvSpPr/>
+          <p:nvPr/>
+        </p:nvSpPr>
+        <p:spPr>
+          <a:xfrm>
+            <a:off x="11100816" y="457200"/>
+            <a:ext cx="137160" cy="137160"/>
+          </a:xfrm>
+          <a:prstGeom prst="ellipse">
+            <a:avLst/>
+          </a:prstGeom>
+          <a:ln w="15875">
+            <a:solidFill>
+              <a:srgbClr val="9AA1AE"/>
+            </a:solidFill>
+            <a:prstDash val="solid"/>
+          </a:ln>
+        </p:spPr>
+      </p:sp>
+      <p:sp>
+        <p:nvSpPr>
+          <p:cNvPr id="7" name="hallazgo 3"/>
+          <p:cNvSpPr/>
+          <p:nvPr/>
+        </p:nvSpPr>
+        <p:spPr>
+          <a:xfrm>
+            <a:off x="11301984" y="457200"/>
+            <a:ext cx="137160" cy="137160"/>
+          </a:xfrm>
+          <a:prstGeom prst="ellipse">
+            <a:avLst/>
+          </a:prstGeom>
+          <a:ln w="15875">
+            <a:solidFill>
+              <a:srgbClr val="9AA1AE"/>
+            </a:solidFill>
+            <a:prstDash val="solid"/>
+          </a:ln>
+        </p:spPr>
+      </p:sp>
+      <p:sp>
+        <p:nvSpPr>
+          <p:cNvPr id="8" name="hallazgo 4"/>
+          <p:cNvSpPr/>
+          <p:nvPr/>
+        </p:nvSpPr>
+        <p:spPr>
+          <a:xfrm>
+            <a:off x="11503152" y="457200"/>
+            <a:ext cx="137160" cy="137160"/>
+          </a:xfrm>
+          <a:prstGeom prst="ellipse">
+            <a:avLst/>
+          </a:prstGeom>
+          <a:ln w="15875">
+            <a:solidFill>
+              <a:srgbClr val="9AA1AE"/>
+            </a:solidFill>
+            <a:prstDash val="solid"/>
+          </a:ln>
+        </p:spPr>
+      </p:sp>
+      <p:sp>
+        <p:nvSpPr>
+          <p:cNvPr id="9" name="Shape 7"/>
+          <p:cNvSpPr/>
+          <p:nvPr/>
+        </p:nvSpPr>
+        <p:spPr>
+          <a:xfrm>
+            <a:off x="548640" y="1828800"/>
+            <a:ext cx="3520440" cy="0"/>
+          </a:xfrm>
+          <a:prstGeom prst="line">
+            <a:avLst/>
+          </a:prstGeom>
+          <a:noFill/>
+          <a:ln w="9525">
+            <a:solidFill>
+              <a:srgbClr val="1F2430"/>
+            </a:solidFill>
+            <a:prstDash val="solid"/>
+          </a:ln>
+        </p:spPr>
+      </p:sp>
+      <p:sp>
+        <p:nvSpPr>
+          <p:cNvPr id="10" name="Text 8"/>
+          <p:cNvSpPr txBox="1"/>
+          <p:nvPr/>
+        </p:nvSpPr>
+        <p:spPr>
+          <a:xfrm>
+            <a:off x="548640" y="2011680"/>
+            <a:ext cx="3474720" cy="640080"/>
+          </a:xfrm>
+          <a:prstGeom prst="rect">
+            <a:avLst/>
+          </a:prstGeom>
+          <a:noFill/>
+          <a:ln/>
+        </p:spPr>
+        <p:txBody>
+          <a:bodyPr wrap="square" lIns="0" tIns="0" rIns="0" bIns="0" rtlCol="0" anchor="t"/>
+          <a:lstStyle/>
+          <a:p>
+            <a:pPr indent="0" marL="0">
+              <a:lnSpc>
+                <a:spcPct val="100000"/>
+              </a:lnSpc>
+              <a:buNone/>
+            </a:pPr>
+            <a:r>
+              <a:rPr lang="en-US" sz="1900" dirty="0">
+                <a:solidFill>
+                  <a:srgbClr val="1F2430"/>
+                </a:solidFill>
+                <a:latin typeface="Georgia" pitchFamily="34" charset="0"/>
+                <a:ea typeface="Georgia" pitchFamily="34" charset="-122"/>
+                <a:cs typeface="Georgia" pitchFamily="34" charset="-120"/>
+              </a:rPr>
+              <a:t>Drift sintético</a:t>
+            </a:r>
+            <a:endParaRPr lang="en-US" sz="1900" dirty="0"/>
+          </a:p>
+        </p:txBody>
+      </p:sp>
+      <p:sp>
+        <p:nvSpPr>
+          <p:cNvPr id="11" name="Text 9"/>
+          <p:cNvSpPr txBox="1"/>
+          <p:nvPr/>
+        </p:nvSpPr>
+        <p:spPr>
+          <a:xfrm>
+            <a:off x="548640" y="2697480"/>
+            <a:ext cx="3474720" cy="868680"/>
+          </a:xfrm>
+          <a:prstGeom prst="rect">
+            <a:avLst/>
+          </a:prstGeom>
+          <a:noFill/>
+          <a:ln/>
+        </p:spPr>
+        <p:txBody>
+          <a:bodyPr wrap="square" lIns="0" tIns="0" rIns="0" bIns="0" rtlCol="0" anchor="t"/>
+          <a:lstStyle/>
+          <a:p>
+            <a:pPr indent="0" marL="0">
+              <a:lnSpc>
+                <a:spcPct val="100000"/>
+              </a:lnSpc>
+              <a:buNone/>
+            </a:pPr>
+            <a:r>
+              <a:rPr lang="en-US" sz="1500" dirty="0">
+                <a:solidFill>
+                  <a:srgbClr val="5A6274"/>
+                </a:solidFill>
+                <a:latin typeface="Arial" pitchFamily="34" charset="0"/>
+                <a:ea typeface="Arial" pitchFamily="34" charset="-122"/>
+                <a:cs typeface="Arial" pitchFamily="34" charset="-120"/>
+              </a:rPr>
+              <a:t>El corpus no tiene fechas: el orden y el ataque son nuestros.</a:t>
+            </a:r>
+            <a:endParaRPr lang="en-US" sz="1500" dirty="0"/>
+          </a:p>
+        </p:txBody>
+      </p:sp>
+      <p:sp>
+        <p:nvSpPr>
+          <p:cNvPr id="12" name="Shape 10"/>
+          <p:cNvSpPr/>
+          <p:nvPr/>
+        </p:nvSpPr>
+        <p:spPr>
+          <a:xfrm>
+            <a:off x="4370832" y="1828800"/>
+            <a:ext cx="3520440" cy="0"/>
+          </a:xfrm>
+          <a:prstGeom prst="line">
+            <a:avLst/>
+          </a:prstGeom>
+          <a:noFill/>
+          <a:ln w="9525">
+            <a:solidFill>
+              <a:srgbClr val="1F2430"/>
+            </a:solidFill>
+            <a:prstDash val="solid"/>
+          </a:ln>
+        </p:spPr>
+      </p:sp>
+      <p:sp>
+        <p:nvSpPr>
+          <p:cNvPr id="13" name="Text 11"/>
+          <p:cNvSpPr txBox="1"/>
+          <p:nvPr/>
+        </p:nvSpPr>
+        <p:spPr>
+          <a:xfrm>
+            <a:off x="4370832" y="2011680"/>
+            <a:ext cx="3474720" cy="640080"/>
+          </a:xfrm>
+          <a:prstGeom prst="rect">
+            <a:avLst/>
+          </a:prstGeom>
+          <a:noFill/>
+          <a:ln/>
+        </p:spPr>
+        <p:txBody>
+          <a:bodyPr wrap="square" lIns="0" tIns="0" rIns="0" bIns="0" rtlCol="0" anchor="t"/>
+          <a:lstStyle/>
+          <a:p>
+            <a:pPr indent="0" marL="0">
+              <a:lnSpc>
+                <a:spcPct val="100000"/>
+              </a:lnSpc>
+              <a:buNone/>
+            </a:pPr>
+            <a:r>
+              <a:rPr lang="en-US" sz="1900" dirty="0">
+                <a:solidFill>
+                  <a:srgbClr val="1F2430"/>
+                </a:solidFill>
+                <a:latin typeface="Georgia" pitchFamily="34" charset="0"/>
+                <a:ea typeface="Georgia" pitchFamily="34" charset="-122"/>
+                <a:cs typeface="Georgia" pitchFamily="34" charset="-120"/>
+              </a:rPr>
+              <a:t>Adversario que no reacciona</a:t>
+            </a:r>
+            <a:endParaRPr lang="en-US" sz="1900" dirty="0"/>
+          </a:p>
+        </p:txBody>
+      </p:sp>
+      <p:sp>
+        <p:nvSpPr>
+          <p:cNvPr id="14" name="Text 12"/>
+          <p:cNvSpPr txBox="1"/>
+          <p:nvPr/>
+        </p:nvSpPr>
+        <p:spPr>
+          <a:xfrm>
+            <a:off x="4370832" y="2697480"/>
+            <a:ext cx="3474720" cy="868680"/>
+          </a:xfrm>
+          <a:prstGeom prst="rect">
+            <a:avLst/>
+          </a:prstGeom>
+          <a:noFill/>
+          <a:ln/>
+        </p:spPr>
+        <p:txBody>
+          <a:bodyPr wrap="square" lIns="0" tIns="0" rIns="0" bIns="0" rtlCol="0" anchor="t"/>
+          <a:lstStyle/>
+          <a:p>
+            <a:pPr indent="0" marL="0">
+              <a:lnSpc>
+                <a:spcPct val="100000"/>
+              </a:lnSpc>
+              <a:buNone/>
+            </a:pPr>
+            <a:r>
+              <a:rPr lang="en-US" sz="1500" dirty="0">
+                <a:solidFill>
+                  <a:srgbClr val="5A6274"/>
+                </a:solidFill>
+                <a:latin typeface="Arial" pitchFamily="34" charset="0"/>
+                <a:ea typeface="Arial" pitchFamily="34" charset="-122"/>
+                <a:cs typeface="Arial" pitchFamily="34" charset="-120"/>
+              </a:rPr>
+              <a:t>Uno adaptativo degradaría las tasas de √T a T^(2/3).</a:t>
+            </a:r>
+            <a:endParaRPr lang="en-US" sz="1500" dirty="0"/>
+          </a:p>
+        </p:txBody>
+      </p:sp>
+      <p:sp>
+        <p:nvSpPr>
+          <p:cNvPr id="15" name="Shape 13"/>
+          <p:cNvSpPr/>
+          <p:nvPr/>
+        </p:nvSpPr>
+        <p:spPr>
+          <a:xfrm>
+            <a:off x="8193024" y="1828800"/>
+            <a:ext cx="3520440" cy="0"/>
+          </a:xfrm>
+          <a:prstGeom prst="line">
+            <a:avLst/>
+          </a:prstGeom>
+          <a:noFill/>
+          <a:ln w="9525">
+            <a:solidFill>
+              <a:srgbClr val="1F2430"/>
+            </a:solidFill>
+            <a:prstDash val="solid"/>
+          </a:ln>
+        </p:spPr>
+      </p:sp>
+      <p:sp>
+        <p:nvSpPr>
+          <p:cNvPr id="16" name="Text 14"/>
+          <p:cNvSpPr txBox="1"/>
+          <p:nvPr/>
+        </p:nvSpPr>
+        <p:spPr>
+          <a:xfrm>
+            <a:off x="8193024" y="2011680"/>
+            <a:ext cx="3474720" cy="640080"/>
+          </a:xfrm>
+          <a:prstGeom prst="rect">
+            <a:avLst/>
+          </a:prstGeom>
+          <a:noFill/>
+          <a:ln/>
+        </p:spPr>
+        <p:txBody>
+          <a:bodyPr wrap="square" lIns="0" tIns="0" rIns="0" bIns="0" rtlCol="0" anchor="t"/>
+          <a:lstStyle/>
+          <a:p>
+            <a:pPr indent="0" marL="0">
+              <a:lnSpc>
+                <a:spcPct val="100000"/>
+              </a:lnSpc>
+              <a:buNone/>
+            </a:pPr>
+            <a:r>
+              <a:rPr lang="en-US" sz="1900" dirty="0">
+                <a:solidFill>
+                  <a:srgbClr val="1F2430"/>
+                </a:solidFill>
+                <a:latin typeface="Georgia" pitchFamily="34" charset="0"/>
+                <a:ea typeface="Georgia" pitchFamily="34" charset="-122"/>
+                <a:cs typeface="Georgia" pitchFamily="34" charset="-120"/>
+              </a:rPr>
+              <a:t>Experto robusto por construcción</a:t>
+            </a:r>
+            <a:endParaRPr lang="en-US" sz="1900" dirty="0"/>
+          </a:p>
+        </p:txBody>
+      </p:sp>
+      <p:sp>
+        <p:nvSpPr>
+          <p:cNvPr id="17" name="Text 15"/>
+          <p:cNvSpPr txBox="1"/>
+          <p:nvPr/>
+        </p:nvSpPr>
+        <p:spPr>
+          <a:xfrm>
+            <a:off x="8193024" y="2697480"/>
+            <a:ext cx="3474720" cy="868680"/>
+          </a:xfrm>
+          <a:prstGeom prst="rect">
+            <a:avLst/>
+          </a:prstGeom>
+          <a:noFill/>
+          <a:ln/>
+        </p:spPr>
+        <p:txBody>
+          <a:bodyPr wrap="square" lIns="0" tIns="0" rIns="0" bIns="0" rtlCol="0" anchor="t"/>
+          <a:lstStyle/>
+          <a:p>
+            <a:pPr indent="0" marL="0">
+              <a:lnSpc>
+                <a:spcPct val="100000"/>
+              </a:lnSpc>
+              <a:buNone/>
+            </a:pPr>
+            <a:r>
+              <a:rPr lang="en-US" sz="1500" dirty="0">
+                <a:solidFill>
+                  <a:srgbClr val="5A6274"/>
+                </a:solidFill>
+                <a:latin typeface="Arial" pitchFamily="34" charset="0"/>
+                <a:ea typeface="Arial" pitchFamily="34" charset="-122"/>
+                <a:cs typeface="Arial" pitchFamily="34" charset="-120"/>
+              </a:rPr>
+              <a:t>El ataque no toca dígitos ni símbolos; uno que lo hiciera lo rompería.</a:t>
+            </a:r>
+            <a:endParaRPr lang="en-US" sz="1500" dirty="0"/>
+          </a:p>
+        </p:txBody>
+      </p:sp>
+      <p:sp>
+        <p:nvSpPr>
+          <p:cNvPr id="18" name="Shape 16"/>
+          <p:cNvSpPr/>
+          <p:nvPr/>
+        </p:nvSpPr>
+        <p:spPr>
+          <a:xfrm>
+            <a:off x="548640" y="3931920"/>
+            <a:ext cx="3520440" cy="0"/>
+          </a:xfrm>
+          <a:prstGeom prst="line">
+            <a:avLst/>
+          </a:prstGeom>
+          <a:noFill/>
+          <a:ln w="9525">
+            <a:solidFill>
+              <a:srgbClr val="1F2430"/>
+            </a:solidFill>
+            <a:prstDash val="solid"/>
+          </a:ln>
+        </p:spPr>
+      </p:sp>
+      <p:sp>
+        <p:nvSpPr>
+          <p:cNvPr id="19" name="Text 17"/>
+          <p:cNvSpPr txBox="1"/>
+          <p:nvPr/>
+        </p:nvSpPr>
+        <p:spPr>
+          <a:xfrm>
+            <a:off x="548640" y="4114800"/>
+            <a:ext cx="3474720" cy="640080"/>
+          </a:xfrm>
+          <a:prstGeom prst="rect">
+            <a:avLst/>
+          </a:prstGeom>
+          <a:noFill/>
+          <a:ln/>
+        </p:spPr>
+        <p:txBody>
+          <a:bodyPr wrap="square" lIns="0" tIns="0" rIns="0" bIns="0" rtlCol="0" anchor="t"/>
+          <a:lstStyle/>
+          <a:p>
+            <a:pPr indent="0" marL="0">
+              <a:lnSpc>
+                <a:spcPct val="100000"/>
+              </a:lnSpc>
+              <a:buNone/>
+            </a:pPr>
+            <a:r>
+              <a:rPr lang="en-US" sz="1900" dirty="0">
+                <a:solidFill>
+                  <a:srgbClr val="1F2430"/>
+                </a:solidFill>
+                <a:latin typeface="Georgia" pitchFamily="34" charset="0"/>
+                <a:ea typeface="Georgia" pitchFamily="34" charset="-122"/>
+                <a:cs typeface="Georgia" pitchFamily="34" charset="-120"/>
+              </a:rPr>
+              <a:t>Pérdida 0-1 simétrica</a:t>
+            </a:r>
+            <a:endParaRPr lang="en-US" sz="1900" dirty="0"/>
+          </a:p>
+        </p:txBody>
+      </p:sp>
+      <p:sp>
+        <p:nvSpPr>
+          <p:cNvPr id="20" name="Text 18"/>
+          <p:cNvSpPr txBox="1"/>
+          <p:nvPr/>
+        </p:nvSpPr>
+        <p:spPr>
+          <a:xfrm>
+            <a:off x="548640" y="4800600"/>
+            <a:ext cx="3474720" cy="868680"/>
+          </a:xfrm>
+          <a:prstGeom prst="rect">
+            <a:avLst/>
+          </a:prstGeom>
+          <a:noFill/>
+          <a:ln/>
+        </p:spPr>
+        <p:txBody>
+          <a:bodyPr wrap="square" lIns="0" tIns="0" rIns="0" bIns="0" rtlCol="0" anchor="t"/>
+          <a:lstStyle/>
+          <a:p>
+            <a:pPr indent="0" marL="0">
+              <a:lnSpc>
+                <a:spcPct val="100000"/>
+              </a:lnSpc>
+              <a:buNone/>
+            </a:pPr>
+            <a:r>
+              <a:rPr lang="en-US" sz="1500" dirty="0">
+                <a:solidFill>
+                  <a:srgbClr val="5A6274"/>
+                </a:solidFill>
+                <a:latin typeface="Arial" pitchFamily="34" charset="0"/>
+                <a:ea typeface="Arial" pitchFamily="34" charset="-122"/>
+                <a:cs typeface="Arial" pitchFamily="34" charset="-120"/>
+              </a:rPr>
+              <a:t>Bloquear un mensaje legítimo cuesta más que dejar pasar spam.</a:t>
+            </a:r>
+            <a:endParaRPr lang="en-US" sz="1500" dirty="0"/>
+          </a:p>
+        </p:txBody>
+      </p:sp>
+      <p:sp>
+        <p:nvSpPr>
+          <p:cNvPr id="21" name="Shape 19"/>
+          <p:cNvSpPr/>
+          <p:nvPr/>
+        </p:nvSpPr>
+        <p:spPr>
+          <a:xfrm>
+            <a:off x="4370832" y="3931920"/>
+            <a:ext cx="3520440" cy="0"/>
+          </a:xfrm>
+          <a:prstGeom prst="line">
+            <a:avLst/>
+          </a:prstGeom>
+          <a:noFill/>
+          <a:ln w="9525">
+            <a:solidFill>
+              <a:srgbClr val="1F2430"/>
+            </a:solidFill>
+            <a:prstDash val="solid"/>
+          </a:ln>
+        </p:spPr>
+      </p:sp>
+      <p:sp>
+        <p:nvSpPr>
+          <p:cNvPr id="22" name="Text 20"/>
+          <p:cNvSpPr txBox="1"/>
+          <p:nvPr/>
+        </p:nvSpPr>
+        <p:spPr>
+          <a:xfrm>
+            <a:off x="4370832" y="4114800"/>
+            <a:ext cx="3474720" cy="640080"/>
+          </a:xfrm>
+          <a:prstGeom prst="rect">
+            <a:avLst/>
+          </a:prstGeom>
+          <a:noFill/>
+          <a:ln/>
+        </p:spPr>
+        <p:txBody>
+          <a:bodyPr wrap="square" lIns="0" tIns="0" rIns="0" bIns="0" rtlCol="0" anchor="t"/>
+          <a:lstStyle/>
+          <a:p>
+            <a:pPr indent="0" marL="0">
+              <a:lnSpc>
+                <a:spcPct val="100000"/>
+              </a:lnSpc>
+              <a:buNone/>
+            </a:pPr>
+            <a:r>
+              <a:rPr lang="en-US" sz="1900" dirty="0">
+                <a:solidFill>
+                  <a:srgbClr val="1F2430"/>
+                </a:solidFill>
+                <a:latin typeface="Georgia" pitchFamily="34" charset="0"/>
+                <a:ea typeface="Georgia" pitchFamily="34" charset="-122"/>
+                <a:cs typeface="Georgia" pitchFamily="34" charset="-120"/>
+              </a:rPr>
+              <a:t>Etiqueta de dos lados</a:t>
+            </a:r>
+            <a:endParaRPr lang="en-US" sz="1900" dirty="0"/>
+          </a:p>
+        </p:txBody>
+      </p:sp>
+      <p:sp>
+        <p:nvSpPr>
+          <p:cNvPr id="23" name="Text 21"/>
+          <p:cNvSpPr txBox="1"/>
+          <p:nvPr/>
+        </p:nvSpPr>
+        <p:spPr>
+          <a:xfrm>
+            <a:off x="4370832" y="4800600"/>
+            <a:ext cx="3474720" cy="868680"/>
+          </a:xfrm>
+          <a:prstGeom prst="rect">
+            <a:avLst/>
+          </a:prstGeom>
+          <a:noFill/>
+          <a:ln/>
+        </p:spPr>
+        <p:txBody>
+          <a:bodyPr wrap="square" lIns="0" tIns="0" rIns="0" bIns="0" rtlCol="0" anchor="t"/>
+          <a:lstStyle/>
+          <a:p>
+            <a:pPr indent="0" marL="0">
+              <a:lnSpc>
+                <a:spcPct val="100000"/>
+              </a:lnSpc>
+              <a:buNone/>
+            </a:pPr>
+            <a:r>
+              <a:rPr lang="en-US" sz="1500" dirty="0">
+                <a:solidFill>
+                  <a:srgbClr val="5A6274"/>
+                </a:solidFill>
+                <a:latin typeface="Arial" pitchFamily="34" charset="0"/>
+                <a:ea typeface="Arial" pitchFamily="34" charset="-122"/>
+                <a:cs typeface="Arial" pitchFamily="34" charset="-120"/>
+              </a:rPr>
+              <a:t>En la práctica solo se ven los errores de lo que se entrega.</a:t>
+            </a:r>
+            <a:endParaRPr lang="en-US" sz="1500" dirty="0"/>
+          </a:p>
+        </p:txBody>
+      </p:sp>
+      <p:sp>
+        <p:nvSpPr>
+          <p:cNvPr id="24" name="Shape 22"/>
+          <p:cNvSpPr/>
+          <p:nvPr/>
+        </p:nvSpPr>
+        <p:spPr>
+          <a:xfrm>
+            <a:off x="8193024" y="3931920"/>
+            <a:ext cx="3520440" cy="0"/>
+          </a:xfrm>
+          <a:prstGeom prst="line">
+            <a:avLst/>
+          </a:prstGeom>
+          <a:noFill/>
+          <a:ln w="9525">
+            <a:solidFill>
+              <a:srgbClr val="1F2430"/>
+            </a:solidFill>
+            <a:prstDash val="solid"/>
+          </a:ln>
+        </p:spPr>
+      </p:sp>
+      <p:sp>
+        <p:nvSpPr>
+          <p:cNvPr id="25" name="Text 23"/>
+          <p:cNvSpPr txBox="1"/>
+          <p:nvPr/>
+        </p:nvSpPr>
+        <p:spPr>
+          <a:xfrm>
+            <a:off x="8193024" y="4114800"/>
+            <a:ext cx="3474720" cy="640080"/>
+          </a:xfrm>
+          <a:prstGeom prst="rect">
+            <a:avLst/>
+          </a:prstGeom>
+          <a:noFill/>
+          <a:ln/>
+        </p:spPr>
+        <p:txBody>
+          <a:bodyPr wrap="square" lIns="0" tIns="0" rIns="0" bIns="0" rtlCol="0" anchor="t"/>
+          <a:lstStyle/>
+          <a:p>
+            <a:pPr indent="0" marL="0">
+              <a:lnSpc>
+                <a:spcPct val="100000"/>
+              </a:lnSpc>
+              <a:buNone/>
+            </a:pPr>
+            <a:r>
+              <a:rPr lang="en-US" sz="1900" dirty="0">
+                <a:solidFill>
+                  <a:srgbClr val="1F2430"/>
+                </a:solidFill>
+                <a:latin typeface="Georgia" pitchFamily="34" charset="0"/>
+                <a:ea typeface="Georgia" pitchFamily="34" charset="-122"/>
+                <a:cs typeface="Georgia" pitchFamily="34" charset="-120"/>
+              </a:rPr>
+              <a:t>Un solo corpus</a:t>
+            </a:r>
+            <a:endParaRPr lang="en-US" sz="1900" dirty="0"/>
+          </a:p>
+        </p:txBody>
+      </p:sp>
+      <p:sp>
+        <p:nvSpPr>
+          <p:cNvPr id="26" name="Text 24"/>
+          <p:cNvSpPr txBox="1"/>
+          <p:nvPr/>
+        </p:nvSpPr>
+        <p:spPr>
+          <a:xfrm>
+            <a:off x="8193024" y="4800600"/>
+            <a:ext cx="3474720" cy="868680"/>
+          </a:xfrm>
+          <a:prstGeom prst="rect">
+            <a:avLst/>
+          </a:prstGeom>
+          <a:noFill/>
+          <a:ln/>
+        </p:spPr>
+        <p:txBody>
+          <a:bodyPr wrap="square" lIns="0" tIns="0" rIns="0" bIns="0" rtlCol="0" anchor="t"/>
+          <a:lstStyle/>
+          <a:p>
+            <a:pPr indent="0" marL="0">
+              <a:lnSpc>
+                <a:spcPct val="100000"/>
+              </a:lnSpc>
+              <a:buNone/>
+            </a:pPr>
+            <a:r>
+              <a:rPr lang="en-US" sz="1500" dirty="0">
+                <a:solidFill>
+                  <a:srgbClr val="5A6274"/>
+                </a:solidFill>
+                <a:latin typeface="Arial" pitchFamily="34" charset="0"/>
+                <a:ea typeface="Arial" pitchFamily="34" charset="-122"/>
+                <a:cs typeface="Arial" pitchFamily="34" charset="-120"/>
+              </a:rPr>
+              <a:t>5.574 SMS en inglés, ~305 spams atacados por semilla.</a:t>
+            </a:r>
+            <a:endParaRPr lang="en-US" sz="1500" dirty="0"/>
+          </a:p>
+        </p:txBody>
+      </p:sp>
+      <p:sp>
+        <p:nvSpPr>
+          <p:cNvPr id="27" name="Text 25"/>
+          <p:cNvSpPr txBox="1"/>
+          <p:nvPr/>
+        </p:nvSpPr>
+        <p:spPr>
+          <a:xfrm>
+            <a:off x="548640" y="6373368"/>
+            <a:ext cx="10241280" cy="274320"/>
+          </a:xfrm>
+          <a:prstGeom prst="rect">
+            <a:avLst/>
+          </a:prstGeom>
+          <a:noFill/>
+          <a:ln/>
+        </p:spPr>
+        <p:txBody>
+          <a:bodyPr wrap="square" lIns="0" tIns="0" rIns="0" bIns="0" rtlCol="0" anchor="t"/>
+          <a:lstStyle/>
+          <a:p>
+            <a:pPr indent="0" marL="0">
+              <a:lnSpc>
+                <a:spcPct val="100000"/>
+              </a:lnSpc>
+              <a:buNone/>
+            </a:pPr>
+            <a:r>
+              <a:rPr lang="en-US" sz="1000" dirty="0">
+                <a:solidFill>
+                  <a:srgbClr val="9AA1AE"/>
+                </a:solidFill>
+                <a:latin typeface="Arial" pitchFamily="34" charset="0"/>
+                <a:ea typeface="Arial" pitchFamily="34" charset="-122"/>
+                <a:cs typeface="Arial" pitchFamily="34" charset="-120"/>
+              </a:rPr>
+              <a:t>Detalle en la sección de limitaciones del paper.</a:t>
+            </a:r>
+            <a:endParaRPr lang="en-US" sz="1000" dirty="0"/>
+          </a:p>
+        </p:txBody>
+      </p:sp>
+      <p:sp>
+        <p:nvSpPr>
+          <p:cNvPr id="25" name="Slide Number Placeholder 0"/>
+          <p:cNvSpPr>
+            <a:spLocks noGrp="1"/>
+          </p:cNvSpPr>
+          <p:nvPr>
+            <p:ph type="sldNum" sz="quarter" idx="4294967295"/>
+          </p:nvPr>
+        </p:nvSpPr>
+        <p:spPr>
+          <a:xfrm>
+            <a:off x="11091672" y="6373368"/>
+            <a:ext cx="548640" cy="274320"/>
+          </a:xfrm>
+          <a:prstGeom prst="rect">
+            <a:avLst/>
+          </a:prstGeom>
+          <a:extLst>
+            <a:ext uri="{C572A759-6A51-4108-AA02-DFA0A04FC94B}">
+              <ma14:wrappingTextBoxFlag xmlns:ma14="http://schemas.microsoft.com/office/mac/drawingml/2011/main" val="0"/>
+            </a:ext>
+          </a:extLst>
+        </p:spPr>
+        <p:txBody>
+          <a:bodyPr/>
+          <a:lstStyle>
+            <a:lvl1pPr>
+              <a:defRPr sz="1000">
+                <a:solidFill>
+                  <a:srgbClr val="9AA1AE"/>
+                </a:solidFill>
+                <a:latin typeface="Arial"/>
+                <a:ea typeface="Arial"/>
+                <a:cs typeface="Arial"/>
+              </a:defRPr>
+            </a:lvl1pPr>
+          </a:lstStyle>
+          <a:p>
+            <a:pPr algn="r"/>
+            <a:fld id="{F7021451-1387-4CA6-816F-3879F97B5CBC}" type="slidenum">
+              <a:rPr b="0" lang="en-US"/>
+              <a:t>18</a:t>
+            </a:fld>
+            <a:endParaRPr lang="en-US"/>
+          </a:p>
+        </p:txBody>
+      </p:sp>
+    </p:spTree>
+  </p:cSld>
+  <p:clrMapOvr>
+    <a:masterClrMapping/>
+  </p:clrMapOvr>
+  <p:transition spd="med">
+    <p:fade/>
+  </p:transition>
+</p:sld>
+</file>
+
+<file path=ppt/slides/slide19.xml><?xml version="1.0" encoding="utf-8"?>
+<p:sld xmlns:a="http://schemas.openxmlformats.org/drawingml/2006/main" xmlns:r="http://schemas.openxmlformats.org/officeDocument/2006/relationships" xmlns:p="http://schemas.openxmlformats.org/presentationml/2006/main">
+  <p:cSld name="Slide 19">
     <p:spTree>
       <p:nvGrpSpPr>
         <p:cNvPr id="1" name=""/>
